--- a/Coniques/2_slides_coniques.pptx
+++ b/Coniques/2_slides_coniques.pptx
@@ -5,6 +5,9 @@
     <p:sldMasterId id="2147483648" r:id="rId1"/>
     <p:sldMasterId id="2147483660" r:id="rId2"/>
   </p:sldMasterIdLst>
+  <p:notesMasterIdLst>
+    <p:notesMasterId r:id="rId67"/>
+  </p:notesMasterIdLst>
   <p:sldIdLst>
     <p:sldId id="256" r:id="rId3"/>
     <p:sldId id="283" r:id="rId4"/>
@@ -14,54 +17,62 @@
     <p:sldId id="308" r:id="rId8"/>
     <p:sldId id="257" r:id="rId9"/>
     <p:sldId id="309" r:id="rId10"/>
-    <p:sldId id="341" r:id="rId11"/>
-    <p:sldId id="346" r:id="rId12"/>
-    <p:sldId id="342" r:id="rId13"/>
-    <p:sldId id="349" r:id="rId14"/>
-    <p:sldId id="343" r:id="rId15"/>
-    <p:sldId id="344" r:id="rId16"/>
-    <p:sldId id="345" r:id="rId17"/>
-    <p:sldId id="347" r:id="rId18"/>
-    <p:sldId id="310" r:id="rId19"/>
-    <p:sldId id="350" r:id="rId20"/>
-    <p:sldId id="351" r:id="rId21"/>
-    <p:sldId id="352" r:id="rId22"/>
-    <p:sldId id="353" r:id="rId23"/>
-    <p:sldId id="354" r:id="rId24"/>
-    <p:sldId id="356" r:id="rId25"/>
-    <p:sldId id="311" r:id="rId26"/>
-    <p:sldId id="312" r:id="rId27"/>
-    <p:sldId id="313" r:id="rId28"/>
-    <p:sldId id="357" r:id="rId29"/>
-    <p:sldId id="358" r:id="rId30"/>
-    <p:sldId id="359" r:id="rId31"/>
-    <p:sldId id="314" r:id="rId32"/>
-    <p:sldId id="315" r:id="rId33"/>
-    <p:sldId id="316" r:id="rId34"/>
-    <p:sldId id="317" r:id="rId35"/>
-    <p:sldId id="318" r:id="rId36"/>
-    <p:sldId id="319" r:id="rId37"/>
-    <p:sldId id="320" r:id="rId38"/>
-    <p:sldId id="321" r:id="rId39"/>
-    <p:sldId id="322" r:id="rId40"/>
-    <p:sldId id="323" r:id="rId41"/>
-    <p:sldId id="324" r:id="rId42"/>
-    <p:sldId id="325" r:id="rId43"/>
-    <p:sldId id="326" r:id="rId44"/>
-    <p:sldId id="327" r:id="rId45"/>
-    <p:sldId id="328" r:id="rId46"/>
-    <p:sldId id="329" r:id="rId47"/>
-    <p:sldId id="330" r:id="rId48"/>
-    <p:sldId id="331" r:id="rId49"/>
-    <p:sldId id="332" r:id="rId50"/>
-    <p:sldId id="333" r:id="rId51"/>
-    <p:sldId id="334" r:id="rId52"/>
-    <p:sldId id="335" r:id="rId53"/>
-    <p:sldId id="336" r:id="rId54"/>
-    <p:sldId id="337" r:id="rId55"/>
-    <p:sldId id="338" r:id="rId56"/>
-    <p:sldId id="339" r:id="rId57"/>
-    <p:sldId id="340" r:id="rId58"/>
+    <p:sldId id="362" r:id="rId11"/>
+    <p:sldId id="341" r:id="rId12"/>
+    <p:sldId id="360" r:id="rId13"/>
+    <p:sldId id="361" r:id="rId14"/>
+    <p:sldId id="346" r:id="rId15"/>
+    <p:sldId id="342" r:id="rId16"/>
+    <p:sldId id="349" r:id="rId17"/>
+    <p:sldId id="343" r:id="rId18"/>
+    <p:sldId id="344" r:id="rId19"/>
+    <p:sldId id="345" r:id="rId20"/>
+    <p:sldId id="347" r:id="rId21"/>
+    <p:sldId id="310" r:id="rId22"/>
+    <p:sldId id="350" r:id="rId23"/>
+    <p:sldId id="351" r:id="rId24"/>
+    <p:sldId id="352" r:id="rId25"/>
+    <p:sldId id="353" r:id="rId26"/>
+    <p:sldId id="354" r:id="rId27"/>
+    <p:sldId id="356" r:id="rId28"/>
+    <p:sldId id="311" r:id="rId29"/>
+    <p:sldId id="312" r:id="rId30"/>
+    <p:sldId id="313" r:id="rId31"/>
+    <p:sldId id="357" r:id="rId32"/>
+    <p:sldId id="358" r:id="rId33"/>
+    <p:sldId id="363" r:id="rId34"/>
+    <p:sldId id="314" r:id="rId35"/>
+    <p:sldId id="315" r:id="rId36"/>
+    <p:sldId id="316" r:id="rId37"/>
+    <p:sldId id="317" r:id="rId38"/>
+    <p:sldId id="318" r:id="rId39"/>
+    <p:sldId id="319" r:id="rId40"/>
+    <p:sldId id="364" r:id="rId41"/>
+    <p:sldId id="368" r:id="rId42"/>
+    <p:sldId id="369" r:id="rId43"/>
+    <p:sldId id="366" r:id="rId44"/>
+    <p:sldId id="365" r:id="rId45"/>
+    <p:sldId id="320" r:id="rId46"/>
+    <p:sldId id="321" r:id="rId47"/>
+    <p:sldId id="322" r:id="rId48"/>
+    <p:sldId id="323" r:id="rId49"/>
+    <p:sldId id="324" r:id="rId50"/>
+    <p:sldId id="325" r:id="rId51"/>
+    <p:sldId id="326" r:id="rId52"/>
+    <p:sldId id="327" r:id="rId53"/>
+    <p:sldId id="328" r:id="rId54"/>
+    <p:sldId id="329" r:id="rId55"/>
+    <p:sldId id="330" r:id="rId56"/>
+    <p:sldId id="331" r:id="rId57"/>
+    <p:sldId id="332" r:id="rId58"/>
+    <p:sldId id="333" r:id="rId59"/>
+    <p:sldId id="334" r:id="rId60"/>
+    <p:sldId id="335" r:id="rId61"/>
+    <p:sldId id="336" r:id="rId62"/>
+    <p:sldId id="337" r:id="rId63"/>
+    <p:sldId id="338" r:id="rId64"/>
+    <p:sldId id="339" r:id="rId65"/>
+    <p:sldId id="340" r:id="rId66"/>
   </p:sldIdLst>
   <p:sldSz cx="12192000" cy="6858000"/>
   <p:notesSz cx="6858000" cy="9144000"/>
@@ -160,7 +171,620 @@
       </a:defRPr>
     </a:lvl9pPr>
   </p:defaultTextStyle>
+  <p:extLst>
+    <p:ext uri="{EFAFB233-063F-42B5-8137-9DF3F51BA10A}">
+      <p15:sldGuideLst xmlns:p15="http://schemas.microsoft.com/office/powerpoint/2012/main"/>
+    </p:ext>
+  </p:extLst>
 </p:presentation>
+</file>
+
+<file path=ppt/notesMasters/notesMaster1.xml><?xml version="1.0" encoding="utf-8"?>
+<p:notesMaster xmlns:a="http://schemas.openxmlformats.org/drawingml/2006/main" xmlns:r="http://schemas.openxmlformats.org/officeDocument/2006/relationships" xmlns:p="http://schemas.openxmlformats.org/presentationml/2006/main">
+  <p:cSld>
+    <p:bg>
+      <p:bgRef idx="1001">
+        <a:schemeClr val="bg1"/>
+      </p:bgRef>
+    </p:bg>
+    <p:spTree>
+      <p:nvGrpSpPr>
+        <p:cNvPr id="1" name=""/>
+        <p:cNvGrpSpPr/>
+        <p:nvPr/>
+      </p:nvGrpSpPr>
+      <p:grpSpPr>
+        <a:xfrm>
+          <a:off x="0" y="0"/>
+          <a:ext cx="0" cy="0"/>
+          <a:chOff x="0" y="0"/>
+          <a:chExt cx="0" cy="0"/>
+        </a:xfrm>
+      </p:grpSpPr>
+      <p:sp>
+        <p:nvSpPr>
+          <p:cNvPr id="2" name="Espace réservé de l'en-tête 1"/>
+          <p:cNvSpPr>
+            <a:spLocks noGrp="1"/>
+          </p:cNvSpPr>
+          <p:nvPr>
+            <p:ph type="hdr" sz="quarter"/>
+          </p:nvPr>
+        </p:nvSpPr>
+        <p:spPr>
+          <a:xfrm>
+            <a:off x="0" y="0"/>
+            <a:ext cx="2971800" cy="458788"/>
+          </a:xfrm>
+          <a:prstGeom prst="rect">
+            <a:avLst/>
+          </a:prstGeom>
+        </p:spPr>
+        <p:txBody>
+          <a:bodyPr vert="horz" lIns="91440" tIns="45720" rIns="91440" bIns="45720" rtlCol="0"/>
+          <a:lstStyle>
+            <a:lvl1pPr algn="l">
+              <a:defRPr sz="1200"/>
+            </a:lvl1pPr>
+          </a:lstStyle>
+          <a:p>
+            <a:endParaRPr lang="fr-BE"/>
+          </a:p>
+        </p:txBody>
+      </p:sp>
+      <p:sp>
+        <p:nvSpPr>
+          <p:cNvPr id="3" name="Espace réservé de la date 2"/>
+          <p:cNvSpPr>
+            <a:spLocks noGrp="1"/>
+          </p:cNvSpPr>
+          <p:nvPr>
+            <p:ph type="dt" idx="1"/>
+          </p:nvPr>
+        </p:nvSpPr>
+        <p:spPr>
+          <a:xfrm>
+            <a:off x="3884613" y="0"/>
+            <a:ext cx="2971800" cy="458788"/>
+          </a:xfrm>
+          <a:prstGeom prst="rect">
+            <a:avLst/>
+          </a:prstGeom>
+        </p:spPr>
+        <p:txBody>
+          <a:bodyPr vert="horz" lIns="91440" tIns="45720" rIns="91440" bIns="45720" rtlCol="0"/>
+          <a:lstStyle>
+            <a:lvl1pPr algn="r">
+              <a:defRPr sz="1200"/>
+            </a:lvl1pPr>
+          </a:lstStyle>
+          <a:p>
+            <a:fld id="{9679A111-609C-47FB-A85C-253157D59CBA}" type="datetimeFigureOut">
+              <a:rPr lang="fr-BE" smtClean="0"/>
+              <a:t>10-03-26</a:t>
+            </a:fld>
+            <a:endParaRPr lang="fr-BE"/>
+          </a:p>
+        </p:txBody>
+      </p:sp>
+      <p:sp>
+        <p:nvSpPr>
+          <p:cNvPr id="4" name="Espace réservé de l'image des diapositives 3"/>
+          <p:cNvSpPr>
+            <a:spLocks noGrp="1" noRot="1" noChangeAspect="1"/>
+          </p:cNvSpPr>
+          <p:nvPr>
+            <p:ph type="sldImg" idx="2"/>
+          </p:nvPr>
+        </p:nvSpPr>
+        <p:spPr>
+          <a:xfrm>
+            <a:off x="685800" y="1143000"/>
+            <a:ext cx="5486400" cy="3086100"/>
+          </a:xfrm>
+          <a:prstGeom prst="rect">
+            <a:avLst/>
+          </a:prstGeom>
+          <a:noFill/>
+          <a:ln w="12700">
+            <a:solidFill>
+              <a:prstClr val="black"/>
+            </a:solidFill>
+          </a:ln>
+        </p:spPr>
+        <p:txBody>
+          <a:bodyPr vert="horz" lIns="91440" tIns="45720" rIns="91440" bIns="45720" rtlCol="0" anchor="ctr"/>
+          <a:lstStyle/>
+          <a:p>
+            <a:endParaRPr lang="fr-BE"/>
+          </a:p>
+        </p:txBody>
+      </p:sp>
+      <p:sp>
+        <p:nvSpPr>
+          <p:cNvPr id="5" name="Espace réservé des notes 4"/>
+          <p:cNvSpPr>
+            <a:spLocks noGrp="1"/>
+          </p:cNvSpPr>
+          <p:nvPr>
+            <p:ph type="body" sz="quarter" idx="3"/>
+          </p:nvPr>
+        </p:nvSpPr>
+        <p:spPr>
+          <a:xfrm>
+            <a:off x="685800" y="4400550"/>
+            <a:ext cx="5486400" cy="3600450"/>
+          </a:xfrm>
+          <a:prstGeom prst="rect">
+            <a:avLst/>
+          </a:prstGeom>
+        </p:spPr>
+        <p:txBody>
+          <a:bodyPr vert="horz" lIns="91440" tIns="45720" rIns="91440" bIns="45720" rtlCol="0"/>
+          <a:lstStyle/>
+          <a:p>
+            <a:pPr lvl="0"/>
+            <a:r>
+              <a:rPr lang="fr-FR"/>
+              <a:t>Cliquez pour modifier les styles du texte du masque</a:t>
+            </a:r>
+          </a:p>
+          <a:p>
+            <a:pPr lvl="1"/>
+            <a:r>
+              <a:rPr lang="fr-FR"/>
+              <a:t>Deuxième niveau</a:t>
+            </a:r>
+          </a:p>
+          <a:p>
+            <a:pPr lvl="2"/>
+            <a:r>
+              <a:rPr lang="fr-FR"/>
+              <a:t>Troisième niveau</a:t>
+            </a:r>
+          </a:p>
+          <a:p>
+            <a:pPr lvl="3"/>
+            <a:r>
+              <a:rPr lang="fr-FR"/>
+              <a:t>Quatrième niveau</a:t>
+            </a:r>
+          </a:p>
+          <a:p>
+            <a:pPr lvl="4"/>
+            <a:r>
+              <a:rPr lang="fr-FR"/>
+              <a:t>Cinquième niveau</a:t>
+            </a:r>
+            <a:endParaRPr lang="fr-BE"/>
+          </a:p>
+        </p:txBody>
+      </p:sp>
+      <p:sp>
+        <p:nvSpPr>
+          <p:cNvPr id="6" name="Espace réservé du pied de page 5"/>
+          <p:cNvSpPr>
+            <a:spLocks noGrp="1"/>
+          </p:cNvSpPr>
+          <p:nvPr>
+            <p:ph type="ftr" sz="quarter" idx="4"/>
+          </p:nvPr>
+        </p:nvSpPr>
+        <p:spPr>
+          <a:xfrm>
+            <a:off x="0" y="8685213"/>
+            <a:ext cx="2971800" cy="458787"/>
+          </a:xfrm>
+          <a:prstGeom prst="rect">
+            <a:avLst/>
+          </a:prstGeom>
+        </p:spPr>
+        <p:txBody>
+          <a:bodyPr vert="horz" lIns="91440" tIns="45720" rIns="91440" bIns="45720" rtlCol="0" anchor="b"/>
+          <a:lstStyle>
+            <a:lvl1pPr algn="l">
+              <a:defRPr sz="1200"/>
+            </a:lvl1pPr>
+          </a:lstStyle>
+          <a:p>
+            <a:endParaRPr lang="fr-BE"/>
+          </a:p>
+        </p:txBody>
+      </p:sp>
+      <p:sp>
+        <p:nvSpPr>
+          <p:cNvPr id="7" name="Espace réservé du numéro de diapositive 6"/>
+          <p:cNvSpPr>
+            <a:spLocks noGrp="1"/>
+          </p:cNvSpPr>
+          <p:nvPr>
+            <p:ph type="sldNum" sz="quarter" idx="5"/>
+          </p:nvPr>
+        </p:nvSpPr>
+        <p:spPr>
+          <a:xfrm>
+            <a:off x="3884613" y="8685213"/>
+            <a:ext cx="2971800" cy="458787"/>
+          </a:xfrm>
+          <a:prstGeom prst="rect">
+            <a:avLst/>
+          </a:prstGeom>
+        </p:spPr>
+        <p:txBody>
+          <a:bodyPr vert="horz" lIns="91440" tIns="45720" rIns="91440" bIns="45720" rtlCol="0" anchor="b"/>
+          <a:lstStyle>
+            <a:lvl1pPr algn="r">
+              <a:defRPr sz="1200"/>
+            </a:lvl1pPr>
+          </a:lstStyle>
+          <a:p>
+            <a:fld id="{62269FC8-9F42-42E0-B573-2051772DE61B}" type="slidenum">
+              <a:rPr lang="fr-BE" smtClean="0"/>
+              <a:t>‹N°›</a:t>
+            </a:fld>
+            <a:endParaRPr lang="fr-BE"/>
+          </a:p>
+        </p:txBody>
+      </p:sp>
+    </p:spTree>
+    <p:extLst>
+      <p:ext uri="{BB962C8B-B14F-4D97-AF65-F5344CB8AC3E}">
+        <p14:creationId xmlns:p14="http://schemas.microsoft.com/office/powerpoint/2010/main" val="4117963121"/>
+      </p:ext>
+    </p:extLst>
+  </p:cSld>
+  <p:clrMap bg1="lt1" tx1="dk1" bg2="lt2" tx2="dk2" accent1="accent1" accent2="accent2" accent3="accent3" accent4="accent4" accent5="accent5" accent6="accent6" hlink="hlink" folHlink="folHlink"/>
+  <p:notesStyle>
+    <a:lvl1pPr marL="0" algn="l" defTabSz="914400" rtl="0" eaLnBrk="1" latinLnBrk="0" hangingPunct="1">
+      <a:defRPr sz="1200" kern="1200">
+        <a:solidFill>
+          <a:schemeClr val="tx1"/>
+        </a:solidFill>
+        <a:latin typeface="+mn-lt"/>
+        <a:ea typeface="+mn-ea"/>
+        <a:cs typeface="+mn-cs"/>
+      </a:defRPr>
+    </a:lvl1pPr>
+    <a:lvl2pPr marL="457200" algn="l" defTabSz="914400" rtl="0" eaLnBrk="1" latinLnBrk="0" hangingPunct="1">
+      <a:defRPr sz="1200" kern="1200">
+        <a:solidFill>
+          <a:schemeClr val="tx1"/>
+        </a:solidFill>
+        <a:latin typeface="+mn-lt"/>
+        <a:ea typeface="+mn-ea"/>
+        <a:cs typeface="+mn-cs"/>
+      </a:defRPr>
+    </a:lvl2pPr>
+    <a:lvl3pPr marL="914400" algn="l" defTabSz="914400" rtl="0" eaLnBrk="1" latinLnBrk="0" hangingPunct="1">
+      <a:defRPr sz="1200" kern="1200">
+        <a:solidFill>
+          <a:schemeClr val="tx1"/>
+        </a:solidFill>
+        <a:latin typeface="+mn-lt"/>
+        <a:ea typeface="+mn-ea"/>
+        <a:cs typeface="+mn-cs"/>
+      </a:defRPr>
+    </a:lvl3pPr>
+    <a:lvl4pPr marL="1371600" algn="l" defTabSz="914400" rtl="0" eaLnBrk="1" latinLnBrk="0" hangingPunct="1">
+      <a:defRPr sz="1200" kern="1200">
+        <a:solidFill>
+          <a:schemeClr val="tx1"/>
+        </a:solidFill>
+        <a:latin typeface="+mn-lt"/>
+        <a:ea typeface="+mn-ea"/>
+        <a:cs typeface="+mn-cs"/>
+      </a:defRPr>
+    </a:lvl4pPr>
+    <a:lvl5pPr marL="1828800" algn="l" defTabSz="914400" rtl="0" eaLnBrk="1" latinLnBrk="0" hangingPunct="1">
+      <a:defRPr sz="1200" kern="1200">
+        <a:solidFill>
+          <a:schemeClr val="tx1"/>
+        </a:solidFill>
+        <a:latin typeface="+mn-lt"/>
+        <a:ea typeface="+mn-ea"/>
+        <a:cs typeface="+mn-cs"/>
+      </a:defRPr>
+    </a:lvl5pPr>
+    <a:lvl6pPr marL="2286000" algn="l" defTabSz="914400" rtl="0" eaLnBrk="1" latinLnBrk="0" hangingPunct="1">
+      <a:defRPr sz="1200" kern="1200">
+        <a:solidFill>
+          <a:schemeClr val="tx1"/>
+        </a:solidFill>
+        <a:latin typeface="+mn-lt"/>
+        <a:ea typeface="+mn-ea"/>
+        <a:cs typeface="+mn-cs"/>
+      </a:defRPr>
+    </a:lvl6pPr>
+    <a:lvl7pPr marL="2743200" algn="l" defTabSz="914400" rtl="0" eaLnBrk="1" latinLnBrk="0" hangingPunct="1">
+      <a:defRPr sz="1200" kern="1200">
+        <a:solidFill>
+          <a:schemeClr val="tx1"/>
+        </a:solidFill>
+        <a:latin typeface="+mn-lt"/>
+        <a:ea typeface="+mn-ea"/>
+        <a:cs typeface="+mn-cs"/>
+      </a:defRPr>
+    </a:lvl7pPr>
+    <a:lvl8pPr marL="3200400" algn="l" defTabSz="914400" rtl="0" eaLnBrk="1" latinLnBrk="0" hangingPunct="1">
+      <a:defRPr sz="1200" kern="1200">
+        <a:solidFill>
+          <a:schemeClr val="tx1"/>
+        </a:solidFill>
+        <a:latin typeface="+mn-lt"/>
+        <a:ea typeface="+mn-ea"/>
+        <a:cs typeface="+mn-cs"/>
+      </a:defRPr>
+    </a:lvl8pPr>
+    <a:lvl9pPr marL="3657600" algn="l" defTabSz="914400" rtl="0" eaLnBrk="1" latinLnBrk="0" hangingPunct="1">
+      <a:defRPr sz="1200" kern="1200">
+        <a:solidFill>
+          <a:schemeClr val="tx1"/>
+        </a:solidFill>
+        <a:latin typeface="+mn-lt"/>
+        <a:ea typeface="+mn-ea"/>
+        <a:cs typeface="+mn-cs"/>
+      </a:defRPr>
+    </a:lvl9pPr>
+  </p:notesStyle>
+</p:notesMaster>
+</file>
+
+<file path=ppt/notesSlides/notesSlide1.xml><?xml version="1.0" encoding="utf-8"?>
+<p:notes xmlns:a="http://schemas.openxmlformats.org/drawingml/2006/main" xmlns:r="http://schemas.openxmlformats.org/officeDocument/2006/relationships" xmlns:p="http://schemas.openxmlformats.org/presentationml/2006/main">
+  <p:cSld>
+    <p:spTree>
+      <p:nvGrpSpPr>
+        <p:cNvPr id="1" name=""/>
+        <p:cNvGrpSpPr/>
+        <p:nvPr/>
+      </p:nvGrpSpPr>
+      <p:grpSpPr>
+        <a:xfrm>
+          <a:off x="0" y="0"/>
+          <a:ext cx="0" cy="0"/>
+          <a:chOff x="0" y="0"/>
+          <a:chExt cx="0" cy="0"/>
+        </a:xfrm>
+      </p:grpSpPr>
+      <p:sp>
+        <p:nvSpPr>
+          <p:cNvPr id="2" name="Espace réservé de l'image des diapositives 1"/>
+          <p:cNvSpPr>
+            <a:spLocks noGrp="1" noRot="1" noChangeAspect="1"/>
+          </p:cNvSpPr>
+          <p:nvPr>
+            <p:ph type="sldImg"/>
+          </p:nvPr>
+        </p:nvSpPr>
+        <p:spPr/>
+      </p:sp>
+      <p:sp>
+        <p:nvSpPr>
+          <p:cNvPr id="3" name="Espace réservé des notes 2"/>
+          <p:cNvSpPr>
+            <a:spLocks noGrp="1"/>
+          </p:cNvSpPr>
+          <p:nvPr>
+            <p:ph type="body" idx="1"/>
+          </p:nvPr>
+        </p:nvSpPr>
+        <p:spPr/>
+        <p:txBody>
+          <a:bodyPr/>
+          <a:lstStyle/>
+          <a:p>
+            <a:r>
+              <a:rPr lang="fr-BE" dirty="0"/>
+              <a:t>Distance à un point égale à la distance à un cercle</a:t>
+            </a:r>
+          </a:p>
+        </p:txBody>
+      </p:sp>
+      <p:sp>
+        <p:nvSpPr>
+          <p:cNvPr id="4" name="Espace réservé du numéro de diapositive 3"/>
+          <p:cNvSpPr>
+            <a:spLocks noGrp="1"/>
+          </p:cNvSpPr>
+          <p:nvPr>
+            <p:ph type="sldNum" sz="quarter" idx="5"/>
+          </p:nvPr>
+        </p:nvSpPr>
+        <p:spPr/>
+        <p:txBody>
+          <a:bodyPr/>
+          <a:lstStyle/>
+          <a:p>
+            <a:fld id="{62269FC8-9F42-42E0-B573-2051772DE61B}" type="slidenum">
+              <a:rPr lang="fr-BE" smtClean="0"/>
+              <a:t>15</a:t>
+            </a:fld>
+            <a:endParaRPr lang="fr-BE"/>
+          </a:p>
+        </p:txBody>
+      </p:sp>
+    </p:spTree>
+    <p:extLst>
+      <p:ext uri="{BB962C8B-B14F-4D97-AF65-F5344CB8AC3E}">
+        <p14:creationId xmlns:p14="http://schemas.microsoft.com/office/powerpoint/2010/main" val="1730019485"/>
+      </p:ext>
+    </p:extLst>
+  </p:cSld>
+  <p:clrMapOvr>
+    <a:masterClrMapping/>
+  </p:clrMapOvr>
+</p:notes>
+</file>
+
+<file path=ppt/notesSlides/notesSlide2.xml><?xml version="1.0" encoding="utf-8"?>
+<p:notes xmlns:a="http://schemas.openxmlformats.org/drawingml/2006/main" xmlns:r="http://schemas.openxmlformats.org/officeDocument/2006/relationships" xmlns:p="http://schemas.openxmlformats.org/presentationml/2006/main">
+  <p:cSld>
+    <p:spTree>
+      <p:nvGrpSpPr>
+        <p:cNvPr id="1" name=""/>
+        <p:cNvGrpSpPr/>
+        <p:nvPr/>
+      </p:nvGrpSpPr>
+      <p:grpSpPr>
+        <a:xfrm>
+          <a:off x="0" y="0"/>
+          <a:ext cx="0" cy="0"/>
+          <a:chOff x="0" y="0"/>
+          <a:chExt cx="0" cy="0"/>
+        </a:xfrm>
+      </p:grpSpPr>
+      <p:sp>
+        <p:nvSpPr>
+          <p:cNvPr id="2" name="Espace réservé de l'image des diapositives 1"/>
+          <p:cNvSpPr>
+            <a:spLocks noGrp="1" noRot="1" noChangeAspect="1"/>
+          </p:cNvSpPr>
+          <p:nvPr>
+            <p:ph type="sldImg"/>
+          </p:nvPr>
+        </p:nvSpPr>
+        <p:spPr/>
+      </p:sp>
+      <p:sp>
+        <p:nvSpPr>
+          <p:cNvPr id="3" name="Espace réservé des notes 2"/>
+          <p:cNvSpPr>
+            <a:spLocks noGrp="1"/>
+          </p:cNvSpPr>
+          <p:nvPr>
+            <p:ph type="body" idx="1"/>
+          </p:nvPr>
+        </p:nvSpPr>
+        <p:spPr/>
+        <p:txBody>
+          <a:bodyPr/>
+          <a:lstStyle/>
+          <a:p>
+            <a:r>
+              <a:rPr lang="fr-BE" dirty="0"/>
+              <a:t>2 branches</a:t>
+            </a:r>
+          </a:p>
+        </p:txBody>
+      </p:sp>
+      <p:sp>
+        <p:nvSpPr>
+          <p:cNvPr id="4" name="Espace réservé du numéro de diapositive 3"/>
+          <p:cNvSpPr>
+            <a:spLocks noGrp="1"/>
+          </p:cNvSpPr>
+          <p:nvPr>
+            <p:ph type="sldNum" sz="quarter" idx="5"/>
+          </p:nvPr>
+        </p:nvSpPr>
+        <p:spPr/>
+        <p:txBody>
+          <a:bodyPr/>
+          <a:lstStyle/>
+          <a:p>
+            <a:fld id="{62269FC8-9F42-42E0-B573-2051772DE61B}" type="slidenum">
+              <a:rPr lang="fr-BE" smtClean="0"/>
+              <a:t>19</a:t>
+            </a:fld>
+            <a:endParaRPr lang="fr-BE"/>
+          </a:p>
+        </p:txBody>
+      </p:sp>
+    </p:spTree>
+    <p:extLst>
+      <p:ext uri="{BB962C8B-B14F-4D97-AF65-F5344CB8AC3E}">
+        <p14:creationId xmlns:p14="http://schemas.microsoft.com/office/powerpoint/2010/main" val="2452193527"/>
+      </p:ext>
+    </p:extLst>
+  </p:cSld>
+  <p:clrMapOvr>
+    <a:masterClrMapping/>
+  </p:clrMapOvr>
+</p:notes>
+</file>
+
+<file path=ppt/notesSlides/notesSlide3.xml><?xml version="1.0" encoding="utf-8"?>
+<p:notes xmlns:a="http://schemas.openxmlformats.org/drawingml/2006/main" xmlns:r="http://schemas.openxmlformats.org/officeDocument/2006/relationships" xmlns:p="http://schemas.openxmlformats.org/presentationml/2006/main">
+  <p:cSld>
+    <p:spTree>
+      <p:nvGrpSpPr>
+        <p:cNvPr id="1" name=""/>
+        <p:cNvGrpSpPr/>
+        <p:nvPr/>
+      </p:nvGrpSpPr>
+      <p:grpSpPr>
+        <a:xfrm>
+          <a:off x="0" y="0"/>
+          <a:ext cx="0" cy="0"/>
+          <a:chOff x="0" y="0"/>
+          <a:chExt cx="0" cy="0"/>
+        </a:xfrm>
+      </p:grpSpPr>
+      <p:sp>
+        <p:nvSpPr>
+          <p:cNvPr id="2" name="Espace réservé de l'image des diapositives 1"/>
+          <p:cNvSpPr>
+            <a:spLocks noGrp="1" noRot="1" noChangeAspect="1"/>
+          </p:cNvSpPr>
+          <p:nvPr>
+            <p:ph type="sldImg"/>
+          </p:nvPr>
+        </p:nvSpPr>
+        <p:spPr/>
+      </p:sp>
+      <p:sp>
+        <p:nvSpPr>
+          <p:cNvPr id="3" name="Espace réservé des notes 2"/>
+          <p:cNvSpPr>
+            <a:spLocks noGrp="1"/>
+          </p:cNvSpPr>
+          <p:nvPr>
+            <p:ph type="body" idx="1"/>
+          </p:nvPr>
+        </p:nvSpPr>
+        <p:spPr/>
+        <p:txBody>
+          <a:bodyPr/>
+          <a:lstStyle/>
+          <a:p>
+            <a:endParaRPr lang="fr-BE" dirty="0"/>
+          </a:p>
+        </p:txBody>
+      </p:sp>
+      <p:sp>
+        <p:nvSpPr>
+          <p:cNvPr id="4" name="Espace réservé du numéro de diapositive 3"/>
+          <p:cNvSpPr>
+            <a:spLocks noGrp="1"/>
+          </p:cNvSpPr>
+          <p:nvPr>
+            <p:ph type="sldNum" sz="quarter" idx="5"/>
+          </p:nvPr>
+        </p:nvSpPr>
+        <p:spPr/>
+        <p:txBody>
+          <a:bodyPr/>
+          <a:lstStyle/>
+          <a:p>
+            <a:fld id="{62269FC8-9F42-42E0-B573-2051772DE61B}" type="slidenum">
+              <a:rPr lang="fr-BE" smtClean="0"/>
+              <a:t>23</a:t>
+            </a:fld>
+            <a:endParaRPr lang="fr-BE"/>
+          </a:p>
+        </p:txBody>
+      </p:sp>
+    </p:spTree>
+    <p:extLst>
+      <p:ext uri="{BB962C8B-B14F-4D97-AF65-F5344CB8AC3E}">
+        <p14:creationId xmlns:p14="http://schemas.microsoft.com/office/powerpoint/2010/main" val="2320817567"/>
+      </p:ext>
+    </p:extLst>
+  </p:cSld>
+  <p:clrMapOvr>
+    <a:masterClrMapping/>
+  </p:clrMapOvr>
+</p:notes>
 </file>
 
 <file path=ppt/slideLayouts/slideLayout1.xml><?xml version="1.0" encoding="utf-8"?>
@@ -312,7 +936,7 @@
           <a:p>
             <a:fld id="{0AE472FC-725B-4EE1-8E60-D98B5CD01CC3}" type="datetimeFigureOut">
               <a:rPr lang="fr-BE" smtClean="0"/>
-              <a:t>08-03-26</a:t>
+              <a:t>10-03-26</a:t>
             </a:fld>
             <a:endParaRPr lang="fr-BE"/>
           </a:p>
@@ -512,7 +1136,7 @@
           <a:p>
             <a:fld id="{0AE472FC-725B-4EE1-8E60-D98B5CD01CC3}" type="datetimeFigureOut">
               <a:rPr lang="fr-BE" smtClean="0"/>
-              <a:t>08-03-26</a:t>
+              <a:t>10-03-26</a:t>
             </a:fld>
             <a:endParaRPr lang="fr-BE"/>
           </a:p>
@@ -722,7 +1346,7 @@
           <a:p>
             <a:fld id="{0AE472FC-725B-4EE1-8E60-D98B5CD01CC3}" type="datetimeFigureOut">
               <a:rPr lang="fr-BE" smtClean="0"/>
-              <a:t>08-03-26</a:t>
+              <a:t>10-03-26</a:t>
             </a:fld>
             <a:endParaRPr lang="fr-BE"/>
           </a:p>
@@ -944,7 +1568,7 @@
           <a:p>
             <a:fld id="{7CAC1560-C803-46E2-A186-D4227662A004}" type="datetimeFigureOut">
               <a:rPr lang="fr-BE" smtClean="0"/>
-              <a:t>08-03-26</a:t>
+              <a:t>10-03-26</a:t>
             </a:fld>
             <a:endParaRPr lang="fr-BE"/>
           </a:p>
@@ -1144,7 +1768,7 @@
           <a:p>
             <a:fld id="{7CAC1560-C803-46E2-A186-D4227662A004}" type="datetimeFigureOut">
               <a:rPr lang="fr-BE" smtClean="0"/>
-              <a:t>08-03-26</a:t>
+              <a:t>10-03-26</a:t>
             </a:fld>
             <a:endParaRPr lang="fr-BE"/>
           </a:p>
@@ -1420,7 +2044,7 @@
           <a:p>
             <a:fld id="{7CAC1560-C803-46E2-A186-D4227662A004}" type="datetimeFigureOut">
               <a:rPr lang="fr-BE" smtClean="0"/>
-              <a:t>08-03-26</a:t>
+              <a:t>10-03-26</a:t>
             </a:fld>
             <a:endParaRPr lang="fr-BE"/>
           </a:p>
@@ -1688,7 +2312,7 @@
           <a:p>
             <a:fld id="{7CAC1560-C803-46E2-A186-D4227662A004}" type="datetimeFigureOut">
               <a:rPr lang="fr-BE" smtClean="0"/>
-              <a:t>08-03-26</a:t>
+              <a:t>10-03-26</a:t>
             </a:fld>
             <a:endParaRPr lang="fr-BE"/>
           </a:p>
@@ -2103,7 +2727,7 @@
           <a:p>
             <a:fld id="{7CAC1560-C803-46E2-A186-D4227662A004}" type="datetimeFigureOut">
               <a:rPr lang="fr-BE" smtClean="0"/>
-              <a:t>08-03-26</a:t>
+              <a:t>10-03-26</a:t>
             </a:fld>
             <a:endParaRPr lang="fr-BE"/>
           </a:p>
@@ -2245,7 +2869,7 @@
           <a:p>
             <a:fld id="{7CAC1560-C803-46E2-A186-D4227662A004}" type="datetimeFigureOut">
               <a:rPr lang="fr-BE" smtClean="0"/>
-              <a:t>08-03-26</a:t>
+              <a:t>10-03-26</a:t>
             </a:fld>
             <a:endParaRPr lang="fr-BE"/>
           </a:p>
@@ -2358,7 +2982,7 @@
           <a:p>
             <a:fld id="{7CAC1560-C803-46E2-A186-D4227662A004}" type="datetimeFigureOut">
               <a:rPr lang="fr-BE" smtClean="0"/>
-              <a:t>08-03-26</a:t>
+              <a:t>10-03-26</a:t>
             </a:fld>
             <a:endParaRPr lang="fr-BE"/>
           </a:p>
@@ -2671,7 +3295,7 @@
           <a:p>
             <a:fld id="{7CAC1560-C803-46E2-A186-D4227662A004}" type="datetimeFigureOut">
               <a:rPr lang="fr-BE" smtClean="0"/>
-              <a:t>08-03-26</a:t>
+              <a:t>10-03-26</a:t>
             </a:fld>
             <a:endParaRPr lang="fr-BE"/>
           </a:p>
@@ -2871,7 +3495,7 @@
           <a:p>
             <a:fld id="{0AE472FC-725B-4EE1-8E60-D98B5CD01CC3}" type="datetimeFigureOut">
               <a:rPr lang="fr-BE" smtClean="0"/>
-              <a:t>08-03-26</a:t>
+              <a:t>10-03-26</a:t>
             </a:fld>
             <a:endParaRPr lang="fr-BE"/>
           </a:p>
@@ -3160,7 +3784,7 @@
           <a:p>
             <a:fld id="{7CAC1560-C803-46E2-A186-D4227662A004}" type="datetimeFigureOut">
               <a:rPr lang="fr-BE" smtClean="0"/>
-              <a:t>08-03-26</a:t>
+              <a:t>10-03-26</a:t>
             </a:fld>
             <a:endParaRPr lang="fr-BE"/>
           </a:p>
@@ -3360,7 +3984,7 @@
           <a:p>
             <a:fld id="{7CAC1560-C803-46E2-A186-D4227662A004}" type="datetimeFigureOut">
               <a:rPr lang="fr-BE" smtClean="0"/>
-              <a:t>08-03-26</a:t>
+              <a:t>10-03-26</a:t>
             </a:fld>
             <a:endParaRPr lang="fr-BE"/>
           </a:p>
@@ -3570,7 +4194,7 @@
           <a:p>
             <a:fld id="{7CAC1560-C803-46E2-A186-D4227662A004}" type="datetimeFigureOut">
               <a:rPr lang="fr-BE" smtClean="0"/>
-              <a:t>08-03-26</a:t>
+              <a:t>10-03-26</a:t>
             </a:fld>
             <a:endParaRPr lang="fr-BE"/>
           </a:p>
@@ -3846,7 +4470,7 @@
           <a:p>
             <a:fld id="{0AE472FC-725B-4EE1-8E60-D98B5CD01CC3}" type="datetimeFigureOut">
               <a:rPr lang="fr-BE" smtClean="0"/>
-              <a:t>08-03-26</a:t>
+              <a:t>10-03-26</a:t>
             </a:fld>
             <a:endParaRPr lang="fr-BE"/>
           </a:p>
@@ -4114,7 +4738,7 @@
           <a:p>
             <a:fld id="{0AE472FC-725B-4EE1-8E60-D98B5CD01CC3}" type="datetimeFigureOut">
               <a:rPr lang="fr-BE" smtClean="0"/>
-              <a:t>08-03-26</a:t>
+              <a:t>10-03-26</a:t>
             </a:fld>
             <a:endParaRPr lang="fr-BE"/>
           </a:p>
@@ -4529,7 +5153,7 @@
           <a:p>
             <a:fld id="{0AE472FC-725B-4EE1-8E60-D98B5CD01CC3}" type="datetimeFigureOut">
               <a:rPr lang="fr-BE" smtClean="0"/>
-              <a:t>08-03-26</a:t>
+              <a:t>10-03-26</a:t>
             </a:fld>
             <a:endParaRPr lang="fr-BE"/>
           </a:p>
@@ -4671,7 +5295,7 @@
           <a:p>
             <a:fld id="{0AE472FC-725B-4EE1-8E60-D98B5CD01CC3}" type="datetimeFigureOut">
               <a:rPr lang="fr-BE" smtClean="0"/>
-              <a:t>08-03-26</a:t>
+              <a:t>10-03-26</a:t>
             </a:fld>
             <a:endParaRPr lang="fr-BE"/>
           </a:p>
@@ -4784,7 +5408,7 @@
           <a:p>
             <a:fld id="{0AE472FC-725B-4EE1-8E60-D98B5CD01CC3}" type="datetimeFigureOut">
               <a:rPr lang="fr-BE" smtClean="0"/>
-              <a:t>08-03-26</a:t>
+              <a:t>10-03-26</a:t>
             </a:fld>
             <a:endParaRPr lang="fr-BE"/>
           </a:p>
@@ -5097,7 +5721,7 @@
           <a:p>
             <a:fld id="{0AE472FC-725B-4EE1-8E60-D98B5CD01CC3}" type="datetimeFigureOut">
               <a:rPr lang="fr-BE" smtClean="0"/>
-              <a:t>08-03-26</a:t>
+              <a:t>10-03-26</a:t>
             </a:fld>
             <a:endParaRPr lang="fr-BE"/>
           </a:p>
@@ -5386,7 +6010,7 @@
           <a:p>
             <a:fld id="{0AE472FC-725B-4EE1-8E60-D98B5CD01CC3}" type="datetimeFigureOut">
               <a:rPr lang="fr-BE" smtClean="0"/>
-              <a:t>08-03-26</a:t>
+              <a:t>10-03-26</a:t>
             </a:fld>
             <a:endParaRPr lang="fr-BE"/>
           </a:p>
@@ -5629,7 +6253,7 @@
           <a:p>
             <a:fld id="{0AE472FC-725B-4EE1-8E60-D98B5CD01CC3}" type="datetimeFigureOut">
               <a:rPr lang="fr-BE" smtClean="0"/>
-              <a:t>08-03-26</a:t>
+              <a:t>10-03-26</a:t>
             </a:fld>
             <a:endParaRPr lang="fr-BE"/>
           </a:p>
@@ -6199,7 +6823,7 @@
           <a:p>
             <a:fld id="{7CAC1560-C803-46E2-A186-D4227662A004}" type="datetimeFigureOut">
               <a:rPr lang="fr-BE" smtClean="0"/>
-              <a:t>08-03-26</a:t>
+              <a:t>10-03-26</a:t>
             </a:fld>
             <a:endParaRPr lang="fr-BE"/>
           </a:p>
@@ -6673,6 +7297,578 @@
         <p:cNvPr id="1" name="">
           <a:extLst>
             <a:ext uri="{FF2B5EF4-FFF2-40B4-BE49-F238E27FC236}">
+              <a16:creationId xmlns:a16="http://schemas.microsoft.com/office/drawing/2014/main" id="{1002A272-4394-86B4-0C78-FD6822103A1B}"/>
+            </a:ext>
+          </a:extLst>
+        </p:cNvPr>
+        <p:cNvGrpSpPr/>
+        <p:nvPr/>
+      </p:nvGrpSpPr>
+      <p:grpSpPr>
+        <a:xfrm>
+          <a:off x="0" y="0"/>
+          <a:ext cx="0" cy="0"/>
+          <a:chOff x="0" y="0"/>
+          <a:chExt cx="0" cy="0"/>
+        </a:xfrm>
+      </p:grpSpPr>
+      <p:pic>
+        <p:nvPicPr>
+          <p:cNvPr id="3" name="Image 2">
+            <a:extLst>
+              <a:ext uri="{FF2B5EF4-FFF2-40B4-BE49-F238E27FC236}">
+                <a16:creationId xmlns:a16="http://schemas.microsoft.com/office/drawing/2014/main" id="{B41531CF-93A5-2E78-838D-00751D24BFDF}"/>
+              </a:ext>
+            </a:extLst>
+          </p:cNvPr>
+          <p:cNvPicPr>
+            <a:picLocks noChangeAspect="1"/>
+          </p:cNvPicPr>
+          <p:nvPr/>
+        </p:nvPicPr>
+        <p:blipFill>
+          <a:blip r:embed="rId2"/>
+          <a:stretch>
+            <a:fillRect/>
+          </a:stretch>
+        </p:blipFill>
+        <p:spPr>
+          <a:xfrm>
+            <a:off x="1739738" y="0"/>
+            <a:ext cx="8712523" cy="6858000"/>
+          </a:xfrm>
+          <a:prstGeom prst="rect">
+            <a:avLst/>
+          </a:prstGeom>
+        </p:spPr>
+      </p:pic>
+      <p:sp>
+        <p:nvSpPr>
+          <p:cNvPr id="5" name="Ellipse 4">
+            <a:extLst>
+              <a:ext uri="{FF2B5EF4-FFF2-40B4-BE49-F238E27FC236}">
+                <a16:creationId xmlns:a16="http://schemas.microsoft.com/office/drawing/2014/main" id="{6B8D4B12-2163-3E81-92F4-FC26C902D90F}"/>
+              </a:ext>
+            </a:extLst>
+          </p:cNvPr>
+          <p:cNvSpPr/>
+          <p:nvPr/>
+        </p:nvSpPr>
+        <p:spPr>
+          <a:xfrm>
+            <a:off x="5091694" y="1749859"/>
+            <a:ext cx="3322101" cy="3308944"/>
+          </a:xfrm>
+          <a:prstGeom prst="ellipse">
+            <a:avLst/>
+          </a:prstGeom>
+          <a:noFill/>
+          <a:ln>
+            <a:solidFill>
+              <a:srgbClr val="FF0000"/>
+            </a:solidFill>
+          </a:ln>
+        </p:spPr>
+        <p:style>
+          <a:lnRef idx="2">
+            <a:schemeClr val="accent1">
+              <a:shade val="15000"/>
+            </a:schemeClr>
+          </a:lnRef>
+          <a:fillRef idx="1">
+            <a:schemeClr val="accent1"/>
+          </a:fillRef>
+          <a:effectRef idx="0">
+            <a:schemeClr val="accent1"/>
+          </a:effectRef>
+          <a:fontRef idx="minor">
+            <a:schemeClr val="lt1"/>
+          </a:fontRef>
+        </p:style>
+        <p:txBody>
+          <a:bodyPr rtlCol="0" anchor="ctr"/>
+          <a:lstStyle/>
+          <a:p>
+            <a:pPr algn="ctr"/>
+            <a:endParaRPr lang="fr-BE"/>
+          </a:p>
+        </p:txBody>
+      </p:sp>
+    </p:spTree>
+    <p:extLst>
+      <p:ext uri="{BB962C8B-B14F-4D97-AF65-F5344CB8AC3E}">
+        <p14:creationId xmlns:p14="http://schemas.microsoft.com/office/powerpoint/2010/main" val="3009571489"/>
+      </p:ext>
+    </p:extLst>
+  </p:cSld>
+  <p:clrMapOvr>
+    <a:masterClrMapping/>
+  </p:clrMapOvr>
+</p:sld>
+</file>
+
+<file path=ppt/slides/slide11.xml><?xml version="1.0" encoding="utf-8"?>
+<p:sld xmlns:a="http://schemas.openxmlformats.org/drawingml/2006/main" xmlns:r="http://schemas.openxmlformats.org/officeDocument/2006/relationships" xmlns:p="http://schemas.openxmlformats.org/presentationml/2006/main">
+  <p:cSld>
+    <p:spTree>
+      <p:nvGrpSpPr>
+        <p:cNvPr id="1" name="">
+          <a:extLst>
+            <a:ext uri="{FF2B5EF4-FFF2-40B4-BE49-F238E27FC236}">
+              <a16:creationId xmlns:a16="http://schemas.microsoft.com/office/drawing/2014/main" id="{DB6682CE-A18E-C88C-7650-3E6056A42BFC}"/>
+            </a:ext>
+          </a:extLst>
+        </p:cNvPr>
+        <p:cNvGrpSpPr/>
+        <p:nvPr/>
+      </p:nvGrpSpPr>
+      <p:grpSpPr>
+        <a:xfrm>
+          <a:off x="0" y="0"/>
+          <a:ext cx="0" cy="0"/>
+          <a:chOff x="0" y="0"/>
+          <a:chExt cx="0" cy="0"/>
+        </a:xfrm>
+      </p:grpSpPr>
+      <p:pic>
+        <p:nvPicPr>
+          <p:cNvPr id="3" name="Image 2">
+            <a:extLst>
+              <a:ext uri="{FF2B5EF4-FFF2-40B4-BE49-F238E27FC236}">
+                <a16:creationId xmlns:a16="http://schemas.microsoft.com/office/drawing/2014/main" id="{9ABFEE86-5D85-EF33-0603-AC664F29BB9C}"/>
+              </a:ext>
+            </a:extLst>
+          </p:cNvPr>
+          <p:cNvPicPr>
+            <a:picLocks noChangeAspect="1"/>
+          </p:cNvPicPr>
+          <p:nvPr/>
+        </p:nvPicPr>
+        <p:blipFill>
+          <a:blip r:embed="rId2"/>
+          <a:stretch>
+            <a:fillRect/>
+          </a:stretch>
+        </p:blipFill>
+        <p:spPr>
+          <a:xfrm>
+            <a:off x="1739738" y="0"/>
+            <a:ext cx="8712523" cy="6858000"/>
+          </a:xfrm>
+          <a:prstGeom prst="rect">
+            <a:avLst/>
+          </a:prstGeom>
+        </p:spPr>
+      </p:pic>
+      <p:sp>
+        <p:nvSpPr>
+          <p:cNvPr id="4" name="Ellipse 3">
+            <a:extLst>
+              <a:ext uri="{FF2B5EF4-FFF2-40B4-BE49-F238E27FC236}">
+                <a16:creationId xmlns:a16="http://schemas.microsoft.com/office/drawing/2014/main" id="{A80481E4-8C0C-3A70-074F-81F4F5E5C885}"/>
+              </a:ext>
+            </a:extLst>
+          </p:cNvPr>
+          <p:cNvSpPr/>
+          <p:nvPr/>
+        </p:nvSpPr>
+        <p:spPr>
+          <a:xfrm>
+            <a:off x="4190452" y="2312312"/>
+            <a:ext cx="2203770" cy="2184037"/>
+          </a:xfrm>
+          <a:prstGeom prst="ellipse">
+            <a:avLst/>
+          </a:prstGeom>
+          <a:noFill/>
+          <a:ln>
+            <a:solidFill>
+              <a:schemeClr val="tx2">
+                <a:lumMod val="75000"/>
+                <a:lumOff val="25000"/>
+              </a:schemeClr>
+            </a:solidFill>
+          </a:ln>
+        </p:spPr>
+        <p:style>
+          <a:lnRef idx="2">
+            <a:schemeClr val="accent1">
+              <a:shade val="15000"/>
+            </a:schemeClr>
+          </a:lnRef>
+          <a:fillRef idx="1">
+            <a:schemeClr val="accent1"/>
+          </a:fillRef>
+          <a:effectRef idx="0">
+            <a:schemeClr val="accent1"/>
+          </a:effectRef>
+          <a:fontRef idx="minor">
+            <a:schemeClr val="lt1"/>
+          </a:fontRef>
+        </p:style>
+        <p:txBody>
+          <a:bodyPr rtlCol="0" anchor="ctr"/>
+          <a:lstStyle/>
+          <a:p>
+            <a:pPr algn="ctr"/>
+            <a:endParaRPr lang="fr-BE"/>
+          </a:p>
+        </p:txBody>
+      </p:sp>
+      <p:sp>
+        <p:nvSpPr>
+          <p:cNvPr id="5" name="Ellipse 4">
+            <a:extLst>
+              <a:ext uri="{FF2B5EF4-FFF2-40B4-BE49-F238E27FC236}">
+                <a16:creationId xmlns:a16="http://schemas.microsoft.com/office/drawing/2014/main" id="{FA49DDED-57CD-EB34-3CA4-CD8EDB8E6A59}"/>
+              </a:ext>
+            </a:extLst>
+          </p:cNvPr>
+          <p:cNvSpPr/>
+          <p:nvPr/>
+        </p:nvSpPr>
+        <p:spPr>
+          <a:xfrm>
+            <a:off x="5091694" y="1749859"/>
+            <a:ext cx="3322101" cy="3308944"/>
+          </a:xfrm>
+          <a:prstGeom prst="ellipse">
+            <a:avLst/>
+          </a:prstGeom>
+          <a:noFill/>
+          <a:ln>
+            <a:solidFill>
+              <a:srgbClr val="FF0000"/>
+            </a:solidFill>
+          </a:ln>
+        </p:spPr>
+        <p:style>
+          <a:lnRef idx="2">
+            <a:schemeClr val="accent1">
+              <a:shade val="15000"/>
+            </a:schemeClr>
+          </a:lnRef>
+          <a:fillRef idx="1">
+            <a:schemeClr val="accent1"/>
+          </a:fillRef>
+          <a:effectRef idx="0">
+            <a:schemeClr val="accent1"/>
+          </a:effectRef>
+          <a:fontRef idx="minor">
+            <a:schemeClr val="lt1"/>
+          </a:fontRef>
+        </p:style>
+        <p:txBody>
+          <a:bodyPr rtlCol="0" anchor="ctr"/>
+          <a:lstStyle/>
+          <a:p>
+            <a:pPr algn="ctr"/>
+            <a:endParaRPr lang="fr-BE"/>
+          </a:p>
+        </p:txBody>
+      </p:sp>
+    </p:spTree>
+    <p:extLst>
+      <p:ext uri="{BB962C8B-B14F-4D97-AF65-F5344CB8AC3E}">
+        <p14:creationId xmlns:p14="http://schemas.microsoft.com/office/powerpoint/2010/main" val="3053127207"/>
+      </p:ext>
+    </p:extLst>
+  </p:cSld>
+  <p:clrMapOvr>
+    <a:masterClrMapping/>
+  </p:clrMapOvr>
+</p:sld>
+</file>
+
+<file path=ppt/slides/slide12.xml><?xml version="1.0" encoding="utf-8"?>
+<p:sld xmlns:a="http://schemas.openxmlformats.org/drawingml/2006/main" xmlns:r="http://schemas.openxmlformats.org/officeDocument/2006/relationships" xmlns:p="http://schemas.openxmlformats.org/presentationml/2006/main">
+  <p:cSld>
+    <p:spTree>
+      <p:nvGrpSpPr>
+        <p:cNvPr id="1" name="">
+          <a:extLst>
+            <a:ext uri="{FF2B5EF4-FFF2-40B4-BE49-F238E27FC236}">
+              <a16:creationId xmlns:a16="http://schemas.microsoft.com/office/drawing/2014/main" id="{A6E4C428-0A4E-E08C-9524-406426CCC736}"/>
+            </a:ext>
+          </a:extLst>
+        </p:cNvPr>
+        <p:cNvGrpSpPr/>
+        <p:nvPr/>
+      </p:nvGrpSpPr>
+      <p:grpSpPr>
+        <a:xfrm>
+          <a:off x="0" y="0"/>
+          <a:ext cx="0" cy="0"/>
+          <a:chOff x="0" y="0"/>
+          <a:chExt cx="0" cy="0"/>
+        </a:xfrm>
+      </p:grpSpPr>
+      <p:pic>
+        <p:nvPicPr>
+          <p:cNvPr id="3" name="Image 2">
+            <a:extLst>
+              <a:ext uri="{FF2B5EF4-FFF2-40B4-BE49-F238E27FC236}">
+                <a16:creationId xmlns:a16="http://schemas.microsoft.com/office/drawing/2014/main" id="{C18C3390-5D1B-769F-D584-F962958859E4}"/>
+              </a:ext>
+            </a:extLst>
+          </p:cNvPr>
+          <p:cNvPicPr>
+            <a:picLocks noChangeAspect="1"/>
+          </p:cNvPicPr>
+          <p:nvPr/>
+        </p:nvPicPr>
+        <p:blipFill>
+          <a:blip r:embed="rId2"/>
+          <a:stretch>
+            <a:fillRect/>
+          </a:stretch>
+        </p:blipFill>
+        <p:spPr>
+          <a:xfrm>
+            <a:off x="1739738" y="0"/>
+            <a:ext cx="8712523" cy="6858000"/>
+          </a:xfrm>
+          <a:prstGeom prst="rect">
+            <a:avLst/>
+          </a:prstGeom>
+        </p:spPr>
+      </p:pic>
+      <p:sp>
+        <p:nvSpPr>
+          <p:cNvPr id="4" name="Ellipse 3">
+            <a:extLst>
+              <a:ext uri="{FF2B5EF4-FFF2-40B4-BE49-F238E27FC236}">
+                <a16:creationId xmlns:a16="http://schemas.microsoft.com/office/drawing/2014/main" id="{D872B34B-D535-C282-0B37-1FBF0AA65B9C}"/>
+              </a:ext>
+            </a:extLst>
+          </p:cNvPr>
+          <p:cNvSpPr/>
+          <p:nvPr/>
+        </p:nvSpPr>
+        <p:spPr>
+          <a:xfrm>
+            <a:off x="4190452" y="2312312"/>
+            <a:ext cx="2203770" cy="2184037"/>
+          </a:xfrm>
+          <a:prstGeom prst="ellipse">
+            <a:avLst/>
+          </a:prstGeom>
+          <a:noFill/>
+          <a:ln>
+            <a:solidFill>
+              <a:schemeClr val="tx2">
+                <a:lumMod val="75000"/>
+                <a:lumOff val="25000"/>
+              </a:schemeClr>
+            </a:solidFill>
+          </a:ln>
+        </p:spPr>
+        <p:style>
+          <a:lnRef idx="2">
+            <a:schemeClr val="accent1">
+              <a:shade val="15000"/>
+            </a:schemeClr>
+          </a:lnRef>
+          <a:fillRef idx="1">
+            <a:schemeClr val="accent1"/>
+          </a:fillRef>
+          <a:effectRef idx="0">
+            <a:schemeClr val="accent1"/>
+          </a:effectRef>
+          <a:fontRef idx="minor">
+            <a:schemeClr val="lt1"/>
+          </a:fontRef>
+        </p:style>
+        <p:txBody>
+          <a:bodyPr rtlCol="0" anchor="ctr"/>
+          <a:lstStyle/>
+          <a:p>
+            <a:pPr algn="ctr"/>
+            <a:endParaRPr lang="fr-BE"/>
+          </a:p>
+        </p:txBody>
+      </p:sp>
+      <p:sp>
+        <p:nvSpPr>
+          <p:cNvPr id="5" name="Ellipse 4">
+            <a:extLst>
+              <a:ext uri="{FF2B5EF4-FFF2-40B4-BE49-F238E27FC236}">
+                <a16:creationId xmlns:a16="http://schemas.microsoft.com/office/drawing/2014/main" id="{6675F5A1-D672-928F-82C9-1775C543D114}"/>
+              </a:ext>
+            </a:extLst>
+          </p:cNvPr>
+          <p:cNvSpPr/>
+          <p:nvPr/>
+        </p:nvSpPr>
+        <p:spPr>
+          <a:xfrm>
+            <a:off x="5091694" y="1749859"/>
+            <a:ext cx="3322101" cy="3308944"/>
+          </a:xfrm>
+          <a:prstGeom prst="ellipse">
+            <a:avLst/>
+          </a:prstGeom>
+          <a:noFill/>
+          <a:ln>
+            <a:solidFill>
+              <a:srgbClr val="FF0000"/>
+            </a:solidFill>
+          </a:ln>
+        </p:spPr>
+        <p:style>
+          <a:lnRef idx="2">
+            <a:schemeClr val="accent1">
+              <a:shade val="15000"/>
+            </a:schemeClr>
+          </a:lnRef>
+          <a:fillRef idx="1">
+            <a:schemeClr val="accent1"/>
+          </a:fillRef>
+          <a:effectRef idx="0">
+            <a:schemeClr val="accent1"/>
+          </a:effectRef>
+          <a:fontRef idx="minor">
+            <a:schemeClr val="lt1"/>
+          </a:fontRef>
+        </p:style>
+        <p:txBody>
+          <a:bodyPr rtlCol="0" anchor="ctr"/>
+          <a:lstStyle/>
+          <a:p>
+            <a:pPr algn="ctr"/>
+            <a:endParaRPr lang="fr-BE"/>
+          </a:p>
+        </p:txBody>
+      </p:sp>
+      <p:sp>
+        <p:nvSpPr>
+          <p:cNvPr id="2" name="Ellipse 1">
+            <a:extLst>
+              <a:ext uri="{FF2B5EF4-FFF2-40B4-BE49-F238E27FC236}">
+                <a16:creationId xmlns:a16="http://schemas.microsoft.com/office/drawing/2014/main" id="{F6C26AB9-9604-8ADC-E5C1-5688A240B521}"/>
+              </a:ext>
+            </a:extLst>
+          </p:cNvPr>
+          <p:cNvSpPr/>
+          <p:nvPr/>
+        </p:nvSpPr>
+        <p:spPr>
+          <a:xfrm>
+            <a:off x="5473243" y="2262975"/>
+            <a:ext cx="92098" cy="98676"/>
+          </a:xfrm>
+          <a:prstGeom prst="ellipse">
+            <a:avLst/>
+          </a:prstGeom>
+          <a:solidFill>
+            <a:srgbClr val="FF0000"/>
+          </a:solidFill>
+          <a:ln>
+            <a:solidFill>
+              <a:schemeClr val="tx1"/>
+            </a:solidFill>
+          </a:ln>
+        </p:spPr>
+        <p:style>
+          <a:lnRef idx="2">
+            <a:schemeClr val="accent1">
+              <a:shade val="15000"/>
+            </a:schemeClr>
+          </a:lnRef>
+          <a:fillRef idx="1">
+            <a:schemeClr val="accent1"/>
+          </a:fillRef>
+          <a:effectRef idx="0">
+            <a:schemeClr val="accent1"/>
+          </a:effectRef>
+          <a:fontRef idx="minor">
+            <a:schemeClr val="lt1"/>
+          </a:fontRef>
+        </p:style>
+        <p:txBody>
+          <a:bodyPr rtlCol="0" anchor="ctr"/>
+          <a:lstStyle/>
+          <a:p>
+            <a:pPr algn="ctr"/>
+            <a:endParaRPr lang="fr-BE"/>
+          </a:p>
+        </p:txBody>
+      </p:sp>
+      <p:sp>
+        <p:nvSpPr>
+          <p:cNvPr id="6" name="Ellipse 5">
+            <a:extLst>
+              <a:ext uri="{FF2B5EF4-FFF2-40B4-BE49-F238E27FC236}">
+                <a16:creationId xmlns:a16="http://schemas.microsoft.com/office/drawing/2014/main" id="{F4ED84EB-A1C0-4E2C-D06C-F538039D9A79}"/>
+              </a:ext>
+            </a:extLst>
+          </p:cNvPr>
+          <p:cNvSpPr/>
+          <p:nvPr/>
+        </p:nvSpPr>
+        <p:spPr>
+          <a:xfrm>
+            <a:off x="5445300" y="4424832"/>
+            <a:ext cx="92098" cy="98676"/>
+          </a:xfrm>
+          <a:prstGeom prst="ellipse">
+            <a:avLst/>
+          </a:prstGeom>
+          <a:solidFill>
+            <a:srgbClr val="FF0000"/>
+          </a:solidFill>
+          <a:ln>
+            <a:solidFill>
+              <a:schemeClr val="tx1"/>
+            </a:solidFill>
+          </a:ln>
+        </p:spPr>
+        <p:style>
+          <a:lnRef idx="2">
+            <a:schemeClr val="accent1">
+              <a:shade val="15000"/>
+            </a:schemeClr>
+          </a:lnRef>
+          <a:fillRef idx="1">
+            <a:schemeClr val="accent1"/>
+          </a:fillRef>
+          <a:effectRef idx="0">
+            <a:schemeClr val="accent1"/>
+          </a:effectRef>
+          <a:fontRef idx="minor">
+            <a:schemeClr val="lt1"/>
+          </a:fontRef>
+        </p:style>
+        <p:txBody>
+          <a:bodyPr rtlCol="0" anchor="ctr"/>
+          <a:lstStyle/>
+          <a:p>
+            <a:pPr algn="ctr"/>
+            <a:endParaRPr lang="fr-BE"/>
+          </a:p>
+        </p:txBody>
+      </p:sp>
+    </p:spTree>
+    <p:extLst>
+      <p:ext uri="{BB962C8B-B14F-4D97-AF65-F5344CB8AC3E}">
+        <p14:creationId xmlns:p14="http://schemas.microsoft.com/office/powerpoint/2010/main" val="92229585"/>
+      </p:ext>
+    </p:extLst>
+  </p:cSld>
+  <p:clrMapOvr>
+    <a:masterClrMapping/>
+  </p:clrMapOvr>
+</p:sld>
+</file>
+
+<file path=ppt/slides/slide13.xml><?xml version="1.0" encoding="utf-8"?>
+<p:sld xmlns:a="http://schemas.openxmlformats.org/drawingml/2006/main" xmlns:r="http://schemas.openxmlformats.org/officeDocument/2006/relationships" xmlns:p="http://schemas.openxmlformats.org/presentationml/2006/main">
+  <p:cSld>
+    <p:spTree>
+      <p:nvGrpSpPr>
+        <p:cNvPr id="1" name="">
+          <a:extLst>
+            <a:ext uri="{FF2B5EF4-FFF2-40B4-BE49-F238E27FC236}">
               <a16:creationId xmlns:a16="http://schemas.microsoft.com/office/drawing/2014/main" id="{E4796300-5BBB-6404-C89F-A06EE88EA817}"/>
             </a:ext>
           </a:extLst>
@@ -6935,6 +8131,60 @@
           </a:p>
         </p:txBody>
       </p:sp>
+      <p:sp>
+        <p:nvSpPr>
+          <p:cNvPr id="7" name="Ellipse 6">
+            <a:extLst>
+              <a:ext uri="{FF2B5EF4-FFF2-40B4-BE49-F238E27FC236}">
+                <a16:creationId xmlns:a16="http://schemas.microsoft.com/office/drawing/2014/main" id="{BF40A78C-6E4C-43A6-0E10-CA9C1D154B82}"/>
+              </a:ext>
+            </a:extLst>
+          </p:cNvPr>
+          <p:cNvSpPr/>
+          <p:nvPr/>
+        </p:nvSpPr>
+        <p:spPr>
+          <a:xfrm>
+            <a:off x="5445300" y="4424832"/>
+            <a:ext cx="92098" cy="98676"/>
+          </a:xfrm>
+          <a:prstGeom prst="ellipse">
+            <a:avLst/>
+          </a:prstGeom>
+          <a:solidFill>
+            <a:srgbClr val="FF0000"/>
+          </a:solidFill>
+          <a:ln>
+            <a:solidFill>
+              <a:schemeClr val="tx1"/>
+            </a:solidFill>
+          </a:ln>
+        </p:spPr>
+        <p:style>
+          <a:lnRef idx="2">
+            <a:schemeClr val="accent1">
+              <a:shade val="15000"/>
+            </a:schemeClr>
+          </a:lnRef>
+          <a:fillRef idx="1">
+            <a:schemeClr val="accent1"/>
+          </a:fillRef>
+          <a:effectRef idx="0">
+            <a:schemeClr val="accent1"/>
+          </a:effectRef>
+          <a:fontRef idx="minor">
+            <a:schemeClr val="lt1"/>
+          </a:fontRef>
+        </p:style>
+        <p:txBody>
+          <a:bodyPr rtlCol="0" anchor="ctr"/>
+          <a:lstStyle/>
+          <a:p>
+            <a:pPr algn="ctr"/>
+            <a:endParaRPr lang="fr-BE"/>
+          </a:p>
+        </p:txBody>
+      </p:sp>
     </p:spTree>
     <p:extLst>
       <p:ext uri="{BB962C8B-B14F-4D97-AF65-F5344CB8AC3E}">
@@ -6948,7 +8198,7 @@
 </p:sld>
 </file>
 
-<file path=ppt/slides/slide11.xml><?xml version="1.0" encoding="utf-8"?>
+<file path=ppt/slides/slide14.xml><?xml version="1.0" encoding="utf-8"?>
 <p:sld xmlns:a="http://schemas.openxmlformats.org/drawingml/2006/main" xmlns:r="http://schemas.openxmlformats.org/officeDocument/2006/relationships" xmlns:p="http://schemas.openxmlformats.org/presentationml/2006/main">
   <p:cSld>
     <p:spTree>
@@ -7274,87 +8524,21 @@
           </a:p>
         </p:txBody>
       </p:sp>
-    </p:spTree>
-    <p:extLst>
-      <p:ext uri="{BB962C8B-B14F-4D97-AF65-F5344CB8AC3E}">
-        <p14:creationId xmlns:p14="http://schemas.microsoft.com/office/powerpoint/2010/main" val="1239644896"/>
-      </p:ext>
-    </p:extLst>
-  </p:cSld>
-  <p:clrMapOvr>
-    <a:masterClrMapping/>
-  </p:clrMapOvr>
-</p:sld>
-</file>
-
-<file path=ppt/slides/slide12.xml><?xml version="1.0" encoding="utf-8"?>
-<p:sld xmlns:a="http://schemas.openxmlformats.org/drawingml/2006/main" xmlns:r="http://schemas.openxmlformats.org/officeDocument/2006/relationships" xmlns:p="http://schemas.openxmlformats.org/presentationml/2006/main">
-  <p:cSld>
-    <p:spTree>
-      <p:nvGrpSpPr>
-        <p:cNvPr id="1" name="">
-          <a:extLst>
-            <a:ext uri="{FF2B5EF4-FFF2-40B4-BE49-F238E27FC236}">
-              <a16:creationId xmlns:a16="http://schemas.microsoft.com/office/drawing/2014/main" id="{0A45E6C7-65CC-C6D4-9149-00DEE5CCACE5}"/>
-            </a:ext>
-          </a:extLst>
-        </p:cNvPr>
-        <p:cNvGrpSpPr/>
-        <p:nvPr/>
-      </p:nvGrpSpPr>
-      <p:grpSpPr>
-        <a:xfrm>
-          <a:off x="0" y="0"/>
-          <a:ext cx="0" cy="0"/>
-          <a:chOff x="0" y="0"/>
-          <a:chExt cx="0" cy="0"/>
-        </a:xfrm>
-      </p:grpSpPr>
-      <p:pic>
-        <p:nvPicPr>
-          <p:cNvPr id="3" name="Image 2">
-            <a:extLst>
-              <a:ext uri="{FF2B5EF4-FFF2-40B4-BE49-F238E27FC236}">
-                <a16:creationId xmlns:a16="http://schemas.microsoft.com/office/drawing/2014/main" id="{B8FD7210-A392-0842-6967-2CA16D336E15}"/>
-              </a:ext>
-            </a:extLst>
-          </p:cNvPr>
-          <p:cNvPicPr>
-            <a:picLocks noChangeAspect="1"/>
-          </p:cNvPicPr>
+      <p:sp>
+        <p:nvSpPr>
+          <p:cNvPr id="4" name="Ellipse 3">
+            <a:extLst>
+              <a:ext uri="{FF2B5EF4-FFF2-40B4-BE49-F238E27FC236}">
+                <a16:creationId xmlns:a16="http://schemas.microsoft.com/office/drawing/2014/main" id="{3E591A15-CBFC-327A-013D-1F2770EC7D1D}"/>
+              </a:ext>
+            </a:extLst>
+          </p:cNvPr>
+          <p:cNvSpPr/>
           <p:nvPr/>
-        </p:nvPicPr>
-        <p:blipFill>
-          <a:blip r:embed="rId2"/>
-          <a:stretch>
-            <a:fillRect/>
-          </a:stretch>
-        </p:blipFill>
+        </p:nvSpPr>
         <p:spPr>
           <a:xfrm>
-            <a:off x="1739738" y="0"/>
-            <a:ext cx="8712523" cy="6858000"/>
-          </a:xfrm>
-          <a:prstGeom prst="rect">
-            <a:avLst/>
-          </a:prstGeom>
-        </p:spPr>
-      </p:pic>
-      <p:sp>
-        <p:nvSpPr>
-          <p:cNvPr id="5" name="Ellipse 4">
-            <a:extLst>
-              <a:ext uri="{FF2B5EF4-FFF2-40B4-BE49-F238E27FC236}">
-                <a16:creationId xmlns:a16="http://schemas.microsoft.com/office/drawing/2014/main" id="{01D65D7E-A9D8-BC05-FD01-E7139D5E3960}"/>
-              </a:ext>
-            </a:extLst>
-          </p:cNvPr>
-          <p:cNvSpPr/>
-          <p:nvPr/>
-        </p:nvSpPr>
-        <p:spPr>
-          <a:xfrm>
-            <a:off x="5460087" y="2284905"/>
+            <a:off x="5445300" y="4424832"/>
             <a:ext cx="92098" cy="98676"/>
           </a:xfrm>
           <a:prstGeom prst="ellipse">
@@ -7398,6 +8582,182 @@
       </p:sp>
       <p:sp>
         <p:nvSpPr>
+          <p:cNvPr id="9" name="Ellipse 8">
+            <a:extLst>
+              <a:ext uri="{FF2B5EF4-FFF2-40B4-BE49-F238E27FC236}">
+                <a16:creationId xmlns:a16="http://schemas.microsoft.com/office/drawing/2014/main" id="{93450FCE-5A8F-C15D-A55A-A5E681B8C9BC}"/>
+              </a:ext>
+            </a:extLst>
+          </p:cNvPr>
+          <p:cNvSpPr/>
+          <p:nvPr/>
+        </p:nvSpPr>
+        <p:spPr>
+          <a:xfrm>
+            <a:off x="5537398" y="4248383"/>
+            <a:ext cx="92098" cy="98676"/>
+          </a:xfrm>
+          <a:prstGeom prst="ellipse">
+            <a:avLst/>
+          </a:prstGeom>
+          <a:solidFill>
+            <a:srgbClr val="FF0000"/>
+          </a:solidFill>
+          <a:ln>
+            <a:solidFill>
+              <a:schemeClr val="tx1"/>
+            </a:solidFill>
+          </a:ln>
+        </p:spPr>
+        <p:style>
+          <a:lnRef idx="2">
+            <a:schemeClr val="accent1">
+              <a:shade val="15000"/>
+            </a:schemeClr>
+          </a:lnRef>
+          <a:fillRef idx="1">
+            <a:schemeClr val="accent1"/>
+          </a:fillRef>
+          <a:effectRef idx="0">
+            <a:schemeClr val="accent1"/>
+          </a:effectRef>
+          <a:fontRef idx="minor">
+            <a:schemeClr val="lt1"/>
+          </a:fontRef>
+        </p:style>
+        <p:txBody>
+          <a:bodyPr rtlCol="0" anchor="ctr"/>
+          <a:lstStyle/>
+          <a:p>
+            <a:pPr algn="ctr"/>
+            <a:endParaRPr lang="fr-BE"/>
+          </a:p>
+        </p:txBody>
+      </p:sp>
+    </p:spTree>
+    <p:extLst>
+      <p:ext uri="{BB962C8B-B14F-4D97-AF65-F5344CB8AC3E}">
+        <p14:creationId xmlns:p14="http://schemas.microsoft.com/office/powerpoint/2010/main" val="1239644896"/>
+      </p:ext>
+    </p:extLst>
+  </p:cSld>
+  <p:clrMapOvr>
+    <a:masterClrMapping/>
+  </p:clrMapOvr>
+</p:sld>
+</file>
+
+<file path=ppt/slides/slide15.xml><?xml version="1.0" encoding="utf-8"?>
+<p:sld xmlns:a="http://schemas.openxmlformats.org/drawingml/2006/main" xmlns:r="http://schemas.openxmlformats.org/officeDocument/2006/relationships" xmlns:p="http://schemas.openxmlformats.org/presentationml/2006/main">
+  <p:cSld>
+    <p:spTree>
+      <p:nvGrpSpPr>
+        <p:cNvPr id="1" name="">
+          <a:extLst>
+            <a:ext uri="{FF2B5EF4-FFF2-40B4-BE49-F238E27FC236}">
+              <a16:creationId xmlns:a16="http://schemas.microsoft.com/office/drawing/2014/main" id="{0A45E6C7-65CC-C6D4-9149-00DEE5CCACE5}"/>
+            </a:ext>
+          </a:extLst>
+        </p:cNvPr>
+        <p:cNvGrpSpPr/>
+        <p:nvPr/>
+      </p:nvGrpSpPr>
+      <p:grpSpPr>
+        <a:xfrm>
+          <a:off x="0" y="0"/>
+          <a:ext cx="0" cy="0"/>
+          <a:chOff x="0" y="0"/>
+          <a:chExt cx="0" cy="0"/>
+        </a:xfrm>
+      </p:grpSpPr>
+      <p:pic>
+        <p:nvPicPr>
+          <p:cNvPr id="3" name="Image 2">
+            <a:extLst>
+              <a:ext uri="{FF2B5EF4-FFF2-40B4-BE49-F238E27FC236}">
+                <a16:creationId xmlns:a16="http://schemas.microsoft.com/office/drawing/2014/main" id="{B8FD7210-A392-0842-6967-2CA16D336E15}"/>
+              </a:ext>
+            </a:extLst>
+          </p:cNvPr>
+          <p:cNvPicPr>
+            <a:picLocks noChangeAspect="1"/>
+          </p:cNvPicPr>
+          <p:nvPr/>
+        </p:nvPicPr>
+        <p:blipFill>
+          <a:blip r:embed="rId3"/>
+          <a:stretch>
+            <a:fillRect/>
+          </a:stretch>
+        </p:blipFill>
+        <p:spPr>
+          <a:xfrm>
+            <a:off x="1739738" y="0"/>
+            <a:ext cx="8712523" cy="6858000"/>
+          </a:xfrm>
+          <a:prstGeom prst="rect">
+            <a:avLst/>
+          </a:prstGeom>
+        </p:spPr>
+      </p:pic>
+      <p:sp>
+        <p:nvSpPr>
+          <p:cNvPr id="5" name="Ellipse 4">
+            <a:extLst>
+              <a:ext uri="{FF2B5EF4-FFF2-40B4-BE49-F238E27FC236}">
+                <a16:creationId xmlns:a16="http://schemas.microsoft.com/office/drawing/2014/main" id="{01D65D7E-A9D8-BC05-FD01-E7139D5E3960}"/>
+              </a:ext>
+            </a:extLst>
+          </p:cNvPr>
+          <p:cNvSpPr/>
+          <p:nvPr/>
+        </p:nvSpPr>
+        <p:spPr>
+          <a:xfrm>
+            <a:off x="5460087" y="2284905"/>
+            <a:ext cx="92098" cy="98676"/>
+          </a:xfrm>
+          <a:prstGeom prst="ellipse">
+            <a:avLst/>
+          </a:prstGeom>
+          <a:solidFill>
+            <a:schemeClr val="bg2">
+              <a:lumMod val="90000"/>
+            </a:schemeClr>
+          </a:solidFill>
+          <a:ln>
+            <a:solidFill>
+              <a:schemeClr val="tx1"/>
+            </a:solidFill>
+          </a:ln>
+        </p:spPr>
+        <p:style>
+          <a:lnRef idx="2">
+            <a:schemeClr val="accent1">
+              <a:shade val="15000"/>
+            </a:schemeClr>
+          </a:lnRef>
+          <a:fillRef idx="1">
+            <a:schemeClr val="accent1"/>
+          </a:fillRef>
+          <a:effectRef idx="0">
+            <a:schemeClr val="accent1"/>
+          </a:effectRef>
+          <a:fontRef idx="minor">
+            <a:schemeClr val="lt1"/>
+          </a:fontRef>
+        </p:style>
+        <p:txBody>
+          <a:bodyPr rtlCol="0" anchor="ctr"/>
+          <a:lstStyle/>
+          <a:p>
+            <a:pPr algn="ctr"/>
+            <a:endParaRPr lang="fr-BE"/>
+          </a:p>
+        </p:txBody>
+      </p:sp>
+      <p:sp>
+        <p:nvSpPr>
           <p:cNvPr id="6" name="Ellipse 5">
             <a:extLst>
               <a:ext uri="{FF2B5EF4-FFF2-40B4-BE49-F238E27FC236}">
@@ -7669,87 +9029,21 @@
           </a:p>
         </p:txBody>
       </p:sp>
-    </p:spTree>
-    <p:extLst>
-      <p:ext uri="{BB962C8B-B14F-4D97-AF65-F5344CB8AC3E}">
-        <p14:creationId xmlns:p14="http://schemas.microsoft.com/office/powerpoint/2010/main" val="702372420"/>
-      </p:ext>
-    </p:extLst>
-  </p:cSld>
-  <p:clrMapOvr>
-    <a:masterClrMapping/>
-  </p:clrMapOvr>
-</p:sld>
-</file>
-
-<file path=ppt/slides/slide13.xml><?xml version="1.0" encoding="utf-8"?>
-<p:sld xmlns:a="http://schemas.openxmlformats.org/drawingml/2006/main" xmlns:r="http://schemas.openxmlformats.org/officeDocument/2006/relationships" xmlns:p="http://schemas.openxmlformats.org/presentationml/2006/main">
-  <p:cSld>
-    <p:spTree>
-      <p:nvGrpSpPr>
-        <p:cNvPr id="1" name="">
-          <a:extLst>
-            <a:ext uri="{FF2B5EF4-FFF2-40B4-BE49-F238E27FC236}">
-              <a16:creationId xmlns:a16="http://schemas.microsoft.com/office/drawing/2014/main" id="{42D3A21B-5331-EFD5-55FF-5BC6163183BC}"/>
-            </a:ext>
-          </a:extLst>
-        </p:cNvPr>
-        <p:cNvGrpSpPr/>
-        <p:nvPr/>
-      </p:nvGrpSpPr>
-      <p:grpSpPr>
-        <a:xfrm>
-          <a:off x="0" y="0"/>
-          <a:ext cx="0" cy="0"/>
-          <a:chOff x="0" y="0"/>
-          <a:chExt cx="0" cy="0"/>
-        </a:xfrm>
-      </p:grpSpPr>
-      <p:pic>
-        <p:nvPicPr>
-          <p:cNvPr id="3" name="Image 2">
-            <a:extLst>
-              <a:ext uri="{FF2B5EF4-FFF2-40B4-BE49-F238E27FC236}">
-                <a16:creationId xmlns:a16="http://schemas.microsoft.com/office/drawing/2014/main" id="{9E526AE0-E5BB-98AB-B920-90FDC5C7688D}"/>
-              </a:ext>
-            </a:extLst>
-          </p:cNvPr>
-          <p:cNvPicPr>
-            <a:picLocks noChangeAspect="1"/>
-          </p:cNvPicPr>
+      <p:sp>
+        <p:nvSpPr>
+          <p:cNvPr id="9" name="Ellipse 8">
+            <a:extLst>
+              <a:ext uri="{FF2B5EF4-FFF2-40B4-BE49-F238E27FC236}">
+                <a16:creationId xmlns:a16="http://schemas.microsoft.com/office/drawing/2014/main" id="{C301CD91-2806-7849-318A-417F69AB5E9F}"/>
+              </a:ext>
+            </a:extLst>
+          </p:cNvPr>
+          <p:cNvSpPr/>
           <p:nvPr/>
-        </p:nvPicPr>
-        <p:blipFill>
-          <a:blip r:embed="rId2"/>
-          <a:stretch>
-            <a:fillRect/>
-          </a:stretch>
-        </p:blipFill>
+        </p:nvSpPr>
         <p:spPr>
           <a:xfrm>
-            <a:off x="1739738" y="0"/>
-            <a:ext cx="8712523" cy="6858000"/>
-          </a:xfrm>
-          <a:prstGeom prst="rect">
-            <a:avLst/>
-          </a:prstGeom>
-        </p:spPr>
-      </p:pic>
-      <p:sp>
-        <p:nvSpPr>
-          <p:cNvPr id="2" name="Ellipse 1">
-            <a:extLst>
-              <a:ext uri="{FF2B5EF4-FFF2-40B4-BE49-F238E27FC236}">
-                <a16:creationId xmlns:a16="http://schemas.microsoft.com/office/drawing/2014/main" id="{2EB776B5-D9C3-EB7F-9A51-E7C07997A525}"/>
-              </a:ext>
-            </a:extLst>
-          </p:cNvPr>
-          <p:cNvSpPr/>
-          <p:nvPr/>
-        </p:nvSpPr>
-        <p:spPr>
-          <a:xfrm>
-            <a:off x="5519292" y="2493220"/>
+            <a:off x="5537398" y="4248383"/>
             <a:ext cx="92098" cy="98676"/>
           </a:xfrm>
           <a:prstGeom prst="ellipse">
@@ -7793,10 +9087,10 @@
       </p:sp>
       <p:sp>
         <p:nvSpPr>
-          <p:cNvPr id="4" name="Ellipse 3">
-            <a:extLst>
-              <a:ext uri="{FF2B5EF4-FFF2-40B4-BE49-F238E27FC236}">
-                <a16:creationId xmlns:a16="http://schemas.microsoft.com/office/drawing/2014/main" id="{15957045-B0E7-FB6A-1345-D61ED643C15A}"/>
+          <p:cNvPr id="10" name="Ellipse 9">
+            <a:extLst>
+              <a:ext uri="{FF2B5EF4-FFF2-40B4-BE49-F238E27FC236}">
+                <a16:creationId xmlns:a16="http://schemas.microsoft.com/office/drawing/2014/main" id="{4F576FCC-CA1B-91C1-D719-7B1D8720964F}"/>
               </a:ext>
             </a:extLst>
           </p:cNvPr>
@@ -7805,7 +9099,7 @@
         </p:nvSpPr>
         <p:spPr>
           <a:xfrm>
-            <a:off x="5611390" y="2737717"/>
+            <a:off x="5445300" y="4424832"/>
             <a:ext cx="92098" cy="98676"/>
           </a:xfrm>
           <a:prstGeom prst="ellipse">
@@ -7849,10 +9143,10 @@
       </p:sp>
       <p:sp>
         <p:nvSpPr>
-          <p:cNvPr id="5" name="Ellipse 4">
-            <a:extLst>
-              <a:ext uri="{FF2B5EF4-FFF2-40B4-BE49-F238E27FC236}">
-                <a16:creationId xmlns:a16="http://schemas.microsoft.com/office/drawing/2014/main" id="{A572F6F0-73BC-4B4C-A3ED-B606C0F2D977}"/>
+          <p:cNvPr id="11" name="Ellipse 10">
+            <a:extLst>
+              <a:ext uri="{FF2B5EF4-FFF2-40B4-BE49-F238E27FC236}">
+                <a16:creationId xmlns:a16="http://schemas.microsoft.com/office/drawing/2014/main" id="{5A47ECF4-EC9A-8424-84E3-A7C68857C115}"/>
               </a:ext>
             </a:extLst>
           </p:cNvPr>
@@ -7861,7 +9155,7 @@
         </p:nvSpPr>
         <p:spPr>
           <a:xfrm>
-            <a:off x="5657439" y="3041421"/>
+            <a:off x="5602337" y="4012555"/>
             <a:ext cx="92098" cy="98676"/>
           </a:xfrm>
           <a:prstGeom prst="ellipse">
@@ -7901,12 +9195,78 @@
           </a:p>
         </p:txBody>
       </p:sp>
-      <p:sp>
-        <p:nvSpPr>
-          <p:cNvPr id="6" name="Ellipse 5">
-            <a:extLst>
-              <a:ext uri="{FF2B5EF4-FFF2-40B4-BE49-F238E27FC236}">
-                <a16:creationId xmlns:a16="http://schemas.microsoft.com/office/drawing/2014/main" id="{7B8C2BC2-54C5-2FAF-88EF-2905AC862203}"/>
+    </p:spTree>
+    <p:extLst>
+      <p:ext uri="{BB962C8B-B14F-4D97-AF65-F5344CB8AC3E}">
+        <p14:creationId xmlns:p14="http://schemas.microsoft.com/office/powerpoint/2010/main" val="702372420"/>
+      </p:ext>
+    </p:extLst>
+  </p:cSld>
+  <p:clrMapOvr>
+    <a:masterClrMapping/>
+  </p:clrMapOvr>
+</p:sld>
+</file>
+
+<file path=ppt/slides/slide16.xml><?xml version="1.0" encoding="utf-8"?>
+<p:sld xmlns:a="http://schemas.openxmlformats.org/drawingml/2006/main" xmlns:r="http://schemas.openxmlformats.org/officeDocument/2006/relationships" xmlns:p="http://schemas.openxmlformats.org/presentationml/2006/main">
+  <p:cSld>
+    <p:spTree>
+      <p:nvGrpSpPr>
+        <p:cNvPr id="1" name="">
+          <a:extLst>
+            <a:ext uri="{FF2B5EF4-FFF2-40B4-BE49-F238E27FC236}">
+              <a16:creationId xmlns:a16="http://schemas.microsoft.com/office/drawing/2014/main" id="{42D3A21B-5331-EFD5-55FF-5BC6163183BC}"/>
+            </a:ext>
+          </a:extLst>
+        </p:cNvPr>
+        <p:cNvGrpSpPr/>
+        <p:nvPr/>
+      </p:nvGrpSpPr>
+      <p:grpSpPr>
+        <a:xfrm>
+          <a:off x="0" y="0"/>
+          <a:ext cx="0" cy="0"/>
+          <a:chOff x="0" y="0"/>
+          <a:chExt cx="0" cy="0"/>
+        </a:xfrm>
+      </p:grpSpPr>
+      <p:pic>
+        <p:nvPicPr>
+          <p:cNvPr id="3" name="Image 2">
+            <a:extLst>
+              <a:ext uri="{FF2B5EF4-FFF2-40B4-BE49-F238E27FC236}">
+                <a16:creationId xmlns:a16="http://schemas.microsoft.com/office/drawing/2014/main" id="{9E526AE0-E5BB-98AB-B920-90FDC5C7688D}"/>
+              </a:ext>
+            </a:extLst>
+          </p:cNvPr>
+          <p:cNvPicPr>
+            <a:picLocks noChangeAspect="1"/>
+          </p:cNvPicPr>
+          <p:nvPr/>
+        </p:nvPicPr>
+        <p:blipFill>
+          <a:blip r:embed="rId2"/>
+          <a:stretch>
+            <a:fillRect/>
+          </a:stretch>
+        </p:blipFill>
+        <p:spPr>
+          <a:xfrm>
+            <a:off x="1739738" y="0"/>
+            <a:ext cx="8712523" cy="6858000"/>
+          </a:xfrm>
+          <a:prstGeom prst="rect">
+            <a:avLst/>
+          </a:prstGeom>
+        </p:spPr>
+      </p:pic>
+      <p:sp>
+        <p:nvSpPr>
+          <p:cNvPr id="2" name="Ellipse 1">
+            <a:extLst>
+              <a:ext uri="{FF2B5EF4-FFF2-40B4-BE49-F238E27FC236}">
+                <a16:creationId xmlns:a16="http://schemas.microsoft.com/office/drawing/2014/main" id="{2EB776B5-D9C3-EB7F-9A51-E7C07997A525}"/>
               </a:ext>
             </a:extLst>
           </p:cNvPr>
@@ -7915,7 +9275,7 @@
         </p:nvSpPr>
         <p:spPr>
           <a:xfrm>
-            <a:off x="5460087" y="2284905"/>
+            <a:off x="5519292" y="2493220"/>
             <a:ext cx="92098" cy="98676"/>
           </a:xfrm>
           <a:prstGeom prst="ellipse">
@@ -7957,87 +9317,21 @@
           </a:p>
         </p:txBody>
       </p:sp>
-    </p:spTree>
-    <p:extLst>
-      <p:ext uri="{BB962C8B-B14F-4D97-AF65-F5344CB8AC3E}">
-        <p14:creationId xmlns:p14="http://schemas.microsoft.com/office/powerpoint/2010/main" val="1523370608"/>
-      </p:ext>
-    </p:extLst>
-  </p:cSld>
-  <p:clrMapOvr>
-    <a:masterClrMapping/>
-  </p:clrMapOvr>
-</p:sld>
-</file>
-
-<file path=ppt/slides/slide14.xml><?xml version="1.0" encoding="utf-8"?>
-<p:sld xmlns:a="http://schemas.openxmlformats.org/drawingml/2006/main" xmlns:r="http://schemas.openxmlformats.org/officeDocument/2006/relationships" xmlns:p="http://schemas.openxmlformats.org/presentationml/2006/main">
-  <p:cSld>
-    <p:spTree>
-      <p:nvGrpSpPr>
-        <p:cNvPr id="1" name="">
-          <a:extLst>
-            <a:ext uri="{FF2B5EF4-FFF2-40B4-BE49-F238E27FC236}">
-              <a16:creationId xmlns:a16="http://schemas.microsoft.com/office/drawing/2014/main" id="{E20CFA8A-6396-4347-2826-E0422F87F4D8}"/>
-            </a:ext>
-          </a:extLst>
-        </p:cNvPr>
-        <p:cNvGrpSpPr/>
-        <p:nvPr/>
-      </p:nvGrpSpPr>
-      <p:grpSpPr>
-        <a:xfrm>
-          <a:off x="0" y="0"/>
-          <a:ext cx="0" cy="0"/>
-          <a:chOff x="0" y="0"/>
-          <a:chExt cx="0" cy="0"/>
-        </a:xfrm>
-      </p:grpSpPr>
-      <p:pic>
-        <p:nvPicPr>
-          <p:cNvPr id="3" name="Image 2">
-            <a:extLst>
-              <a:ext uri="{FF2B5EF4-FFF2-40B4-BE49-F238E27FC236}">
-                <a16:creationId xmlns:a16="http://schemas.microsoft.com/office/drawing/2014/main" id="{9070BFA7-57B6-5079-5711-CF2739E5BA95}"/>
-              </a:ext>
-            </a:extLst>
-          </p:cNvPr>
-          <p:cNvPicPr>
-            <a:picLocks noChangeAspect="1"/>
-          </p:cNvPicPr>
+      <p:sp>
+        <p:nvSpPr>
+          <p:cNvPr id="4" name="Ellipse 3">
+            <a:extLst>
+              <a:ext uri="{FF2B5EF4-FFF2-40B4-BE49-F238E27FC236}">
+                <a16:creationId xmlns:a16="http://schemas.microsoft.com/office/drawing/2014/main" id="{15957045-B0E7-FB6A-1345-D61ED643C15A}"/>
+              </a:ext>
+            </a:extLst>
+          </p:cNvPr>
+          <p:cNvSpPr/>
           <p:nvPr/>
-        </p:nvPicPr>
-        <p:blipFill>
-          <a:blip r:embed="rId2"/>
-          <a:stretch>
-            <a:fillRect/>
-          </a:stretch>
-        </p:blipFill>
+        </p:nvSpPr>
         <p:spPr>
           <a:xfrm>
-            <a:off x="1739738" y="0"/>
-            <a:ext cx="8712523" cy="6858000"/>
-          </a:xfrm>
-          <a:prstGeom prst="rect">
-            <a:avLst/>
-          </a:prstGeom>
-        </p:spPr>
-      </p:pic>
-      <p:sp>
-        <p:nvSpPr>
-          <p:cNvPr id="2" name="Ellipse 1">
-            <a:extLst>
-              <a:ext uri="{FF2B5EF4-FFF2-40B4-BE49-F238E27FC236}">
-                <a16:creationId xmlns:a16="http://schemas.microsoft.com/office/drawing/2014/main" id="{2C247983-9973-09CF-6443-9656291AE98D}"/>
-              </a:ext>
-            </a:extLst>
-          </p:cNvPr>
-          <p:cNvSpPr/>
-          <p:nvPr/>
-        </p:nvSpPr>
-        <p:spPr>
-          <a:xfrm>
-            <a:off x="5519292" y="2493220"/>
+            <a:off x="5611390" y="2737717"/>
             <a:ext cx="92098" cy="98676"/>
           </a:xfrm>
           <a:prstGeom prst="ellipse">
@@ -8081,10 +9375,10 @@
       </p:sp>
       <p:sp>
         <p:nvSpPr>
-          <p:cNvPr id="4" name="Ellipse 3">
-            <a:extLst>
-              <a:ext uri="{FF2B5EF4-FFF2-40B4-BE49-F238E27FC236}">
-                <a16:creationId xmlns:a16="http://schemas.microsoft.com/office/drawing/2014/main" id="{0D47F36C-E42C-B19E-9837-F35F9CABBE73}"/>
+          <p:cNvPr id="5" name="Ellipse 4">
+            <a:extLst>
+              <a:ext uri="{FF2B5EF4-FFF2-40B4-BE49-F238E27FC236}">
+                <a16:creationId xmlns:a16="http://schemas.microsoft.com/office/drawing/2014/main" id="{A572F6F0-73BC-4B4C-A3ED-B606C0F2D977}"/>
               </a:ext>
             </a:extLst>
           </p:cNvPr>
@@ -8093,7 +9387,61 @@
         </p:nvSpPr>
         <p:spPr>
           <a:xfrm>
-            <a:off x="5611390" y="2737717"/>
+            <a:off x="5657439" y="3041421"/>
+            <a:ext cx="92098" cy="98676"/>
+          </a:xfrm>
+          <a:prstGeom prst="ellipse">
+            <a:avLst/>
+          </a:prstGeom>
+          <a:solidFill>
+            <a:srgbClr val="FF0000"/>
+          </a:solidFill>
+          <a:ln>
+            <a:solidFill>
+              <a:schemeClr val="tx1"/>
+            </a:solidFill>
+          </a:ln>
+        </p:spPr>
+        <p:style>
+          <a:lnRef idx="2">
+            <a:schemeClr val="accent1">
+              <a:shade val="15000"/>
+            </a:schemeClr>
+          </a:lnRef>
+          <a:fillRef idx="1">
+            <a:schemeClr val="accent1"/>
+          </a:fillRef>
+          <a:effectRef idx="0">
+            <a:schemeClr val="accent1"/>
+          </a:effectRef>
+          <a:fontRef idx="minor">
+            <a:schemeClr val="lt1"/>
+          </a:fontRef>
+        </p:style>
+        <p:txBody>
+          <a:bodyPr rtlCol="0" anchor="ctr"/>
+          <a:lstStyle/>
+          <a:p>
+            <a:pPr algn="ctr"/>
+            <a:endParaRPr lang="fr-BE"/>
+          </a:p>
+        </p:txBody>
+      </p:sp>
+      <p:sp>
+        <p:nvSpPr>
+          <p:cNvPr id="6" name="Ellipse 5">
+            <a:extLst>
+              <a:ext uri="{FF2B5EF4-FFF2-40B4-BE49-F238E27FC236}">
+                <a16:creationId xmlns:a16="http://schemas.microsoft.com/office/drawing/2014/main" id="{7B8C2BC2-54C5-2FAF-88EF-2905AC862203}"/>
+              </a:ext>
+            </a:extLst>
+          </p:cNvPr>
+          <p:cNvSpPr/>
+          <p:nvPr/>
+        </p:nvSpPr>
+        <p:spPr>
+          <a:xfrm>
+            <a:off x="5460087" y="2284905"/>
             <a:ext cx="92098" cy="98676"/>
           </a:xfrm>
           <a:prstGeom prst="ellipse">
@@ -8137,10 +9485,10 @@
       </p:sp>
       <p:sp>
         <p:nvSpPr>
-          <p:cNvPr id="5" name="Ellipse 4">
-            <a:extLst>
-              <a:ext uri="{FF2B5EF4-FFF2-40B4-BE49-F238E27FC236}">
-                <a16:creationId xmlns:a16="http://schemas.microsoft.com/office/drawing/2014/main" id="{1CD7028F-C6E7-C2DC-A298-E457BDD1CE69}"/>
+          <p:cNvPr id="7" name="Ellipse 6">
+            <a:extLst>
+              <a:ext uri="{FF2B5EF4-FFF2-40B4-BE49-F238E27FC236}">
+                <a16:creationId xmlns:a16="http://schemas.microsoft.com/office/drawing/2014/main" id="{FD9D13B9-03A7-8613-C4E9-433BFBF63995}"/>
               </a:ext>
             </a:extLst>
           </p:cNvPr>
@@ -8149,7 +9497,7 @@
         </p:nvSpPr>
         <p:spPr>
           <a:xfrm>
-            <a:off x="5657439" y="3041421"/>
+            <a:off x="5537398" y="4248383"/>
             <a:ext cx="92098" cy="98676"/>
           </a:xfrm>
           <a:prstGeom prst="ellipse">
@@ -8193,10 +9541,10 @@
       </p:sp>
       <p:sp>
         <p:nvSpPr>
-          <p:cNvPr id="6" name="Ellipse 5">
-            <a:extLst>
-              <a:ext uri="{FF2B5EF4-FFF2-40B4-BE49-F238E27FC236}">
-                <a16:creationId xmlns:a16="http://schemas.microsoft.com/office/drawing/2014/main" id="{3F07D39B-84E5-0D80-FC23-88B676A7EA31}"/>
+          <p:cNvPr id="8" name="Ellipse 7">
+            <a:extLst>
+              <a:ext uri="{FF2B5EF4-FFF2-40B4-BE49-F238E27FC236}">
+                <a16:creationId xmlns:a16="http://schemas.microsoft.com/office/drawing/2014/main" id="{71FA21CD-8119-BD6A-E8C8-33F1799AF6B1}"/>
               </a:ext>
             </a:extLst>
           </p:cNvPr>
@@ -8205,61 +9553,7 @@
         </p:nvSpPr>
         <p:spPr>
           <a:xfrm>
-            <a:off x="5703488" y="3379662"/>
-            <a:ext cx="92098" cy="98676"/>
-          </a:xfrm>
-          <a:prstGeom prst="ellipse">
-            <a:avLst/>
-          </a:prstGeom>
-          <a:solidFill>
-            <a:srgbClr val="FF0000"/>
-          </a:solidFill>
-          <a:ln>
-            <a:solidFill>
-              <a:schemeClr val="tx1"/>
-            </a:solidFill>
-          </a:ln>
-        </p:spPr>
-        <p:style>
-          <a:lnRef idx="2">
-            <a:schemeClr val="accent1">
-              <a:shade val="15000"/>
-            </a:schemeClr>
-          </a:lnRef>
-          <a:fillRef idx="1">
-            <a:schemeClr val="accent1"/>
-          </a:fillRef>
-          <a:effectRef idx="0">
-            <a:schemeClr val="accent1"/>
-          </a:effectRef>
-          <a:fontRef idx="minor">
-            <a:schemeClr val="lt1"/>
-          </a:fontRef>
-        </p:style>
-        <p:txBody>
-          <a:bodyPr rtlCol="0" anchor="ctr"/>
-          <a:lstStyle/>
-          <a:p>
-            <a:pPr algn="ctr"/>
-            <a:endParaRPr lang="fr-BE"/>
-          </a:p>
-        </p:txBody>
-      </p:sp>
-      <p:sp>
-        <p:nvSpPr>
-          <p:cNvPr id="7" name="Ellipse 6">
-            <a:extLst>
-              <a:ext uri="{FF2B5EF4-FFF2-40B4-BE49-F238E27FC236}">
-                <a16:creationId xmlns:a16="http://schemas.microsoft.com/office/drawing/2014/main" id="{B0A5B879-ED62-B0FB-243D-57EE1034311C}"/>
-              </a:ext>
-            </a:extLst>
-          </p:cNvPr>
-          <p:cNvSpPr/>
-          <p:nvPr/>
-        </p:nvSpPr>
-        <p:spPr>
-          <a:xfrm>
-            <a:off x="5460087" y="2284905"/>
+            <a:off x="5445300" y="4424832"/>
             <a:ext cx="92098" cy="98676"/>
           </a:xfrm>
           <a:prstGeom prst="ellipse">
@@ -8301,87 +9595,21 @@
           </a:p>
         </p:txBody>
       </p:sp>
-    </p:spTree>
-    <p:extLst>
-      <p:ext uri="{BB962C8B-B14F-4D97-AF65-F5344CB8AC3E}">
-        <p14:creationId xmlns:p14="http://schemas.microsoft.com/office/powerpoint/2010/main" val="1270477814"/>
-      </p:ext>
-    </p:extLst>
-  </p:cSld>
-  <p:clrMapOvr>
-    <a:masterClrMapping/>
-  </p:clrMapOvr>
-</p:sld>
-</file>
-
-<file path=ppt/slides/slide15.xml><?xml version="1.0" encoding="utf-8"?>
-<p:sld xmlns:a="http://schemas.openxmlformats.org/drawingml/2006/main" xmlns:r="http://schemas.openxmlformats.org/officeDocument/2006/relationships" xmlns:p="http://schemas.openxmlformats.org/presentationml/2006/main">
-  <p:cSld>
-    <p:spTree>
-      <p:nvGrpSpPr>
-        <p:cNvPr id="1" name="">
-          <a:extLst>
-            <a:ext uri="{FF2B5EF4-FFF2-40B4-BE49-F238E27FC236}">
-              <a16:creationId xmlns:a16="http://schemas.microsoft.com/office/drawing/2014/main" id="{28CF9EFC-A590-DECA-4FF5-B022091FC7FE}"/>
-            </a:ext>
-          </a:extLst>
-        </p:cNvPr>
-        <p:cNvGrpSpPr/>
-        <p:nvPr/>
-      </p:nvGrpSpPr>
-      <p:grpSpPr>
-        <a:xfrm>
-          <a:off x="0" y="0"/>
-          <a:ext cx="0" cy="0"/>
-          <a:chOff x="0" y="0"/>
-          <a:chExt cx="0" cy="0"/>
-        </a:xfrm>
-      </p:grpSpPr>
-      <p:pic>
-        <p:nvPicPr>
-          <p:cNvPr id="3" name="Image 2">
-            <a:extLst>
-              <a:ext uri="{FF2B5EF4-FFF2-40B4-BE49-F238E27FC236}">
-                <a16:creationId xmlns:a16="http://schemas.microsoft.com/office/drawing/2014/main" id="{E97B358C-E3B4-FAA4-600A-4CC81CFF4D67}"/>
-              </a:ext>
-            </a:extLst>
-          </p:cNvPr>
-          <p:cNvPicPr>
-            <a:picLocks noChangeAspect="1"/>
-          </p:cNvPicPr>
+      <p:sp>
+        <p:nvSpPr>
+          <p:cNvPr id="9" name="Ellipse 8">
+            <a:extLst>
+              <a:ext uri="{FF2B5EF4-FFF2-40B4-BE49-F238E27FC236}">
+                <a16:creationId xmlns:a16="http://schemas.microsoft.com/office/drawing/2014/main" id="{65807067-BAFB-2871-3DF7-107673AE1DB2}"/>
+              </a:ext>
+            </a:extLst>
+          </p:cNvPr>
+          <p:cNvSpPr/>
           <p:nvPr/>
-        </p:nvPicPr>
-        <p:blipFill>
-          <a:blip r:embed="rId2"/>
-          <a:stretch>
-            <a:fillRect/>
-          </a:stretch>
-        </p:blipFill>
+        </p:nvSpPr>
         <p:spPr>
           <a:xfrm>
-            <a:off x="1739738" y="0"/>
-            <a:ext cx="8712523" cy="6858000"/>
-          </a:xfrm>
-          <a:prstGeom prst="rect">
-            <a:avLst/>
-          </a:prstGeom>
-        </p:spPr>
-      </p:pic>
-      <p:sp>
-        <p:nvSpPr>
-          <p:cNvPr id="2" name="Ellipse 1">
-            <a:extLst>
-              <a:ext uri="{FF2B5EF4-FFF2-40B4-BE49-F238E27FC236}">
-                <a16:creationId xmlns:a16="http://schemas.microsoft.com/office/drawing/2014/main" id="{C97AEDC2-6691-4C7C-CEAD-DAFC9C64B2AD}"/>
-              </a:ext>
-            </a:extLst>
-          </p:cNvPr>
-          <p:cNvSpPr/>
-          <p:nvPr/>
-        </p:nvSpPr>
-        <p:spPr>
-          <a:xfrm>
-            <a:off x="5519292" y="2493220"/>
+            <a:off x="5611390" y="4021608"/>
             <a:ext cx="92098" cy="98676"/>
           </a:xfrm>
           <a:prstGeom prst="ellipse">
@@ -8425,10 +9653,10 @@
       </p:sp>
       <p:sp>
         <p:nvSpPr>
-          <p:cNvPr id="4" name="Ellipse 3">
-            <a:extLst>
-              <a:ext uri="{FF2B5EF4-FFF2-40B4-BE49-F238E27FC236}">
-                <a16:creationId xmlns:a16="http://schemas.microsoft.com/office/drawing/2014/main" id="{E5E1CE07-1474-973D-B279-987F25BA6EB2}"/>
+          <p:cNvPr id="10" name="Ellipse 9">
+            <a:extLst>
+              <a:ext uri="{FF2B5EF4-FFF2-40B4-BE49-F238E27FC236}">
+                <a16:creationId xmlns:a16="http://schemas.microsoft.com/office/drawing/2014/main" id="{7E8E9D52-706E-92B0-F6C3-460AEDBC1840}"/>
               </a:ext>
             </a:extLst>
           </p:cNvPr>
@@ -8437,7 +9665,290 @@
         </p:nvSpPr>
         <p:spPr>
           <a:xfrm>
-            <a:off x="5611390" y="2737717"/>
+            <a:off x="5657439" y="3717904"/>
+            <a:ext cx="92098" cy="98676"/>
+          </a:xfrm>
+          <a:prstGeom prst="ellipse">
+            <a:avLst/>
+          </a:prstGeom>
+          <a:solidFill>
+            <a:srgbClr val="FF0000"/>
+          </a:solidFill>
+          <a:ln>
+            <a:solidFill>
+              <a:schemeClr val="tx1"/>
+            </a:solidFill>
+          </a:ln>
+        </p:spPr>
+        <p:style>
+          <a:lnRef idx="2">
+            <a:schemeClr val="accent1">
+              <a:shade val="15000"/>
+            </a:schemeClr>
+          </a:lnRef>
+          <a:fillRef idx="1">
+            <a:schemeClr val="accent1"/>
+          </a:fillRef>
+          <a:effectRef idx="0">
+            <a:schemeClr val="accent1"/>
+          </a:effectRef>
+          <a:fontRef idx="minor">
+            <a:schemeClr val="lt1"/>
+          </a:fontRef>
+        </p:style>
+        <p:txBody>
+          <a:bodyPr rtlCol="0" anchor="ctr"/>
+          <a:lstStyle/>
+          <a:p>
+            <a:pPr algn="ctr"/>
+            <a:endParaRPr lang="fr-BE"/>
+          </a:p>
+        </p:txBody>
+      </p:sp>
+      <p:sp>
+        <p:nvSpPr>
+          <p:cNvPr id="11" name="Ellipse 10">
+            <a:extLst>
+              <a:ext uri="{FF2B5EF4-FFF2-40B4-BE49-F238E27FC236}">
+                <a16:creationId xmlns:a16="http://schemas.microsoft.com/office/drawing/2014/main" id="{8EB4F11E-2167-78AA-BC45-B15C0ECEFA2A}"/>
+              </a:ext>
+            </a:extLst>
+          </p:cNvPr>
+          <p:cNvSpPr/>
+          <p:nvPr/>
+        </p:nvSpPr>
+        <p:spPr>
+          <a:xfrm>
+            <a:off x="4742520" y="2872605"/>
+            <a:ext cx="1078860" cy="1107442"/>
+          </a:xfrm>
+          <a:prstGeom prst="ellipse">
+            <a:avLst/>
+          </a:prstGeom>
+          <a:noFill/>
+          <a:ln>
+            <a:solidFill>
+              <a:schemeClr val="tx2">
+                <a:lumMod val="75000"/>
+                <a:lumOff val="25000"/>
+              </a:schemeClr>
+            </a:solidFill>
+          </a:ln>
+        </p:spPr>
+        <p:style>
+          <a:lnRef idx="2">
+            <a:schemeClr val="accent1">
+              <a:shade val="15000"/>
+            </a:schemeClr>
+          </a:lnRef>
+          <a:fillRef idx="1">
+            <a:schemeClr val="accent1"/>
+          </a:fillRef>
+          <a:effectRef idx="0">
+            <a:schemeClr val="accent1"/>
+          </a:effectRef>
+          <a:fontRef idx="minor">
+            <a:schemeClr val="lt1"/>
+          </a:fontRef>
+        </p:style>
+        <p:txBody>
+          <a:bodyPr rtlCol="0" anchor="ctr"/>
+          <a:lstStyle/>
+          <a:p>
+            <a:pPr algn="ctr"/>
+            <a:endParaRPr lang="fr-BE"/>
+          </a:p>
+        </p:txBody>
+      </p:sp>
+      <p:sp>
+        <p:nvSpPr>
+          <p:cNvPr id="12" name="Ellipse 11">
+            <a:extLst>
+              <a:ext uri="{FF2B5EF4-FFF2-40B4-BE49-F238E27FC236}">
+                <a16:creationId xmlns:a16="http://schemas.microsoft.com/office/drawing/2014/main" id="{4F1B3806-0185-FE1D-2016-15DF181953AF}"/>
+              </a:ext>
+            </a:extLst>
+          </p:cNvPr>
+          <p:cNvSpPr/>
+          <p:nvPr/>
+        </p:nvSpPr>
+        <p:spPr>
+          <a:xfrm>
+            <a:off x="5656655" y="2312065"/>
+            <a:ext cx="2201753" cy="2211444"/>
+          </a:xfrm>
+          <a:prstGeom prst="ellipse">
+            <a:avLst/>
+          </a:prstGeom>
+          <a:noFill/>
+          <a:ln>
+            <a:solidFill>
+              <a:srgbClr val="FF0000"/>
+            </a:solidFill>
+          </a:ln>
+        </p:spPr>
+        <p:style>
+          <a:lnRef idx="2">
+            <a:schemeClr val="accent1">
+              <a:shade val="15000"/>
+            </a:schemeClr>
+          </a:lnRef>
+          <a:fillRef idx="1">
+            <a:schemeClr val="accent1"/>
+          </a:fillRef>
+          <a:effectRef idx="0">
+            <a:schemeClr val="accent1"/>
+          </a:effectRef>
+          <a:fontRef idx="minor">
+            <a:schemeClr val="lt1"/>
+          </a:fontRef>
+        </p:style>
+        <p:txBody>
+          <a:bodyPr rtlCol="0" anchor="ctr"/>
+          <a:lstStyle/>
+          <a:p>
+            <a:pPr algn="ctr"/>
+            <a:endParaRPr lang="fr-BE"/>
+          </a:p>
+        </p:txBody>
+      </p:sp>
+      <p:sp>
+        <p:nvSpPr>
+          <p:cNvPr id="13" name="Ellipse 12">
+            <a:extLst>
+              <a:ext uri="{FF2B5EF4-FFF2-40B4-BE49-F238E27FC236}">
+                <a16:creationId xmlns:a16="http://schemas.microsoft.com/office/drawing/2014/main" id="{C9EB1E5E-5BE3-E8A5-E279-A1E98D6C36A4}"/>
+              </a:ext>
+            </a:extLst>
+          </p:cNvPr>
+          <p:cNvSpPr/>
+          <p:nvPr/>
+        </p:nvSpPr>
+        <p:spPr>
+          <a:xfrm>
+            <a:off x="6216604" y="2874766"/>
+            <a:ext cx="1078860" cy="1098598"/>
+          </a:xfrm>
+          <a:prstGeom prst="ellipse">
+            <a:avLst/>
+          </a:prstGeom>
+          <a:noFill/>
+          <a:ln w="28575">
+            <a:solidFill>
+              <a:schemeClr val="accent5">
+                <a:lumMod val="60000"/>
+                <a:lumOff val="40000"/>
+              </a:schemeClr>
+            </a:solidFill>
+            <a:prstDash val="dash"/>
+          </a:ln>
+        </p:spPr>
+        <p:style>
+          <a:lnRef idx="2">
+            <a:schemeClr val="accent1">
+              <a:shade val="15000"/>
+            </a:schemeClr>
+          </a:lnRef>
+          <a:fillRef idx="1">
+            <a:schemeClr val="accent1"/>
+          </a:fillRef>
+          <a:effectRef idx="0">
+            <a:schemeClr val="accent1"/>
+          </a:effectRef>
+          <a:fontRef idx="minor">
+            <a:schemeClr val="lt1"/>
+          </a:fontRef>
+        </p:style>
+        <p:txBody>
+          <a:bodyPr rtlCol="0" anchor="ctr"/>
+          <a:lstStyle/>
+          <a:p>
+            <a:pPr algn="ctr"/>
+            <a:endParaRPr lang="fr-BE"/>
+          </a:p>
+        </p:txBody>
+      </p:sp>
+    </p:spTree>
+    <p:extLst>
+      <p:ext uri="{BB962C8B-B14F-4D97-AF65-F5344CB8AC3E}">
+        <p14:creationId xmlns:p14="http://schemas.microsoft.com/office/powerpoint/2010/main" val="1523370608"/>
+      </p:ext>
+    </p:extLst>
+  </p:cSld>
+  <p:clrMapOvr>
+    <a:masterClrMapping/>
+  </p:clrMapOvr>
+</p:sld>
+</file>
+
+<file path=ppt/slides/slide17.xml><?xml version="1.0" encoding="utf-8"?>
+<p:sld xmlns:a="http://schemas.openxmlformats.org/drawingml/2006/main" xmlns:r="http://schemas.openxmlformats.org/officeDocument/2006/relationships" xmlns:p="http://schemas.openxmlformats.org/presentationml/2006/main">
+  <p:cSld>
+    <p:spTree>
+      <p:nvGrpSpPr>
+        <p:cNvPr id="1" name="">
+          <a:extLst>
+            <a:ext uri="{FF2B5EF4-FFF2-40B4-BE49-F238E27FC236}">
+              <a16:creationId xmlns:a16="http://schemas.microsoft.com/office/drawing/2014/main" id="{E20CFA8A-6396-4347-2826-E0422F87F4D8}"/>
+            </a:ext>
+          </a:extLst>
+        </p:cNvPr>
+        <p:cNvGrpSpPr/>
+        <p:nvPr/>
+      </p:nvGrpSpPr>
+      <p:grpSpPr>
+        <a:xfrm>
+          <a:off x="0" y="0"/>
+          <a:ext cx="0" cy="0"/>
+          <a:chOff x="0" y="0"/>
+          <a:chExt cx="0" cy="0"/>
+        </a:xfrm>
+      </p:grpSpPr>
+      <p:pic>
+        <p:nvPicPr>
+          <p:cNvPr id="3" name="Image 2">
+            <a:extLst>
+              <a:ext uri="{FF2B5EF4-FFF2-40B4-BE49-F238E27FC236}">
+                <a16:creationId xmlns:a16="http://schemas.microsoft.com/office/drawing/2014/main" id="{9070BFA7-57B6-5079-5711-CF2739E5BA95}"/>
+              </a:ext>
+            </a:extLst>
+          </p:cNvPr>
+          <p:cNvPicPr>
+            <a:picLocks noChangeAspect="1"/>
+          </p:cNvPicPr>
+          <p:nvPr/>
+        </p:nvPicPr>
+        <p:blipFill>
+          <a:blip r:embed="rId2"/>
+          <a:stretch>
+            <a:fillRect/>
+          </a:stretch>
+        </p:blipFill>
+        <p:spPr>
+          <a:xfrm>
+            <a:off x="1739738" y="0"/>
+            <a:ext cx="8712523" cy="6858000"/>
+          </a:xfrm>
+          <a:prstGeom prst="rect">
+            <a:avLst/>
+          </a:prstGeom>
+        </p:spPr>
+      </p:pic>
+      <p:sp>
+        <p:nvSpPr>
+          <p:cNvPr id="2" name="Ellipse 1">
+            <a:extLst>
+              <a:ext uri="{FF2B5EF4-FFF2-40B4-BE49-F238E27FC236}">
+                <a16:creationId xmlns:a16="http://schemas.microsoft.com/office/drawing/2014/main" id="{2C247983-9973-09CF-6443-9656291AE98D}"/>
+              </a:ext>
+            </a:extLst>
+          </p:cNvPr>
+          <p:cNvSpPr/>
+          <p:nvPr/>
+        </p:nvSpPr>
+        <p:spPr>
+          <a:xfrm>
+            <a:off x="5519292" y="2493220"/>
             <a:ext cx="92098" cy="98676"/>
           </a:xfrm>
           <a:prstGeom prst="ellipse">
@@ -8481,10 +9992,10 @@
       </p:sp>
       <p:sp>
         <p:nvSpPr>
-          <p:cNvPr id="5" name="Ellipse 4">
-            <a:extLst>
-              <a:ext uri="{FF2B5EF4-FFF2-40B4-BE49-F238E27FC236}">
-                <a16:creationId xmlns:a16="http://schemas.microsoft.com/office/drawing/2014/main" id="{EA2D39B8-3907-598F-2D02-21C42CB93CAF}"/>
+          <p:cNvPr id="4" name="Ellipse 3">
+            <a:extLst>
+              <a:ext uri="{FF2B5EF4-FFF2-40B4-BE49-F238E27FC236}">
+                <a16:creationId xmlns:a16="http://schemas.microsoft.com/office/drawing/2014/main" id="{0D47F36C-E42C-B19E-9837-F35F9CABBE73}"/>
               </a:ext>
             </a:extLst>
           </p:cNvPr>
@@ -8493,7 +10004,7 @@
         </p:nvSpPr>
         <p:spPr>
           <a:xfrm>
-            <a:off x="5657439" y="3041421"/>
+            <a:off x="5611390" y="2737717"/>
             <a:ext cx="92098" cy="98676"/>
           </a:xfrm>
           <a:prstGeom prst="ellipse">
@@ -8537,10 +10048,10 @@
       </p:sp>
       <p:sp>
         <p:nvSpPr>
-          <p:cNvPr id="6" name="Ellipse 5">
-            <a:extLst>
-              <a:ext uri="{FF2B5EF4-FFF2-40B4-BE49-F238E27FC236}">
-                <a16:creationId xmlns:a16="http://schemas.microsoft.com/office/drawing/2014/main" id="{8BA74D2E-B78A-5320-812D-AB1C7F22832A}"/>
+          <p:cNvPr id="5" name="Ellipse 4">
+            <a:extLst>
+              <a:ext uri="{FF2B5EF4-FFF2-40B4-BE49-F238E27FC236}">
+                <a16:creationId xmlns:a16="http://schemas.microsoft.com/office/drawing/2014/main" id="{1CD7028F-C6E7-C2DC-A298-E457BDD1CE69}"/>
               </a:ext>
             </a:extLst>
           </p:cNvPr>
@@ -8549,7 +10060,7 @@
         </p:nvSpPr>
         <p:spPr>
           <a:xfrm>
-            <a:off x="5703488" y="3379662"/>
+            <a:off x="5657439" y="3041421"/>
             <a:ext cx="92098" cy="98676"/>
           </a:xfrm>
           <a:prstGeom prst="ellipse">
@@ -8593,10 +10104,10 @@
       </p:sp>
       <p:sp>
         <p:nvSpPr>
-          <p:cNvPr id="7" name="Ellipse 6">
-            <a:extLst>
-              <a:ext uri="{FF2B5EF4-FFF2-40B4-BE49-F238E27FC236}">
-                <a16:creationId xmlns:a16="http://schemas.microsoft.com/office/drawing/2014/main" id="{0D9BE2D8-50AD-3C09-F67E-E00015BA9429}"/>
+          <p:cNvPr id="6" name="Ellipse 5">
+            <a:extLst>
+              <a:ext uri="{FF2B5EF4-FFF2-40B4-BE49-F238E27FC236}">
+                <a16:creationId xmlns:a16="http://schemas.microsoft.com/office/drawing/2014/main" id="{3F07D39B-84E5-0D80-FC23-88B676A7EA31}"/>
               </a:ext>
             </a:extLst>
           </p:cNvPr>
@@ -8605,7 +10116,7 @@
         </p:nvSpPr>
         <p:spPr>
           <a:xfrm>
-            <a:off x="6250593" y="3379662"/>
+            <a:off x="5703488" y="3379662"/>
             <a:ext cx="92098" cy="98676"/>
           </a:xfrm>
           <a:prstGeom prst="ellipse">
@@ -8647,10 +10158,10 @@
       </p:sp>
       <p:sp>
         <p:nvSpPr>
-          <p:cNvPr id="8" name="Ellipse 7">
-            <a:extLst>
-              <a:ext uri="{FF2B5EF4-FFF2-40B4-BE49-F238E27FC236}">
-                <a16:creationId xmlns:a16="http://schemas.microsoft.com/office/drawing/2014/main" id="{FED76782-5208-E66C-2108-5BE29F71F71E}"/>
+          <p:cNvPr id="7" name="Ellipse 6">
+            <a:extLst>
+              <a:ext uri="{FF2B5EF4-FFF2-40B4-BE49-F238E27FC236}">
+                <a16:creationId xmlns:a16="http://schemas.microsoft.com/office/drawing/2014/main" id="{B0A5B879-ED62-B0FB-243D-57EE1034311C}"/>
               </a:ext>
             </a:extLst>
           </p:cNvPr>
@@ -8659,7 +10170,7 @@
         </p:nvSpPr>
         <p:spPr>
           <a:xfrm>
-            <a:off x="5657439" y="3717903"/>
+            <a:off x="5460087" y="2284905"/>
             <a:ext cx="92098" cy="98676"/>
           </a:xfrm>
           <a:prstGeom prst="ellipse">
@@ -8703,10 +10214,10 @@
       </p:sp>
       <p:sp>
         <p:nvSpPr>
-          <p:cNvPr id="9" name="Ellipse 8">
-            <a:extLst>
-              <a:ext uri="{FF2B5EF4-FFF2-40B4-BE49-F238E27FC236}">
-                <a16:creationId xmlns:a16="http://schemas.microsoft.com/office/drawing/2014/main" id="{6683D9FB-3315-409C-86C5-A155AA0AEF9C}"/>
+          <p:cNvPr id="8" name="Ellipse 7">
+            <a:extLst>
+              <a:ext uri="{FF2B5EF4-FFF2-40B4-BE49-F238E27FC236}">
+                <a16:creationId xmlns:a16="http://schemas.microsoft.com/office/drawing/2014/main" id="{22FEC300-A3EC-EEAB-B2B3-5FA7E81FA380}"/>
               </a:ext>
             </a:extLst>
           </p:cNvPr>
@@ -8715,7 +10226,7 @@
         </p:nvSpPr>
         <p:spPr>
           <a:xfrm>
-            <a:off x="5611390" y="4006806"/>
+            <a:off x="5537398" y="4248383"/>
             <a:ext cx="92098" cy="98676"/>
           </a:xfrm>
           <a:prstGeom prst="ellipse">
@@ -8759,10 +10270,10 @@
       </p:sp>
       <p:sp>
         <p:nvSpPr>
-          <p:cNvPr id="10" name="Ellipse 9">
-            <a:extLst>
-              <a:ext uri="{FF2B5EF4-FFF2-40B4-BE49-F238E27FC236}">
-                <a16:creationId xmlns:a16="http://schemas.microsoft.com/office/drawing/2014/main" id="{3C09171E-9CAE-7A99-2ED3-08B5CFB2637B}"/>
+          <p:cNvPr id="9" name="Ellipse 8">
+            <a:extLst>
+              <a:ext uri="{FF2B5EF4-FFF2-40B4-BE49-F238E27FC236}">
+                <a16:creationId xmlns:a16="http://schemas.microsoft.com/office/drawing/2014/main" id="{5A0CB761-7464-6510-6A15-9E2312FA9B31}"/>
               </a:ext>
             </a:extLst>
           </p:cNvPr>
@@ -8771,7 +10282,7 @@
         </p:nvSpPr>
         <p:spPr>
           <a:xfrm>
-            <a:off x="5519292" y="4266105"/>
+            <a:off x="5445300" y="4424832"/>
             <a:ext cx="92098" cy="98676"/>
           </a:xfrm>
           <a:prstGeom prst="ellipse">
@@ -8815,10 +10326,10 @@
       </p:sp>
       <p:sp>
         <p:nvSpPr>
-          <p:cNvPr id="11" name="Ellipse 10">
-            <a:extLst>
-              <a:ext uri="{FF2B5EF4-FFF2-40B4-BE49-F238E27FC236}">
-                <a16:creationId xmlns:a16="http://schemas.microsoft.com/office/drawing/2014/main" id="{2B662286-24F4-6CA9-AD49-9A96DEC6122D}"/>
+          <p:cNvPr id="10" name="Ellipse 9">
+            <a:extLst>
+              <a:ext uri="{FF2B5EF4-FFF2-40B4-BE49-F238E27FC236}">
+                <a16:creationId xmlns:a16="http://schemas.microsoft.com/office/drawing/2014/main" id="{6E84ECD1-2C4F-A9B6-9766-D0729BC33B6C}"/>
               </a:ext>
             </a:extLst>
           </p:cNvPr>
@@ -8827,7 +10338,7 @@
         </p:nvSpPr>
         <p:spPr>
           <a:xfrm>
-            <a:off x="5460087" y="4439884"/>
+            <a:off x="5611390" y="4021608"/>
             <a:ext cx="92098" cy="98676"/>
           </a:xfrm>
           <a:prstGeom prst="ellipse">
@@ -8871,10 +10382,10 @@
       </p:sp>
       <p:sp>
         <p:nvSpPr>
-          <p:cNvPr id="12" name="Ellipse 11">
-            <a:extLst>
-              <a:ext uri="{FF2B5EF4-FFF2-40B4-BE49-F238E27FC236}">
-                <a16:creationId xmlns:a16="http://schemas.microsoft.com/office/drawing/2014/main" id="{5FB36CDD-DC0A-257D-9A27-6EC2A42763C3}"/>
+          <p:cNvPr id="11" name="Ellipse 10">
+            <a:extLst>
+              <a:ext uri="{FF2B5EF4-FFF2-40B4-BE49-F238E27FC236}">
+                <a16:creationId xmlns:a16="http://schemas.microsoft.com/office/drawing/2014/main" id="{FA03A42E-584D-7F0B-2E5A-29D208C14FFC}"/>
               </a:ext>
             </a:extLst>
           </p:cNvPr>
@@ -8883,7 +10394,7 @@
         </p:nvSpPr>
         <p:spPr>
           <a:xfrm>
-            <a:off x="5394301" y="4644913"/>
+            <a:off x="5657439" y="3717903"/>
             <a:ext cx="92098" cy="98676"/>
           </a:xfrm>
           <a:prstGeom prst="ellipse">
@@ -8927,10 +10438,10 @@
       </p:sp>
       <p:sp>
         <p:nvSpPr>
-          <p:cNvPr id="13" name="Ellipse 12">
-            <a:extLst>
-              <a:ext uri="{FF2B5EF4-FFF2-40B4-BE49-F238E27FC236}">
-                <a16:creationId xmlns:a16="http://schemas.microsoft.com/office/drawing/2014/main" id="{5E8974B6-7DBF-CD67-6C6B-6E8FC5877BEC}"/>
+          <p:cNvPr id="12" name="Ellipse 11">
+            <a:extLst>
+              <a:ext uri="{FF2B5EF4-FFF2-40B4-BE49-F238E27FC236}">
+                <a16:creationId xmlns:a16="http://schemas.microsoft.com/office/drawing/2014/main" id="{8B8381D6-75EB-0E5A-CE7C-31BFCB0EC66C}"/>
               </a:ext>
             </a:extLst>
           </p:cNvPr>
@@ -8939,7 +10450,236 @@
         </p:nvSpPr>
         <p:spPr>
           <a:xfrm>
-            <a:off x="5335096" y="4840072"/>
+            <a:off x="4825497" y="2958605"/>
+            <a:ext cx="924040" cy="934904"/>
+          </a:xfrm>
+          <a:prstGeom prst="ellipse">
+            <a:avLst/>
+          </a:prstGeom>
+          <a:noFill/>
+          <a:ln>
+            <a:solidFill>
+              <a:schemeClr val="tx2">
+                <a:lumMod val="75000"/>
+                <a:lumOff val="25000"/>
+              </a:schemeClr>
+            </a:solidFill>
+          </a:ln>
+        </p:spPr>
+        <p:style>
+          <a:lnRef idx="2">
+            <a:schemeClr val="accent1">
+              <a:shade val="15000"/>
+            </a:schemeClr>
+          </a:lnRef>
+          <a:fillRef idx="1">
+            <a:schemeClr val="accent1"/>
+          </a:fillRef>
+          <a:effectRef idx="0">
+            <a:schemeClr val="accent1"/>
+          </a:effectRef>
+          <a:fontRef idx="minor">
+            <a:schemeClr val="lt1"/>
+          </a:fontRef>
+        </p:style>
+        <p:txBody>
+          <a:bodyPr rtlCol="0" anchor="ctr"/>
+          <a:lstStyle/>
+          <a:p>
+            <a:pPr algn="ctr"/>
+            <a:endParaRPr lang="fr-BE" dirty="0"/>
+          </a:p>
+        </p:txBody>
+      </p:sp>
+      <p:sp>
+        <p:nvSpPr>
+          <p:cNvPr id="13" name="Ellipse 12">
+            <a:extLst>
+              <a:ext uri="{FF2B5EF4-FFF2-40B4-BE49-F238E27FC236}">
+                <a16:creationId xmlns:a16="http://schemas.microsoft.com/office/drawing/2014/main" id="{81711622-E883-A858-25EE-FD442E217A0A}"/>
+              </a:ext>
+            </a:extLst>
+          </p:cNvPr>
+          <p:cNvSpPr/>
+          <p:nvPr/>
+        </p:nvSpPr>
+        <p:spPr>
+          <a:xfrm>
+            <a:off x="5749537" y="2383581"/>
+            <a:ext cx="2036443" cy="2041251"/>
+          </a:xfrm>
+          <a:prstGeom prst="ellipse">
+            <a:avLst/>
+          </a:prstGeom>
+          <a:noFill/>
+          <a:ln>
+            <a:solidFill>
+              <a:srgbClr val="FF0000"/>
+            </a:solidFill>
+          </a:ln>
+        </p:spPr>
+        <p:style>
+          <a:lnRef idx="2">
+            <a:schemeClr val="accent1">
+              <a:shade val="15000"/>
+            </a:schemeClr>
+          </a:lnRef>
+          <a:fillRef idx="1">
+            <a:schemeClr val="accent1"/>
+          </a:fillRef>
+          <a:effectRef idx="0">
+            <a:schemeClr val="accent1"/>
+          </a:effectRef>
+          <a:fontRef idx="minor">
+            <a:schemeClr val="lt1"/>
+          </a:fontRef>
+        </p:style>
+        <p:txBody>
+          <a:bodyPr rtlCol="0" anchor="ctr"/>
+          <a:lstStyle/>
+          <a:p>
+            <a:pPr algn="ctr"/>
+            <a:endParaRPr lang="fr-BE"/>
+          </a:p>
+        </p:txBody>
+      </p:sp>
+      <p:sp>
+        <p:nvSpPr>
+          <p:cNvPr id="14" name="Ellipse 13">
+            <a:extLst>
+              <a:ext uri="{FF2B5EF4-FFF2-40B4-BE49-F238E27FC236}">
+                <a16:creationId xmlns:a16="http://schemas.microsoft.com/office/drawing/2014/main" id="{C0706EAB-AF01-582B-EE8F-DBC4AE457868}"/>
+              </a:ext>
+            </a:extLst>
+          </p:cNvPr>
+          <p:cNvSpPr/>
+          <p:nvPr/>
+        </p:nvSpPr>
+        <p:spPr>
+          <a:xfrm>
+            <a:off x="6216604" y="2874766"/>
+            <a:ext cx="1078860" cy="1098598"/>
+          </a:xfrm>
+          <a:prstGeom prst="ellipse">
+            <a:avLst/>
+          </a:prstGeom>
+          <a:noFill/>
+          <a:ln w="28575">
+            <a:solidFill>
+              <a:schemeClr val="accent5">
+                <a:lumMod val="60000"/>
+                <a:lumOff val="40000"/>
+              </a:schemeClr>
+            </a:solidFill>
+            <a:prstDash val="dash"/>
+          </a:ln>
+        </p:spPr>
+        <p:style>
+          <a:lnRef idx="2">
+            <a:schemeClr val="accent1">
+              <a:shade val="15000"/>
+            </a:schemeClr>
+          </a:lnRef>
+          <a:fillRef idx="1">
+            <a:schemeClr val="accent1"/>
+          </a:fillRef>
+          <a:effectRef idx="0">
+            <a:schemeClr val="accent1"/>
+          </a:effectRef>
+          <a:fontRef idx="minor">
+            <a:schemeClr val="lt1"/>
+          </a:fontRef>
+        </p:style>
+        <p:txBody>
+          <a:bodyPr rtlCol="0" anchor="ctr"/>
+          <a:lstStyle/>
+          <a:p>
+            <a:pPr algn="ctr"/>
+            <a:endParaRPr lang="fr-BE"/>
+          </a:p>
+        </p:txBody>
+      </p:sp>
+    </p:spTree>
+    <p:extLst>
+      <p:ext uri="{BB962C8B-B14F-4D97-AF65-F5344CB8AC3E}">
+        <p14:creationId xmlns:p14="http://schemas.microsoft.com/office/powerpoint/2010/main" val="1270477814"/>
+      </p:ext>
+    </p:extLst>
+  </p:cSld>
+  <p:clrMapOvr>
+    <a:masterClrMapping/>
+  </p:clrMapOvr>
+</p:sld>
+</file>
+
+<file path=ppt/slides/slide18.xml><?xml version="1.0" encoding="utf-8"?>
+<p:sld xmlns:a="http://schemas.openxmlformats.org/drawingml/2006/main" xmlns:r="http://schemas.openxmlformats.org/officeDocument/2006/relationships" xmlns:p="http://schemas.openxmlformats.org/presentationml/2006/main">
+  <p:cSld>
+    <p:spTree>
+      <p:nvGrpSpPr>
+        <p:cNvPr id="1" name="">
+          <a:extLst>
+            <a:ext uri="{FF2B5EF4-FFF2-40B4-BE49-F238E27FC236}">
+              <a16:creationId xmlns:a16="http://schemas.microsoft.com/office/drawing/2014/main" id="{28CF9EFC-A590-DECA-4FF5-B022091FC7FE}"/>
+            </a:ext>
+          </a:extLst>
+        </p:cNvPr>
+        <p:cNvGrpSpPr/>
+        <p:nvPr/>
+      </p:nvGrpSpPr>
+      <p:grpSpPr>
+        <a:xfrm>
+          <a:off x="0" y="0"/>
+          <a:ext cx="0" cy="0"/>
+          <a:chOff x="0" y="0"/>
+          <a:chExt cx="0" cy="0"/>
+        </a:xfrm>
+      </p:grpSpPr>
+      <p:pic>
+        <p:nvPicPr>
+          <p:cNvPr id="3" name="Image 2">
+            <a:extLst>
+              <a:ext uri="{FF2B5EF4-FFF2-40B4-BE49-F238E27FC236}">
+                <a16:creationId xmlns:a16="http://schemas.microsoft.com/office/drawing/2014/main" id="{E97B358C-E3B4-FAA4-600A-4CC81CFF4D67}"/>
+              </a:ext>
+            </a:extLst>
+          </p:cNvPr>
+          <p:cNvPicPr>
+            <a:picLocks noChangeAspect="1"/>
+          </p:cNvPicPr>
+          <p:nvPr/>
+        </p:nvPicPr>
+        <p:blipFill>
+          <a:blip r:embed="rId2"/>
+          <a:stretch>
+            <a:fillRect/>
+          </a:stretch>
+        </p:blipFill>
+        <p:spPr>
+          <a:xfrm>
+            <a:off x="1739738" y="0"/>
+            <a:ext cx="8712523" cy="6858000"/>
+          </a:xfrm>
+          <a:prstGeom prst="rect">
+            <a:avLst/>
+          </a:prstGeom>
+        </p:spPr>
+      </p:pic>
+      <p:sp>
+        <p:nvSpPr>
+          <p:cNvPr id="2" name="Ellipse 1">
+            <a:extLst>
+              <a:ext uri="{FF2B5EF4-FFF2-40B4-BE49-F238E27FC236}">
+                <a16:creationId xmlns:a16="http://schemas.microsoft.com/office/drawing/2014/main" id="{C97AEDC2-6691-4C7C-CEAD-DAFC9C64B2AD}"/>
+              </a:ext>
+            </a:extLst>
+          </p:cNvPr>
+          <p:cNvSpPr/>
+          <p:nvPr/>
+        </p:nvSpPr>
+        <p:spPr>
+          <a:xfrm>
+            <a:off x="5519292" y="2493220"/>
             <a:ext cx="92098" cy="98676"/>
           </a:xfrm>
           <a:prstGeom prst="ellipse">
@@ -8983,10 +10723,10 @@
       </p:sp>
       <p:sp>
         <p:nvSpPr>
-          <p:cNvPr id="14" name="Ellipse 13">
-            <a:extLst>
-              <a:ext uri="{FF2B5EF4-FFF2-40B4-BE49-F238E27FC236}">
-                <a16:creationId xmlns:a16="http://schemas.microsoft.com/office/drawing/2014/main" id="{8A1963FC-8707-E0C6-2D2C-27F2B4C25C01}"/>
+          <p:cNvPr id="4" name="Ellipse 3">
+            <a:extLst>
+              <a:ext uri="{FF2B5EF4-FFF2-40B4-BE49-F238E27FC236}">
+                <a16:creationId xmlns:a16="http://schemas.microsoft.com/office/drawing/2014/main" id="{E5E1CE07-1474-973D-B279-987F25BA6EB2}"/>
               </a:ext>
             </a:extLst>
           </p:cNvPr>
@@ -8995,7 +10735,7 @@
         </p:nvSpPr>
         <p:spPr>
           <a:xfrm>
-            <a:off x="5256155" y="5022075"/>
+            <a:off x="5611390" y="2737717"/>
             <a:ext cx="92098" cy="98676"/>
           </a:xfrm>
           <a:prstGeom prst="ellipse">
@@ -9039,10 +10779,10 @@
       </p:sp>
       <p:sp>
         <p:nvSpPr>
-          <p:cNvPr id="15" name="Ellipse 14">
-            <a:extLst>
-              <a:ext uri="{FF2B5EF4-FFF2-40B4-BE49-F238E27FC236}">
-                <a16:creationId xmlns:a16="http://schemas.microsoft.com/office/drawing/2014/main" id="{3D676465-81FA-EB08-6460-A6FCA212B6EF}"/>
+          <p:cNvPr id="5" name="Ellipse 4">
+            <a:extLst>
+              <a:ext uri="{FF2B5EF4-FFF2-40B4-BE49-F238E27FC236}">
+                <a16:creationId xmlns:a16="http://schemas.microsoft.com/office/drawing/2014/main" id="{EA2D39B8-3907-598F-2D02-21C42CB93CAF}"/>
               </a:ext>
             </a:extLst>
           </p:cNvPr>
@@ -9051,7 +10791,7 @@
         </p:nvSpPr>
         <p:spPr>
           <a:xfrm>
-            <a:off x="5190368" y="5194211"/>
+            <a:off x="5657439" y="3041421"/>
             <a:ext cx="92098" cy="98676"/>
           </a:xfrm>
           <a:prstGeom prst="ellipse">
@@ -9095,10 +10835,10 @@
       </p:sp>
       <p:sp>
         <p:nvSpPr>
-          <p:cNvPr id="16" name="Ellipse 15">
-            <a:extLst>
-              <a:ext uri="{FF2B5EF4-FFF2-40B4-BE49-F238E27FC236}">
-                <a16:creationId xmlns:a16="http://schemas.microsoft.com/office/drawing/2014/main" id="{1ADFB5B4-0D41-5576-4F12-18A173B1B13F}"/>
+          <p:cNvPr id="6" name="Ellipse 5">
+            <a:extLst>
+              <a:ext uri="{FF2B5EF4-FFF2-40B4-BE49-F238E27FC236}">
+                <a16:creationId xmlns:a16="http://schemas.microsoft.com/office/drawing/2014/main" id="{8BA74D2E-B78A-5320-812D-AB1C7F22832A}"/>
               </a:ext>
             </a:extLst>
           </p:cNvPr>
@@ -9107,7 +10847,7 @@
         </p:nvSpPr>
         <p:spPr>
           <a:xfrm>
-            <a:off x="5118007" y="5386081"/>
+            <a:off x="5703488" y="3379662"/>
             <a:ext cx="92098" cy="98676"/>
           </a:xfrm>
           <a:prstGeom prst="ellipse">
@@ -9151,10 +10891,10 @@
       </p:sp>
       <p:sp>
         <p:nvSpPr>
-          <p:cNvPr id="17" name="Ellipse 16">
-            <a:extLst>
-              <a:ext uri="{FF2B5EF4-FFF2-40B4-BE49-F238E27FC236}">
-                <a16:creationId xmlns:a16="http://schemas.microsoft.com/office/drawing/2014/main" id="{C950632E-CB90-E398-FB89-66337376260E}"/>
+          <p:cNvPr id="7" name="Ellipse 6">
+            <a:extLst>
+              <a:ext uri="{FF2B5EF4-FFF2-40B4-BE49-F238E27FC236}">
+                <a16:creationId xmlns:a16="http://schemas.microsoft.com/office/drawing/2014/main" id="{0D9BE2D8-50AD-3C09-F67E-E00015BA9429}"/>
               </a:ext>
             </a:extLst>
           </p:cNvPr>
@@ -9163,7 +10903,61 @@
         </p:nvSpPr>
         <p:spPr>
           <a:xfrm>
-            <a:off x="5045643" y="5551639"/>
+            <a:off x="6250593" y="3379662"/>
+            <a:ext cx="92098" cy="98676"/>
+          </a:xfrm>
+          <a:prstGeom prst="ellipse">
+            <a:avLst/>
+          </a:prstGeom>
+          <a:solidFill>
+            <a:srgbClr val="FF0000"/>
+          </a:solidFill>
+          <a:ln>
+            <a:solidFill>
+              <a:schemeClr val="tx1"/>
+            </a:solidFill>
+          </a:ln>
+        </p:spPr>
+        <p:style>
+          <a:lnRef idx="2">
+            <a:schemeClr val="accent1">
+              <a:shade val="15000"/>
+            </a:schemeClr>
+          </a:lnRef>
+          <a:fillRef idx="1">
+            <a:schemeClr val="accent1"/>
+          </a:fillRef>
+          <a:effectRef idx="0">
+            <a:schemeClr val="accent1"/>
+          </a:effectRef>
+          <a:fontRef idx="minor">
+            <a:schemeClr val="lt1"/>
+          </a:fontRef>
+        </p:style>
+        <p:txBody>
+          <a:bodyPr rtlCol="0" anchor="ctr"/>
+          <a:lstStyle/>
+          <a:p>
+            <a:pPr algn="ctr"/>
+            <a:endParaRPr lang="fr-BE"/>
+          </a:p>
+        </p:txBody>
+      </p:sp>
+      <p:sp>
+        <p:nvSpPr>
+          <p:cNvPr id="8" name="Ellipse 7">
+            <a:extLst>
+              <a:ext uri="{FF2B5EF4-FFF2-40B4-BE49-F238E27FC236}">
+                <a16:creationId xmlns:a16="http://schemas.microsoft.com/office/drawing/2014/main" id="{FED76782-5208-E66C-2108-5BE29F71F71E}"/>
+              </a:ext>
+            </a:extLst>
+          </p:cNvPr>
+          <p:cNvSpPr/>
+          <p:nvPr/>
+        </p:nvSpPr>
+        <p:spPr>
+          <a:xfrm>
+            <a:off x="5657439" y="3717903"/>
             <a:ext cx="92098" cy="98676"/>
           </a:xfrm>
           <a:prstGeom prst="ellipse">
@@ -9207,10 +11001,10 @@
       </p:sp>
       <p:sp>
         <p:nvSpPr>
-          <p:cNvPr id="18" name="Ellipse 17">
-            <a:extLst>
-              <a:ext uri="{FF2B5EF4-FFF2-40B4-BE49-F238E27FC236}">
-                <a16:creationId xmlns:a16="http://schemas.microsoft.com/office/drawing/2014/main" id="{7DCCAC81-84A6-ABA5-4AF4-1732889E84CB}"/>
+          <p:cNvPr id="9" name="Ellipse 8">
+            <a:extLst>
+              <a:ext uri="{FF2B5EF4-FFF2-40B4-BE49-F238E27FC236}">
+                <a16:creationId xmlns:a16="http://schemas.microsoft.com/office/drawing/2014/main" id="{6683D9FB-3315-409C-86C5-A155AA0AEF9C}"/>
               </a:ext>
             </a:extLst>
           </p:cNvPr>
@@ -9219,7 +11013,7 @@
         </p:nvSpPr>
         <p:spPr>
           <a:xfrm>
-            <a:off x="4973283" y="5736931"/>
+            <a:off x="5611390" y="4006806"/>
             <a:ext cx="92098" cy="98676"/>
           </a:xfrm>
           <a:prstGeom prst="ellipse">
@@ -9263,10 +11057,10 @@
       </p:sp>
       <p:sp>
         <p:nvSpPr>
-          <p:cNvPr id="19" name="Ellipse 18">
-            <a:extLst>
-              <a:ext uri="{FF2B5EF4-FFF2-40B4-BE49-F238E27FC236}">
-                <a16:creationId xmlns:a16="http://schemas.microsoft.com/office/drawing/2014/main" id="{A6B1DD36-6969-61D9-A3DB-0D9AD7C96F8F}"/>
+          <p:cNvPr id="10" name="Ellipse 9">
+            <a:extLst>
+              <a:ext uri="{FF2B5EF4-FFF2-40B4-BE49-F238E27FC236}">
+                <a16:creationId xmlns:a16="http://schemas.microsoft.com/office/drawing/2014/main" id="{3C09171E-9CAE-7A99-2ED3-08B5CFB2637B}"/>
               </a:ext>
             </a:extLst>
           </p:cNvPr>
@@ -9275,7 +11069,7 @@
         </p:nvSpPr>
         <p:spPr>
           <a:xfrm>
-            <a:off x="5453509" y="2298061"/>
+            <a:off x="5519292" y="4266105"/>
             <a:ext cx="92098" cy="98676"/>
           </a:xfrm>
           <a:prstGeom prst="ellipse">
@@ -9319,10 +11113,10 @@
       </p:sp>
       <p:sp>
         <p:nvSpPr>
-          <p:cNvPr id="20" name="Ellipse 19">
-            <a:extLst>
-              <a:ext uri="{FF2B5EF4-FFF2-40B4-BE49-F238E27FC236}">
-                <a16:creationId xmlns:a16="http://schemas.microsoft.com/office/drawing/2014/main" id="{70A88021-EB90-E331-67FF-BE6562109211}"/>
+          <p:cNvPr id="11" name="Ellipse 10">
+            <a:extLst>
+              <a:ext uri="{FF2B5EF4-FFF2-40B4-BE49-F238E27FC236}">
+                <a16:creationId xmlns:a16="http://schemas.microsoft.com/office/drawing/2014/main" id="{2B662286-24F4-6CA9-AD49-9A96DEC6122D}"/>
               </a:ext>
             </a:extLst>
           </p:cNvPr>
@@ -9331,7 +11125,7 @@
         </p:nvSpPr>
         <p:spPr>
           <a:xfrm>
-            <a:off x="5387724" y="2093032"/>
+            <a:off x="5460087" y="4439884"/>
             <a:ext cx="92098" cy="98676"/>
           </a:xfrm>
           <a:prstGeom prst="ellipse">
@@ -9375,10 +11169,10 @@
       </p:sp>
       <p:sp>
         <p:nvSpPr>
-          <p:cNvPr id="21" name="Ellipse 20">
-            <a:extLst>
-              <a:ext uri="{FF2B5EF4-FFF2-40B4-BE49-F238E27FC236}">
-                <a16:creationId xmlns:a16="http://schemas.microsoft.com/office/drawing/2014/main" id="{ED5C1F75-C11C-4629-DB60-5D2D4E1A84B2}"/>
+          <p:cNvPr id="12" name="Ellipse 11">
+            <a:extLst>
+              <a:ext uri="{FF2B5EF4-FFF2-40B4-BE49-F238E27FC236}">
+                <a16:creationId xmlns:a16="http://schemas.microsoft.com/office/drawing/2014/main" id="{5FB36CDD-DC0A-257D-9A27-6EC2A42763C3}"/>
               </a:ext>
             </a:extLst>
           </p:cNvPr>
@@ -9387,7 +11181,7 @@
         </p:nvSpPr>
         <p:spPr>
           <a:xfrm>
-            <a:off x="5335096" y="1896777"/>
+            <a:off x="5394301" y="4644913"/>
             <a:ext cx="92098" cy="98676"/>
           </a:xfrm>
           <a:prstGeom prst="ellipse">
@@ -9431,10 +11225,10 @@
       </p:sp>
       <p:sp>
         <p:nvSpPr>
-          <p:cNvPr id="22" name="Ellipse 21">
-            <a:extLst>
-              <a:ext uri="{FF2B5EF4-FFF2-40B4-BE49-F238E27FC236}">
-                <a16:creationId xmlns:a16="http://schemas.microsoft.com/office/drawing/2014/main" id="{4090777A-D52F-0116-37CE-D5B790ED440F}"/>
+          <p:cNvPr id="13" name="Ellipse 12">
+            <a:extLst>
+              <a:ext uri="{FF2B5EF4-FFF2-40B4-BE49-F238E27FC236}">
+                <a16:creationId xmlns:a16="http://schemas.microsoft.com/office/drawing/2014/main" id="{5E8974B6-7DBF-CD67-6C6B-6E8FC5877BEC}"/>
               </a:ext>
             </a:extLst>
           </p:cNvPr>
@@ -9443,7 +11237,7 @@
         </p:nvSpPr>
         <p:spPr>
           <a:xfrm>
-            <a:off x="5256155" y="1707100"/>
+            <a:off x="5335096" y="4840072"/>
             <a:ext cx="92098" cy="98676"/>
           </a:xfrm>
           <a:prstGeom prst="ellipse">
@@ -9487,10 +11281,10 @@
       </p:sp>
       <p:sp>
         <p:nvSpPr>
-          <p:cNvPr id="23" name="Ellipse 22">
-            <a:extLst>
-              <a:ext uri="{FF2B5EF4-FFF2-40B4-BE49-F238E27FC236}">
-                <a16:creationId xmlns:a16="http://schemas.microsoft.com/office/drawing/2014/main" id="{C21E9435-84F3-1578-E419-A58B9A56272D}"/>
+          <p:cNvPr id="14" name="Ellipse 13">
+            <a:extLst>
+              <a:ext uri="{FF2B5EF4-FFF2-40B4-BE49-F238E27FC236}">
+                <a16:creationId xmlns:a16="http://schemas.microsoft.com/office/drawing/2014/main" id="{8A1963FC-8707-E0C6-2D2C-27F2B4C25C01}"/>
               </a:ext>
             </a:extLst>
           </p:cNvPr>
@@ -9499,7 +11293,7 @@
         </p:nvSpPr>
         <p:spPr>
           <a:xfrm>
-            <a:off x="5190368" y="1537157"/>
+            <a:off x="5256155" y="5022075"/>
             <a:ext cx="92098" cy="98676"/>
           </a:xfrm>
           <a:prstGeom prst="ellipse">
@@ -9543,10 +11337,10 @@
       </p:sp>
       <p:sp>
         <p:nvSpPr>
-          <p:cNvPr id="24" name="Ellipse 23">
-            <a:extLst>
-              <a:ext uri="{FF2B5EF4-FFF2-40B4-BE49-F238E27FC236}">
-                <a16:creationId xmlns:a16="http://schemas.microsoft.com/office/drawing/2014/main" id="{160618FC-B844-0176-A76C-09802A9F53CD}"/>
+          <p:cNvPr id="15" name="Ellipse 14">
+            <a:extLst>
+              <a:ext uri="{FF2B5EF4-FFF2-40B4-BE49-F238E27FC236}">
+                <a16:creationId xmlns:a16="http://schemas.microsoft.com/office/drawing/2014/main" id="{3D676465-81FA-EB08-6460-A6FCA212B6EF}"/>
               </a:ext>
             </a:extLst>
           </p:cNvPr>
@@ -9555,7 +11349,7 @@
         </p:nvSpPr>
         <p:spPr>
           <a:xfrm>
-            <a:off x="5131164" y="1342546"/>
+            <a:off x="5190368" y="5194211"/>
             <a:ext cx="92098" cy="98676"/>
           </a:xfrm>
           <a:prstGeom prst="ellipse">
@@ -9599,10 +11393,10 @@
       </p:sp>
       <p:sp>
         <p:nvSpPr>
-          <p:cNvPr id="25" name="Ellipse 24">
-            <a:extLst>
-              <a:ext uri="{FF2B5EF4-FFF2-40B4-BE49-F238E27FC236}">
-                <a16:creationId xmlns:a16="http://schemas.microsoft.com/office/drawing/2014/main" id="{E5F46D1A-EA61-0285-BBDA-C4DDC8EC5AA2}"/>
+          <p:cNvPr id="16" name="Ellipse 15">
+            <a:extLst>
+              <a:ext uri="{FF2B5EF4-FFF2-40B4-BE49-F238E27FC236}">
+                <a16:creationId xmlns:a16="http://schemas.microsoft.com/office/drawing/2014/main" id="{1ADFB5B4-0D41-5576-4F12-18A173B1B13F}"/>
               </a:ext>
             </a:extLst>
           </p:cNvPr>
@@ -9611,7 +11405,7 @@
         </p:nvSpPr>
         <p:spPr>
           <a:xfrm>
-            <a:off x="5039066" y="1169313"/>
+            <a:off x="5118007" y="5386081"/>
             <a:ext cx="92098" cy="98676"/>
           </a:xfrm>
           <a:prstGeom prst="ellipse">
@@ -9655,10 +11449,10 @@
       </p:sp>
       <p:sp>
         <p:nvSpPr>
-          <p:cNvPr id="26" name="Ellipse 25">
-            <a:extLst>
-              <a:ext uri="{FF2B5EF4-FFF2-40B4-BE49-F238E27FC236}">
-                <a16:creationId xmlns:a16="http://schemas.microsoft.com/office/drawing/2014/main" id="{920BE946-4C82-26D0-F45D-A06BFD54798D}"/>
+          <p:cNvPr id="17" name="Ellipse 16">
+            <a:extLst>
+              <a:ext uri="{FF2B5EF4-FFF2-40B4-BE49-F238E27FC236}">
+                <a16:creationId xmlns:a16="http://schemas.microsoft.com/office/drawing/2014/main" id="{C950632E-CB90-E398-FB89-66337376260E}"/>
               </a:ext>
             </a:extLst>
           </p:cNvPr>
@@ -9667,7 +11461,7 @@
         </p:nvSpPr>
         <p:spPr>
           <a:xfrm>
-            <a:off x="4973283" y="973055"/>
+            <a:off x="5045643" y="5551639"/>
             <a:ext cx="92098" cy="98676"/>
           </a:xfrm>
           <a:prstGeom prst="ellipse">
@@ -9709,6 +11503,510 @@
           </a:p>
         </p:txBody>
       </p:sp>
+      <p:sp>
+        <p:nvSpPr>
+          <p:cNvPr id="18" name="Ellipse 17">
+            <a:extLst>
+              <a:ext uri="{FF2B5EF4-FFF2-40B4-BE49-F238E27FC236}">
+                <a16:creationId xmlns:a16="http://schemas.microsoft.com/office/drawing/2014/main" id="{7DCCAC81-84A6-ABA5-4AF4-1732889E84CB}"/>
+              </a:ext>
+            </a:extLst>
+          </p:cNvPr>
+          <p:cNvSpPr/>
+          <p:nvPr/>
+        </p:nvSpPr>
+        <p:spPr>
+          <a:xfrm>
+            <a:off x="4973283" y="5736931"/>
+            <a:ext cx="92098" cy="98676"/>
+          </a:xfrm>
+          <a:prstGeom prst="ellipse">
+            <a:avLst/>
+          </a:prstGeom>
+          <a:solidFill>
+            <a:schemeClr val="bg2">
+              <a:lumMod val="90000"/>
+            </a:schemeClr>
+          </a:solidFill>
+          <a:ln>
+            <a:solidFill>
+              <a:schemeClr val="tx1"/>
+            </a:solidFill>
+          </a:ln>
+        </p:spPr>
+        <p:style>
+          <a:lnRef idx="2">
+            <a:schemeClr val="accent1">
+              <a:shade val="15000"/>
+            </a:schemeClr>
+          </a:lnRef>
+          <a:fillRef idx="1">
+            <a:schemeClr val="accent1"/>
+          </a:fillRef>
+          <a:effectRef idx="0">
+            <a:schemeClr val="accent1"/>
+          </a:effectRef>
+          <a:fontRef idx="minor">
+            <a:schemeClr val="lt1"/>
+          </a:fontRef>
+        </p:style>
+        <p:txBody>
+          <a:bodyPr rtlCol="0" anchor="ctr"/>
+          <a:lstStyle/>
+          <a:p>
+            <a:pPr algn="ctr"/>
+            <a:endParaRPr lang="fr-BE"/>
+          </a:p>
+        </p:txBody>
+      </p:sp>
+      <p:sp>
+        <p:nvSpPr>
+          <p:cNvPr id="19" name="Ellipse 18">
+            <a:extLst>
+              <a:ext uri="{FF2B5EF4-FFF2-40B4-BE49-F238E27FC236}">
+                <a16:creationId xmlns:a16="http://schemas.microsoft.com/office/drawing/2014/main" id="{A6B1DD36-6969-61D9-A3DB-0D9AD7C96F8F}"/>
+              </a:ext>
+            </a:extLst>
+          </p:cNvPr>
+          <p:cNvSpPr/>
+          <p:nvPr/>
+        </p:nvSpPr>
+        <p:spPr>
+          <a:xfrm>
+            <a:off x="5453509" y="2298061"/>
+            <a:ext cx="92098" cy="98676"/>
+          </a:xfrm>
+          <a:prstGeom prst="ellipse">
+            <a:avLst/>
+          </a:prstGeom>
+          <a:solidFill>
+            <a:schemeClr val="bg2">
+              <a:lumMod val="90000"/>
+            </a:schemeClr>
+          </a:solidFill>
+          <a:ln>
+            <a:solidFill>
+              <a:schemeClr val="tx1"/>
+            </a:solidFill>
+          </a:ln>
+        </p:spPr>
+        <p:style>
+          <a:lnRef idx="2">
+            <a:schemeClr val="accent1">
+              <a:shade val="15000"/>
+            </a:schemeClr>
+          </a:lnRef>
+          <a:fillRef idx="1">
+            <a:schemeClr val="accent1"/>
+          </a:fillRef>
+          <a:effectRef idx="0">
+            <a:schemeClr val="accent1"/>
+          </a:effectRef>
+          <a:fontRef idx="minor">
+            <a:schemeClr val="lt1"/>
+          </a:fontRef>
+        </p:style>
+        <p:txBody>
+          <a:bodyPr rtlCol="0" anchor="ctr"/>
+          <a:lstStyle/>
+          <a:p>
+            <a:pPr algn="ctr"/>
+            <a:endParaRPr lang="fr-BE"/>
+          </a:p>
+        </p:txBody>
+      </p:sp>
+      <p:sp>
+        <p:nvSpPr>
+          <p:cNvPr id="20" name="Ellipse 19">
+            <a:extLst>
+              <a:ext uri="{FF2B5EF4-FFF2-40B4-BE49-F238E27FC236}">
+                <a16:creationId xmlns:a16="http://schemas.microsoft.com/office/drawing/2014/main" id="{70A88021-EB90-E331-67FF-BE6562109211}"/>
+              </a:ext>
+            </a:extLst>
+          </p:cNvPr>
+          <p:cNvSpPr/>
+          <p:nvPr/>
+        </p:nvSpPr>
+        <p:spPr>
+          <a:xfrm>
+            <a:off x="5387724" y="2093032"/>
+            <a:ext cx="92098" cy="98676"/>
+          </a:xfrm>
+          <a:prstGeom prst="ellipse">
+            <a:avLst/>
+          </a:prstGeom>
+          <a:solidFill>
+            <a:schemeClr val="bg2">
+              <a:lumMod val="90000"/>
+            </a:schemeClr>
+          </a:solidFill>
+          <a:ln>
+            <a:solidFill>
+              <a:schemeClr val="tx1"/>
+            </a:solidFill>
+          </a:ln>
+        </p:spPr>
+        <p:style>
+          <a:lnRef idx="2">
+            <a:schemeClr val="accent1">
+              <a:shade val="15000"/>
+            </a:schemeClr>
+          </a:lnRef>
+          <a:fillRef idx="1">
+            <a:schemeClr val="accent1"/>
+          </a:fillRef>
+          <a:effectRef idx="0">
+            <a:schemeClr val="accent1"/>
+          </a:effectRef>
+          <a:fontRef idx="minor">
+            <a:schemeClr val="lt1"/>
+          </a:fontRef>
+        </p:style>
+        <p:txBody>
+          <a:bodyPr rtlCol="0" anchor="ctr"/>
+          <a:lstStyle/>
+          <a:p>
+            <a:pPr algn="ctr"/>
+            <a:endParaRPr lang="fr-BE"/>
+          </a:p>
+        </p:txBody>
+      </p:sp>
+      <p:sp>
+        <p:nvSpPr>
+          <p:cNvPr id="21" name="Ellipse 20">
+            <a:extLst>
+              <a:ext uri="{FF2B5EF4-FFF2-40B4-BE49-F238E27FC236}">
+                <a16:creationId xmlns:a16="http://schemas.microsoft.com/office/drawing/2014/main" id="{ED5C1F75-C11C-4629-DB60-5D2D4E1A84B2}"/>
+              </a:ext>
+            </a:extLst>
+          </p:cNvPr>
+          <p:cNvSpPr/>
+          <p:nvPr/>
+        </p:nvSpPr>
+        <p:spPr>
+          <a:xfrm>
+            <a:off x="5335096" y="1896777"/>
+            <a:ext cx="92098" cy="98676"/>
+          </a:xfrm>
+          <a:prstGeom prst="ellipse">
+            <a:avLst/>
+          </a:prstGeom>
+          <a:solidFill>
+            <a:schemeClr val="bg2">
+              <a:lumMod val="90000"/>
+            </a:schemeClr>
+          </a:solidFill>
+          <a:ln>
+            <a:solidFill>
+              <a:schemeClr val="tx1"/>
+            </a:solidFill>
+          </a:ln>
+        </p:spPr>
+        <p:style>
+          <a:lnRef idx="2">
+            <a:schemeClr val="accent1">
+              <a:shade val="15000"/>
+            </a:schemeClr>
+          </a:lnRef>
+          <a:fillRef idx="1">
+            <a:schemeClr val="accent1"/>
+          </a:fillRef>
+          <a:effectRef idx="0">
+            <a:schemeClr val="accent1"/>
+          </a:effectRef>
+          <a:fontRef idx="minor">
+            <a:schemeClr val="lt1"/>
+          </a:fontRef>
+        </p:style>
+        <p:txBody>
+          <a:bodyPr rtlCol="0" anchor="ctr"/>
+          <a:lstStyle/>
+          <a:p>
+            <a:pPr algn="ctr"/>
+            <a:endParaRPr lang="fr-BE"/>
+          </a:p>
+        </p:txBody>
+      </p:sp>
+      <p:sp>
+        <p:nvSpPr>
+          <p:cNvPr id="22" name="Ellipse 21">
+            <a:extLst>
+              <a:ext uri="{FF2B5EF4-FFF2-40B4-BE49-F238E27FC236}">
+                <a16:creationId xmlns:a16="http://schemas.microsoft.com/office/drawing/2014/main" id="{4090777A-D52F-0116-37CE-D5B790ED440F}"/>
+              </a:ext>
+            </a:extLst>
+          </p:cNvPr>
+          <p:cNvSpPr/>
+          <p:nvPr/>
+        </p:nvSpPr>
+        <p:spPr>
+          <a:xfrm>
+            <a:off x="5256155" y="1707100"/>
+            <a:ext cx="92098" cy="98676"/>
+          </a:xfrm>
+          <a:prstGeom prst="ellipse">
+            <a:avLst/>
+          </a:prstGeom>
+          <a:solidFill>
+            <a:schemeClr val="bg2">
+              <a:lumMod val="90000"/>
+            </a:schemeClr>
+          </a:solidFill>
+          <a:ln>
+            <a:solidFill>
+              <a:schemeClr val="tx1"/>
+            </a:solidFill>
+          </a:ln>
+        </p:spPr>
+        <p:style>
+          <a:lnRef idx="2">
+            <a:schemeClr val="accent1">
+              <a:shade val="15000"/>
+            </a:schemeClr>
+          </a:lnRef>
+          <a:fillRef idx="1">
+            <a:schemeClr val="accent1"/>
+          </a:fillRef>
+          <a:effectRef idx="0">
+            <a:schemeClr val="accent1"/>
+          </a:effectRef>
+          <a:fontRef idx="minor">
+            <a:schemeClr val="lt1"/>
+          </a:fontRef>
+        </p:style>
+        <p:txBody>
+          <a:bodyPr rtlCol="0" anchor="ctr"/>
+          <a:lstStyle/>
+          <a:p>
+            <a:pPr algn="ctr"/>
+            <a:endParaRPr lang="fr-BE"/>
+          </a:p>
+        </p:txBody>
+      </p:sp>
+      <p:sp>
+        <p:nvSpPr>
+          <p:cNvPr id="23" name="Ellipse 22">
+            <a:extLst>
+              <a:ext uri="{FF2B5EF4-FFF2-40B4-BE49-F238E27FC236}">
+                <a16:creationId xmlns:a16="http://schemas.microsoft.com/office/drawing/2014/main" id="{C21E9435-84F3-1578-E419-A58B9A56272D}"/>
+              </a:ext>
+            </a:extLst>
+          </p:cNvPr>
+          <p:cNvSpPr/>
+          <p:nvPr/>
+        </p:nvSpPr>
+        <p:spPr>
+          <a:xfrm>
+            <a:off x="5190368" y="1537157"/>
+            <a:ext cx="92098" cy="98676"/>
+          </a:xfrm>
+          <a:prstGeom prst="ellipse">
+            <a:avLst/>
+          </a:prstGeom>
+          <a:solidFill>
+            <a:schemeClr val="bg2">
+              <a:lumMod val="90000"/>
+            </a:schemeClr>
+          </a:solidFill>
+          <a:ln>
+            <a:solidFill>
+              <a:schemeClr val="tx1"/>
+            </a:solidFill>
+          </a:ln>
+        </p:spPr>
+        <p:style>
+          <a:lnRef idx="2">
+            <a:schemeClr val="accent1">
+              <a:shade val="15000"/>
+            </a:schemeClr>
+          </a:lnRef>
+          <a:fillRef idx="1">
+            <a:schemeClr val="accent1"/>
+          </a:fillRef>
+          <a:effectRef idx="0">
+            <a:schemeClr val="accent1"/>
+          </a:effectRef>
+          <a:fontRef idx="minor">
+            <a:schemeClr val="lt1"/>
+          </a:fontRef>
+        </p:style>
+        <p:txBody>
+          <a:bodyPr rtlCol="0" anchor="ctr"/>
+          <a:lstStyle/>
+          <a:p>
+            <a:pPr algn="ctr"/>
+            <a:endParaRPr lang="fr-BE"/>
+          </a:p>
+        </p:txBody>
+      </p:sp>
+      <p:sp>
+        <p:nvSpPr>
+          <p:cNvPr id="24" name="Ellipse 23">
+            <a:extLst>
+              <a:ext uri="{FF2B5EF4-FFF2-40B4-BE49-F238E27FC236}">
+                <a16:creationId xmlns:a16="http://schemas.microsoft.com/office/drawing/2014/main" id="{160618FC-B844-0176-A76C-09802A9F53CD}"/>
+              </a:ext>
+            </a:extLst>
+          </p:cNvPr>
+          <p:cNvSpPr/>
+          <p:nvPr/>
+        </p:nvSpPr>
+        <p:spPr>
+          <a:xfrm>
+            <a:off x="5131164" y="1342546"/>
+            <a:ext cx="92098" cy="98676"/>
+          </a:xfrm>
+          <a:prstGeom prst="ellipse">
+            <a:avLst/>
+          </a:prstGeom>
+          <a:solidFill>
+            <a:schemeClr val="bg2">
+              <a:lumMod val="90000"/>
+            </a:schemeClr>
+          </a:solidFill>
+          <a:ln>
+            <a:solidFill>
+              <a:schemeClr val="tx1"/>
+            </a:solidFill>
+          </a:ln>
+        </p:spPr>
+        <p:style>
+          <a:lnRef idx="2">
+            <a:schemeClr val="accent1">
+              <a:shade val="15000"/>
+            </a:schemeClr>
+          </a:lnRef>
+          <a:fillRef idx="1">
+            <a:schemeClr val="accent1"/>
+          </a:fillRef>
+          <a:effectRef idx="0">
+            <a:schemeClr val="accent1"/>
+          </a:effectRef>
+          <a:fontRef idx="minor">
+            <a:schemeClr val="lt1"/>
+          </a:fontRef>
+        </p:style>
+        <p:txBody>
+          <a:bodyPr rtlCol="0" anchor="ctr"/>
+          <a:lstStyle/>
+          <a:p>
+            <a:pPr algn="ctr"/>
+            <a:endParaRPr lang="fr-BE"/>
+          </a:p>
+        </p:txBody>
+      </p:sp>
+      <p:sp>
+        <p:nvSpPr>
+          <p:cNvPr id="25" name="Ellipse 24">
+            <a:extLst>
+              <a:ext uri="{FF2B5EF4-FFF2-40B4-BE49-F238E27FC236}">
+                <a16:creationId xmlns:a16="http://schemas.microsoft.com/office/drawing/2014/main" id="{E5F46D1A-EA61-0285-BBDA-C4DDC8EC5AA2}"/>
+              </a:ext>
+            </a:extLst>
+          </p:cNvPr>
+          <p:cNvSpPr/>
+          <p:nvPr/>
+        </p:nvSpPr>
+        <p:spPr>
+          <a:xfrm>
+            <a:off x="5039066" y="1169313"/>
+            <a:ext cx="92098" cy="98676"/>
+          </a:xfrm>
+          <a:prstGeom prst="ellipse">
+            <a:avLst/>
+          </a:prstGeom>
+          <a:solidFill>
+            <a:schemeClr val="bg2">
+              <a:lumMod val="90000"/>
+            </a:schemeClr>
+          </a:solidFill>
+          <a:ln>
+            <a:solidFill>
+              <a:schemeClr val="tx1"/>
+            </a:solidFill>
+          </a:ln>
+        </p:spPr>
+        <p:style>
+          <a:lnRef idx="2">
+            <a:schemeClr val="accent1">
+              <a:shade val="15000"/>
+            </a:schemeClr>
+          </a:lnRef>
+          <a:fillRef idx="1">
+            <a:schemeClr val="accent1"/>
+          </a:fillRef>
+          <a:effectRef idx="0">
+            <a:schemeClr val="accent1"/>
+          </a:effectRef>
+          <a:fontRef idx="minor">
+            <a:schemeClr val="lt1"/>
+          </a:fontRef>
+        </p:style>
+        <p:txBody>
+          <a:bodyPr rtlCol="0" anchor="ctr"/>
+          <a:lstStyle/>
+          <a:p>
+            <a:pPr algn="ctr"/>
+            <a:endParaRPr lang="fr-BE"/>
+          </a:p>
+        </p:txBody>
+      </p:sp>
+      <p:sp>
+        <p:nvSpPr>
+          <p:cNvPr id="26" name="Ellipse 25">
+            <a:extLst>
+              <a:ext uri="{FF2B5EF4-FFF2-40B4-BE49-F238E27FC236}">
+                <a16:creationId xmlns:a16="http://schemas.microsoft.com/office/drawing/2014/main" id="{920BE946-4C82-26D0-F45D-A06BFD54798D}"/>
+              </a:ext>
+            </a:extLst>
+          </p:cNvPr>
+          <p:cNvSpPr/>
+          <p:nvPr/>
+        </p:nvSpPr>
+        <p:spPr>
+          <a:xfrm>
+            <a:off x="4973283" y="973055"/>
+            <a:ext cx="92098" cy="98676"/>
+          </a:xfrm>
+          <a:prstGeom prst="ellipse">
+            <a:avLst/>
+          </a:prstGeom>
+          <a:solidFill>
+            <a:schemeClr val="bg2">
+              <a:lumMod val="90000"/>
+            </a:schemeClr>
+          </a:solidFill>
+          <a:ln>
+            <a:solidFill>
+              <a:schemeClr val="tx1"/>
+            </a:solidFill>
+          </a:ln>
+        </p:spPr>
+        <p:style>
+          <a:lnRef idx="2">
+            <a:schemeClr val="accent1">
+              <a:shade val="15000"/>
+            </a:schemeClr>
+          </a:lnRef>
+          <a:fillRef idx="1">
+            <a:schemeClr val="accent1"/>
+          </a:fillRef>
+          <a:effectRef idx="0">
+            <a:schemeClr val="accent1"/>
+          </a:effectRef>
+          <a:fontRef idx="minor">
+            <a:schemeClr val="lt1"/>
+          </a:fontRef>
+        </p:style>
+        <p:txBody>
+          <a:bodyPr rtlCol="0" anchor="ctr"/>
+          <a:lstStyle/>
+          <a:p>
+            <a:pPr algn="ctr"/>
+            <a:endParaRPr lang="fr-BE"/>
+          </a:p>
+        </p:txBody>
+      </p:sp>
     </p:spTree>
     <p:extLst>
       <p:ext uri="{BB962C8B-B14F-4D97-AF65-F5344CB8AC3E}">
@@ -9722,7 +12020,7 @@
 </p:sld>
 </file>
 
-<file path=ppt/slides/slide16.xml><?xml version="1.0" encoding="utf-8"?>
+<file path=ppt/slides/slide19.xml><?xml version="1.0" encoding="utf-8"?>
 <p:sld xmlns:a="http://schemas.openxmlformats.org/drawingml/2006/main" xmlns:r="http://schemas.openxmlformats.org/officeDocument/2006/relationships" xmlns:p="http://schemas.openxmlformats.org/presentationml/2006/main">
   <p:cSld>
     <p:spTree>
@@ -9760,7 +12058,7 @@
           <p:nvPr/>
         </p:nvPicPr>
         <p:blipFill>
-          <a:blip r:embed="rId2"/>
+          <a:blip r:embed="rId3"/>
           <a:stretch>
             <a:fillRect/>
           </a:stretch>
@@ -12466,7 +14764,238 @@
 </p:sld>
 </file>
 
-<file path=ppt/slides/slide17.xml><?xml version="1.0" encoding="utf-8"?>
+<file path=ppt/slides/slide2.xml><?xml version="1.0" encoding="utf-8"?>
+<p:sld xmlns:a="http://schemas.openxmlformats.org/drawingml/2006/main" xmlns:r="http://schemas.openxmlformats.org/officeDocument/2006/relationships" xmlns:p="http://schemas.openxmlformats.org/presentationml/2006/main">
+  <p:cSld>
+    <p:spTree>
+      <p:nvGrpSpPr>
+        <p:cNvPr id="1" name="">
+          <a:extLst>
+            <a:ext uri="{FF2B5EF4-FFF2-40B4-BE49-F238E27FC236}">
+              <a16:creationId xmlns:a16="http://schemas.microsoft.com/office/drawing/2014/main" id="{4715BBF6-F045-2A0E-86C3-164ED99A1E4E}"/>
+            </a:ext>
+          </a:extLst>
+        </p:cNvPr>
+        <p:cNvGrpSpPr/>
+        <p:nvPr/>
+      </p:nvGrpSpPr>
+      <p:grpSpPr>
+        <a:xfrm>
+          <a:off x="0" y="0"/>
+          <a:ext cx="0" cy="0"/>
+          <a:chOff x="0" y="0"/>
+          <a:chExt cx="0" cy="0"/>
+        </a:xfrm>
+      </p:grpSpPr>
+      <p:pic>
+        <p:nvPicPr>
+          <p:cNvPr id="3" name="Image 2">
+            <a:extLst>
+              <a:ext uri="{FF2B5EF4-FFF2-40B4-BE49-F238E27FC236}">
+                <a16:creationId xmlns:a16="http://schemas.microsoft.com/office/drawing/2014/main" id="{56694426-403B-9CC8-4F17-84A25739CA20}"/>
+              </a:ext>
+            </a:extLst>
+          </p:cNvPr>
+          <p:cNvPicPr>
+            <a:picLocks noChangeAspect="1"/>
+          </p:cNvPicPr>
+          <p:nvPr/>
+        </p:nvPicPr>
+        <p:blipFill>
+          <a:blip r:embed="rId2">
+            <a:extLst>
+              <a:ext uri="{28A0092B-C50C-407E-A947-70E740481C1C}">
+                <a14:useLocalDpi xmlns:a14="http://schemas.microsoft.com/office/drawing/2010/main" val="0"/>
+              </a:ext>
+            </a:extLst>
+          </a:blip>
+          <a:srcRect/>
+          <a:stretch/>
+        </p:blipFill>
+        <p:spPr>
+          <a:xfrm rot="5400000">
+            <a:off x="2618395" y="-1604724"/>
+            <a:ext cx="6858000" cy="10067448"/>
+          </a:xfrm>
+          <a:prstGeom prst="rect">
+            <a:avLst/>
+          </a:prstGeom>
+        </p:spPr>
+      </p:pic>
+      <p:sp>
+        <p:nvSpPr>
+          <p:cNvPr id="6" name="Rectangle 5">
+            <a:extLst>
+              <a:ext uri="{FF2B5EF4-FFF2-40B4-BE49-F238E27FC236}">
+                <a16:creationId xmlns:a16="http://schemas.microsoft.com/office/drawing/2014/main" id="{3D201E32-D5F5-5C64-83CF-1172E3F506E7}"/>
+              </a:ext>
+            </a:extLst>
+          </p:cNvPr>
+          <p:cNvSpPr/>
+          <p:nvPr/>
+        </p:nvSpPr>
+        <p:spPr>
+          <a:xfrm>
+            <a:off x="3138770" y="998620"/>
+            <a:ext cx="7676148" cy="794085"/>
+          </a:xfrm>
+          <a:prstGeom prst="rect">
+            <a:avLst/>
+          </a:prstGeom>
+          <a:solidFill>
+            <a:srgbClr val="AEAEAE">
+              <a:alpha val="89020"/>
+            </a:srgbClr>
+          </a:solidFill>
+          <a:ln w="76200">
+            <a:noFill/>
+          </a:ln>
+        </p:spPr>
+        <p:style>
+          <a:lnRef idx="2">
+            <a:schemeClr val="accent1">
+              <a:shade val="15000"/>
+            </a:schemeClr>
+          </a:lnRef>
+          <a:fillRef idx="1">
+            <a:schemeClr val="accent1"/>
+          </a:fillRef>
+          <a:effectRef idx="0">
+            <a:schemeClr val="accent1"/>
+          </a:effectRef>
+          <a:fontRef idx="minor">
+            <a:schemeClr val="lt1"/>
+          </a:fontRef>
+        </p:style>
+        <p:txBody>
+          <a:bodyPr rtlCol="0" anchor="ctr"/>
+          <a:lstStyle/>
+          <a:p>
+            <a:pPr algn="ctr"/>
+            <a:endParaRPr lang="fr-BE" dirty="0"/>
+          </a:p>
+        </p:txBody>
+      </p:sp>
+      <p:sp>
+        <p:nvSpPr>
+          <p:cNvPr id="2" name="Rectangle 1">
+            <a:extLst>
+              <a:ext uri="{FF2B5EF4-FFF2-40B4-BE49-F238E27FC236}">
+                <a16:creationId xmlns:a16="http://schemas.microsoft.com/office/drawing/2014/main" id="{D8767B85-6E69-C6A9-8BB5-116B9E54C5BD}"/>
+              </a:ext>
+            </a:extLst>
+          </p:cNvPr>
+          <p:cNvSpPr/>
+          <p:nvPr/>
+        </p:nvSpPr>
+        <p:spPr>
+          <a:xfrm>
+            <a:off x="3303230" y="3429000"/>
+            <a:ext cx="1708485" cy="794084"/>
+          </a:xfrm>
+          <a:prstGeom prst="rect">
+            <a:avLst/>
+          </a:prstGeom>
+          <a:noFill/>
+          <a:ln w="76200">
+            <a:solidFill>
+              <a:srgbClr val="FF0000"/>
+            </a:solidFill>
+          </a:ln>
+        </p:spPr>
+        <p:style>
+          <a:lnRef idx="2">
+            <a:schemeClr val="accent1">
+              <a:shade val="15000"/>
+            </a:schemeClr>
+          </a:lnRef>
+          <a:fillRef idx="1">
+            <a:schemeClr val="accent1"/>
+          </a:fillRef>
+          <a:effectRef idx="0">
+            <a:schemeClr val="accent1"/>
+          </a:effectRef>
+          <a:fontRef idx="minor">
+            <a:schemeClr val="lt1"/>
+          </a:fontRef>
+        </p:style>
+        <p:txBody>
+          <a:bodyPr rtlCol="0" anchor="ctr"/>
+          <a:lstStyle/>
+          <a:p>
+            <a:pPr algn="ctr"/>
+            <a:endParaRPr lang="fr-BE"/>
+          </a:p>
+        </p:txBody>
+      </p:sp>
+      <p:sp>
+        <p:nvSpPr>
+          <p:cNvPr id="7" name="Rectangle 6">
+            <a:extLst>
+              <a:ext uri="{FF2B5EF4-FFF2-40B4-BE49-F238E27FC236}">
+                <a16:creationId xmlns:a16="http://schemas.microsoft.com/office/drawing/2014/main" id="{0C13D566-96A6-106B-0B52-4CE881674C9F}"/>
+              </a:ext>
+            </a:extLst>
+          </p:cNvPr>
+          <p:cNvSpPr/>
+          <p:nvPr/>
+        </p:nvSpPr>
+        <p:spPr>
+          <a:xfrm>
+            <a:off x="3138770" y="1816767"/>
+            <a:ext cx="1920033" cy="794085"/>
+          </a:xfrm>
+          <a:prstGeom prst="rect">
+            <a:avLst/>
+          </a:prstGeom>
+          <a:solidFill>
+            <a:srgbClr val="AEAEAE">
+              <a:alpha val="89020"/>
+            </a:srgbClr>
+          </a:solidFill>
+          <a:ln w="76200">
+            <a:noFill/>
+          </a:ln>
+        </p:spPr>
+        <p:style>
+          <a:lnRef idx="2">
+            <a:schemeClr val="accent1">
+              <a:shade val="15000"/>
+            </a:schemeClr>
+          </a:lnRef>
+          <a:fillRef idx="1">
+            <a:schemeClr val="accent1"/>
+          </a:fillRef>
+          <a:effectRef idx="0">
+            <a:schemeClr val="accent1"/>
+          </a:effectRef>
+          <a:fontRef idx="minor">
+            <a:schemeClr val="lt1"/>
+          </a:fontRef>
+        </p:style>
+        <p:txBody>
+          <a:bodyPr rtlCol="0" anchor="ctr"/>
+          <a:lstStyle/>
+          <a:p>
+            <a:pPr algn="ctr"/>
+            <a:endParaRPr lang="fr-BE" dirty="0"/>
+          </a:p>
+        </p:txBody>
+      </p:sp>
+    </p:spTree>
+    <p:extLst>
+      <p:ext uri="{BB962C8B-B14F-4D97-AF65-F5344CB8AC3E}">
+        <p14:creationId xmlns:p14="http://schemas.microsoft.com/office/powerpoint/2010/main" val="3700225456"/>
+      </p:ext>
+    </p:extLst>
+  </p:cSld>
+  <p:clrMapOvr>
+    <a:masterClrMapping/>
+  </p:clrMapOvr>
+</p:sld>
+</file>
+
+<file path=ppt/slides/slide20.xml><?xml version="1.0" encoding="utf-8"?>
 <p:sld xmlns:a="http://schemas.openxmlformats.org/drawingml/2006/main" xmlns:r="http://schemas.openxmlformats.org/officeDocument/2006/relationships" xmlns:p="http://schemas.openxmlformats.org/presentationml/2006/main">
   <p:cSld>
     <p:spTree>
@@ -12737,7 +15266,7 @@
 </p:sld>
 </file>
 
-<file path=ppt/slides/slide18.xml><?xml version="1.0" encoding="utf-8"?>
+<file path=ppt/slides/slide21.xml><?xml version="1.0" encoding="utf-8"?>
 <p:sld xmlns:a="http://schemas.openxmlformats.org/drawingml/2006/main" xmlns:r="http://schemas.openxmlformats.org/officeDocument/2006/relationships" xmlns:p="http://schemas.openxmlformats.org/presentationml/2006/main">
   <p:cSld>
     <p:spTree>
@@ -12846,7 +15375,7 @@
 </p:sld>
 </file>
 
-<file path=ppt/slides/slide19.xml><?xml version="1.0" encoding="utf-8"?>
+<file path=ppt/slides/slide22.xml><?xml version="1.0" encoding="utf-8"?>
 <p:sld xmlns:a="http://schemas.openxmlformats.org/drawingml/2006/main" xmlns:r="http://schemas.openxmlformats.org/officeDocument/2006/relationships" xmlns:p="http://schemas.openxmlformats.org/presentationml/2006/main">
   <p:cSld>
     <p:spTree>
@@ -12955,238 +15484,7 @@
 </p:sld>
 </file>
 
-<file path=ppt/slides/slide2.xml><?xml version="1.0" encoding="utf-8"?>
-<p:sld xmlns:a="http://schemas.openxmlformats.org/drawingml/2006/main" xmlns:r="http://schemas.openxmlformats.org/officeDocument/2006/relationships" xmlns:p="http://schemas.openxmlformats.org/presentationml/2006/main">
-  <p:cSld>
-    <p:spTree>
-      <p:nvGrpSpPr>
-        <p:cNvPr id="1" name="">
-          <a:extLst>
-            <a:ext uri="{FF2B5EF4-FFF2-40B4-BE49-F238E27FC236}">
-              <a16:creationId xmlns:a16="http://schemas.microsoft.com/office/drawing/2014/main" id="{4715BBF6-F045-2A0E-86C3-164ED99A1E4E}"/>
-            </a:ext>
-          </a:extLst>
-        </p:cNvPr>
-        <p:cNvGrpSpPr/>
-        <p:nvPr/>
-      </p:nvGrpSpPr>
-      <p:grpSpPr>
-        <a:xfrm>
-          <a:off x="0" y="0"/>
-          <a:ext cx="0" cy="0"/>
-          <a:chOff x="0" y="0"/>
-          <a:chExt cx="0" cy="0"/>
-        </a:xfrm>
-      </p:grpSpPr>
-      <p:pic>
-        <p:nvPicPr>
-          <p:cNvPr id="3" name="Image 2">
-            <a:extLst>
-              <a:ext uri="{FF2B5EF4-FFF2-40B4-BE49-F238E27FC236}">
-                <a16:creationId xmlns:a16="http://schemas.microsoft.com/office/drawing/2014/main" id="{56694426-403B-9CC8-4F17-84A25739CA20}"/>
-              </a:ext>
-            </a:extLst>
-          </p:cNvPr>
-          <p:cNvPicPr>
-            <a:picLocks noChangeAspect="1"/>
-          </p:cNvPicPr>
-          <p:nvPr/>
-        </p:nvPicPr>
-        <p:blipFill>
-          <a:blip r:embed="rId2">
-            <a:extLst>
-              <a:ext uri="{28A0092B-C50C-407E-A947-70E740481C1C}">
-                <a14:useLocalDpi xmlns:a14="http://schemas.microsoft.com/office/drawing/2010/main" val="0"/>
-              </a:ext>
-            </a:extLst>
-          </a:blip>
-          <a:srcRect/>
-          <a:stretch/>
-        </p:blipFill>
-        <p:spPr>
-          <a:xfrm rot="5400000">
-            <a:off x="2618395" y="-1604724"/>
-            <a:ext cx="6858000" cy="10067448"/>
-          </a:xfrm>
-          <a:prstGeom prst="rect">
-            <a:avLst/>
-          </a:prstGeom>
-        </p:spPr>
-      </p:pic>
-      <p:sp>
-        <p:nvSpPr>
-          <p:cNvPr id="6" name="Rectangle 5">
-            <a:extLst>
-              <a:ext uri="{FF2B5EF4-FFF2-40B4-BE49-F238E27FC236}">
-                <a16:creationId xmlns:a16="http://schemas.microsoft.com/office/drawing/2014/main" id="{3D201E32-D5F5-5C64-83CF-1172E3F506E7}"/>
-              </a:ext>
-            </a:extLst>
-          </p:cNvPr>
-          <p:cNvSpPr/>
-          <p:nvPr/>
-        </p:nvSpPr>
-        <p:spPr>
-          <a:xfrm>
-            <a:off x="3138770" y="998620"/>
-            <a:ext cx="7676148" cy="794085"/>
-          </a:xfrm>
-          <a:prstGeom prst="rect">
-            <a:avLst/>
-          </a:prstGeom>
-          <a:solidFill>
-            <a:srgbClr val="AEAEAE">
-              <a:alpha val="89020"/>
-            </a:srgbClr>
-          </a:solidFill>
-          <a:ln w="76200">
-            <a:noFill/>
-          </a:ln>
-        </p:spPr>
-        <p:style>
-          <a:lnRef idx="2">
-            <a:schemeClr val="accent1">
-              <a:shade val="15000"/>
-            </a:schemeClr>
-          </a:lnRef>
-          <a:fillRef idx="1">
-            <a:schemeClr val="accent1"/>
-          </a:fillRef>
-          <a:effectRef idx="0">
-            <a:schemeClr val="accent1"/>
-          </a:effectRef>
-          <a:fontRef idx="minor">
-            <a:schemeClr val="lt1"/>
-          </a:fontRef>
-        </p:style>
-        <p:txBody>
-          <a:bodyPr rtlCol="0" anchor="ctr"/>
-          <a:lstStyle/>
-          <a:p>
-            <a:pPr algn="ctr"/>
-            <a:endParaRPr lang="fr-BE" dirty="0"/>
-          </a:p>
-        </p:txBody>
-      </p:sp>
-      <p:sp>
-        <p:nvSpPr>
-          <p:cNvPr id="2" name="Rectangle 1">
-            <a:extLst>
-              <a:ext uri="{FF2B5EF4-FFF2-40B4-BE49-F238E27FC236}">
-                <a16:creationId xmlns:a16="http://schemas.microsoft.com/office/drawing/2014/main" id="{D8767B85-6E69-C6A9-8BB5-116B9E54C5BD}"/>
-              </a:ext>
-            </a:extLst>
-          </p:cNvPr>
-          <p:cNvSpPr/>
-          <p:nvPr/>
-        </p:nvSpPr>
-        <p:spPr>
-          <a:xfrm>
-            <a:off x="3303230" y="3429000"/>
-            <a:ext cx="1708485" cy="794084"/>
-          </a:xfrm>
-          <a:prstGeom prst="rect">
-            <a:avLst/>
-          </a:prstGeom>
-          <a:noFill/>
-          <a:ln w="76200">
-            <a:solidFill>
-              <a:srgbClr val="FF0000"/>
-            </a:solidFill>
-          </a:ln>
-        </p:spPr>
-        <p:style>
-          <a:lnRef idx="2">
-            <a:schemeClr val="accent1">
-              <a:shade val="15000"/>
-            </a:schemeClr>
-          </a:lnRef>
-          <a:fillRef idx="1">
-            <a:schemeClr val="accent1"/>
-          </a:fillRef>
-          <a:effectRef idx="0">
-            <a:schemeClr val="accent1"/>
-          </a:effectRef>
-          <a:fontRef idx="minor">
-            <a:schemeClr val="lt1"/>
-          </a:fontRef>
-        </p:style>
-        <p:txBody>
-          <a:bodyPr rtlCol="0" anchor="ctr"/>
-          <a:lstStyle/>
-          <a:p>
-            <a:pPr algn="ctr"/>
-            <a:endParaRPr lang="fr-BE"/>
-          </a:p>
-        </p:txBody>
-      </p:sp>
-      <p:sp>
-        <p:nvSpPr>
-          <p:cNvPr id="7" name="Rectangle 6">
-            <a:extLst>
-              <a:ext uri="{FF2B5EF4-FFF2-40B4-BE49-F238E27FC236}">
-                <a16:creationId xmlns:a16="http://schemas.microsoft.com/office/drawing/2014/main" id="{0C13D566-96A6-106B-0B52-4CE881674C9F}"/>
-              </a:ext>
-            </a:extLst>
-          </p:cNvPr>
-          <p:cNvSpPr/>
-          <p:nvPr/>
-        </p:nvSpPr>
-        <p:spPr>
-          <a:xfrm>
-            <a:off x="3138770" y="1816767"/>
-            <a:ext cx="1920033" cy="794085"/>
-          </a:xfrm>
-          <a:prstGeom prst="rect">
-            <a:avLst/>
-          </a:prstGeom>
-          <a:solidFill>
-            <a:srgbClr val="AEAEAE">
-              <a:alpha val="89020"/>
-            </a:srgbClr>
-          </a:solidFill>
-          <a:ln w="76200">
-            <a:noFill/>
-          </a:ln>
-        </p:spPr>
-        <p:style>
-          <a:lnRef idx="2">
-            <a:schemeClr val="accent1">
-              <a:shade val="15000"/>
-            </a:schemeClr>
-          </a:lnRef>
-          <a:fillRef idx="1">
-            <a:schemeClr val="accent1"/>
-          </a:fillRef>
-          <a:effectRef idx="0">
-            <a:schemeClr val="accent1"/>
-          </a:effectRef>
-          <a:fontRef idx="minor">
-            <a:schemeClr val="lt1"/>
-          </a:fontRef>
-        </p:style>
-        <p:txBody>
-          <a:bodyPr rtlCol="0" anchor="ctr"/>
-          <a:lstStyle/>
-          <a:p>
-            <a:pPr algn="ctr"/>
-            <a:endParaRPr lang="fr-BE" dirty="0"/>
-          </a:p>
-        </p:txBody>
-      </p:sp>
-    </p:spTree>
-    <p:extLst>
-      <p:ext uri="{BB962C8B-B14F-4D97-AF65-F5344CB8AC3E}">
-        <p14:creationId xmlns:p14="http://schemas.microsoft.com/office/powerpoint/2010/main" val="3700225456"/>
-      </p:ext>
-    </p:extLst>
-  </p:cSld>
-  <p:clrMapOvr>
-    <a:masterClrMapping/>
-  </p:clrMapOvr>
-</p:sld>
-</file>
-
-<file path=ppt/slides/slide20.xml><?xml version="1.0" encoding="utf-8"?>
+<file path=ppt/slides/slide23.xml><?xml version="1.0" encoding="utf-8"?>
 <p:sld xmlns:a="http://schemas.openxmlformats.org/drawingml/2006/main" xmlns:r="http://schemas.openxmlformats.org/officeDocument/2006/relationships" xmlns:p="http://schemas.openxmlformats.org/presentationml/2006/main">
   <p:cSld>
     <p:spTree>
@@ -13224,7 +15522,7 @@
           <p:nvPr/>
         </p:nvPicPr>
         <p:blipFill>
-          <a:blip r:embed="rId2"/>
+          <a:blip r:embed="rId3"/>
           <a:stretch>
             <a:fillRect/>
           </a:stretch>
@@ -13295,7 +15593,7 @@
 </p:sld>
 </file>
 
-<file path=ppt/slides/slide21.xml><?xml version="1.0" encoding="utf-8"?>
+<file path=ppt/slides/slide24.xml><?xml version="1.0" encoding="utf-8"?>
 <p:sld xmlns:a="http://schemas.openxmlformats.org/drawingml/2006/main" xmlns:r="http://schemas.openxmlformats.org/officeDocument/2006/relationships" xmlns:p="http://schemas.openxmlformats.org/presentationml/2006/main">
   <p:cSld>
     <p:spTree>
@@ -13362,9 +15660,9 @@
         </p:nvGrpSpPr>
         <p:grpSpPr>
           <a:xfrm rot="749992">
-            <a:off x="4306584" y="297800"/>
+            <a:off x="4306583" y="297800"/>
             <a:ext cx="3586717" cy="6379535"/>
-            <a:chOff x="4307764" y="379365"/>
+            <a:chOff x="4307763" y="379365"/>
             <a:chExt cx="3586717" cy="6379535"/>
           </a:xfrm>
         </p:grpSpPr>
@@ -13540,7 +15838,7 @@
 </p:sld>
 </file>
 
-<file path=ppt/slides/slide22.xml><?xml version="1.0" encoding="utf-8"?>
+<file path=ppt/slides/slide25.xml><?xml version="1.0" encoding="utf-8"?>
 <p:sld xmlns:a="http://schemas.openxmlformats.org/drawingml/2006/main" xmlns:r="http://schemas.openxmlformats.org/officeDocument/2006/relationships" xmlns:p="http://schemas.openxmlformats.org/presentationml/2006/main">
   <p:cSld>
     <p:spTree>
@@ -13653,7 +15951,7 @@
 </p:sld>
 </file>
 
-<file path=ppt/slides/slide23.xml><?xml version="1.0" encoding="utf-8"?>
+<file path=ppt/slides/slide26.xml><?xml version="1.0" encoding="utf-8"?>
 <p:sld xmlns:a="http://schemas.openxmlformats.org/drawingml/2006/main" xmlns:r="http://schemas.openxmlformats.org/officeDocument/2006/relationships" xmlns:p="http://schemas.openxmlformats.org/presentationml/2006/main">
   <p:cSld>
     <p:spTree>
@@ -13936,8 +16234,8 @@
           </a:p>
         </p:txBody>
       </p:sp>
-      <mc:AlternateContent xmlns:mc="http://schemas.openxmlformats.org/markup-compatibility/2006">
-        <mc:Choice xmlns:a14="http://schemas.microsoft.com/office/drawing/2010/main" Requires="a14">
+      <mc:AlternateContent xmlns:mc="http://schemas.openxmlformats.org/markup-compatibility/2006" xmlns:a14="http://schemas.microsoft.com/office/drawing/2010/main">
+        <mc:Choice Requires="a14">
           <p:sp>
             <p:nvSpPr>
               <p:cNvPr id="17" name="ZoneTexte 16">
@@ -14019,7 +16317,7 @@
             </p:txBody>
           </p:sp>
         </mc:Choice>
-        <mc:Fallback>
+        <mc:Fallback xmlns="">
           <p:sp>
             <p:nvSpPr>
               <p:cNvPr id="17" name="ZoneTexte 16">
@@ -14118,8 +16416,8 @@
           </a:p>
         </p:txBody>
       </p:sp>
-      <mc:AlternateContent xmlns:mc="http://schemas.openxmlformats.org/markup-compatibility/2006">
-        <mc:Choice xmlns:a14="http://schemas.microsoft.com/office/drawing/2010/main" Requires="a14">
+      <mc:AlternateContent xmlns:mc="http://schemas.openxmlformats.org/markup-compatibility/2006" xmlns:a14="http://schemas.microsoft.com/office/drawing/2010/main">
+        <mc:Choice Requires="a14">
           <p:sp>
             <p:nvSpPr>
               <p:cNvPr id="19" name="ZoneTexte 18">
@@ -14201,7 +16499,7 @@
             </p:txBody>
           </p:sp>
         </mc:Choice>
-        <mc:Fallback>
+        <mc:Fallback xmlns="">
           <p:sp>
             <p:nvSpPr>
               <p:cNvPr id="19" name="ZoneTexte 18">
@@ -14259,7 +16557,7 @@
 </p:sld>
 </file>
 
-<file path=ppt/slides/slide24.xml><?xml version="1.0" encoding="utf-8"?>
+<file path=ppt/slides/slide27.xml><?xml version="1.0" encoding="utf-8"?>
 <p:sld xmlns:a="http://schemas.openxmlformats.org/drawingml/2006/main" xmlns:r="http://schemas.openxmlformats.org/officeDocument/2006/relationships" xmlns:p="http://schemas.openxmlformats.org/presentationml/2006/main">
   <p:cSld>
     <p:spTree>
@@ -14325,7 +16623,7 @@
 </p:sld>
 </file>
 
-<file path=ppt/slides/slide25.xml><?xml version="1.0" encoding="utf-8"?>
+<file path=ppt/slides/slide28.xml><?xml version="1.0" encoding="utf-8"?>
 <p:sld xmlns:a="http://schemas.openxmlformats.org/drawingml/2006/main" xmlns:r="http://schemas.openxmlformats.org/officeDocument/2006/relationships" xmlns:p="http://schemas.openxmlformats.org/presentationml/2006/main">
   <p:cSld>
     <p:spTree>
@@ -14391,7 +16689,7 @@
 </p:sld>
 </file>
 
-<file path=ppt/slides/slide26.xml><?xml version="1.0" encoding="utf-8"?>
+<file path=ppt/slides/slide29.xml><?xml version="1.0" encoding="utf-8"?>
 <p:sld xmlns:a="http://schemas.openxmlformats.org/drawingml/2006/main" xmlns:r="http://schemas.openxmlformats.org/officeDocument/2006/relationships" xmlns:p="http://schemas.openxmlformats.org/presentationml/2006/main">
   <p:cSld>
     <p:spTree>
@@ -14457,7 +16755,240 @@
 </p:sld>
 </file>
 
-<file path=ppt/slides/slide27.xml><?xml version="1.0" encoding="utf-8"?>
+<file path=ppt/slides/slide3.xml><?xml version="1.0" encoding="utf-8"?>
+<p:sld xmlns:a="http://schemas.openxmlformats.org/drawingml/2006/main" xmlns:r="http://schemas.openxmlformats.org/officeDocument/2006/relationships" xmlns:p="http://schemas.openxmlformats.org/presentationml/2006/main">
+  <p:cSld>
+    <p:spTree>
+      <p:nvGrpSpPr>
+        <p:cNvPr id="1" name="">
+          <a:extLst>
+            <a:ext uri="{FF2B5EF4-FFF2-40B4-BE49-F238E27FC236}">
+              <a16:creationId xmlns:a16="http://schemas.microsoft.com/office/drawing/2014/main" id="{A2969254-A18C-72C7-AD1A-9ADC0465A556}"/>
+            </a:ext>
+          </a:extLst>
+        </p:cNvPr>
+        <p:cNvGrpSpPr/>
+        <p:nvPr/>
+      </p:nvGrpSpPr>
+      <p:grpSpPr>
+        <a:xfrm>
+          <a:off x="0" y="0"/>
+          <a:ext cx="0" cy="0"/>
+          <a:chOff x="0" y="0"/>
+          <a:chExt cx="0" cy="0"/>
+        </a:xfrm>
+      </p:grpSpPr>
+      <p:pic>
+        <p:nvPicPr>
+          <p:cNvPr id="3" name="Image 2">
+            <a:extLst>
+              <a:ext uri="{FF2B5EF4-FFF2-40B4-BE49-F238E27FC236}">
+                <a16:creationId xmlns:a16="http://schemas.microsoft.com/office/drawing/2014/main" id="{0902F4BA-09EE-CAF0-604E-054719350D14}"/>
+              </a:ext>
+            </a:extLst>
+          </p:cNvPr>
+          <p:cNvPicPr>
+            <a:picLocks noChangeAspect="1"/>
+          </p:cNvPicPr>
+          <p:nvPr/>
+        </p:nvPicPr>
+        <p:blipFill>
+          <a:blip r:embed="rId2">
+            <a:extLst>
+              <a:ext uri="{28A0092B-C50C-407E-A947-70E740481C1C}">
+                <a14:useLocalDpi xmlns:a14="http://schemas.microsoft.com/office/drawing/2010/main" val="0"/>
+              </a:ext>
+            </a:extLst>
+          </a:blip>
+          <a:srcRect/>
+          <a:stretch/>
+        </p:blipFill>
+        <p:spPr>
+          <a:xfrm rot="5400000">
+            <a:off x="2618395" y="-1604724"/>
+            <a:ext cx="6858000" cy="10067448"/>
+          </a:xfrm>
+          <a:prstGeom prst="rect">
+            <a:avLst/>
+          </a:prstGeom>
+        </p:spPr>
+      </p:pic>
+      <p:sp>
+        <p:nvSpPr>
+          <p:cNvPr id="6" name="Rectangle 5">
+            <a:extLst>
+              <a:ext uri="{FF2B5EF4-FFF2-40B4-BE49-F238E27FC236}">
+                <a16:creationId xmlns:a16="http://schemas.microsoft.com/office/drawing/2014/main" id="{B5DFF6FE-AC55-944F-7BC0-67AC9CCA4E94}"/>
+              </a:ext>
+            </a:extLst>
+          </p:cNvPr>
+          <p:cNvSpPr/>
+          <p:nvPr/>
+        </p:nvSpPr>
+        <p:spPr>
+          <a:xfrm>
+            <a:off x="3138770" y="919679"/>
+            <a:ext cx="7676148" cy="794085"/>
+          </a:xfrm>
+          <a:prstGeom prst="rect">
+            <a:avLst/>
+          </a:prstGeom>
+          <a:solidFill>
+            <a:srgbClr val="AEAEAE">
+              <a:alpha val="89020"/>
+            </a:srgbClr>
+          </a:solidFill>
+          <a:ln w="76200">
+            <a:noFill/>
+          </a:ln>
+        </p:spPr>
+        <p:style>
+          <a:lnRef idx="2">
+            <a:schemeClr val="accent1">
+              <a:shade val="15000"/>
+            </a:schemeClr>
+          </a:lnRef>
+          <a:fillRef idx="1">
+            <a:schemeClr val="accent1"/>
+          </a:fillRef>
+          <a:effectRef idx="0">
+            <a:schemeClr val="accent1"/>
+          </a:effectRef>
+          <a:fontRef idx="minor">
+            <a:schemeClr val="lt1"/>
+          </a:fontRef>
+        </p:style>
+        <p:txBody>
+          <a:bodyPr rtlCol="0" anchor="ctr"/>
+          <a:lstStyle/>
+          <a:p>
+            <a:pPr algn="ctr"/>
+            <a:endParaRPr lang="fr-BE" dirty="0"/>
+          </a:p>
+        </p:txBody>
+      </p:sp>
+      <p:sp>
+        <p:nvSpPr>
+          <p:cNvPr id="7" name="Rectangle 6">
+            <a:extLst>
+              <a:ext uri="{FF2B5EF4-FFF2-40B4-BE49-F238E27FC236}">
+                <a16:creationId xmlns:a16="http://schemas.microsoft.com/office/drawing/2014/main" id="{1CE78AB3-2141-A3CA-C6CE-CA5E736E245F}"/>
+              </a:ext>
+            </a:extLst>
+          </p:cNvPr>
+          <p:cNvSpPr/>
+          <p:nvPr/>
+        </p:nvSpPr>
+        <p:spPr>
+          <a:xfrm>
+            <a:off x="3138769" y="1713764"/>
+            <a:ext cx="1920033" cy="794085"/>
+          </a:xfrm>
+          <a:prstGeom prst="rect">
+            <a:avLst/>
+          </a:prstGeom>
+          <a:solidFill>
+            <a:srgbClr val="AEAEAE">
+              <a:alpha val="89020"/>
+            </a:srgbClr>
+          </a:solidFill>
+          <a:ln w="76200">
+            <a:noFill/>
+          </a:ln>
+        </p:spPr>
+        <p:style>
+          <a:lnRef idx="2">
+            <a:schemeClr val="accent1">
+              <a:shade val="15000"/>
+            </a:schemeClr>
+          </a:lnRef>
+          <a:fillRef idx="1">
+            <a:schemeClr val="accent1"/>
+          </a:fillRef>
+          <a:effectRef idx="0">
+            <a:schemeClr val="accent1"/>
+          </a:effectRef>
+          <a:fontRef idx="minor">
+            <a:schemeClr val="lt1"/>
+          </a:fontRef>
+        </p:style>
+        <p:txBody>
+          <a:bodyPr rtlCol="0" anchor="ctr"/>
+          <a:lstStyle/>
+          <a:p>
+            <a:pPr algn="ctr"/>
+            <a:endParaRPr lang="fr-BE" dirty="0"/>
+          </a:p>
+        </p:txBody>
+      </p:sp>
+      <p:sp>
+        <p:nvSpPr>
+          <p:cNvPr id="4" name="Rectangle 3">
+            <a:extLst>
+              <a:ext uri="{FF2B5EF4-FFF2-40B4-BE49-F238E27FC236}">
+                <a16:creationId xmlns:a16="http://schemas.microsoft.com/office/drawing/2014/main" id="{4CC1B040-6C8A-0CF5-1A28-CBFD713E3C08}"/>
+              </a:ext>
+            </a:extLst>
+          </p:cNvPr>
+          <p:cNvSpPr/>
+          <p:nvPr/>
+        </p:nvSpPr>
+        <p:spPr>
+          <a:xfrm>
+            <a:off x="3138770" y="3380701"/>
+            <a:ext cx="1920033" cy="794085"/>
+          </a:xfrm>
+          <a:prstGeom prst="rect">
+            <a:avLst/>
+          </a:prstGeom>
+          <a:solidFill>
+            <a:srgbClr val="AEAEAE">
+              <a:alpha val="89020"/>
+            </a:srgbClr>
+          </a:solidFill>
+          <a:ln w="76200">
+            <a:noFill/>
+          </a:ln>
+        </p:spPr>
+        <p:style>
+          <a:lnRef idx="2">
+            <a:schemeClr val="accent1">
+              <a:shade val="15000"/>
+            </a:schemeClr>
+          </a:lnRef>
+          <a:fillRef idx="1">
+            <a:schemeClr val="accent1"/>
+          </a:fillRef>
+          <a:effectRef idx="0">
+            <a:schemeClr val="accent1"/>
+          </a:effectRef>
+          <a:fontRef idx="minor">
+            <a:schemeClr val="lt1"/>
+          </a:fontRef>
+        </p:style>
+        <p:txBody>
+          <a:bodyPr rtlCol="0" anchor="ctr"/>
+          <a:lstStyle/>
+          <a:p>
+            <a:pPr algn="ctr"/>
+            <a:endParaRPr lang="fr-BE" dirty="0"/>
+          </a:p>
+        </p:txBody>
+      </p:sp>
+    </p:spTree>
+    <p:extLst>
+      <p:ext uri="{BB962C8B-B14F-4D97-AF65-F5344CB8AC3E}">
+        <p14:creationId xmlns:p14="http://schemas.microsoft.com/office/powerpoint/2010/main" val="3137532103"/>
+      </p:ext>
+    </p:extLst>
+  </p:cSld>
+  <p:clrMapOvr>
+    <a:masterClrMapping/>
+  </p:clrMapOvr>
+</p:sld>
+</file>
+
+<file path=ppt/slides/slide30.xml><?xml version="1.0" encoding="utf-8"?>
 <p:sld xmlns:a="http://schemas.openxmlformats.org/drawingml/2006/main" xmlns:r="http://schemas.openxmlformats.org/officeDocument/2006/relationships" xmlns:p="http://schemas.openxmlformats.org/presentationml/2006/main">
   <p:cSld>
     <p:spTree>
@@ -14617,7 +17148,7 @@
 </p:sld>
 </file>
 
-<file path=ppt/slides/slide28.xml><?xml version="1.0" encoding="utf-8"?>
+<file path=ppt/slides/slide31.xml><?xml version="1.0" encoding="utf-8"?>
 <p:sld xmlns:a="http://schemas.openxmlformats.org/drawingml/2006/main" xmlns:r="http://schemas.openxmlformats.org/officeDocument/2006/relationships" xmlns:p="http://schemas.openxmlformats.org/presentationml/2006/main">
   <p:cSld>
     <p:spTree>
@@ -14910,8 +17441,8 @@
           </a:p>
         </p:txBody>
       </p:sp>
-      <mc:AlternateContent xmlns:mc="http://schemas.openxmlformats.org/markup-compatibility/2006">
-        <mc:Choice xmlns:a14="http://schemas.microsoft.com/office/drawing/2010/main" Requires="a14">
+      <mc:AlternateContent xmlns:mc="http://schemas.openxmlformats.org/markup-compatibility/2006" xmlns:a14="http://schemas.microsoft.com/office/drawing/2010/main">
+        <mc:Choice Requires="a14">
           <p:sp>
             <p:nvSpPr>
               <p:cNvPr id="12" name="ZoneTexte 11">
@@ -14993,7 +17524,7 @@
             </p:txBody>
           </p:sp>
         </mc:Choice>
-        <mc:Fallback>
+        <mc:Fallback xmlns="">
           <p:sp>
             <p:nvSpPr>
               <p:cNvPr id="12" name="ZoneTexte 11">
@@ -15090,8 +17621,8 @@
           </a:p>
         </p:txBody>
       </p:sp>
-      <mc:AlternateContent xmlns:mc="http://schemas.openxmlformats.org/markup-compatibility/2006">
-        <mc:Choice xmlns:a14="http://schemas.microsoft.com/office/drawing/2010/main" Requires="a14">
+      <mc:AlternateContent xmlns:mc="http://schemas.openxmlformats.org/markup-compatibility/2006" xmlns:a14="http://schemas.microsoft.com/office/drawing/2010/main">
+        <mc:Choice Requires="a14">
           <p:sp>
             <p:nvSpPr>
               <p:cNvPr id="14" name="ZoneTexte 13">
@@ -15173,7 +17704,7 @@
             </p:txBody>
           </p:sp>
         </mc:Choice>
-        <mc:Fallback>
+        <mc:Fallback xmlns="">
           <p:sp>
             <p:nvSpPr>
               <p:cNvPr id="14" name="ZoneTexte 13">
@@ -15231,7 +17762,7 @@
 </p:sld>
 </file>
 
-<file path=ppt/slides/slide29.xml><?xml version="1.0" encoding="utf-8"?>
+<file path=ppt/slides/slide32.xml><?xml version="1.0" encoding="utf-8"?>
 <p:sld xmlns:a="http://schemas.openxmlformats.org/drawingml/2006/main" xmlns:r="http://schemas.openxmlformats.org/officeDocument/2006/relationships" xmlns:p="http://schemas.openxmlformats.org/presentationml/2006/main">
   <p:cSld>
     <p:spTree>
@@ -15239,7 +17770,7 @@
         <p:cNvPr id="1" name="">
           <a:extLst>
             <a:ext uri="{FF2B5EF4-FFF2-40B4-BE49-F238E27FC236}">
-              <a16:creationId xmlns:a16="http://schemas.microsoft.com/office/drawing/2014/main" id="{CDA1673F-0B09-3768-FC12-7AEA465C5665}"/>
+              <a16:creationId xmlns:a16="http://schemas.microsoft.com/office/drawing/2014/main" id="{752A85F9-79A2-1A25-BFED-7C8F5820D381}"/>
             </a:ext>
           </a:extLst>
         </p:cNvPr>
@@ -15259,7 +17790,7 @@
           <p:cNvPr id="3" name="Image 2">
             <a:extLst>
               <a:ext uri="{FF2B5EF4-FFF2-40B4-BE49-F238E27FC236}">
-                <a16:creationId xmlns:a16="http://schemas.microsoft.com/office/drawing/2014/main" id="{26F50D16-1B67-7DDB-9D43-970C6F05C314}"/>
+                <a16:creationId xmlns:a16="http://schemas.microsoft.com/office/drawing/2014/main" id="{64856275-C6CF-BC6D-4AD0-C862CC29F0A7}"/>
               </a:ext>
             </a:extLst>
           </p:cNvPr>
@@ -15275,7 +17806,7 @@
           </a:stretch>
         </p:blipFill>
         <p:spPr>
-          <a:xfrm rot="1070503">
+          <a:xfrm rot="1005457">
             <a:off x="891172" y="0"/>
             <a:ext cx="10409655" cy="6858000"/>
           </a:xfrm>
@@ -15295,7 +17826,7 @@
           <p:cNvPr id="4" name="Connecteur droit 3">
             <a:extLst>
               <a:ext uri="{FF2B5EF4-FFF2-40B4-BE49-F238E27FC236}">
-                <a16:creationId xmlns:a16="http://schemas.microsoft.com/office/drawing/2014/main" id="{9A499306-95D5-8D8B-2626-B0156E0C3047}"/>
+                <a16:creationId xmlns:a16="http://schemas.microsoft.com/office/drawing/2014/main" id="{AF9ABA93-074A-957B-A1AF-6B1231023356}"/>
               </a:ext>
             </a:extLst>
           </p:cNvPr>
@@ -15305,8 +17836,8 @@
           <p:nvPr/>
         </p:nvCxnSpPr>
         <p:spPr>
-          <a:xfrm rot="1070503" flipV="1">
-            <a:off x="1902203" y="2121094"/>
+          <a:xfrm rot="1005457" flipV="1">
+            <a:off x="1899684" y="2083981"/>
             <a:ext cx="8626549" cy="2636875"/>
           </a:xfrm>
           <a:prstGeom prst="line">
@@ -15342,7 +17873,7 @@
           <p:cNvPr id="6" name="Connecteur droit 5">
             <a:extLst>
               <a:ext uri="{FF2B5EF4-FFF2-40B4-BE49-F238E27FC236}">
-                <a16:creationId xmlns:a16="http://schemas.microsoft.com/office/drawing/2014/main" id="{B9624859-6DE5-D4B9-FB1E-37A8A6761817}"/>
+                <a16:creationId xmlns:a16="http://schemas.microsoft.com/office/drawing/2014/main" id="{32D8DD87-DF5F-0594-08E4-BE96EB2B7DE7}"/>
               </a:ext>
             </a:extLst>
           </p:cNvPr>
@@ -15352,9 +17883,9 @@
           <p:nvPr/>
         </p:nvCxnSpPr>
         <p:spPr>
-          <a:xfrm rot="1070503" flipH="1" flipV="1">
-            <a:off x="5004823" y="381727"/>
-            <a:ext cx="2161954" cy="6181061"/>
+          <a:xfrm flipV="1">
+            <a:off x="6096000" y="190500"/>
+            <a:ext cx="0" cy="6502400"/>
           </a:xfrm>
           <a:prstGeom prst="line">
             <a:avLst/>
@@ -15389,7 +17920,7 @@
           <p:cNvPr id="7" name="Connecteur droit 6">
             <a:extLst>
               <a:ext uri="{FF2B5EF4-FFF2-40B4-BE49-F238E27FC236}">
-                <a16:creationId xmlns:a16="http://schemas.microsoft.com/office/drawing/2014/main" id="{E9DC0C22-4208-A140-4E9D-E2A0E631C7AE}"/>
+                <a16:creationId xmlns:a16="http://schemas.microsoft.com/office/drawing/2014/main" id="{5A72E49D-2C6B-B9F6-F7C2-6D4FABFDFE13}"/>
               </a:ext>
             </a:extLst>
           </p:cNvPr>
@@ -15399,8 +17930,8 @@
           <p:nvPr/>
         </p:nvCxnSpPr>
         <p:spPr>
-          <a:xfrm rot="1070503">
-            <a:off x="5857860" y="3106769"/>
+          <a:xfrm rot="1005457">
+            <a:off x="5888855" y="3065665"/>
             <a:ext cx="67874" cy="202368"/>
           </a:xfrm>
           <a:prstGeom prst="line">
@@ -15433,7 +17964,7 @@
           <p:cNvPr id="8" name="Connecteur droit 7">
             <a:extLst>
               <a:ext uri="{FF2B5EF4-FFF2-40B4-BE49-F238E27FC236}">
-                <a16:creationId xmlns:a16="http://schemas.microsoft.com/office/drawing/2014/main" id="{25A88312-788D-8940-1595-999698876755}"/>
+                <a16:creationId xmlns:a16="http://schemas.microsoft.com/office/drawing/2014/main" id="{F0B93083-9901-E809-96D1-9993ACE63F81}"/>
               </a:ext>
             </a:extLst>
           </p:cNvPr>
@@ -15443,8 +17974,8 @@
           <p:nvPr/>
         </p:nvCxnSpPr>
         <p:spPr>
-          <a:xfrm rot="1070503" flipH="1">
-            <a:off x="5723848" y="3288101"/>
+          <a:xfrm rot="1005457" flipH="1">
+            <a:off x="5792285" y="3268033"/>
             <a:ext cx="164444" cy="57204"/>
           </a:xfrm>
           <a:prstGeom prst="line">
@@ -15477,7 +18008,7 @@
           <p:cNvPr id="11" name="Ellipse 10">
             <a:extLst>
               <a:ext uri="{FF2B5EF4-FFF2-40B4-BE49-F238E27FC236}">
-                <a16:creationId xmlns:a16="http://schemas.microsoft.com/office/drawing/2014/main" id="{F6A9AE29-E508-E3B4-A943-8C25B03291D6}"/>
+                <a16:creationId xmlns:a16="http://schemas.microsoft.com/office/drawing/2014/main" id="{578FE870-3D2B-B813-014C-CB1915FDA302}"/>
               </a:ext>
             </a:extLst>
           </p:cNvPr>
@@ -15485,8 +18016,8 @@
           <p:nvPr/>
         </p:nvSpPr>
         <p:spPr>
-          <a:xfrm rot="1070503">
-            <a:off x="4369850" y="3380066"/>
+          <a:xfrm rot="1005457">
+            <a:off x="4405324" y="3392804"/>
             <a:ext cx="81280" cy="72390"/>
           </a:xfrm>
           <a:prstGeom prst="ellipse">
@@ -15524,14 +18055,14 @@
           </a:p>
         </p:txBody>
       </p:sp>
-      <mc:AlternateContent xmlns:mc="http://schemas.openxmlformats.org/markup-compatibility/2006">
-        <mc:Choice xmlns:a14="http://schemas.microsoft.com/office/drawing/2010/main" Requires="a14">
+      <mc:AlternateContent xmlns:mc="http://schemas.openxmlformats.org/markup-compatibility/2006" xmlns:a14="http://schemas.microsoft.com/office/drawing/2010/main">
+        <mc:Choice Requires="a14">
           <p:sp>
             <p:nvSpPr>
               <p:cNvPr id="12" name="ZoneTexte 11">
                 <a:extLst>
                   <a:ext uri="{FF2B5EF4-FFF2-40B4-BE49-F238E27FC236}">
-                    <a16:creationId xmlns:a16="http://schemas.microsoft.com/office/drawing/2014/main" id="{E95C98A9-64D4-53EC-5F70-0ECFF0871328}"/>
+                    <a16:creationId xmlns:a16="http://schemas.microsoft.com/office/drawing/2014/main" id="{2DDC0263-933D-5B2F-12F7-2A2AB1754625}"/>
                   </a:ext>
                 </a:extLst>
               </p:cNvPr>
@@ -15539,8 +18070,8 @@
               <p:nvPr/>
             </p:nvSpPr>
             <p:spPr>
-              <a:xfrm rot="1070503">
-                <a:off x="4311330" y="2585140"/>
+              <a:xfrm rot="1005457">
+                <a:off x="4165500" y="2520314"/>
                 <a:ext cx="873760" cy="584775"/>
               </a:xfrm>
               <a:prstGeom prst="rect">
@@ -15607,13 +18138,13 @@
             </p:txBody>
           </p:sp>
         </mc:Choice>
-        <mc:Fallback>
+        <mc:Fallback xmlns="">
           <p:sp>
             <p:nvSpPr>
               <p:cNvPr id="12" name="ZoneTexte 11">
                 <a:extLst>
                   <a:ext uri="{FF2B5EF4-FFF2-40B4-BE49-F238E27FC236}">
-                    <a16:creationId xmlns:a16="http://schemas.microsoft.com/office/drawing/2014/main" id="{E95C98A9-64D4-53EC-5F70-0ECFF0871328}"/>
+                    <a16:creationId xmlns:a16="http://schemas.microsoft.com/office/drawing/2014/main" id="{2DDC0263-933D-5B2F-12F7-2A2AB1754625}"/>
                   </a:ext>
                 </a:extLst>
               </p:cNvPr>
@@ -15623,8 +18154,8 @@
               <p:nvPr/>
             </p:nvSpPr>
             <p:spPr>
-              <a:xfrm rot="1070503">
-                <a:off x="4311330" y="2585140"/>
+              <a:xfrm rot="1005457">
+                <a:off x="4165500" y="2520314"/>
                 <a:ext cx="873760" cy="584775"/>
               </a:xfrm>
               <a:prstGeom prst="rect">
@@ -15657,7 +18188,7 @@
           <p:cNvPr id="13" name="Ellipse 12">
             <a:extLst>
               <a:ext uri="{FF2B5EF4-FFF2-40B4-BE49-F238E27FC236}">
-                <a16:creationId xmlns:a16="http://schemas.microsoft.com/office/drawing/2014/main" id="{37E088F7-BE32-1AFA-7ACF-DE238EE4EAC8}"/>
+                <a16:creationId xmlns:a16="http://schemas.microsoft.com/office/drawing/2014/main" id="{D4A89381-E697-DD3B-1944-24C97705112A}"/>
               </a:ext>
             </a:extLst>
           </p:cNvPr>
@@ -15665,8 +18196,8 @@
           <p:nvPr/>
         </p:nvSpPr>
         <p:spPr>
-          <a:xfrm rot="1070503">
-            <a:off x="7734809" y="3416905"/>
+          <a:xfrm rot="1005457">
+            <a:off x="7754791" y="3362981"/>
             <a:ext cx="81280" cy="72390"/>
           </a:xfrm>
           <a:prstGeom prst="ellipse">
@@ -15704,14 +18235,14 @@
           </a:p>
         </p:txBody>
       </p:sp>
-      <mc:AlternateContent xmlns:mc="http://schemas.openxmlformats.org/markup-compatibility/2006">
-        <mc:Choice xmlns:a14="http://schemas.microsoft.com/office/drawing/2010/main" Requires="a14">
+      <mc:AlternateContent xmlns:mc="http://schemas.openxmlformats.org/markup-compatibility/2006" xmlns:a14="http://schemas.microsoft.com/office/drawing/2010/main">
+        <mc:Choice Requires="a14">
           <p:sp>
             <p:nvSpPr>
               <p:cNvPr id="14" name="ZoneTexte 13">
                 <a:extLst>
                   <a:ext uri="{FF2B5EF4-FFF2-40B4-BE49-F238E27FC236}">
-                    <a16:creationId xmlns:a16="http://schemas.microsoft.com/office/drawing/2014/main" id="{4CBD8408-9CA3-C707-20C6-7BA11B80D3CB}"/>
+                    <a16:creationId xmlns:a16="http://schemas.microsoft.com/office/drawing/2014/main" id="{D1941055-3782-A069-7B43-CE80360975BE}"/>
                   </a:ext>
                 </a:extLst>
               </p:cNvPr>
@@ -15719,8 +18250,8 @@
               <p:nvPr/>
             </p:nvSpPr>
             <p:spPr>
-              <a:xfrm rot="1070503">
-                <a:off x="7342122" y="2382619"/>
+              <a:xfrm rot="1005457">
+                <a:off x="7123535" y="2365027"/>
                 <a:ext cx="873760" cy="584775"/>
               </a:xfrm>
               <a:prstGeom prst="rect">
@@ -15787,13 +18318,13 @@
             </p:txBody>
           </p:sp>
         </mc:Choice>
-        <mc:Fallback>
+        <mc:Fallback xmlns="">
           <p:sp>
             <p:nvSpPr>
               <p:cNvPr id="14" name="ZoneTexte 13">
                 <a:extLst>
                   <a:ext uri="{FF2B5EF4-FFF2-40B4-BE49-F238E27FC236}">
-                    <a16:creationId xmlns:a16="http://schemas.microsoft.com/office/drawing/2014/main" id="{4CBD8408-9CA3-C707-20C6-7BA11B80D3CB}"/>
+                    <a16:creationId xmlns:a16="http://schemas.microsoft.com/office/drawing/2014/main" id="{D1941055-3782-A069-7B43-CE80360975BE}"/>
                   </a:ext>
                 </a:extLst>
               </p:cNvPr>
@@ -15803,8 +18334,8 @@
               <p:nvPr/>
             </p:nvSpPr>
             <p:spPr>
-              <a:xfrm rot="1070503">
-                <a:off x="7342122" y="2382619"/>
+              <a:xfrm rot="1005457">
+                <a:off x="7123535" y="2365027"/>
                 <a:ext cx="873760" cy="584775"/>
               </a:xfrm>
               <a:prstGeom prst="rect">
@@ -15835,7 +18366,7 @@
     </p:spTree>
     <p:extLst>
       <p:ext uri="{BB962C8B-B14F-4D97-AF65-F5344CB8AC3E}">
-        <p14:creationId xmlns:p14="http://schemas.microsoft.com/office/powerpoint/2010/main" val="2729181029"/>
+        <p14:creationId xmlns:p14="http://schemas.microsoft.com/office/powerpoint/2010/main" val="75656025"/>
       </p:ext>
     </p:extLst>
   </p:cSld>
@@ -15845,240 +18376,7 @@
 </p:sld>
 </file>
 
-<file path=ppt/slides/slide3.xml><?xml version="1.0" encoding="utf-8"?>
-<p:sld xmlns:a="http://schemas.openxmlformats.org/drawingml/2006/main" xmlns:r="http://schemas.openxmlformats.org/officeDocument/2006/relationships" xmlns:p="http://schemas.openxmlformats.org/presentationml/2006/main">
-  <p:cSld>
-    <p:spTree>
-      <p:nvGrpSpPr>
-        <p:cNvPr id="1" name="">
-          <a:extLst>
-            <a:ext uri="{FF2B5EF4-FFF2-40B4-BE49-F238E27FC236}">
-              <a16:creationId xmlns:a16="http://schemas.microsoft.com/office/drawing/2014/main" id="{A2969254-A18C-72C7-AD1A-9ADC0465A556}"/>
-            </a:ext>
-          </a:extLst>
-        </p:cNvPr>
-        <p:cNvGrpSpPr/>
-        <p:nvPr/>
-      </p:nvGrpSpPr>
-      <p:grpSpPr>
-        <a:xfrm>
-          <a:off x="0" y="0"/>
-          <a:ext cx="0" cy="0"/>
-          <a:chOff x="0" y="0"/>
-          <a:chExt cx="0" cy="0"/>
-        </a:xfrm>
-      </p:grpSpPr>
-      <p:pic>
-        <p:nvPicPr>
-          <p:cNvPr id="3" name="Image 2">
-            <a:extLst>
-              <a:ext uri="{FF2B5EF4-FFF2-40B4-BE49-F238E27FC236}">
-                <a16:creationId xmlns:a16="http://schemas.microsoft.com/office/drawing/2014/main" id="{0902F4BA-09EE-CAF0-604E-054719350D14}"/>
-              </a:ext>
-            </a:extLst>
-          </p:cNvPr>
-          <p:cNvPicPr>
-            <a:picLocks noChangeAspect="1"/>
-          </p:cNvPicPr>
-          <p:nvPr/>
-        </p:nvPicPr>
-        <p:blipFill>
-          <a:blip r:embed="rId2">
-            <a:extLst>
-              <a:ext uri="{28A0092B-C50C-407E-A947-70E740481C1C}">
-                <a14:useLocalDpi xmlns:a14="http://schemas.microsoft.com/office/drawing/2010/main" val="0"/>
-              </a:ext>
-            </a:extLst>
-          </a:blip>
-          <a:srcRect/>
-          <a:stretch/>
-        </p:blipFill>
-        <p:spPr>
-          <a:xfrm rot="5400000">
-            <a:off x="2618395" y="-1604724"/>
-            <a:ext cx="6858000" cy="10067448"/>
-          </a:xfrm>
-          <a:prstGeom prst="rect">
-            <a:avLst/>
-          </a:prstGeom>
-        </p:spPr>
-      </p:pic>
-      <p:sp>
-        <p:nvSpPr>
-          <p:cNvPr id="6" name="Rectangle 5">
-            <a:extLst>
-              <a:ext uri="{FF2B5EF4-FFF2-40B4-BE49-F238E27FC236}">
-                <a16:creationId xmlns:a16="http://schemas.microsoft.com/office/drawing/2014/main" id="{B5DFF6FE-AC55-944F-7BC0-67AC9CCA4E94}"/>
-              </a:ext>
-            </a:extLst>
-          </p:cNvPr>
-          <p:cNvSpPr/>
-          <p:nvPr/>
-        </p:nvSpPr>
-        <p:spPr>
-          <a:xfrm>
-            <a:off x="3138770" y="919679"/>
-            <a:ext cx="7676148" cy="794085"/>
-          </a:xfrm>
-          <a:prstGeom prst="rect">
-            <a:avLst/>
-          </a:prstGeom>
-          <a:solidFill>
-            <a:srgbClr val="AEAEAE">
-              <a:alpha val="89020"/>
-            </a:srgbClr>
-          </a:solidFill>
-          <a:ln w="76200">
-            <a:noFill/>
-          </a:ln>
-        </p:spPr>
-        <p:style>
-          <a:lnRef idx="2">
-            <a:schemeClr val="accent1">
-              <a:shade val="15000"/>
-            </a:schemeClr>
-          </a:lnRef>
-          <a:fillRef idx="1">
-            <a:schemeClr val="accent1"/>
-          </a:fillRef>
-          <a:effectRef idx="0">
-            <a:schemeClr val="accent1"/>
-          </a:effectRef>
-          <a:fontRef idx="minor">
-            <a:schemeClr val="lt1"/>
-          </a:fontRef>
-        </p:style>
-        <p:txBody>
-          <a:bodyPr rtlCol="0" anchor="ctr"/>
-          <a:lstStyle/>
-          <a:p>
-            <a:pPr algn="ctr"/>
-            <a:endParaRPr lang="fr-BE" dirty="0"/>
-          </a:p>
-        </p:txBody>
-      </p:sp>
-      <p:sp>
-        <p:nvSpPr>
-          <p:cNvPr id="7" name="Rectangle 6">
-            <a:extLst>
-              <a:ext uri="{FF2B5EF4-FFF2-40B4-BE49-F238E27FC236}">
-                <a16:creationId xmlns:a16="http://schemas.microsoft.com/office/drawing/2014/main" id="{1CE78AB3-2141-A3CA-C6CE-CA5E736E245F}"/>
-              </a:ext>
-            </a:extLst>
-          </p:cNvPr>
-          <p:cNvSpPr/>
-          <p:nvPr/>
-        </p:nvSpPr>
-        <p:spPr>
-          <a:xfrm>
-            <a:off x="3138769" y="1713764"/>
-            <a:ext cx="1920033" cy="794085"/>
-          </a:xfrm>
-          <a:prstGeom prst="rect">
-            <a:avLst/>
-          </a:prstGeom>
-          <a:solidFill>
-            <a:srgbClr val="AEAEAE">
-              <a:alpha val="89020"/>
-            </a:srgbClr>
-          </a:solidFill>
-          <a:ln w="76200">
-            <a:noFill/>
-          </a:ln>
-        </p:spPr>
-        <p:style>
-          <a:lnRef idx="2">
-            <a:schemeClr val="accent1">
-              <a:shade val="15000"/>
-            </a:schemeClr>
-          </a:lnRef>
-          <a:fillRef idx="1">
-            <a:schemeClr val="accent1"/>
-          </a:fillRef>
-          <a:effectRef idx="0">
-            <a:schemeClr val="accent1"/>
-          </a:effectRef>
-          <a:fontRef idx="minor">
-            <a:schemeClr val="lt1"/>
-          </a:fontRef>
-        </p:style>
-        <p:txBody>
-          <a:bodyPr rtlCol="0" anchor="ctr"/>
-          <a:lstStyle/>
-          <a:p>
-            <a:pPr algn="ctr"/>
-            <a:endParaRPr lang="fr-BE" dirty="0"/>
-          </a:p>
-        </p:txBody>
-      </p:sp>
-      <p:sp>
-        <p:nvSpPr>
-          <p:cNvPr id="4" name="Rectangle 3">
-            <a:extLst>
-              <a:ext uri="{FF2B5EF4-FFF2-40B4-BE49-F238E27FC236}">
-                <a16:creationId xmlns:a16="http://schemas.microsoft.com/office/drawing/2014/main" id="{4CC1B040-6C8A-0CF5-1A28-CBFD713E3C08}"/>
-              </a:ext>
-            </a:extLst>
-          </p:cNvPr>
-          <p:cNvSpPr/>
-          <p:nvPr/>
-        </p:nvSpPr>
-        <p:spPr>
-          <a:xfrm>
-            <a:off x="3138770" y="3380701"/>
-            <a:ext cx="1920033" cy="794085"/>
-          </a:xfrm>
-          <a:prstGeom prst="rect">
-            <a:avLst/>
-          </a:prstGeom>
-          <a:solidFill>
-            <a:srgbClr val="AEAEAE">
-              <a:alpha val="89020"/>
-            </a:srgbClr>
-          </a:solidFill>
-          <a:ln w="76200">
-            <a:noFill/>
-          </a:ln>
-        </p:spPr>
-        <p:style>
-          <a:lnRef idx="2">
-            <a:schemeClr val="accent1">
-              <a:shade val="15000"/>
-            </a:schemeClr>
-          </a:lnRef>
-          <a:fillRef idx="1">
-            <a:schemeClr val="accent1"/>
-          </a:fillRef>
-          <a:effectRef idx="0">
-            <a:schemeClr val="accent1"/>
-          </a:effectRef>
-          <a:fontRef idx="minor">
-            <a:schemeClr val="lt1"/>
-          </a:fontRef>
-        </p:style>
-        <p:txBody>
-          <a:bodyPr rtlCol="0" anchor="ctr"/>
-          <a:lstStyle/>
-          <a:p>
-            <a:pPr algn="ctr"/>
-            <a:endParaRPr lang="fr-BE" dirty="0"/>
-          </a:p>
-        </p:txBody>
-      </p:sp>
-    </p:spTree>
-    <p:extLst>
-      <p:ext uri="{BB962C8B-B14F-4D97-AF65-F5344CB8AC3E}">
-        <p14:creationId xmlns:p14="http://schemas.microsoft.com/office/powerpoint/2010/main" val="3137532103"/>
-      </p:ext>
-    </p:extLst>
-  </p:cSld>
-  <p:clrMapOvr>
-    <a:masterClrMapping/>
-  </p:clrMapOvr>
-</p:sld>
-</file>
-
-<file path=ppt/slides/slide30.xml><?xml version="1.0" encoding="utf-8"?>
+<file path=ppt/slides/slide33.xml><?xml version="1.0" encoding="utf-8"?>
 <p:sld xmlns:a="http://schemas.openxmlformats.org/drawingml/2006/main" xmlns:r="http://schemas.openxmlformats.org/officeDocument/2006/relationships" xmlns:p="http://schemas.openxmlformats.org/presentationml/2006/main">
   <p:cSld>
     <p:spTree>
@@ -16144,7 +18442,7 @@
 </p:sld>
 </file>
 
-<file path=ppt/slides/slide31.xml><?xml version="1.0" encoding="utf-8"?>
+<file path=ppt/slides/slide34.xml><?xml version="1.0" encoding="utf-8"?>
 <p:sld xmlns:a="http://schemas.openxmlformats.org/drawingml/2006/main" xmlns:r="http://schemas.openxmlformats.org/officeDocument/2006/relationships" xmlns:p="http://schemas.openxmlformats.org/presentationml/2006/main">
   <p:cSld>
     <p:spTree>
@@ -16210,7 +18508,7 @@
 </p:sld>
 </file>
 
-<file path=ppt/slides/slide32.xml><?xml version="1.0" encoding="utf-8"?>
+<file path=ppt/slides/slide35.xml><?xml version="1.0" encoding="utf-8"?>
 <p:sld xmlns:a="http://schemas.openxmlformats.org/drawingml/2006/main" xmlns:r="http://schemas.openxmlformats.org/officeDocument/2006/relationships" xmlns:p="http://schemas.openxmlformats.org/presentationml/2006/main">
   <p:cSld>
     <p:spTree>
@@ -16276,7 +18574,7 @@
 </p:sld>
 </file>
 
-<file path=ppt/slides/slide33.xml><?xml version="1.0" encoding="utf-8"?>
+<file path=ppt/slides/slide36.xml><?xml version="1.0" encoding="utf-8"?>
 <p:sld xmlns:a="http://schemas.openxmlformats.org/drawingml/2006/main" xmlns:r="http://schemas.openxmlformats.org/officeDocument/2006/relationships" xmlns:p="http://schemas.openxmlformats.org/presentationml/2006/main">
   <p:cSld>
     <p:spTree>
@@ -16342,7 +18640,7 @@
 </p:sld>
 </file>
 
-<file path=ppt/slides/slide34.xml><?xml version="1.0" encoding="utf-8"?>
+<file path=ppt/slides/slide37.xml><?xml version="1.0" encoding="utf-8"?>
 <p:sld xmlns:a="http://schemas.openxmlformats.org/drawingml/2006/main" xmlns:r="http://schemas.openxmlformats.org/officeDocument/2006/relationships" xmlns:p="http://schemas.openxmlformats.org/presentationml/2006/main">
   <p:cSld>
     <p:spTree>
@@ -16608,7 +18906,7 @@
 </p:sld>
 </file>
 
-<file path=ppt/slides/slide35.xml><?xml version="1.0" encoding="utf-8"?>
+<file path=ppt/slides/slide38.xml><?xml version="1.0" encoding="utf-8"?>
 <p:sld xmlns:a="http://schemas.openxmlformats.org/drawingml/2006/main" xmlns:r="http://schemas.openxmlformats.org/officeDocument/2006/relationships" xmlns:p="http://schemas.openxmlformats.org/presentationml/2006/main">
   <p:cSld>
     <p:spTree>
@@ -16674,7 +18972,7 @@
 </p:sld>
 </file>
 
-<file path=ppt/slides/slide36.xml><?xml version="1.0" encoding="utf-8"?>
+<file path=ppt/slides/slide39.xml><?xml version="1.0" encoding="utf-8"?>
 <p:sld xmlns:a="http://schemas.openxmlformats.org/drawingml/2006/main" xmlns:r="http://schemas.openxmlformats.org/officeDocument/2006/relationships" xmlns:p="http://schemas.openxmlformats.org/presentationml/2006/main">
   <p:cSld>
     <p:spTree>
@@ -16682,7 +18980,7 @@
         <p:cNvPr id="1" name="">
           <a:extLst>
             <a:ext uri="{FF2B5EF4-FFF2-40B4-BE49-F238E27FC236}">
-              <a16:creationId xmlns:a16="http://schemas.microsoft.com/office/drawing/2014/main" id="{994D1C35-BA82-56B6-CE39-F858B82D2F60}"/>
+              <a16:creationId xmlns:a16="http://schemas.microsoft.com/office/drawing/2014/main" id="{CDA1B68F-A377-813A-E974-F075DD496C6B}"/>
             </a:ext>
           </a:extLst>
         </p:cNvPr>
@@ -16697,268 +18995,363 @@
           <a:chExt cx="0" cy="0"/>
         </a:xfrm>
       </p:grpSpPr>
-      <p:pic>
-        <p:nvPicPr>
-          <p:cNvPr id="3" name="Image 2">
-            <a:extLst>
-              <a:ext uri="{FF2B5EF4-FFF2-40B4-BE49-F238E27FC236}">
-                <a16:creationId xmlns:a16="http://schemas.microsoft.com/office/drawing/2014/main" id="{EE632BB3-00E4-36DD-25A2-2AF8AADEF486}"/>
-              </a:ext>
-            </a:extLst>
-          </p:cNvPr>
-          <p:cNvPicPr>
-            <a:picLocks noChangeAspect="1"/>
-          </p:cNvPicPr>
+      <p:grpSp>
+        <p:nvGrpSpPr>
+          <p:cNvPr id="21" name="Groupe 20">
+            <a:extLst>
+              <a:ext uri="{FF2B5EF4-FFF2-40B4-BE49-F238E27FC236}">
+                <a16:creationId xmlns:a16="http://schemas.microsoft.com/office/drawing/2014/main" id="{C2DD83B3-59F8-C201-9DA9-86504AC05602}"/>
+              </a:ext>
+            </a:extLst>
+          </p:cNvPr>
+          <p:cNvGrpSpPr/>
           <p:nvPr/>
-        </p:nvPicPr>
-        <p:blipFill>
-          <a:blip r:embed="rId2"/>
-          <a:stretch>
-            <a:fillRect/>
-          </a:stretch>
-        </p:blipFill>
-        <p:spPr>
-          <a:xfrm>
-            <a:off x="428607" y="0"/>
-            <a:ext cx="6925817" cy="6858000"/>
-          </a:xfrm>
-          <a:prstGeom prst="rect">
-            <a:avLst/>
-          </a:prstGeom>
-        </p:spPr>
-      </p:pic>
-      <p:pic>
-        <p:nvPicPr>
-          <p:cNvPr id="5" name="Image 4">
-            <a:extLst>
-              <a:ext uri="{FF2B5EF4-FFF2-40B4-BE49-F238E27FC236}">
-                <a16:creationId xmlns:a16="http://schemas.microsoft.com/office/drawing/2014/main" id="{1AFF92CA-07CE-828B-BE2C-2DF08781285A}"/>
-              </a:ext>
-            </a:extLst>
-          </p:cNvPr>
-          <p:cNvPicPr>
-            <a:picLocks noChangeAspect="1"/>
-          </p:cNvPicPr>
-          <p:nvPr/>
-        </p:nvPicPr>
-        <p:blipFill>
-          <a:blip r:embed="rId3"/>
-          <a:stretch>
-            <a:fillRect/>
-          </a:stretch>
-        </p:blipFill>
-        <p:spPr>
-          <a:xfrm>
-            <a:off x="6907424" y="0"/>
-            <a:ext cx="5284575" cy="2849526"/>
-          </a:xfrm>
-          <a:prstGeom prst="rect">
-            <a:avLst/>
-          </a:prstGeom>
-        </p:spPr>
-      </p:pic>
+        </p:nvGrpSpPr>
+        <p:grpSpPr>
+          <a:xfrm rot="5400000">
+            <a:off x="3782922" y="-46684"/>
+            <a:ext cx="4876137" cy="6647610"/>
+            <a:chOff x="3711359" y="45290"/>
+            <a:chExt cx="4876137" cy="6647610"/>
+          </a:xfrm>
+        </p:grpSpPr>
+        <p:pic>
+          <p:nvPicPr>
+            <p:cNvPr id="9" name="Image 8">
+              <a:extLst>
+                <a:ext uri="{FF2B5EF4-FFF2-40B4-BE49-F238E27FC236}">
+                  <a16:creationId xmlns:a16="http://schemas.microsoft.com/office/drawing/2014/main" id="{B5B96FC8-B5A4-702E-3BC8-C391F9F8E750}"/>
+                </a:ext>
+              </a:extLst>
+            </p:cNvPr>
+            <p:cNvPicPr>
+              <a:picLocks noChangeAspect="1"/>
+            </p:cNvPicPr>
+            <p:nvPr/>
+          </p:nvPicPr>
+          <p:blipFill>
+            <a:blip r:embed="rId2"/>
+            <a:stretch>
+              <a:fillRect/>
+            </a:stretch>
+          </p:blipFill>
+          <p:spPr>
+            <a:xfrm rot="17213358">
+              <a:off x="2727570" y="1314299"/>
+              <a:ext cx="6623727" cy="4085710"/>
+            </a:xfrm>
+            <a:prstGeom prst="rect">
+              <a:avLst/>
+            </a:prstGeom>
+          </p:spPr>
+        </p:pic>
+        <p:sp>
+          <p:nvSpPr>
+            <p:cNvPr id="20" name="Rectangle 19">
+              <a:extLst>
+                <a:ext uri="{FF2B5EF4-FFF2-40B4-BE49-F238E27FC236}">
+                  <a16:creationId xmlns:a16="http://schemas.microsoft.com/office/drawing/2014/main" id="{DEF25703-2CF1-717C-B43F-EAEFEEC6EA2D}"/>
+                </a:ext>
+              </a:extLst>
+            </p:cNvPr>
+            <p:cNvSpPr/>
+            <p:nvPr/>
+          </p:nvSpPr>
+          <p:spPr>
+            <a:xfrm>
+              <a:off x="5709842" y="3009348"/>
+              <a:ext cx="1225110" cy="784054"/>
+            </a:xfrm>
+            <a:prstGeom prst="rect">
+              <a:avLst/>
+            </a:prstGeom>
+            <a:solidFill>
+              <a:schemeClr val="bg1"/>
+            </a:solidFill>
+            <a:ln>
+              <a:noFill/>
+            </a:ln>
+          </p:spPr>
+          <p:style>
+            <a:lnRef idx="2">
+              <a:schemeClr val="accent1">
+                <a:shade val="15000"/>
+              </a:schemeClr>
+            </a:lnRef>
+            <a:fillRef idx="1">
+              <a:schemeClr val="accent1"/>
+            </a:fillRef>
+            <a:effectRef idx="0">
+              <a:schemeClr val="accent1"/>
+            </a:effectRef>
+            <a:fontRef idx="minor">
+              <a:schemeClr val="lt1"/>
+            </a:fontRef>
+          </p:style>
+          <p:txBody>
+            <a:bodyPr rtlCol="0" anchor="ctr"/>
+            <a:lstStyle/>
+            <a:p>
+              <a:pPr algn="ctr"/>
+              <a:endParaRPr lang="fr-BE"/>
+            </a:p>
+          </p:txBody>
+        </p:sp>
+        <p:cxnSp>
+          <p:nvCxnSpPr>
+            <p:cNvPr id="4" name="Connecteur droit 3">
+              <a:extLst>
+                <a:ext uri="{FF2B5EF4-FFF2-40B4-BE49-F238E27FC236}">
+                  <a16:creationId xmlns:a16="http://schemas.microsoft.com/office/drawing/2014/main" id="{33CC56DD-539A-8B26-30E4-D13BBE8C1359}"/>
+                </a:ext>
+              </a:extLst>
+            </p:cNvPr>
+            <p:cNvCxnSpPr>
+              <a:cxnSpLocks/>
+            </p:cNvCxnSpPr>
+            <p:nvPr/>
+          </p:nvCxnSpPr>
+          <p:spPr>
+            <a:xfrm rot="17053680" flipH="1" flipV="1">
+              <a:off x="5546648" y="963585"/>
+              <a:ext cx="1351865" cy="4729830"/>
+            </a:xfrm>
+            <a:prstGeom prst="line">
+              <a:avLst/>
+            </a:prstGeom>
+            <a:ln w="38100" cap="flat" cmpd="sng" algn="ctr">
+              <a:solidFill>
+                <a:schemeClr val="accent1">
+                  <a:lumMod val="60000"/>
+                  <a:lumOff val="40000"/>
+                </a:schemeClr>
+              </a:solidFill>
+              <a:prstDash val="solid"/>
+              <a:round/>
+              <a:headEnd type="none" w="med" len="med"/>
+              <a:tailEnd type="arrow" w="med" len="med"/>
+            </a:ln>
+          </p:spPr>
+          <p:style>
+            <a:lnRef idx="0">
+              <a:scrgbClr r="0" g="0" b="0"/>
+            </a:lnRef>
+            <a:fillRef idx="0">
+              <a:scrgbClr r="0" g="0" b="0"/>
+            </a:fillRef>
+            <a:effectRef idx="0">
+              <a:scrgbClr r="0" g="0" b="0"/>
+            </a:effectRef>
+            <a:fontRef idx="minor">
+              <a:schemeClr val="tx1"/>
+            </a:fontRef>
+          </p:style>
+        </p:cxnSp>
+        <p:cxnSp>
+          <p:nvCxnSpPr>
+            <p:cNvPr id="6" name="Connecteur droit 5">
+              <a:extLst>
+                <a:ext uri="{FF2B5EF4-FFF2-40B4-BE49-F238E27FC236}">
+                  <a16:creationId xmlns:a16="http://schemas.microsoft.com/office/drawing/2014/main" id="{1D9111CB-3D1B-C6D4-5652-84E0269484C5}"/>
+                </a:ext>
+              </a:extLst>
+            </p:cNvPr>
+            <p:cNvCxnSpPr>
+              <a:cxnSpLocks/>
+            </p:cNvCxnSpPr>
+            <p:nvPr/>
+          </p:nvCxnSpPr>
+          <p:spPr>
+            <a:xfrm flipV="1">
+              <a:off x="6096000" y="190500"/>
+              <a:ext cx="0" cy="6502400"/>
+            </a:xfrm>
+            <a:prstGeom prst="line">
+              <a:avLst/>
+            </a:prstGeom>
+            <a:ln w="38100" cap="flat" cmpd="sng" algn="ctr">
+              <a:solidFill>
+                <a:schemeClr val="accent1">
+                  <a:lumMod val="60000"/>
+                  <a:lumOff val="40000"/>
+                </a:schemeClr>
+              </a:solidFill>
+              <a:prstDash val="solid"/>
+              <a:round/>
+              <a:headEnd type="none" w="med" len="med"/>
+              <a:tailEnd type="arrow" w="med" len="med"/>
+            </a:ln>
+          </p:spPr>
+          <p:style>
+            <a:lnRef idx="0">
+              <a:scrgbClr r="0" g="0" b="0"/>
+            </a:lnRef>
+            <a:fillRef idx="0">
+              <a:scrgbClr r="0" g="0" b="0"/>
+            </a:fillRef>
+            <a:effectRef idx="0">
+              <a:scrgbClr r="0" g="0" b="0"/>
+            </a:effectRef>
+            <a:fontRef idx="minor">
+              <a:schemeClr val="tx1"/>
+            </a:fontRef>
+          </p:style>
+        </p:cxnSp>
+        <p:sp>
+          <p:nvSpPr>
+            <p:cNvPr id="17" name="ZoneTexte 16">
+              <a:extLst>
+                <a:ext uri="{FF2B5EF4-FFF2-40B4-BE49-F238E27FC236}">
+                  <a16:creationId xmlns:a16="http://schemas.microsoft.com/office/drawing/2014/main" id="{E71021A3-CBA1-DC8F-315C-59FB6EB5C70A}"/>
+                </a:ext>
+              </a:extLst>
+            </p:cNvPr>
+            <p:cNvSpPr txBox="1"/>
+            <p:nvPr/>
+          </p:nvSpPr>
+          <p:spPr>
+            <a:xfrm rot="16200000">
+              <a:off x="3745723" y="2780115"/>
+              <a:ext cx="516047" cy="584775"/>
+            </a:xfrm>
+            <a:prstGeom prst="rect">
+              <a:avLst/>
+            </a:prstGeom>
+            <a:noFill/>
+          </p:spPr>
+          <p:txBody>
+            <a:bodyPr wrap="square" rtlCol="0">
+              <a:spAutoFit/>
+            </a:bodyPr>
+            <a:lstStyle/>
+            <a:p>
+              <a:r>
+                <a:rPr lang="fr-BE" sz="3200" dirty="0">
+                  <a:solidFill>
+                    <a:schemeClr val="accent1">
+                      <a:lumMod val="60000"/>
+                      <a:lumOff val="40000"/>
+                    </a:schemeClr>
+                  </a:solidFill>
+                </a:rPr>
+                <a:t>Y</a:t>
+              </a:r>
+              <a:endParaRPr lang="fr-BE" dirty="0">
+                <a:solidFill>
+                  <a:schemeClr val="accent1">
+                    <a:lumMod val="60000"/>
+                    <a:lumOff val="40000"/>
+                  </a:schemeClr>
+                </a:solidFill>
+              </a:endParaRPr>
+            </a:p>
+          </p:txBody>
+        </p:sp>
+        <p:sp>
+          <p:nvSpPr>
+            <p:cNvPr id="18" name="ZoneTexte 17">
+              <a:extLst>
+                <a:ext uri="{FF2B5EF4-FFF2-40B4-BE49-F238E27FC236}">
+                  <a16:creationId xmlns:a16="http://schemas.microsoft.com/office/drawing/2014/main" id="{FDEE025F-43CE-482A-DBEF-AE869C325982}"/>
+                </a:ext>
+              </a:extLst>
+            </p:cNvPr>
+            <p:cNvSpPr txBox="1"/>
+            <p:nvPr/>
+          </p:nvSpPr>
+          <p:spPr>
+            <a:xfrm rot="16200000">
+              <a:off x="5451819" y="48040"/>
+              <a:ext cx="516047" cy="584775"/>
+            </a:xfrm>
+            <a:prstGeom prst="rect">
+              <a:avLst/>
+            </a:prstGeom>
+            <a:noFill/>
+          </p:spPr>
+          <p:txBody>
+            <a:bodyPr wrap="square" rtlCol="0">
+              <a:spAutoFit/>
+            </a:bodyPr>
+            <a:lstStyle/>
+            <a:p>
+              <a:r>
+                <a:rPr lang="fr-BE" sz="3200" dirty="0">
+                  <a:solidFill>
+                    <a:schemeClr val="accent1">
+                      <a:lumMod val="60000"/>
+                      <a:lumOff val="40000"/>
+                    </a:schemeClr>
+                  </a:solidFill>
+                </a:rPr>
+                <a:t>X</a:t>
+              </a:r>
+              <a:endParaRPr lang="fr-BE" dirty="0">
+                <a:solidFill>
+                  <a:schemeClr val="accent1">
+                    <a:lumMod val="60000"/>
+                    <a:lumOff val="40000"/>
+                  </a:schemeClr>
+                </a:solidFill>
+              </a:endParaRPr>
+            </a:p>
+          </p:txBody>
+        </p:sp>
+        <p:sp>
+          <p:nvSpPr>
+            <p:cNvPr id="19" name="ZoneTexte 18">
+              <a:extLst>
+                <a:ext uri="{FF2B5EF4-FFF2-40B4-BE49-F238E27FC236}">
+                  <a16:creationId xmlns:a16="http://schemas.microsoft.com/office/drawing/2014/main" id="{56044C05-E9FE-FC92-DA6F-1C60443A45FD}"/>
+                </a:ext>
+              </a:extLst>
+            </p:cNvPr>
+            <p:cNvSpPr txBox="1"/>
+            <p:nvPr/>
+          </p:nvSpPr>
+          <p:spPr>
+            <a:xfrm rot="16200000">
+              <a:off x="5410149" y="3459344"/>
+              <a:ext cx="784053" cy="400110"/>
+            </a:xfrm>
+            <a:prstGeom prst="rect">
+              <a:avLst/>
+            </a:prstGeom>
+            <a:noFill/>
+          </p:spPr>
+          <p:txBody>
+            <a:bodyPr wrap="square" rtlCol="0">
+              <a:spAutoFit/>
+            </a:bodyPr>
+            <a:lstStyle/>
+            <a:p>
+              <a:r>
+                <a:rPr lang="fr-BE" sz="2000" dirty="0">
+                  <a:solidFill>
+                    <a:schemeClr val="accent1">
+                      <a:lumMod val="60000"/>
+                      <a:lumOff val="40000"/>
+                    </a:schemeClr>
+                  </a:solidFill>
+                </a:rPr>
+                <a:t>(0;0)</a:t>
+              </a:r>
+              <a:endParaRPr lang="fr-BE" sz="1200" dirty="0">
+                <a:solidFill>
+                  <a:schemeClr val="accent1">
+                    <a:lumMod val="60000"/>
+                    <a:lumOff val="40000"/>
+                  </a:schemeClr>
+                </a:solidFill>
+              </a:endParaRPr>
+            </a:p>
+          </p:txBody>
+        </p:sp>
+      </p:grpSp>
     </p:spTree>
     <p:extLst>
       <p:ext uri="{BB962C8B-B14F-4D97-AF65-F5344CB8AC3E}">
-        <p14:creationId xmlns:p14="http://schemas.microsoft.com/office/powerpoint/2010/main" val="3717806884"/>
-      </p:ext>
-    </p:extLst>
-  </p:cSld>
-  <p:clrMapOvr>
-    <a:masterClrMapping/>
-  </p:clrMapOvr>
-</p:sld>
-</file>
-
-<file path=ppt/slides/slide37.xml><?xml version="1.0" encoding="utf-8"?>
-<p:sld xmlns:a="http://schemas.openxmlformats.org/drawingml/2006/main" xmlns:r="http://schemas.openxmlformats.org/officeDocument/2006/relationships" xmlns:p="http://schemas.openxmlformats.org/presentationml/2006/main">
-  <p:cSld>
-    <p:spTree>
-      <p:nvGrpSpPr>
-        <p:cNvPr id="1" name="">
-          <a:extLst>
-            <a:ext uri="{FF2B5EF4-FFF2-40B4-BE49-F238E27FC236}">
-              <a16:creationId xmlns:a16="http://schemas.microsoft.com/office/drawing/2014/main" id="{19DDE021-1420-6FD0-A343-E8CB91C366B7}"/>
-            </a:ext>
-          </a:extLst>
-        </p:cNvPr>
-        <p:cNvGrpSpPr/>
-        <p:nvPr/>
-      </p:nvGrpSpPr>
-      <p:grpSpPr>
-        <a:xfrm>
-          <a:off x="0" y="0"/>
-          <a:ext cx="0" cy="0"/>
-          <a:chOff x="0" y="0"/>
-          <a:chExt cx="0" cy="0"/>
-        </a:xfrm>
-      </p:grpSpPr>
-      <p:pic>
-        <p:nvPicPr>
-          <p:cNvPr id="3" name="Image 2">
-            <a:extLst>
-              <a:ext uri="{FF2B5EF4-FFF2-40B4-BE49-F238E27FC236}">
-                <a16:creationId xmlns:a16="http://schemas.microsoft.com/office/drawing/2014/main" id="{7161C5EF-75B8-7108-3F09-47EA60A2011A}"/>
-              </a:ext>
-            </a:extLst>
-          </p:cNvPr>
-          <p:cNvPicPr>
-            <a:picLocks noChangeAspect="1"/>
-          </p:cNvPicPr>
-          <p:nvPr/>
-        </p:nvPicPr>
-        <p:blipFill>
-          <a:blip r:embed="rId2"/>
-          <a:stretch>
-            <a:fillRect/>
-          </a:stretch>
-        </p:blipFill>
-        <p:spPr>
-          <a:xfrm>
-            <a:off x="0" y="1980031"/>
-            <a:ext cx="12192000" cy="1381026"/>
-          </a:xfrm>
-          <a:prstGeom prst="rect">
-            <a:avLst/>
-          </a:prstGeom>
-        </p:spPr>
-      </p:pic>
-    </p:spTree>
-    <p:extLst>
-      <p:ext uri="{BB962C8B-B14F-4D97-AF65-F5344CB8AC3E}">
-        <p14:creationId xmlns:p14="http://schemas.microsoft.com/office/powerpoint/2010/main" val="3455796381"/>
-      </p:ext>
-    </p:extLst>
-  </p:cSld>
-  <p:clrMapOvr>
-    <a:masterClrMapping/>
-  </p:clrMapOvr>
-</p:sld>
-</file>
-
-<file path=ppt/slides/slide38.xml><?xml version="1.0" encoding="utf-8"?>
-<p:sld xmlns:a="http://schemas.openxmlformats.org/drawingml/2006/main" xmlns:r="http://schemas.openxmlformats.org/officeDocument/2006/relationships" xmlns:p="http://schemas.openxmlformats.org/presentationml/2006/main">
-  <p:cSld>
-    <p:spTree>
-      <p:nvGrpSpPr>
-        <p:cNvPr id="1" name="">
-          <a:extLst>
-            <a:ext uri="{FF2B5EF4-FFF2-40B4-BE49-F238E27FC236}">
-              <a16:creationId xmlns:a16="http://schemas.microsoft.com/office/drawing/2014/main" id="{1D14EA09-6F50-BA57-E66C-E61B11AC6FE2}"/>
-            </a:ext>
-          </a:extLst>
-        </p:cNvPr>
-        <p:cNvGrpSpPr/>
-        <p:nvPr/>
-      </p:nvGrpSpPr>
-      <p:grpSpPr>
-        <a:xfrm>
-          <a:off x="0" y="0"/>
-          <a:ext cx="0" cy="0"/>
-          <a:chOff x="0" y="0"/>
-          <a:chExt cx="0" cy="0"/>
-        </a:xfrm>
-      </p:grpSpPr>
-      <p:pic>
-        <p:nvPicPr>
-          <p:cNvPr id="3" name="Image 2">
-            <a:extLst>
-              <a:ext uri="{FF2B5EF4-FFF2-40B4-BE49-F238E27FC236}">
-                <a16:creationId xmlns:a16="http://schemas.microsoft.com/office/drawing/2014/main" id="{47B4415F-B2D5-0337-2432-A2FA1F78667E}"/>
-              </a:ext>
-            </a:extLst>
-          </p:cNvPr>
-          <p:cNvPicPr>
-            <a:picLocks noChangeAspect="1"/>
-          </p:cNvPicPr>
-          <p:nvPr/>
-        </p:nvPicPr>
-        <p:blipFill>
-          <a:blip r:embed="rId2"/>
-          <a:stretch>
-            <a:fillRect/>
-          </a:stretch>
-        </p:blipFill>
-        <p:spPr>
-          <a:xfrm>
-            <a:off x="0" y="1655675"/>
-            <a:ext cx="12192000" cy="2426685"/>
-          </a:xfrm>
-          <a:prstGeom prst="rect">
-            <a:avLst/>
-          </a:prstGeom>
-        </p:spPr>
-      </p:pic>
-    </p:spTree>
-    <p:extLst>
-      <p:ext uri="{BB962C8B-B14F-4D97-AF65-F5344CB8AC3E}">
-        <p14:creationId xmlns:p14="http://schemas.microsoft.com/office/powerpoint/2010/main" val="1288482546"/>
-      </p:ext>
-    </p:extLst>
-  </p:cSld>
-  <p:clrMapOvr>
-    <a:masterClrMapping/>
-  </p:clrMapOvr>
-</p:sld>
-</file>
-
-<file path=ppt/slides/slide39.xml><?xml version="1.0" encoding="utf-8"?>
-<p:sld xmlns:a="http://schemas.openxmlformats.org/drawingml/2006/main" xmlns:r="http://schemas.openxmlformats.org/officeDocument/2006/relationships" xmlns:p="http://schemas.openxmlformats.org/presentationml/2006/main">
-  <p:cSld>
-    <p:spTree>
-      <p:nvGrpSpPr>
-        <p:cNvPr id="1" name="">
-          <a:extLst>
-            <a:ext uri="{FF2B5EF4-FFF2-40B4-BE49-F238E27FC236}">
-              <a16:creationId xmlns:a16="http://schemas.microsoft.com/office/drawing/2014/main" id="{28C1615A-D054-269C-11C2-7A2A769A151F}"/>
-            </a:ext>
-          </a:extLst>
-        </p:cNvPr>
-        <p:cNvGrpSpPr/>
-        <p:nvPr/>
-      </p:nvGrpSpPr>
-      <p:grpSpPr>
-        <a:xfrm>
-          <a:off x="0" y="0"/>
-          <a:ext cx="0" cy="0"/>
-          <a:chOff x="0" y="0"/>
-          <a:chExt cx="0" cy="0"/>
-        </a:xfrm>
-      </p:grpSpPr>
-      <p:pic>
-        <p:nvPicPr>
-          <p:cNvPr id="3" name="Image 2">
-            <a:extLst>
-              <a:ext uri="{FF2B5EF4-FFF2-40B4-BE49-F238E27FC236}">
-                <a16:creationId xmlns:a16="http://schemas.microsoft.com/office/drawing/2014/main" id="{FA0DF54B-7084-F0EE-E2A3-B65D26FDA652}"/>
-              </a:ext>
-            </a:extLst>
-          </p:cNvPr>
-          <p:cNvPicPr>
-            <a:picLocks noChangeAspect="1"/>
-          </p:cNvPicPr>
-          <p:nvPr/>
-        </p:nvPicPr>
-        <p:blipFill>
-          <a:blip r:embed="rId2"/>
-          <a:stretch>
-            <a:fillRect/>
-          </a:stretch>
-        </p:blipFill>
-        <p:spPr>
-          <a:xfrm>
-            <a:off x="0" y="1717991"/>
-            <a:ext cx="12192000" cy="2457999"/>
-          </a:xfrm>
-          <a:prstGeom prst="rect">
-            <a:avLst/>
-          </a:prstGeom>
-        </p:spPr>
-      </p:pic>
-    </p:spTree>
-    <p:extLst>
-      <p:ext uri="{BB962C8B-B14F-4D97-AF65-F5344CB8AC3E}">
-        <p14:creationId xmlns:p14="http://schemas.microsoft.com/office/powerpoint/2010/main" val="3797827754"/>
+        <p14:creationId xmlns:p14="http://schemas.microsoft.com/office/powerpoint/2010/main" val="1582390930"/>
       </p:ext>
     </p:extLst>
   </p:cSld>
@@ -17071,6 +19464,1766 @@
 </file>
 
 <file path=ppt/slides/slide40.xml><?xml version="1.0" encoding="utf-8"?>
+<p:sld xmlns:a="http://schemas.openxmlformats.org/drawingml/2006/main" xmlns:r="http://schemas.openxmlformats.org/officeDocument/2006/relationships" xmlns:p="http://schemas.openxmlformats.org/presentationml/2006/main">
+  <p:cSld>
+    <p:spTree>
+      <p:nvGrpSpPr>
+        <p:cNvPr id="1" name="">
+          <a:extLst>
+            <a:ext uri="{FF2B5EF4-FFF2-40B4-BE49-F238E27FC236}">
+              <a16:creationId xmlns:a16="http://schemas.microsoft.com/office/drawing/2014/main" id="{80AA747D-2C05-9DB3-73A8-FEA54329CF05}"/>
+            </a:ext>
+          </a:extLst>
+        </p:cNvPr>
+        <p:cNvGrpSpPr/>
+        <p:nvPr/>
+      </p:nvGrpSpPr>
+      <p:grpSpPr>
+        <a:xfrm>
+          <a:off x="0" y="0"/>
+          <a:ext cx="0" cy="0"/>
+          <a:chOff x="0" y="0"/>
+          <a:chExt cx="0" cy="0"/>
+        </a:xfrm>
+      </p:grpSpPr>
+      <p:grpSp>
+        <p:nvGrpSpPr>
+          <p:cNvPr id="21" name="Groupe 20">
+            <a:extLst>
+              <a:ext uri="{FF2B5EF4-FFF2-40B4-BE49-F238E27FC236}">
+                <a16:creationId xmlns:a16="http://schemas.microsoft.com/office/drawing/2014/main" id="{5A16AE86-F3D2-326F-B359-9B01DE02AB11}"/>
+              </a:ext>
+            </a:extLst>
+          </p:cNvPr>
+          <p:cNvGrpSpPr/>
+          <p:nvPr/>
+        </p:nvGrpSpPr>
+        <p:grpSpPr>
+          <a:xfrm rot="4546320">
+            <a:off x="3782922" y="-46684"/>
+            <a:ext cx="4876137" cy="6647610"/>
+            <a:chOff x="3711359" y="45290"/>
+            <a:chExt cx="4876137" cy="6647610"/>
+          </a:xfrm>
+        </p:grpSpPr>
+        <p:pic>
+          <p:nvPicPr>
+            <p:cNvPr id="9" name="Image 8">
+              <a:extLst>
+                <a:ext uri="{FF2B5EF4-FFF2-40B4-BE49-F238E27FC236}">
+                  <a16:creationId xmlns:a16="http://schemas.microsoft.com/office/drawing/2014/main" id="{090CE326-2BD4-CC1A-65F3-A2B85F3A5935}"/>
+                </a:ext>
+              </a:extLst>
+            </p:cNvPr>
+            <p:cNvPicPr>
+              <a:picLocks noChangeAspect="1"/>
+            </p:cNvPicPr>
+            <p:nvPr/>
+          </p:nvPicPr>
+          <p:blipFill>
+            <a:blip r:embed="rId2"/>
+            <a:stretch>
+              <a:fillRect/>
+            </a:stretch>
+          </p:blipFill>
+          <p:spPr>
+            <a:xfrm rot="17213358">
+              <a:off x="2727570" y="1314299"/>
+              <a:ext cx="6623727" cy="4085710"/>
+            </a:xfrm>
+            <a:prstGeom prst="rect">
+              <a:avLst/>
+            </a:prstGeom>
+          </p:spPr>
+        </p:pic>
+        <p:sp>
+          <p:nvSpPr>
+            <p:cNvPr id="20" name="Rectangle 19">
+              <a:extLst>
+                <a:ext uri="{FF2B5EF4-FFF2-40B4-BE49-F238E27FC236}">
+                  <a16:creationId xmlns:a16="http://schemas.microsoft.com/office/drawing/2014/main" id="{60BDA6CD-BDF5-C641-AC3B-0AEEC84A8DD5}"/>
+                </a:ext>
+              </a:extLst>
+            </p:cNvPr>
+            <p:cNvSpPr/>
+            <p:nvPr/>
+          </p:nvSpPr>
+          <p:spPr>
+            <a:xfrm>
+              <a:off x="5709842" y="3009348"/>
+              <a:ext cx="1225110" cy="784054"/>
+            </a:xfrm>
+            <a:prstGeom prst="rect">
+              <a:avLst/>
+            </a:prstGeom>
+            <a:solidFill>
+              <a:schemeClr val="bg1"/>
+            </a:solidFill>
+            <a:ln>
+              <a:noFill/>
+            </a:ln>
+          </p:spPr>
+          <p:style>
+            <a:lnRef idx="2">
+              <a:schemeClr val="accent1">
+                <a:shade val="15000"/>
+              </a:schemeClr>
+            </a:lnRef>
+            <a:fillRef idx="1">
+              <a:schemeClr val="accent1"/>
+            </a:fillRef>
+            <a:effectRef idx="0">
+              <a:schemeClr val="accent1"/>
+            </a:effectRef>
+            <a:fontRef idx="minor">
+              <a:schemeClr val="lt1"/>
+            </a:fontRef>
+          </p:style>
+          <p:txBody>
+            <a:bodyPr rtlCol="0" anchor="ctr"/>
+            <a:lstStyle/>
+            <a:p>
+              <a:pPr algn="ctr"/>
+              <a:endParaRPr lang="fr-BE"/>
+            </a:p>
+          </p:txBody>
+        </p:sp>
+        <p:cxnSp>
+          <p:nvCxnSpPr>
+            <p:cNvPr id="4" name="Connecteur droit 3">
+              <a:extLst>
+                <a:ext uri="{FF2B5EF4-FFF2-40B4-BE49-F238E27FC236}">
+                  <a16:creationId xmlns:a16="http://schemas.microsoft.com/office/drawing/2014/main" id="{1C96BCBA-B7AA-5E59-25FA-C832A5F3FAE7}"/>
+                </a:ext>
+              </a:extLst>
+            </p:cNvPr>
+            <p:cNvCxnSpPr>
+              <a:cxnSpLocks/>
+            </p:cNvCxnSpPr>
+            <p:nvPr/>
+          </p:nvCxnSpPr>
+          <p:spPr>
+            <a:xfrm rot="17053680" flipH="1" flipV="1">
+              <a:off x="5546648" y="963585"/>
+              <a:ext cx="1351865" cy="4729830"/>
+            </a:xfrm>
+            <a:prstGeom prst="line">
+              <a:avLst/>
+            </a:prstGeom>
+            <a:ln w="38100" cap="flat" cmpd="sng" algn="ctr">
+              <a:solidFill>
+                <a:schemeClr val="accent1">
+                  <a:lumMod val="60000"/>
+                  <a:lumOff val="40000"/>
+                </a:schemeClr>
+              </a:solidFill>
+              <a:prstDash val="solid"/>
+              <a:round/>
+              <a:headEnd type="none" w="med" len="med"/>
+              <a:tailEnd type="arrow" w="med" len="med"/>
+            </a:ln>
+          </p:spPr>
+          <p:style>
+            <a:lnRef idx="0">
+              <a:scrgbClr r="0" g="0" b="0"/>
+            </a:lnRef>
+            <a:fillRef idx="0">
+              <a:scrgbClr r="0" g="0" b="0"/>
+            </a:fillRef>
+            <a:effectRef idx="0">
+              <a:scrgbClr r="0" g="0" b="0"/>
+            </a:effectRef>
+            <a:fontRef idx="minor">
+              <a:schemeClr val="tx1"/>
+            </a:fontRef>
+          </p:style>
+        </p:cxnSp>
+        <p:cxnSp>
+          <p:nvCxnSpPr>
+            <p:cNvPr id="6" name="Connecteur droit 5">
+              <a:extLst>
+                <a:ext uri="{FF2B5EF4-FFF2-40B4-BE49-F238E27FC236}">
+                  <a16:creationId xmlns:a16="http://schemas.microsoft.com/office/drawing/2014/main" id="{B7519266-3721-2AD2-6670-A4CC6905C284}"/>
+                </a:ext>
+              </a:extLst>
+            </p:cNvPr>
+            <p:cNvCxnSpPr>
+              <a:cxnSpLocks/>
+            </p:cNvCxnSpPr>
+            <p:nvPr/>
+          </p:nvCxnSpPr>
+          <p:spPr>
+            <a:xfrm flipV="1">
+              <a:off x="6096000" y="190500"/>
+              <a:ext cx="0" cy="6502400"/>
+            </a:xfrm>
+            <a:prstGeom prst="line">
+              <a:avLst/>
+            </a:prstGeom>
+            <a:ln w="38100" cap="flat" cmpd="sng" algn="ctr">
+              <a:solidFill>
+                <a:schemeClr val="accent1">
+                  <a:lumMod val="60000"/>
+                  <a:lumOff val="40000"/>
+                </a:schemeClr>
+              </a:solidFill>
+              <a:prstDash val="solid"/>
+              <a:round/>
+              <a:headEnd type="none" w="med" len="med"/>
+              <a:tailEnd type="arrow" w="med" len="med"/>
+            </a:ln>
+          </p:spPr>
+          <p:style>
+            <a:lnRef idx="0">
+              <a:scrgbClr r="0" g="0" b="0"/>
+            </a:lnRef>
+            <a:fillRef idx="0">
+              <a:scrgbClr r="0" g="0" b="0"/>
+            </a:fillRef>
+            <a:effectRef idx="0">
+              <a:scrgbClr r="0" g="0" b="0"/>
+            </a:effectRef>
+            <a:fontRef idx="minor">
+              <a:schemeClr val="tx1"/>
+            </a:fontRef>
+          </p:style>
+        </p:cxnSp>
+        <p:sp>
+          <p:nvSpPr>
+            <p:cNvPr id="17" name="ZoneTexte 16">
+              <a:extLst>
+                <a:ext uri="{FF2B5EF4-FFF2-40B4-BE49-F238E27FC236}">
+                  <a16:creationId xmlns:a16="http://schemas.microsoft.com/office/drawing/2014/main" id="{BE3FD3A3-F12E-226D-0FE9-93EEE9DCCE0C}"/>
+                </a:ext>
+              </a:extLst>
+            </p:cNvPr>
+            <p:cNvSpPr txBox="1"/>
+            <p:nvPr/>
+          </p:nvSpPr>
+          <p:spPr>
+            <a:xfrm rot="16200000">
+              <a:off x="3745723" y="2780115"/>
+              <a:ext cx="516047" cy="584775"/>
+            </a:xfrm>
+            <a:prstGeom prst="rect">
+              <a:avLst/>
+            </a:prstGeom>
+            <a:noFill/>
+          </p:spPr>
+          <p:txBody>
+            <a:bodyPr wrap="square" rtlCol="0">
+              <a:spAutoFit/>
+            </a:bodyPr>
+            <a:lstStyle/>
+            <a:p>
+              <a:r>
+                <a:rPr lang="fr-BE" sz="3200" dirty="0">
+                  <a:solidFill>
+                    <a:schemeClr val="accent1">
+                      <a:lumMod val="60000"/>
+                      <a:lumOff val="40000"/>
+                    </a:schemeClr>
+                  </a:solidFill>
+                </a:rPr>
+                <a:t>Y</a:t>
+              </a:r>
+              <a:endParaRPr lang="fr-BE" dirty="0">
+                <a:solidFill>
+                  <a:schemeClr val="accent1">
+                    <a:lumMod val="60000"/>
+                    <a:lumOff val="40000"/>
+                  </a:schemeClr>
+                </a:solidFill>
+              </a:endParaRPr>
+            </a:p>
+          </p:txBody>
+        </p:sp>
+        <p:sp>
+          <p:nvSpPr>
+            <p:cNvPr id="18" name="ZoneTexte 17">
+              <a:extLst>
+                <a:ext uri="{FF2B5EF4-FFF2-40B4-BE49-F238E27FC236}">
+                  <a16:creationId xmlns:a16="http://schemas.microsoft.com/office/drawing/2014/main" id="{6800DD64-29AD-B806-6305-155886DE95F3}"/>
+                </a:ext>
+              </a:extLst>
+            </p:cNvPr>
+            <p:cNvSpPr txBox="1"/>
+            <p:nvPr/>
+          </p:nvSpPr>
+          <p:spPr>
+            <a:xfrm rot="16200000">
+              <a:off x="5451819" y="48040"/>
+              <a:ext cx="516047" cy="584775"/>
+            </a:xfrm>
+            <a:prstGeom prst="rect">
+              <a:avLst/>
+            </a:prstGeom>
+            <a:noFill/>
+          </p:spPr>
+          <p:txBody>
+            <a:bodyPr wrap="square" rtlCol="0">
+              <a:spAutoFit/>
+            </a:bodyPr>
+            <a:lstStyle/>
+            <a:p>
+              <a:r>
+                <a:rPr lang="fr-BE" sz="3200" dirty="0">
+                  <a:solidFill>
+                    <a:schemeClr val="accent1">
+                      <a:lumMod val="60000"/>
+                      <a:lumOff val="40000"/>
+                    </a:schemeClr>
+                  </a:solidFill>
+                </a:rPr>
+                <a:t>X</a:t>
+              </a:r>
+              <a:endParaRPr lang="fr-BE" dirty="0">
+                <a:solidFill>
+                  <a:schemeClr val="accent1">
+                    <a:lumMod val="60000"/>
+                    <a:lumOff val="40000"/>
+                  </a:schemeClr>
+                </a:solidFill>
+              </a:endParaRPr>
+            </a:p>
+          </p:txBody>
+        </p:sp>
+        <p:sp>
+          <p:nvSpPr>
+            <p:cNvPr id="19" name="ZoneTexte 18">
+              <a:extLst>
+                <a:ext uri="{FF2B5EF4-FFF2-40B4-BE49-F238E27FC236}">
+                  <a16:creationId xmlns:a16="http://schemas.microsoft.com/office/drawing/2014/main" id="{DAEE5139-3DC0-DECA-5CBF-B90705FA2C24}"/>
+                </a:ext>
+              </a:extLst>
+            </p:cNvPr>
+            <p:cNvSpPr txBox="1"/>
+            <p:nvPr/>
+          </p:nvSpPr>
+          <p:spPr>
+            <a:xfrm rot="16200000">
+              <a:off x="5410149" y="3459344"/>
+              <a:ext cx="784053" cy="400110"/>
+            </a:xfrm>
+            <a:prstGeom prst="rect">
+              <a:avLst/>
+            </a:prstGeom>
+            <a:noFill/>
+          </p:spPr>
+          <p:txBody>
+            <a:bodyPr wrap="square" rtlCol="0">
+              <a:spAutoFit/>
+            </a:bodyPr>
+            <a:lstStyle/>
+            <a:p>
+              <a:r>
+                <a:rPr lang="fr-BE" sz="2000" dirty="0">
+                  <a:solidFill>
+                    <a:schemeClr val="accent1">
+                      <a:lumMod val="60000"/>
+                      <a:lumOff val="40000"/>
+                    </a:schemeClr>
+                  </a:solidFill>
+                </a:rPr>
+                <a:t>(0;0)</a:t>
+              </a:r>
+              <a:endParaRPr lang="fr-BE" sz="1200" dirty="0">
+                <a:solidFill>
+                  <a:schemeClr val="accent1">
+                    <a:lumMod val="60000"/>
+                    <a:lumOff val="40000"/>
+                  </a:schemeClr>
+                </a:solidFill>
+              </a:endParaRPr>
+            </a:p>
+          </p:txBody>
+        </p:sp>
+      </p:grpSp>
+    </p:spTree>
+    <p:extLst>
+      <p:ext uri="{BB962C8B-B14F-4D97-AF65-F5344CB8AC3E}">
+        <p14:creationId xmlns:p14="http://schemas.microsoft.com/office/powerpoint/2010/main" val="2211867699"/>
+      </p:ext>
+    </p:extLst>
+  </p:cSld>
+  <p:clrMapOvr>
+    <a:masterClrMapping/>
+  </p:clrMapOvr>
+</p:sld>
+</file>
+
+<file path=ppt/slides/slide41.xml><?xml version="1.0" encoding="utf-8"?>
+<p:sld xmlns:a="http://schemas.openxmlformats.org/drawingml/2006/main" xmlns:r="http://schemas.openxmlformats.org/officeDocument/2006/relationships" xmlns:p="http://schemas.openxmlformats.org/presentationml/2006/main">
+  <p:cSld>
+    <p:spTree>
+      <p:nvGrpSpPr>
+        <p:cNvPr id="1" name="">
+          <a:extLst>
+            <a:ext uri="{FF2B5EF4-FFF2-40B4-BE49-F238E27FC236}">
+              <a16:creationId xmlns:a16="http://schemas.microsoft.com/office/drawing/2014/main" id="{92BBFB90-A473-7DB8-0719-ABD6EC3E27CE}"/>
+            </a:ext>
+          </a:extLst>
+        </p:cNvPr>
+        <p:cNvGrpSpPr/>
+        <p:nvPr/>
+      </p:nvGrpSpPr>
+      <p:grpSpPr>
+        <a:xfrm>
+          <a:off x="0" y="0"/>
+          <a:ext cx="0" cy="0"/>
+          <a:chOff x="0" y="0"/>
+          <a:chExt cx="0" cy="0"/>
+        </a:xfrm>
+      </p:grpSpPr>
+      <p:grpSp>
+        <p:nvGrpSpPr>
+          <p:cNvPr id="21" name="Groupe 20">
+            <a:extLst>
+              <a:ext uri="{FF2B5EF4-FFF2-40B4-BE49-F238E27FC236}">
+                <a16:creationId xmlns:a16="http://schemas.microsoft.com/office/drawing/2014/main" id="{A76E35B8-F5DA-4CC6-C8D3-F44991B6ABF5}"/>
+              </a:ext>
+            </a:extLst>
+          </p:cNvPr>
+          <p:cNvGrpSpPr/>
+          <p:nvPr/>
+        </p:nvGrpSpPr>
+        <p:grpSpPr>
+          <a:xfrm rot="2477135">
+            <a:off x="3782922" y="-46684"/>
+            <a:ext cx="4876137" cy="6647610"/>
+            <a:chOff x="3711359" y="45290"/>
+            <a:chExt cx="4876137" cy="6647610"/>
+          </a:xfrm>
+        </p:grpSpPr>
+        <p:pic>
+          <p:nvPicPr>
+            <p:cNvPr id="9" name="Image 8">
+              <a:extLst>
+                <a:ext uri="{FF2B5EF4-FFF2-40B4-BE49-F238E27FC236}">
+                  <a16:creationId xmlns:a16="http://schemas.microsoft.com/office/drawing/2014/main" id="{65687DBD-864A-37FD-086D-89CA4ED69E26}"/>
+                </a:ext>
+              </a:extLst>
+            </p:cNvPr>
+            <p:cNvPicPr>
+              <a:picLocks noChangeAspect="1"/>
+            </p:cNvPicPr>
+            <p:nvPr/>
+          </p:nvPicPr>
+          <p:blipFill>
+            <a:blip r:embed="rId2"/>
+            <a:stretch>
+              <a:fillRect/>
+            </a:stretch>
+          </p:blipFill>
+          <p:spPr>
+            <a:xfrm rot="17213358">
+              <a:off x="2727570" y="1314299"/>
+              <a:ext cx="6623727" cy="4085710"/>
+            </a:xfrm>
+            <a:prstGeom prst="rect">
+              <a:avLst/>
+            </a:prstGeom>
+          </p:spPr>
+        </p:pic>
+        <p:sp>
+          <p:nvSpPr>
+            <p:cNvPr id="20" name="Rectangle 19">
+              <a:extLst>
+                <a:ext uri="{FF2B5EF4-FFF2-40B4-BE49-F238E27FC236}">
+                  <a16:creationId xmlns:a16="http://schemas.microsoft.com/office/drawing/2014/main" id="{DC285375-2DA0-B4DE-B91E-75E3DCD5FF1C}"/>
+                </a:ext>
+              </a:extLst>
+            </p:cNvPr>
+            <p:cNvSpPr/>
+            <p:nvPr/>
+          </p:nvSpPr>
+          <p:spPr>
+            <a:xfrm>
+              <a:off x="5709842" y="3009348"/>
+              <a:ext cx="1225110" cy="784054"/>
+            </a:xfrm>
+            <a:prstGeom prst="rect">
+              <a:avLst/>
+            </a:prstGeom>
+            <a:solidFill>
+              <a:schemeClr val="bg1"/>
+            </a:solidFill>
+            <a:ln>
+              <a:noFill/>
+            </a:ln>
+          </p:spPr>
+          <p:style>
+            <a:lnRef idx="2">
+              <a:schemeClr val="accent1">
+                <a:shade val="15000"/>
+              </a:schemeClr>
+            </a:lnRef>
+            <a:fillRef idx="1">
+              <a:schemeClr val="accent1"/>
+            </a:fillRef>
+            <a:effectRef idx="0">
+              <a:schemeClr val="accent1"/>
+            </a:effectRef>
+            <a:fontRef idx="minor">
+              <a:schemeClr val="lt1"/>
+            </a:fontRef>
+          </p:style>
+          <p:txBody>
+            <a:bodyPr rtlCol="0" anchor="ctr"/>
+            <a:lstStyle/>
+            <a:p>
+              <a:pPr algn="ctr"/>
+              <a:endParaRPr lang="fr-BE"/>
+            </a:p>
+          </p:txBody>
+        </p:sp>
+        <p:cxnSp>
+          <p:nvCxnSpPr>
+            <p:cNvPr id="4" name="Connecteur droit 3">
+              <a:extLst>
+                <a:ext uri="{FF2B5EF4-FFF2-40B4-BE49-F238E27FC236}">
+                  <a16:creationId xmlns:a16="http://schemas.microsoft.com/office/drawing/2014/main" id="{A4915A79-27D6-20DC-82D7-67CDE89FFFEE}"/>
+                </a:ext>
+              </a:extLst>
+            </p:cNvPr>
+            <p:cNvCxnSpPr>
+              <a:cxnSpLocks/>
+            </p:cNvCxnSpPr>
+            <p:nvPr/>
+          </p:nvCxnSpPr>
+          <p:spPr>
+            <a:xfrm rot="17053680" flipH="1" flipV="1">
+              <a:off x="5546648" y="963585"/>
+              <a:ext cx="1351865" cy="4729830"/>
+            </a:xfrm>
+            <a:prstGeom prst="line">
+              <a:avLst/>
+            </a:prstGeom>
+            <a:ln w="38100" cap="flat" cmpd="sng" algn="ctr">
+              <a:solidFill>
+                <a:schemeClr val="accent1">
+                  <a:lumMod val="60000"/>
+                  <a:lumOff val="40000"/>
+                </a:schemeClr>
+              </a:solidFill>
+              <a:prstDash val="solid"/>
+              <a:round/>
+              <a:headEnd type="none" w="med" len="med"/>
+              <a:tailEnd type="arrow" w="med" len="med"/>
+            </a:ln>
+          </p:spPr>
+          <p:style>
+            <a:lnRef idx="0">
+              <a:scrgbClr r="0" g="0" b="0"/>
+            </a:lnRef>
+            <a:fillRef idx="0">
+              <a:scrgbClr r="0" g="0" b="0"/>
+            </a:fillRef>
+            <a:effectRef idx="0">
+              <a:scrgbClr r="0" g="0" b="0"/>
+            </a:effectRef>
+            <a:fontRef idx="minor">
+              <a:schemeClr val="tx1"/>
+            </a:fontRef>
+          </p:style>
+        </p:cxnSp>
+        <p:cxnSp>
+          <p:nvCxnSpPr>
+            <p:cNvPr id="6" name="Connecteur droit 5">
+              <a:extLst>
+                <a:ext uri="{FF2B5EF4-FFF2-40B4-BE49-F238E27FC236}">
+                  <a16:creationId xmlns:a16="http://schemas.microsoft.com/office/drawing/2014/main" id="{18042827-F050-8A03-161C-58B7E4223BC6}"/>
+                </a:ext>
+              </a:extLst>
+            </p:cNvPr>
+            <p:cNvCxnSpPr>
+              <a:cxnSpLocks/>
+            </p:cNvCxnSpPr>
+            <p:nvPr/>
+          </p:nvCxnSpPr>
+          <p:spPr>
+            <a:xfrm flipV="1">
+              <a:off x="6096000" y="190500"/>
+              <a:ext cx="0" cy="6502400"/>
+            </a:xfrm>
+            <a:prstGeom prst="line">
+              <a:avLst/>
+            </a:prstGeom>
+            <a:ln w="38100" cap="flat" cmpd="sng" algn="ctr">
+              <a:solidFill>
+                <a:schemeClr val="accent1">
+                  <a:lumMod val="60000"/>
+                  <a:lumOff val="40000"/>
+                </a:schemeClr>
+              </a:solidFill>
+              <a:prstDash val="solid"/>
+              <a:round/>
+              <a:headEnd type="none" w="med" len="med"/>
+              <a:tailEnd type="arrow" w="med" len="med"/>
+            </a:ln>
+          </p:spPr>
+          <p:style>
+            <a:lnRef idx="0">
+              <a:scrgbClr r="0" g="0" b="0"/>
+            </a:lnRef>
+            <a:fillRef idx="0">
+              <a:scrgbClr r="0" g="0" b="0"/>
+            </a:fillRef>
+            <a:effectRef idx="0">
+              <a:scrgbClr r="0" g="0" b="0"/>
+            </a:effectRef>
+            <a:fontRef idx="minor">
+              <a:schemeClr val="tx1"/>
+            </a:fontRef>
+          </p:style>
+        </p:cxnSp>
+        <p:sp>
+          <p:nvSpPr>
+            <p:cNvPr id="17" name="ZoneTexte 16">
+              <a:extLst>
+                <a:ext uri="{FF2B5EF4-FFF2-40B4-BE49-F238E27FC236}">
+                  <a16:creationId xmlns:a16="http://schemas.microsoft.com/office/drawing/2014/main" id="{2D55B687-9A49-30D6-9220-405613DF8760}"/>
+                </a:ext>
+              </a:extLst>
+            </p:cNvPr>
+            <p:cNvSpPr txBox="1"/>
+            <p:nvPr/>
+          </p:nvSpPr>
+          <p:spPr>
+            <a:xfrm rot="16200000">
+              <a:off x="3745723" y="2780115"/>
+              <a:ext cx="516047" cy="584775"/>
+            </a:xfrm>
+            <a:prstGeom prst="rect">
+              <a:avLst/>
+            </a:prstGeom>
+            <a:noFill/>
+          </p:spPr>
+          <p:txBody>
+            <a:bodyPr wrap="square" rtlCol="0">
+              <a:spAutoFit/>
+            </a:bodyPr>
+            <a:lstStyle/>
+            <a:p>
+              <a:r>
+                <a:rPr lang="fr-BE" sz="3200" dirty="0">
+                  <a:solidFill>
+                    <a:schemeClr val="accent1">
+                      <a:lumMod val="60000"/>
+                      <a:lumOff val="40000"/>
+                    </a:schemeClr>
+                  </a:solidFill>
+                </a:rPr>
+                <a:t>Y</a:t>
+              </a:r>
+              <a:endParaRPr lang="fr-BE" dirty="0">
+                <a:solidFill>
+                  <a:schemeClr val="accent1">
+                    <a:lumMod val="60000"/>
+                    <a:lumOff val="40000"/>
+                  </a:schemeClr>
+                </a:solidFill>
+              </a:endParaRPr>
+            </a:p>
+          </p:txBody>
+        </p:sp>
+        <p:sp>
+          <p:nvSpPr>
+            <p:cNvPr id="18" name="ZoneTexte 17">
+              <a:extLst>
+                <a:ext uri="{FF2B5EF4-FFF2-40B4-BE49-F238E27FC236}">
+                  <a16:creationId xmlns:a16="http://schemas.microsoft.com/office/drawing/2014/main" id="{1E27E391-5BA6-A36C-D828-8ACC17654980}"/>
+                </a:ext>
+              </a:extLst>
+            </p:cNvPr>
+            <p:cNvSpPr txBox="1"/>
+            <p:nvPr/>
+          </p:nvSpPr>
+          <p:spPr>
+            <a:xfrm rot="16200000">
+              <a:off x="5451819" y="48040"/>
+              <a:ext cx="516047" cy="584775"/>
+            </a:xfrm>
+            <a:prstGeom prst="rect">
+              <a:avLst/>
+            </a:prstGeom>
+            <a:noFill/>
+          </p:spPr>
+          <p:txBody>
+            <a:bodyPr wrap="square" rtlCol="0">
+              <a:spAutoFit/>
+            </a:bodyPr>
+            <a:lstStyle/>
+            <a:p>
+              <a:r>
+                <a:rPr lang="fr-BE" sz="3200" dirty="0">
+                  <a:solidFill>
+                    <a:schemeClr val="accent1">
+                      <a:lumMod val="60000"/>
+                      <a:lumOff val="40000"/>
+                    </a:schemeClr>
+                  </a:solidFill>
+                </a:rPr>
+                <a:t>X</a:t>
+              </a:r>
+              <a:endParaRPr lang="fr-BE" dirty="0">
+                <a:solidFill>
+                  <a:schemeClr val="accent1">
+                    <a:lumMod val="60000"/>
+                    <a:lumOff val="40000"/>
+                  </a:schemeClr>
+                </a:solidFill>
+              </a:endParaRPr>
+            </a:p>
+          </p:txBody>
+        </p:sp>
+        <p:sp>
+          <p:nvSpPr>
+            <p:cNvPr id="19" name="ZoneTexte 18">
+              <a:extLst>
+                <a:ext uri="{FF2B5EF4-FFF2-40B4-BE49-F238E27FC236}">
+                  <a16:creationId xmlns:a16="http://schemas.microsoft.com/office/drawing/2014/main" id="{A5DB00A9-A7D8-A399-8823-14A8AE662464}"/>
+                </a:ext>
+              </a:extLst>
+            </p:cNvPr>
+            <p:cNvSpPr txBox="1"/>
+            <p:nvPr/>
+          </p:nvSpPr>
+          <p:spPr>
+            <a:xfrm rot="16200000">
+              <a:off x="5410149" y="3459344"/>
+              <a:ext cx="784053" cy="400110"/>
+            </a:xfrm>
+            <a:prstGeom prst="rect">
+              <a:avLst/>
+            </a:prstGeom>
+            <a:noFill/>
+          </p:spPr>
+          <p:txBody>
+            <a:bodyPr wrap="square" rtlCol="0">
+              <a:spAutoFit/>
+            </a:bodyPr>
+            <a:lstStyle/>
+            <a:p>
+              <a:r>
+                <a:rPr lang="fr-BE" sz="2000" dirty="0">
+                  <a:solidFill>
+                    <a:schemeClr val="accent1">
+                      <a:lumMod val="60000"/>
+                      <a:lumOff val="40000"/>
+                    </a:schemeClr>
+                  </a:solidFill>
+                </a:rPr>
+                <a:t>(0;0)</a:t>
+              </a:r>
+              <a:endParaRPr lang="fr-BE" sz="1200" dirty="0">
+                <a:solidFill>
+                  <a:schemeClr val="accent1">
+                    <a:lumMod val="60000"/>
+                    <a:lumOff val="40000"/>
+                  </a:schemeClr>
+                </a:solidFill>
+              </a:endParaRPr>
+            </a:p>
+          </p:txBody>
+        </p:sp>
+      </p:grpSp>
+    </p:spTree>
+    <p:extLst>
+      <p:ext uri="{BB962C8B-B14F-4D97-AF65-F5344CB8AC3E}">
+        <p14:creationId xmlns:p14="http://schemas.microsoft.com/office/powerpoint/2010/main" val="2365372314"/>
+      </p:ext>
+    </p:extLst>
+  </p:cSld>
+  <p:clrMapOvr>
+    <a:masterClrMapping/>
+  </p:clrMapOvr>
+</p:sld>
+</file>
+
+<file path=ppt/slides/slide42.xml><?xml version="1.0" encoding="utf-8"?>
+<p:sld xmlns:a="http://schemas.openxmlformats.org/drawingml/2006/main" xmlns:r="http://schemas.openxmlformats.org/officeDocument/2006/relationships" xmlns:p="http://schemas.openxmlformats.org/presentationml/2006/main">
+  <p:cSld>
+    <p:spTree>
+      <p:nvGrpSpPr>
+        <p:cNvPr id="1" name="">
+          <a:extLst>
+            <a:ext uri="{FF2B5EF4-FFF2-40B4-BE49-F238E27FC236}">
+              <a16:creationId xmlns:a16="http://schemas.microsoft.com/office/drawing/2014/main" id="{B82620BB-B246-C0E6-8625-B176949BABA8}"/>
+            </a:ext>
+          </a:extLst>
+        </p:cNvPr>
+        <p:cNvGrpSpPr/>
+        <p:nvPr/>
+      </p:nvGrpSpPr>
+      <p:grpSpPr>
+        <a:xfrm>
+          <a:off x="0" y="0"/>
+          <a:ext cx="0" cy="0"/>
+          <a:chOff x="0" y="0"/>
+          <a:chExt cx="0" cy="0"/>
+        </a:xfrm>
+      </p:grpSpPr>
+      <p:pic>
+        <p:nvPicPr>
+          <p:cNvPr id="9" name="Image 8">
+            <a:extLst>
+              <a:ext uri="{FF2B5EF4-FFF2-40B4-BE49-F238E27FC236}">
+                <a16:creationId xmlns:a16="http://schemas.microsoft.com/office/drawing/2014/main" id="{54CBAFC7-D567-D889-95D3-E43FCFF07D3F}"/>
+              </a:ext>
+            </a:extLst>
+          </p:cNvPr>
+          <p:cNvPicPr>
+            <a:picLocks noChangeAspect="1"/>
+          </p:cNvPicPr>
+          <p:nvPr/>
+        </p:nvPicPr>
+        <p:blipFill>
+          <a:blip r:embed="rId2"/>
+          <a:stretch>
+            <a:fillRect/>
+          </a:stretch>
+        </p:blipFill>
+        <p:spPr>
+          <a:xfrm rot="17213358">
+            <a:off x="2727570" y="1314299"/>
+            <a:ext cx="6623727" cy="4085710"/>
+          </a:xfrm>
+          <a:prstGeom prst="rect">
+            <a:avLst/>
+          </a:prstGeom>
+        </p:spPr>
+      </p:pic>
+      <p:sp>
+        <p:nvSpPr>
+          <p:cNvPr id="20" name="Rectangle 19">
+            <a:extLst>
+              <a:ext uri="{FF2B5EF4-FFF2-40B4-BE49-F238E27FC236}">
+                <a16:creationId xmlns:a16="http://schemas.microsoft.com/office/drawing/2014/main" id="{23B81B7C-2A4C-36D6-22B8-1BBA84849A9E}"/>
+              </a:ext>
+            </a:extLst>
+          </p:cNvPr>
+          <p:cNvSpPr/>
+          <p:nvPr/>
+        </p:nvSpPr>
+        <p:spPr>
+          <a:xfrm>
+            <a:off x="5709842" y="3009348"/>
+            <a:ext cx="1225110" cy="784054"/>
+          </a:xfrm>
+          <a:prstGeom prst="rect">
+            <a:avLst/>
+          </a:prstGeom>
+          <a:solidFill>
+            <a:schemeClr val="bg1"/>
+          </a:solidFill>
+          <a:ln>
+            <a:noFill/>
+          </a:ln>
+        </p:spPr>
+        <p:style>
+          <a:lnRef idx="2">
+            <a:schemeClr val="accent1">
+              <a:shade val="15000"/>
+            </a:schemeClr>
+          </a:lnRef>
+          <a:fillRef idx="1">
+            <a:schemeClr val="accent1"/>
+          </a:fillRef>
+          <a:effectRef idx="0">
+            <a:schemeClr val="accent1"/>
+          </a:effectRef>
+          <a:fontRef idx="minor">
+            <a:schemeClr val="lt1"/>
+          </a:fontRef>
+        </p:style>
+        <p:txBody>
+          <a:bodyPr rtlCol="0" anchor="ctr"/>
+          <a:lstStyle/>
+          <a:p>
+            <a:pPr algn="ctr"/>
+            <a:endParaRPr lang="fr-BE"/>
+          </a:p>
+        </p:txBody>
+      </p:sp>
+      <p:cxnSp>
+        <p:nvCxnSpPr>
+          <p:cNvPr id="4" name="Connecteur droit 3">
+            <a:extLst>
+              <a:ext uri="{FF2B5EF4-FFF2-40B4-BE49-F238E27FC236}">
+                <a16:creationId xmlns:a16="http://schemas.microsoft.com/office/drawing/2014/main" id="{F65C84B7-36BE-479D-3CF0-85A653810752}"/>
+              </a:ext>
+            </a:extLst>
+          </p:cNvPr>
+          <p:cNvCxnSpPr>
+            <a:cxnSpLocks/>
+          </p:cNvCxnSpPr>
+          <p:nvPr/>
+        </p:nvCxnSpPr>
+        <p:spPr>
+          <a:xfrm flipH="1">
+            <a:off x="1765426" y="3401696"/>
+            <a:ext cx="8957772" cy="0"/>
+          </a:xfrm>
+          <a:prstGeom prst="line">
+            <a:avLst/>
+          </a:prstGeom>
+          <a:ln w="38100" cap="flat" cmpd="sng" algn="ctr">
+            <a:solidFill>
+              <a:schemeClr val="accent1">
+                <a:lumMod val="60000"/>
+                <a:lumOff val="40000"/>
+              </a:schemeClr>
+            </a:solidFill>
+            <a:prstDash val="solid"/>
+            <a:round/>
+            <a:headEnd type="none" w="med" len="med"/>
+            <a:tailEnd type="arrow" w="med" len="med"/>
+          </a:ln>
+        </p:spPr>
+        <p:style>
+          <a:lnRef idx="0">
+            <a:scrgbClr r="0" g="0" b="0"/>
+          </a:lnRef>
+          <a:fillRef idx="0">
+            <a:scrgbClr r="0" g="0" b="0"/>
+          </a:fillRef>
+          <a:effectRef idx="0">
+            <a:scrgbClr r="0" g="0" b="0"/>
+          </a:effectRef>
+          <a:fontRef idx="minor">
+            <a:schemeClr val="tx1"/>
+          </a:fontRef>
+        </p:style>
+      </p:cxnSp>
+      <p:cxnSp>
+        <p:nvCxnSpPr>
+          <p:cNvPr id="6" name="Connecteur droit 5">
+            <a:extLst>
+              <a:ext uri="{FF2B5EF4-FFF2-40B4-BE49-F238E27FC236}">
+                <a16:creationId xmlns:a16="http://schemas.microsoft.com/office/drawing/2014/main" id="{F387F55E-2246-D8D9-944F-49C755968139}"/>
+              </a:ext>
+            </a:extLst>
+          </p:cNvPr>
+          <p:cNvCxnSpPr>
+            <a:cxnSpLocks/>
+          </p:cNvCxnSpPr>
+          <p:nvPr/>
+        </p:nvCxnSpPr>
+        <p:spPr>
+          <a:xfrm flipV="1">
+            <a:off x="6096000" y="190500"/>
+            <a:ext cx="0" cy="6502400"/>
+          </a:xfrm>
+          <a:prstGeom prst="line">
+            <a:avLst/>
+          </a:prstGeom>
+          <a:ln w="38100" cap="flat" cmpd="sng" algn="ctr">
+            <a:solidFill>
+              <a:schemeClr val="accent1">
+                <a:lumMod val="60000"/>
+                <a:lumOff val="40000"/>
+              </a:schemeClr>
+            </a:solidFill>
+            <a:prstDash val="solid"/>
+            <a:round/>
+            <a:headEnd type="none" w="med" len="med"/>
+            <a:tailEnd type="arrow" w="med" len="med"/>
+          </a:ln>
+        </p:spPr>
+        <p:style>
+          <a:lnRef idx="0">
+            <a:scrgbClr r="0" g="0" b="0"/>
+          </a:lnRef>
+          <a:fillRef idx="0">
+            <a:scrgbClr r="0" g="0" b="0"/>
+          </a:fillRef>
+          <a:effectRef idx="0">
+            <a:scrgbClr r="0" g="0" b="0"/>
+          </a:effectRef>
+          <a:fontRef idx="minor">
+            <a:schemeClr val="tx1"/>
+          </a:fontRef>
+        </p:style>
+      </p:cxnSp>
+      <p:sp>
+        <p:nvSpPr>
+          <p:cNvPr id="17" name="ZoneTexte 16">
+            <a:extLst>
+              <a:ext uri="{FF2B5EF4-FFF2-40B4-BE49-F238E27FC236}">
+                <a16:creationId xmlns:a16="http://schemas.microsoft.com/office/drawing/2014/main" id="{C0171651-0AAF-CEB8-668A-C2DB03474E1B}"/>
+              </a:ext>
+            </a:extLst>
+          </p:cNvPr>
+          <p:cNvSpPr txBox="1"/>
+          <p:nvPr/>
+        </p:nvSpPr>
+        <p:spPr>
+          <a:xfrm rot="16200000">
+            <a:off x="1799790" y="2716961"/>
+            <a:ext cx="516047" cy="584775"/>
+          </a:xfrm>
+          <a:prstGeom prst="rect">
+            <a:avLst/>
+          </a:prstGeom>
+          <a:noFill/>
+        </p:spPr>
+        <p:txBody>
+          <a:bodyPr wrap="square" rtlCol="0">
+            <a:spAutoFit/>
+          </a:bodyPr>
+          <a:lstStyle/>
+          <a:p>
+            <a:r>
+              <a:rPr lang="fr-BE" sz="3200" dirty="0">
+                <a:solidFill>
+                  <a:schemeClr val="accent1">
+                    <a:lumMod val="60000"/>
+                    <a:lumOff val="40000"/>
+                  </a:schemeClr>
+                </a:solidFill>
+              </a:rPr>
+              <a:t>Y</a:t>
+            </a:r>
+            <a:endParaRPr lang="fr-BE" dirty="0">
+              <a:solidFill>
+                <a:schemeClr val="accent1">
+                  <a:lumMod val="60000"/>
+                  <a:lumOff val="40000"/>
+                </a:schemeClr>
+              </a:solidFill>
+            </a:endParaRPr>
+          </a:p>
+        </p:txBody>
+      </p:sp>
+      <p:sp>
+        <p:nvSpPr>
+          <p:cNvPr id="18" name="ZoneTexte 17">
+            <a:extLst>
+              <a:ext uri="{FF2B5EF4-FFF2-40B4-BE49-F238E27FC236}">
+                <a16:creationId xmlns:a16="http://schemas.microsoft.com/office/drawing/2014/main" id="{70706079-D64D-6160-DB77-1C57FC88BE6C}"/>
+              </a:ext>
+            </a:extLst>
+          </p:cNvPr>
+          <p:cNvSpPr txBox="1"/>
+          <p:nvPr/>
+        </p:nvSpPr>
+        <p:spPr>
+          <a:xfrm rot="16200000">
+            <a:off x="5451819" y="48040"/>
+            <a:ext cx="516047" cy="584775"/>
+          </a:xfrm>
+          <a:prstGeom prst="rect">
+            <a:avLst/>
+          </a:prstGeom>
+          <a:noFill/>
+        </p:spPr>
+        <p:txBody>
+          <a:bodyPr wrap="square" rtlCol="0">
+            <a:spAutoFit/>
+          </a:bodyPr>
+          <a:lstStyle/>
+          <a:p>
+            <a:r>
+              <a:rPr lang="fr-BE" sz="3200" dirty="0">
+                <a:solidFill>
+                  <a:schemeClr val="accent1">
+                    <a:lumMod val="60000"/>
+                    <a:lumOff val="40000"/>
+                  </a:schemeClr>
+                </a:solidFill>
+              </a:rPr>
+              <a:t>X</a:t>
+            </a:r>
+            <a:endParaRPr lang="fr-BE" dirty="0">
+              <a:solidFill>
+                <a:schemeClr val="accent1">
+                  <a:lumMod val="60000"/>
+                  <a:lumOff val="40000"/>
+                </a:schemeClr>
+              </a:solidFill>
+            </a:endParaRPr>
+          </a:p>
+        </p:txBody>
+      </p:sp>
+      <p:sp>
+        <p:nvSpPr>
+          <p:cNvPr id="19" name="ZoneTexte 18">
+            <a:extLst>
+              <a:ext uri="{FF2B5EF4-FFF2-40B4-BE49-F238E27FC236}">
+                <a16:creationId xmlns:a16="http://schemas.microsoft.com/office/drawing/2014/main" id="{217EB154-D9AC-2B77-15F9-8055B9140292}"/>
+              </a:ext>
+            </a:extLst>
+          </p:cNvPr>
+          <p:cNvSpPr txBox="1"/>
+          <p:nvPr/>
+        </p:nvSpPr>
+        <p:spPr>
+          <a:xfrm rot="16200000">
+            <a:off x="5410149" y="3459344"/>
+            <a:ext cx="784053" cy="400110"/>
+          </a:xfrm>
+          <a:prstGeom prst="rect">
+            <a:avLst/>
+          </a:prstGeom>
+          <a:noFill/>
+        </p:spPr>
+        <p:txBody>
+          <a:bodyPr wrap="square" rtlCol="0">
+            <a:spAutoFit/>
+          </a:bodyPr>
+          <a:lstStyle/>
+          <a:p>
+            <a:r>
+              <a:rPr lang="fr-BE" sz="2000" dirty="0">
+                <a:solidFill>
+                  <a:schemeClr val="accent1">
+                    <a:lumMod val="60000"/>
+                    <a:lumOff val="40000"/>
+                  </a:schemeClr>
+                </a:solidFill>
+              </a:rPr>
+              <a:t>(0;0)</a:t>
+            </a:r>
+            <a:endParaRPr lang="fr-BE" sz="1200" dirty="0">
+              <a:solidFill>
+                <a:schemeClr val="accent1">
+                  <a:lumMod val="60000"/>
+                  <a:lumOff val="40000"/>
+                </a:schemeClr>
+              </a:solidFill>
+            </a:endParaRPr>
+          </a:p>
+        </p:txBody>
+      </p:sp>
+    </p:spTree>
+    <p:extLst>
+      <p:ext uri="{BB962C8B-B14F-4D97-AF65-F5344CB8AC3E}">
+        <p14:creationId xmlns:p14="http://schemas.microsoft.com/office/powerpoint/2010/main" val="3494232848"/>
+      </p:ext>
+    </p:extLst>
+  </p:cSld>
+  <p:clrMapOvr>
+    <a:masterClrMapping/>
+  </p:clrMapOvr>
+</p:sld>
+</file>
+
+<file path=ppt/slides/slide43.xml><?xml version="1.0" encoding="utf-8"?>
+<p:sld xmlns:a="http://schemas.openxmlformats.org/drawingml/2006/main" xmlns:r="http://schemas.openxmlformats.org/officeDocument/2006/relationships" xmlns:p="http://schemas.openxmlformats.org/presentationml/2006/main">
+  <p:cSld>
+    <p:spTree>
+      <p:nvGrpSpPr>
+        <p:cNvPr id="1" name="">
+          <a:extLst>
+            <a:ext uri="{FF2B5EF4-FFF2-40B4-BE49-F238E27FC236}">
+              <a16:creationId xmlns:a16="http://schemas.microsoft.com/office/drawing/2014/main" id="{3736C0B5-601A-E7A1-AB65-EDF99D0695D0}"/>
+            </a:ext>
+          </a:extLst>
+        </p:cNvPr>
+        <p:cNvGrpSpPr/>
+        <p:nvPr/>
+      </p:nvGrpSpPr>
+      <p:grpSpPr>
+        <a:xfrm>
+          <a:off x="0" y="0"/>
+          <a:ext cx="0" cy="0"/>
+          <a:chOff x="0" y="0"/>
+          <a:chExt cx="0" cy="0"/>
+        </a:xfrm>
+      </p:grpSpPr>
+      <p:pic>
+        <p:nvPicPr>
+          <p:cNvPr id="9" name="Image 8">
+            <a:extLst>
+              <a:ext uri="{FF2B5EF4-FFF2-40B4-BE49-F238E27FC236}">
+                <a16:creationId xmlns:a16="http://schemas.microsoft.com/office/drawing/2014/main" id="{FF6FDCE9-0E2C-9F4B-2C4F-5B623A9FAB4A}"/>
+              </a:ext>
+            </a:extLst>
+          </p:cNvPr>
+          <p:cNvPicPr>
+            <a:picLocks noChangeAspect="1"/>
+          </p:cNvPicPr>
+          <p:nvPr/>
+        </p:nvPicPr>
+        <p:blipFill>
+          <a:blip r:embed="rId2"/>
+          <a:stretch>
+            <a:fillRect/>
+          </a:stretch>
+        </p:blipFill>
+        <p:spPr>
+          <a:xfrm rot="17213358">
+            <a:off x="2727570" y="1314299"/>
+            <a:ext cx="6623727" cy="4085710"/>
+          </a:xfrm>
+          <a:prstGeom prst="rect">
+            <a:avLst/>
+          </a:prstGeom>
+        </p:spPr>
+      </p:pic>
+      <p:sp>
+        <p:nvSpPr>
+          <p:cNvPr id="2" name="Rectangle 1">
+            <a:extLst>
+              <a:ext uri="{FF2B5EF4-FFF2-40B4-BE49-F238E27FC236}">
+                <a16:creationId xmlns:a16="http://schemas.microsoft.com/office/drawing/2014/main" id="{55C49981-5C8B-3968-F20D-8947EF883299}"/>
+              </a:ext>
+            </a:extLst>
+          </p:cNvPr>
+          <p:cNvSpPr/>
+          <p:nvPr/>
+        </p:nvSpPr>
+        <p:spPr>
+          <a:xfrm>
+            <a:off x="5709842" y="3009348"/>
+            <a:ext cx="1225110" cy="784054"/>
+          </a:xfrm>
+          <a:prstGeom prst="rect">
+            <a:avLst/>
+          </a:prstGeom>
+          <a:solidFill>
+            <a:schemeClr val="bg1"/>
+          </a:solidFill>
+          <a:ln>
+            <a:noFill/>
+          </a:ln>
+        </p:spPr>
+        <p:style>
+          <a:lnRef idx="2">
+            <a:schemeClr val="accent1">
+              <a:shade val="15000"/>
+            </a:schemeClr>
+          </a:lnRef>
+          <a:fillRef idx="1">
+            <a:schemeClr val="accent1"/>
+          </a:fillRef>
+          <a:effectRef idx="0">
+            <a:schemeClr val="accent1"/>
+          </a:effectRef>
+          <a:fontRef idx="minor">
+            <a:schemeClr val="lt1"/>
+          </a:fontRef>
+        </p:style>
+        <p:txBody>
+          <a:bodyPr rtlCol="0" anchor="ctr"/>
+          <a:lstStyle/>
+          <a:p>
+            <a:pPr algn="ctr"/>
+            <a:endParaRPr lang="fr-BE"/>
+          </a:p>
+        </p:txBody>
+      </p:sp>
+      <p:cxnSp>
+        <p:nvCxnSpPr>
+          <p:cNvPr id="4" name="Connecteur droit 3">
+            <a:extLst>
+              <a:ext uri="{FF2B5EF4-FFF2-40B4-BE49-F238E27FC236}">
+                <a16:creationId xmlns:a16="http://schemas.microsoft.com/office/drawing/2014/main" id="{76A041EA-3111-1442-B22E-B8BF56DC0056}"/>
+              </a:ext>
+            </a:extLst>
+          </p:cNvPr>
+          <p:cNvCxnSpPr>
+            <a:cxnSpLocks/>
+          </p:cNvCxnSpPr>
+          <p:nvPr/>
+        </p:nvCxnSpPr>
+        <p:spPr>
+          <a:xfrm>
+            <a:off x="1765426" y="3401696"/>
+            <a:ext cx="8957772" cy="0"/>
+          </a:xfrm>
+          <a:prstGeom prst="line">
+            <a:avLst/>
+          </a:prstGeom>
+          <a:ln w="19050" cap="flat" cmpd="sng" algn="ctr">
+            <a:solidFill>
+              <a:schemeClr val="dk1"/>
+            </a:solidFill>
+            <a:prstDash val="solid"/>
+            <a:round/>
+            <a:headEnd type="none" w="med" len="med"/>
+            <a:tailEnd type="arrow" w="med" len="med"/>
+          </a:ln>
+        </p:spPr>
+        <p:style>
+          <a:lnRef idx="0">
+            <a:scrgbClr r="0" g="0" b="0"/>
+          </a:lnRef>
+          <a:fillRef idx="0">
+            <a:scrgbClr r="0" g="0" b="0"/>
+          </a:fillRef>
+          <a:effectRef idx="0">
+            <a:scrgbClr r="0" g="0" b="0"/>
+          </a:effectRef>
+          <a:fontRef idx="minor">
+            <a:schemeClr val="tx1"/>
+          </a:fontRef>
+        </p:style>
+      </p:cxnSp>
+      <p:cxnSp>
+        <p:nvCxnSpPr>
+          <p:cNvPr id="6" name="Connecteur droit 5">
+            <a:extLst>
+              <a:ext uri="{FF2B5EF4-FFF2-40B4-BE49-F238E27FC236}">
+                <a16:creationId xmlns:a16="http://schemas.microsoft.com/office/drawing/2014/main" id="{83C1E813-8CF5-6099-30AA-8171459EECF7}"/>
+              </a:ext>
+            </a:extLst>
+          </p:cNvPr>
+          <p:cNvCxnSpPr>
+            <a:cxnSpLocks/>
+          </p:cNvCxnSpPr>
+          <p:nvPr/>
+        </p:nvCxnSpPr>
+        <p:spPr>
+          <a:xfrm flipV="1">
+            <a:off x="6096000" y="190500"/>
+            <a:ext cx="0" cy="6502400"/>
+          </a:xfrm>
+          <a:prstGeom prst="line">
+            <a:avLst/>
+          </a:prstGeom>
+          <a:ln w="19050" cap="flat" cmpd="sng" algn="ctr">
+            <a:solidFill>
+              <a:schemeClr val="dk1"/>
+            </a:solidFill>
+            <a:prstDash val="solid"/>
+            <a:round/>
+            <a:headEnd type="none" w="med" len="med"/>
+            <a:tailEnd type="arrow" w="med" len="med"/>
+          </a:ln>
+        </p:spPr>
+        <p:style>
+          <a:lnRef idx="0">
+            <a:scrgbClr r="0" g="0" b="0"/>
+          </a:lnRef>
+          <a:fillRef idx="0">
+            <a:scrgbClr r="0" g="0" b="0"/>
+          </a:fillRef>
+          <a:effectRef idx="0">
+            <a:scrgbClr r="0" g="0" b="0"/>
+          </a:effectRef>
+          <a:fontRef idx="minor">
+            <a:schemeClr val="tx1"/>
+          </a:fontRef>
+        </p:style>
+      </p:cxnSp>
+      <p:sp>
+        <p:nvSpPr>
+          <p:cNvPr id="3" name="ZoneTexte 2">
+            <a:extLst>
+              <a:ext uri="{FF2B5EF4-FFF2-40B4-BE49-F238E27FC236}">
+                <a16:creationId xmlns:a16="http://schemas.microsoft.com/office/drawing/2014/main" id="{102DAF3C-F013-9C5B-8B56-11C12D005D9E}"/>
+              </a:ext>
+            </a:extLst>
+          </p:cNvPr>
+          <p:cNvSpPr txBox="1"/>
+          <p:nvPr/>
+        </p:nvSpPr>
+        <p:spPr>
+          <a:xfrm>
+            <a:off x="10465174" y="3456304"/>
+            <a:ext cx="516047" cy="400110"/>
+          </a:xfrm>
+          <a:prstGeom prst="rect">
+            <a:avLst/>
+          </a:prstGeom>
+          <a:noFill/>
+        </p:spPr>
+        <p:txBody>
+          <a:bodyPr wrap="square" rtlCol="0">
+            <a:spAutoFit/>
+          </a:bodyPr>
+          <a:lstStyle/>
+          <a:p>
+            <a:r>
+              <a:rPr lang="fr-BE" sz="2000" dirty="0"/>
+              <a:t>x</a:t>
+            </a:r>
+            <a:endParaRPr lang="fr-BE" sz="1200" dirty="0"/>
+          </a:p>
+        </p:txBody>
+      </p:sp>
+      <p:sp>
+        <p:nvSpPr>
+          <p:cNvPr id="5" name="ZoneTexte 4">
+            <a:extLst>
+              <a:ext uri="{FF2B5EF4-FFF2-40B4-BE49-F238E27FC236}">
+                <a16:creationId xmlns:a16="http://schemas.microsoft.com/office/drawing/2014/main" id="{7437F03C-8F3B-E056-350A-51A6842BEAA9}"/>
+              </a:ext>
+            </a:extLst>
+          </p:cNvPr>
+          <p:cNvSpPr txBox="1"/>
+          <p:nvPr/>
+        </p:nvSpPr>
+        <p:spPr>
+          <a:xfrm>
+            <a:off x="5649898" y="190500"/>
+            <a:ext cx="516047" cy="400110"/>
+          </a:xfrm>
+          <a:prstGeom prst="rect">
+            <a:avLst/>
+          </a:prstGeom>
+          <a:noFill/>
+        </p:spPr>
+        <p:txBody>
+          <a:bodyPr wrap="square" rtlCol="0">
+            <a:spAutoFit/>
+          </a:bodyPr>
+          <a:lstStyle/>
+          <a:p>
+            <a:r>
+              <a:rPr lang="fr-BE" sz="2000" dirty="0"/>
+              <a:t>y</a:t>
+            </a:r>
+            <a:endParaRPr lang="fr-BE" sz="1200" dirty="0"/>
+          </a:p>
+        </p:txBody>
+      </p:sp>
+      <p:sp>
+        <p:nvSpPr>
+          <p:cNvPr id="7" name="ZoneTexte 6">
+            <a:extLst>
+              <a:ext uri="{FF2B5EF4-FFF2-40B4-BE49-F238E27FC236}">
+                <a16:creationId xmlns:a16="http://schemas.microsoft.com/office/drawing/2014/main" id="{5D637046-CB57-C5AB-046E-D499ED1BD571}"/>
+              </a:ext>
+            </a:extLst>
+          </p:cNvPr>
+          <p:cNvSpPr txBox="1"/>
+          <p:nvPr/>
+        </p:nvSpPr>
+        <p:spPr>
+          <a:xfrm>
+            <a:off x="5410149" y="3459344"/>
+            <a:ext cx="784053" cy="400110"/>
+          </a:xfrm>
+          <a:prstGeom prst="rect">
+            <a:avLst/>
+          </a:prstGeom>
+          <a:noFill/>
+        </p:spPr>
+        <p:txBody>
+          <a:bodyPr wrap="square" rtlCol="0">
+            <a:spAutoFit/>
+          </a:bodyPr>
+          <a:lstStyle/>
+          <a:p>
+            <a:r>
+              <a:rPr lang="fr-BE" sz="2000" dirty="0"/>
+              <a:t>(0;0)</a:t>
+            </a:r>
+            <a:endParaRPr lang="fr-BE" sz="1200" dirty="0"/>
+          </a:p>
+        </p:txBody>
+      </p:sp>
+    </p:spTree>
+    <p:extLst>
+      <p:ext uri="{BB962C8B-B14F-4D97-AF65-F5344CB8AC3E}">
+        <p14:creationId xmlns:p14="http://schemas.microsoft.com/office/powerpoint/2010/main" val="2202537394"/>
+      </p:ext>
+    </p:extLst>
+  </p:cSld>
+  <p:clrMapOvr>
+    <a:masterClrMapping/>
+  </p:clrMapOvr>
+</p:sld>
+</file>
+
+<file path=ppt/slides/slide44.xml><?xml version="1.0" encoding="utf-8"?>
+<p:sld xmlns:a="http://schemas.openxmlformats.org/drawingml/2006/main" xmlns:r="http://schemas.openxmlformats.org/officeDocument/2006/relationships" xmlns:p="http://schemas.openxmlformats.org/presentationml/2006/main">
+  <p:cSld>
+    <p:spTree>
+      <p:nvGrpSpPr>
+        <p:cNvPr id="1" name="">
+          <a:extLst>
+            <a:ext uri="{FF2B5EF4-FFF2-40B4-BE49-F238E27FC236}">
+              <a16:creationId xmlns:a16="http://schemas.microsoft.com/office/drawing/2014/main" id="{994D1C35-BA82-56B6-CE39-F858B82D2F60}"/>
+            </a:ext>
+          </a:extLst>
+        </p:cNvPr>
+        <p:cNvGrpSpPr/>
+        <p:nvPr/>
+      </p:nvGrpSpPr>
+      <p:grpSpPr>
+        <a:xfrm>
+          <a:off x="0" y="0"/>
+          <a:ext cx="0" cy="0"/>
+          <a:chOff x="0" y="0"/>
+          <a:chExt cx="0" cy="0"/>
+        </a:xfrm>
+      </p:grpSpPr>
+      <p:pic>
+        <p:nvPicPr>
+          <p:cNvPr id="3" name="Image 2">
+            <a:extLst>
+              <a:ext uri="{FF2B5EF4-FFF2-40B4-BE49-F238E27FC236}">
+                <a16:creationId xmlns:a16="http://schemas.microsoft.com/office/drawing/2014/main" id="{EE632BB3-00E4-36DD-25A2-2AF8AADEF486}"/>
+              </a:ext>
+            </a:extLst>
+          </p:cNvPr>
+          <p:cNvPicPr>
+            <a:picLocks noChangeAspect="1"/>
+          </p:cNvPicPr>
+          <p:nvPr/>
+        </p:nvPicPr>
+        <p:blipFill>
+          <a:blip r:embed="rId2"/>
+          <a:stretch>
+            <a:fillRect/>
+          </a:stretch>
+        </p:blipFill>
+        <p:spPr>
+          <a:xfrm>
+            <a:off x="428607" y="0"/>
+            <a:ext cx="6925817" cy="6858000"/>
+          </a:xfrm>
+          <a:prstGeom prst="rect">
+            <a:avLst/>
+          </a:prstGeom>
+        </p:spPr>
+      </p:pic>
+      <p:pic>
+        <p:nvPicPr>
+          <p:cNvPr id="5" name="Image 4">
+            <a:extLst>
+              <a:ext uri="{FF2B5EF4-FFF2-40B4-BE49-F238E27FC236}">
+                <a16:creationId xmlns:a16="http://schemas.microsoft.com/office/drawing/2014/main" id="{1AFF92CA-07CE-828B-BE2C-2DF08781285A}"/>
+              </a:ext>
+            </a:extLst>
+          </p:cNvPr>
+          <p:cNvPicPr>
+            <a:picLocks noChangeAspect="1"/>
+          </p:cNvPicPr>
+          <p:nvPr/>
+        </p:nvPicPr>
+        <p:blipFill>
+          <a:blip r:embed="rId3"/>
+          <a:stretch>
+            <a:fillRect/>
+          </a:stretch>
+        </p:blipFill>
+        <p:spPr>
+          <a:xfrm>
+            <a:off x="6907424" y="0"/>
+            <a:ext cx="5284575" cy="2849526"/>
+          </a:xfrm>
+          <a:prstGeom prst="rect">
+            <a:avLst/>
+          </a:prstGeom>
+        </p:spPr>
+      </p:pic>
+    </p:spTree>
+    <p:extLst>
+      <p:ext uri="{BB962C8B-B14F-4D97-AF65-F5344CB8AC3E}">
+        <p14:creationId xmlns:p14="http://schemas.microsoft.com/office/powerpoint/2010/main" val="3717806884"/>
+      </p:ext>
+    </p:extLst>
+  </p:cSld>
+  <p:clrMapOvr>
+    <a:masterClrMapping/>
+  </p:clrMapOvr>
+</p:sld>
+</file>
+
+<file path=ppt/slides/slide45.xml><?xml version="1.0" encoding="utf-8"?>
+<p:sld xmlns:a="http://schemas.openxmlformats.org/drawingml/2006/main" xmlns:r="http://schemas.openxmlformats.org/officeDocument/2006/relationships" xmlns:p="http://schemas.openxmlformats.org/presentationml/2006/main">
+  <p:cSld>
+    <p:spTree>
+      <p:nvGrpSpPr>
+        <p:cNvPr id="1" name="">
+          <a:extLst>
+            <a:ext uri="{FF2B5EF4-FFF2-40B4-BE49-F238E27FC236}">
+              <a16:creationId xmlns:a16="http://schemas.microsoft.com/office/drawing/2014/main" id="{19DDE021-1420-6FD0-A343-E8CB91C366B7}"/>
+            </a:ext>
+          </a:extLst>
+        </p:cNvPr>
+        <p:cNvGrpSpPr/>
+        <p:nvPr/>
+      </p:nvGrpSpPr>
+      <p:grpSpPr>
+        <a:xfrm>
+          <a:off x="0" y="0"/>
+          <a:ext cx="0" cy="0"/>
+          <a:chOff x="0" y="0"/>
+          <a:chExt cx="0" cy="0"/>
+        </a:xfrm>
+      </p:grpSpPr>
+      <p:pic>
+        <p:nvPicPr>
+          <p:cNvPr id="3" name="Image 2">
+            <a:extLst>
+              <a:ext uri="{FF2B5EF4-FFF2-40B4-BE49-F238E27FC236}">
+                <a16:creationId xmlns:a16="http://schemas.microsoft.com/office/drawing/2014/main" id="{7161C5EF-75B8-7108-3F09-47EA60A2011A}"/>
+              </a:ext>
+            </a:extLst>
+          </p:cNvPr>
+          <p:cNvPicPr>
+            <a:picLocks noChangeAspect="1"/>
+          </p:cNvPicPr>
+          <p:nvPr/>
+        </p:nvPicPr>
+        <p:blipFill>
+          <a:blip r:embed="rId2"/>
+          <a:stretch>
+            <a:fillRect/>
+          </a:stretch>
+        </p:blipFill>
+        <p:spPr>
+          <a:xfrm>
+            <a:off x="0" y="1980031"/>
+            <a:ext cx="12192000" cy="1381026"/>
+          </a:xfrm>
+          <a:prstGeom prst="rect">
+            <a:avLst/>
+          </a:prstGeom>
+        </p:spPr>
+      </p:pic>
+    </p:spTree>
+    <p:extLst>
+      <p:ext uri="{BB962C8B-B14F-4D97-AF65-F5344CB8AC3E}">
+        <p14:creationId xmlns:p14="http://schemas.microsoft.com/office/powerpoint/2010/main" val="3455796381"/>
+      </p:ext>
+    </p:extLst>
+  </p:cSld>
+  <p:clrMapOvr>
+    <a:masterClrMapping/>
+  </p:clrMapOvr>
+</p:sld>
+</file>
+
+<file path=ppt/slides/slide46.xml><?xml version="1.0" encoding="utf-8"?>
+<p:sld xmlns:a="http://schemas.openxmlformats.org/drawingml/2006/main" xmlns:r="http://schemas.openxmlformats.org/officeDocument/2006/relationships" xmlns:p="http://schemas.openxmlformats.org/presentationml/2006/main">
+  <p:cSld>
+    <p:spTree>
+      <p:nvGrpSpPr>
+        <p:cNvPr id="1" name="">
+          <a:extLst>
+            <a:ext uri="{FF2B5EF4-FFF2-40B4-BE49-F238E27FC236}">
+              <a16:creationId xmlns:a16="http://schemas.microsoft.com/office/drawing/2014/main" id="{1D14EA09-6F50-BA57-E66C-E61B11AC6FE2}"/>
+            </a:ext>
+          </a:extLst>
+        </p:cNvPr>
+        <p:cNvGrpSpPr/>
+        <p:nvPr/>
+      </p:nvGrpSpPr>
+      <p:grpSpPr>
+        <a:xfrm>
+          <a:off x="0" y="0"/>
+          <a:ext cx="0" cy="0"/>
+          <a:chOff x="0" y="0"/>
+          <a:chExt cx="0" cy="0"/>
+        </a:xfrm>
+      </p:grpSpPr>
+      <p:pic>
+        <p:nvPicPr>
+          <p:cNvPr id="3" name="Image 2">
+            <a:extLst>
+              <a:ext uri="{FF2B5EF4-FFF2-40B4-BE49-F238E27FC236}">
+                <a16:creationId xmlns:a16="http://schemas.microsoft.com/office/drawing/2014/main" id="{47B4415F-B2D5-0337-2432-A2FA1F78667E}"/>
+              </a:ext>
+            </a:extLst>
+          </p:cNvPr>
+          <p:cNvPicPr>
+            <a:picLocks noChangeAspect="1"/>
+          </p:cNvPicPr>
+          <p:nvPr/>
+        </p:nvPicPr>
+        <p:blipFill>
+          <a:blip r:embed="rId2"/>
+          <a:stretch>
+            <a:fillRect/>
+          </a:stretch>
+        </p:blipFill>
+        <p:spPr>
+          <a:xfrm>
+            <a:off x="0" y="1655675"/>
+            <a:ext cx="12192000" cy="2426685"/>
+          </a:xfrm>
+          <a:prstGeom prst="rect">
+            <a:avLst/>
+          </a:prstGeom>
+        </p:spPr>
+      </p:pic>
+    </p:spTree>
+    <p:extLst>
+      <p:ext uri="{BB962C8B-B14F-4D97-AF65-F5344CB8AC3E}">
+        <p14:creationId xmlns:p14="http://schemas.microsoft.com/office/powerpoint/2010/main" val="1288482546"/>
+      </p:ext>
+    </p:extLst>
+  </p:cSld>
+  <p:clrMapOvr>
+    <a:masterClrMapping/>
+  </p:clrMapOvr>
+</p:sld>
+</file>
+
+<file path=ppt/slides/slide47.xml><?xml version="1.0" encoding="utf-8"?>
+<p:sld xmlns:a="http://schemas.openxmlformats.org/drawingml/2006/main" xmlns:r="http://schemas.openxmlformats.org/officeDocument/2006/relationships" xmlns:p="http://schemas.openxmlformats.org/presentationml/2006/main">
+  <p:cSld>
+    <p:spTree>
+      <p:nvGrpSpPr>
+        <p:cNvPr id="1" name="">
+          <a:extLst>
+            <a:ext uri="{FF2B5EF4-FFF2-40B4-BE49-F238E27FC236}">
+              <a16:creationId xmlns:a16="http://schemas.microsoft.com/office/drawing/2014/main" id="{28C1615A-D054-269C-11C2-7A2A769A151F}"/>
+            </a:ext>
+          </a:extLst>
+        </p:cNvPr>
+        <p:cNvGrpSpPr/>
+        <p:nvPr/>
+      </p:nvGrpSpPr>
+      <p:grpSpPr>
+        <a:xfrm>
+          <a:off x="0" y="0"/>
+          <a:ext cx="0" cy="0"/>
+          <a:chOff x="0" y="0"/>
+          <a:chExt cx="0" cy="0"/>
+        </a:xfrm>
+      </p:grpSpPr>
+      <p:pic>
+        <p:nvPicPr>
+          <p:cNvPr id="3" name="Image 2">
+            <a:extLst>
+              <a:ext uri="{FF2B5EF4-FFF2-40B4-BE49-F238E27FC236}">
+                <a16:creationId xmlns:a16="http://schemas.microsoft.com/office/drawing/2014/main" id="{FA0DF54B-7084-F0EE-E2A3-B65D26FDA652}"/>
+              </a:ext>
+            </a:extLst>
+          </p:cNvPr>
+          <p:cNvPicPr>
+            <a:picLocks noChangeAspect="1"/>
+          </p:cNvPicPr>
+          <p:nvPr/>
+        </p:nvPicPr>
+        <p:blipFill>
+          <a:blip r:embed="rId2"/>
+          <a:stretch>
+            <a:fillRect/>
+          </a:stretch>
+        </p:blipFill>
+        <p:spPr>
+          <a:xfrm>
+            <a:off x="0" y="1717991"/>
+            <a:ext cx="12192000" cy="2457999"/>
+          </a:xfrm>
+          <a:prstGeom prst="rect">
+            <a:avLst/>
+          </a:prstGeom>
+        </p:spPr>
+      </p:pic>
+    </p:spTree>
+    <p:extLst>
+      <p:ext uri="{BB962C8B-B14F-4D97-AF65-F5344CB8AC3E}">
+        <p14:creationId xmlns:p14="http://schemas.microsoft.com/office/powerpoint/2010/main" val="3797827754"/>
+      </p:ext>
+    </p:extLst>
+  </p:cSld>
+  <p:clrMapOvr>
+    <a:masterClrMapping/>
+  </p:clrMapOvr>
+</p:sld>
+</file>
+
+<file path=ppt/slides/slide48.xml><?xml version="1.0" encoding="utf-8"?>
 <p:sld xmlns:a="http://schemas.openxmlformats.org/drawingml/2006/main" xmlns:r="http://schemas.openxmlformats.org/officeDocument/2006/relationships" xmlns:p="http://schemas.openxmlformats.org/presentationml/2006/main">
   <p:cSld>
     <p:spTree>
@@ -17106,7 +21259,7 @@
 </p:sld>
 </file>
 
-<file path=ppt/slides/slide41.xml><?xml version="1.0" encoding="utf-8"?>
+<file path=ppt/slides/slide49.xml><?xml version="1.0" encoding="utf-8"?>
 <p:sld xmlns:a="http://schemas.openxmlformats.org/drawingml/2006/main" xmlns:r="http://schemas.openxmlformats.org/officeDocument/2006/relationships" xmlns:p="http://schemas.openxmlformats.org/presentationml/2006/main">
   <p:cSld>
     <p:spTree>
@@ -17142,7 +21295,292 @@
 </p:sld>
 </file>
 
-<file path=ppt/slides/slide42.xml><?xml version="1.0" encoding="utf-8"?>
+<file path=ppt/slides/slide5.xml><?xml version="1.0" encoding="utf-8"?>
+<p:sld xmlns:a="http://schemas.openxmlformats.org/drawingml/2006/main" xmlns:r="http://schemas.openxmlformats.org/officeDocument/2006/relationships" xmlns:p="http://schemas.openxmlformats.org/presentationml/2006/main">
+  <p:cSld>
+    <p:spTree>
+      <p:nvGrpSpPr>
+        <p:cNvPr id="1" name="">
+          <a:extLst>
+            <a:ext uri="{FF2B5EF4-FFF2-40B4-BE49-F238E27FC236}">
+              <a16:creationId xmlns:a16="http://schemas.microsoft.com/office/drawing/2014/main" id="{87EE3A80-18E1-700C-F239-868ECB5564A5}"/>
+            </a:ext>
+          </a:extLst>
+        </p:cNvPr>
+        <p:cNvGrpSpPr/>
+        <p:nvPr/>
+      </p:nvGrpSpPr>
+      <p:grpSpPr>
+        <a:xfrm>
+          <a:off x="0" y="0"/>
+          <a:ext cx="0" cy="0"/>
+          <a:chOff x="0" y="0"/>
+          <a:chExt cx="0" cy="0"/>
+        </a:xfrm>
+      </p:grpSpPr>
+      <p:pic>
+        <p:nvPicPr>
+          <p:cNvPr id="3" name="Image 2">
+            <a:extLst>
+              <a:ext uri="{FF2B5EF4-FFF2-40B4-BE49-F238E27FC236}">
+                <a16:creationId xmlns:a16="http://schemas.microsoft.com/office/drawing/2014/main" id="{5EDD913E-B5C6-14DA-7EFB-B40CB657AEBD}"/>
+              </a:ext>
+            </a:extLst>
+          </p:cNvPr>
+          <p:cNvPicPr>
+            <a:picLocks noChangeAspect="1"/>
+          </p:cNvPicPr>
+          <p:nvPr/>
+        </p:nvPicPr>
+        <p:blipFill>
+          <a:blip r:embed="rId2">
+            <a:extLst>
+              <a:ext uri="{28A0092B-C50C-407E-A947-70E740481C1C}">
+                <a14:useLocalDpi xmlns:a14="http://schemas.microsoft.com/office/drawing/2010/main" val="0"/>
+              </a:ext>
+            </a:extLst>
+          </a:blip>
+          <a:srcRect/>
+          <a:stretch/>
+        </p:blipFill>
+        <p:spPr>
+          <a:xfrm rot="5400000">
+            <a:off x="2618395" y="-1604724"/>
+            <a:ext cx="6858000" cy="10067448"/>
+          </a:xfrm>
+          <a:prstGeom prst="rect">
+            <a:avLst/>
+          </a:prstGeom>
+        </p:spPr>
+      </p:pic>
+      <p:sp>
+        <p:nvSpPr>
+          <p:cNvPr id="6" name="Rectangle 5">
+            <a:extLst>
+              <a:ext uri="{FF2B5EF4-FFF2-40B4-BE49-F238E27FC236}">
+                <a16:creationId xmlns:a16="http://schemas.microsoft.com/office/drawing/2014/main" id="{D7C7751B-6DC0-23B3-1F69-035002512273}"/>
+              </a:ext>
+            </a:extLst>
+          </p:cNvPr>
+          <p:cNvSpPr/>
+          <p:nvPr/>
+        </p:nvSpPr>
+        <p:spPr>
+          <a:xfrm>
+            <a:off x="3138770" y="965728"/>
+            <a:ext cx="7676148" cy="794085"/>
+          </a:xfrm>
+          <a:prstGeom prst="rect">
+            <a:avLst/>
+          </a:prstGeom>
+          <a:solidFill>
+            <a:srgbClr val="AEAEAE">
+              <a:alpha val="89020"/>
+            </a:srgbClr>
+          </a:solidFill>
+          <a:ln w="76200">
+            <a:noFill/>
+          </a:ln>
+        </p:spPr>
+        <p:style>
+          <a:lnRef idx="2">
+            <a:schemeClr val="accent1">
+              <a:shade val="15000"/>
+            </a:schemeClr>
+          </a:lnRef>
+          <a:fillRef idx="1">
+            <a:schemeClr val="accent1"/>
+          </a:fillRef>
+          <a:effectRef idx="0">
+            <a:schemeClr val="accent1"/>
+          </a:effectRef>
+          <a:fontRef idx="minor">
+            <a:schemeClr val="lt1"/>
+          </a:fontRef>
+        </p:style>
+        <p:txBody>
+          <a:bodyPr rtlCol="0" anchor="ctr"/>
+          <a:lstStyle/>
+          <a:p>
+            <a:pPr algn="ctr"/>
+            <a:endParaRPr lang="fr-BE" dirty="0"/>
+          </a:p>
+        </p:txBody>
+      </p:sp>
+      <p:sp>
+        <p:nvSpPr>
+          <p:cNvPr id="7" name="Rectangle 6">
+            <a:extLst>
+              <a:ext uri="{FF2B5EF4-FFF2-40B4-BE49-F238E27FC236}">
+                <a16:creationId xmlns:a16="http://schemas.microsoft.com/office/drawing/2014/main" id="{0E3E8305-F49B-7288-6556-23991517537A}"/>
+              </a:ext>
+            </a:extLst>
+          </p:cNvPr>
+          <p:cNvSpPr/>
+          <p:nvPr/>
+        </p:nvSpPr>
+        <p:spPr>
+          <a:xfrm>
+            <a:off x="3138769" y="1749858"/>
+            <a:ext cx="1920033" cy="794085"/>
+          </a:xfrm>
+          <a:prstGeom prst="rect">
+            <a:avLst/>
+          </a:prstGeom>
+          <a:solidFill>
+            <a:srgbClr val="AEAEAE">
+              <a:alpha val="89020"/>
+            </a:srgbClr>
+          </a:solidFill>
+          <a:ln w="76200">
+            <a:noFill/>
+          </a:ln>
+        </p:spPr>
+        <p:style>
+          <a:lnRef idx="2">
+            <a:schemeClr val="accent1">
+              <a:shade val="15000"/>
+            </a:schemeClr>
+          </a:lnRef>
+          <a:fillRef idx="1">
+            <a:schemeClr val="accent1"/>
+          </a:fillRef>
+          <a:effectRef idx="0">
+            <a:schemeClr val="accent1"/>
+          </a:effectRef>
+          <a:fontRef idx="minor">
+            <a:schemeClr val="lt1"/>
+          </a:fontRef>
+        </p:style>
+        <p:txBody>
+          <a:bodyPr rtlCol="0" anchor="ctr"/>
+          <a:lstStyle/>
+          <a:p>
+            <a:pPr algn="ctr"/>
+            <a:endParaRPr lang="fr-BE" dirty="0"/>
+          </a:p>
+        </p:txBody>
+      </p:sp>
+      <p:sp>
+        <p:nvSpPr>
+          <p:cNvPr id="4" name="Rectangle 3">
+            <a:extLst>
+              <a:ext uri="{FF2B5EF4-FFF2-40B4-BE49-F238E27FC236}">
+                <a16:creationId xmlns:a16="http://schemas.microsoft.com/office/drawing/2014/main" id="{4C5902D3-1F19-9E04-01E7-3C71423D4C2E}"/>
+              </a:ext>
+            </a:extLst>
+          </p:cNvPr>
+          <p:cNvSpPr/>
+          <p:nvPr/>
+        </p:nvSpPr>
+        <p:spPr>
+          <a:xfrm>
+            <a:off x="3138769" y="3328074"/>
+            <a:ext cx="1920033" cy="794085"/>
+          </a:xfrm>
+          <a:prstGeom prst="rect">
+            <a:avLst/>
+          </a:prstGeom>
+          <a:solidFill>
+            <a:srgbClr val="AEAEAE">
+              <a:alpha val="89020"/>
+            </a:srgbClr>
+          </a:solidFill>
+          <a:ln w="76200">
+            <a:noFill/>
+          </a:ln>
+        </p:spPr>
+        <p:style>
+          <a:lnRef idx="2">
+            <a:schemeClr val="accent1">
+              <a:shade val="15000"/>
+            </a:schemeClr>
+          </a:lnRef>
+          <a:fillRef idx="1">
+            <a:schemeClr val="accent1"/>
+          </a:fillRef>
+          <a:effectRef idx="0">
+            <a:schemeClr val="accent1"/>
+          </a:effectRef>
+          <a:fontRef idx="minor">
+            <a:schemeClr val="lt1"/>
+          </a:fontRef>
+        </p:style>
+        <p:txBody>
+          <a:bodyPr rtlCol="0" anchor="ctr"/>
+          <a:lstStyle/>
+          <a:p>
+            <a:pPr algn="ctr"/>
+            <a:endParaRPr lang="fr-BE" dirty="0"/>
+          </a:p>
+        </p:txBody>
+      </p:sp>
+      <p:sp>
+        <p:nvSpPr>
+          <p:cNvPr id="2" name="Rectangle 1">
+            <a:extLst>
+              <a:ext uri="{FF2B5EF4-FFF2-40B4-BE49-F238E27FC236}">
+                <a16:creationId xmlns:a16="http://schemas.microsoft.com/office/drawing/2014/main" id="{7AF413BF-BD5C-8976-4EFF-DF8CDAEF65A4}"/>
+              </a:ext>
+            </a:extLst>
+          </p:cNvPr>
+          <p:cNvSpPr/>
+          <p:nvPr/>
+        </p:nvSpPr>
+        <p:spPr>
+          <a:xfrm>
+            <a:off x="7133199" y="1754879"/>
+            <a:ext cx="1708485" cy="794084"/>
+          </a:xfrm>
+          <a:prstGeom prst="rect">
+            <a:avLst/>
+          </a:prstGeom>
+          <a:noFill/>
+          <a:ln w="76200">
+            <a:solidFill>
+              <a:srgbClr val="FF0000"/>
+            </a:solidFill>
+          </a:ln>
+        </p:spPr>
+        <p:style>
+          <a:lnRef idx="2">
+            <a:schemeClr val="accent1">
+              <a:shade val="15000"/>
+            </a:schemeClr>
+          </a:lnRef>
+          <a:fillRef idx="1">
+            <a:schemeClr val="accent1"/>
+          </a:fillRef>
+          <a:effectRef idx="0">
+            <a:schemeClr val="accent1"/>
+          </a:effectRef>
+          <a:fontRef idx="minor">
+            <a:schemeClr val="lt1"/>
+          </a:fontRef>
+        </p:style>
+        <p:txBody>
+          <a:bodyPr rtlCol="0" anchor="ctr"/>
+          <a:lstStyle/>
+          <a:p>
+            <a:pPr algn="ctr"/>
+            <a:endParaRPr lang="fr-BE"/>
+          </a:p>
+        </p:txBody>
+      </p:sp>
+    </p:spTree>
+    <p:extLst>
+      <p:ext uri="{BB962C8B-B14F-4D97-AF65-F5344CB8AC3E}">
+        <p14:creationId xmlns:p14="http://schemas.microsoft.com/office/powerpoint/2010/main" val="3718213451"/>
+      </p:ext>
+    </p:extLst>
+  </p:cSld>
+  <p:clrMapOvr>
+    <a:masterClrMapping/>
+  </p:clrMapOvr>
+</p:sld>
+</file>
+
+<file path=ppt/slides/slide50.xml><?xml version="1.0" encoding="utf-8"?>
 <p:sld xmlns:a="http://schemas.openxmlformats.org/drawingml/2006/main" xmlns:r="http://schemas.openxmlformats.org/officeDocument/2006/relationships" xmlns:p="http://schemas.openxmlformats.org/presentationml/2006/main">
   <p:cSld>
     <p:spTree>
@@ -17178,7 +21616,7 @@
 </p:sld>
 </file>
 
-<file path=ppt/slides/slide43.xml><?xml version="1.0" encoding="utf-8"?>
+<file path=ppt/slides/slide51.xml><?xml version="1.0" encoding="utf-8"?>
 <p:sld xmlns:a="http://schemas.openxmlformats.org/drawingml/2006/main" xmlns:r="http://schemas.openxmlformats.org/officeDocument/2006/relationships" xmlns:p="http://schemas.openxmlformats.org/presentationml/2006/main">
   <p:cSld>
     <p:spTree>
@@ -17214,7 +21652,7 @@
 </p:sld>
 </file>
 
-<file path=ppt/slides/slide44.xml><?xml version="1.0" encoding="utf-8"?>
+<file path=ppt/slides/slide52.xml><?xml version="1.0" encoding="utf-8"?>
 <p:sld xmlns:a="http://schemas.openxmlformats.org/drawingml/2006/main" xmlns:r="http://schemas.openxmlformats.org/officeDocument/2006/relationships" xmlns:p="http://schemas.openxmlformats.org/presentationml/2006/main">
   <p:cSld>
     <p:spTree>
@@ -17250,7 +21688,7 @@
 </p:sld>
 </file>
 
-<file path=ppt/slides/slide45.xml><?xml version="1.0" encoding="utf-8"?>
+<file path=ppt/slides/slide53.xml><?xml version="1.0" encoding="utf-8"?>
 <p:sld xmlns:a="http://schemas.openxmlformats.org/drawingml/2006/main" xmlns:r="http://schemas.openxmlformats.org/officeDocument/2006/relationships" xmlns:p="http://schemas.openxmlformats.org/presentationml/2006/main">
   <p:cSld>
     <p:spTree>
@@ -17286,7 +21724,7 @@
 </p:sld>
 </file>
 
-<file path=ppt/slides/slide46.xml><?xml version="1.0" encoding="utf-8"?>
+<file path=ppt/slides/slide54.xml><?xml version="1.0" encoding="utf-8"?>
 <p:sld xmlns:a="http://schemas.openxmlformats.org/drawingml/2006/main" xmlns:r="http://schemas.openxmlformats.org/officeDocument/2006/relationships" xmlns:p="http://schemas.openxmlformats.org/presentationml/2006/main">
   <p:cSld>
     <p:spTree>
@@ -17322,7 +21760,7 @@
 </p:sld>
 </file>
 
-<file path=ppt/slides/slide47.xml><?xml version="1.0" encoding="utf-8"?>
+<file path=ppt/slides/slide55.xml><?xml version="1.0" encoding="utf-8"?>
 <p:sld xmlns:a="http://schemas.openxmlformats.org/drawingml/2006/main" xmlns:r="http://schemas.openxmlformats.org/officeDocument/2006/relationships" xmlns:p="http://schemas.openxmlformats.org/presentationml/2006/main">
   <p:cSld>
     <p:spTree>
@@ -17358,7 +21796,7 @@
 </p:sld>
 </file>
 
-<file path=ppt/slides/slide48.xml><?xml version="1.0" encoding="utf-8"?>
+<file path=ppt/slides/slide56.xml><?xml version="1.0" encoding="utf-8"?>
 <p:sld xmlns:a="http://schemas.openxmlformats.org/drawingml/2006/main" xmlns:r="http://schemas.openxmlformats.org/officeDocument/2006/relationships" xmlns:p="http://schemas.openxmlformats.org/presentationml/2006/main">
   <p:cSld>
     <p:spTree>
@@ -17394,7 +21832,7 @@
 </p:sld>
 </file>
 
-<file path=ppt/slides/slide49.xml><?xml version="1.0" encoding="utf-8"?>
+<file path=ppt/slides/slide57.xml><?xml version="1.0" encoding="utf-8"?>
 <p:sld xmlns:a="http://schemas.openxmlformats.org/drawingml/2006/main" xmlns:r="http://schemas.openxmlformats.org/officeDocument/2006/relationships" xmlns:p="http://schemas.openxmlformats.org/presentationml/2006/main">
   <p:cSld>
     <p:spTree>
@@ -17430,292 +21868,7 @@
 </p:sld>
 </file>
 
-<file path=ppt/slides/slide5.xml><?xml version="1.0" encoding="utf-8"?>
-<p:sld xmlns:a="http://schemas.openxmlformats.org/drawingml/2006/main" xmlns:r="http://schemas.openxmlformats.org/officeDocument/2006/relationships" xmlns:p="http://schemas.openxmlformats.org/presentationml/2006/main">
-  <p:cSld>
-    <p:spTree>
-      <p:nvGrpSpPr>
-        <p:cNvPr id="1" name="">
-          <a:extLst>
-            <a:ext uri="{FF2B5EF4-FFF2-40B4-BE49-F238E27FC236}">
-              <a16:creationId xmlns:a16="http://schemas.microsoft.com/office/drawing/2014/main" id="{87EE3A80-18E1-700C-F239-868ECB5564A5}"/>
-            </a:ext>
-          </a:extLst>
-        </p:cNvPr>
-        <p:cNvGrpSpPr/>
-        <p:nvPr/>
-      </p:nvGrpSpPr>
-      <p:grpSpPr>
-        <a:xfrm>
-          <a:off x="0" y="0"/>
-          <a:ext cx="0" cy="0"/>
-          <a:chOff x="0" y="0"/>
-          <a:chExt cx="0" cy="0"/>
-        </a:xfrm>
-      </p:grpSpPr>
-      <p:pic>
-        <p:nvPicPr>
-          <p:cNvPr id="3" name="Image 2">
-            <a:extLst>
-              <a:ext uri="{FF2B5EF4-FFF2-40B4-BE49-F238E27FC236}">
-                <a16:creationId xmlns:a16="http://schemas.microsoft.com/office/drawing/2014/main" id="{5EDD913E-B5C6-14DA-7EFB-B40CB657AEBD}"/>
-              </a:ext>
-            </a:extLst>
-          </p:cNvPr>
-          <p:cNvPicPr>
-            <a:picLocks noChangeAspect="1"/>
-          </p:cNvPicPr>
-          <p:nvPr/>
-        </p:nvPicPr>
-        <p:blipFill>
-          <a:blip r:embed="rId2">
-            <a:extLst>
-              <a:ext uri="{28A0092B-C50C-407E-A947-70E740481C1C}">
-                <a14:useLocalDpi xmlns:a14="http://schemas.microsoft.com/office/drawing/2010/main" val="0"/>
-              </a:ext>
-            </a:extLst>
-          </a:blip>
-          <a:srcRect/>
-          <a:stretch/>
-        </p:blipFill>
-        <p:spPr>
-          <a:xfrm rot="5400000">
-            <a:off x="2618395" y="-1604724"/>
-            <a:ext cx="6858000" cy="10067448"/>
-          </a:xfrm>
-          <a:prstGeom prst="rect">
-            <a:avLst/>
-          </a:prstGeom>
-        </p:spPr>
-      </p:pic>
-      <p:sp>
-        <p:nvSpPr>
-          <p:cNvPr id="6" name="Rectangle 5">
-            <a:extLst>
-              <a:ext uri="{FF2B5EF4-FFF2-40B4-BE49-F238E27FC236}">
-                <a16:creationId xmlns:a16="http://schemas.microsoft.com/office/drawing/2014/main" id="{D7C7751B-6DC0-23B3-1F69-035002512273}"/>
-              </a:ext>
-            </a:extLst>
-          </p:cNvPr>
-          <p:cNvSpPr/>
-          <p:nvPr/>
-        </p:nvSpPr>
-        <p:spPr>
-          <a:xfrm>
-            <a:off x="3138770" y="965728"/>
-            <a:ext cx="7676148" cy="794085"/>
-          </a:xfrm>
-          <a:prstGeom prst="rect">
-            <a:avLst/>
-          </a:prstGeom>
-          <a:solidFill>
-            <a:srgbClr val="AEAEAE">
-              <a:alpha val="89020"/>
-            </a:srgbClr>
-          </a:solidFill>
-          <a:ln w="76200">
-            <a:noFill/>
-          </a:ln>
-        </p:spPr>
-        <p:style>
-          <a:lnRef idx="2">
-            <a:schemeClr val="accent1">
-              <a:shade val="15000"/>
-            </a:schemeClr>
-          </a:lnRef>
-          <a:fillRef idx="1">
-            <a:schemeClr val="accent1"/>
-          </a:fillRef>
-          <a:effectRef idx="0">
-            <a:schemeClr val="accent1"/>
-          </a:effectRef>
-          <a:fontRef idx="minor">
-            <a:schemeClr val="lt1"/>
-          </a:fontRef>
-        </p:style>
-        <p:txBody>
-          <a:bodyPr rtlCol="0" anchor="ctr"/>
-          <a:lstStyle/>
-          <a:p>
-            <a:pPr algn="ctr"/>
-            <a:endParaRPr lang="fr-BE" dirty="0"/>
-          </a:p>
-        </p:txBody>
-      </p:sp>
-      <p:sp>
-        <p:nvSpPr>
-          <p:cNvPr id="7" name="Rectangle 6">
-            <a:extLst>
-              <a:ext uri="{FF2B5EF4-FFF2-40B4-BE49-F238E27FC236}">
-                <a16:creationId xmlns:a16="http://schemas.microsoft.com/office/drawing/2014/main" id="{0E3E8305-F49B-7288-6556-23991517537A}"/>
-              </a:ext>
-            </a:extLst>
-          </p:cNvPr>
-          <p:cNvSpPr/>
-          <p:nvPr/>
-        </p:nvSpPr>
-        <p:spPr>
-          <a:xfrm>
-            <a:off x="3138769" y="1749858"/>
-            <a:ext cx="1920033" cy="794085"/>
-          </a:xfrm>
-          <a:prstGeom prst="rect">
-            <a:avLst/>
-          </a:prstGeom>
-          <a:solidFill>
-            <a:srgbClr val="AEAEAE">
-              <a:alpha val="89020"/>
-            </a:srgbClr>
-          </a:solidFill>
-          <a:ln w="76200">
-            <a:noFill/>
-          </a:ln>
-        </p:spPr>
-        <p:style>
-          <a:lnRef idx="2">
-            <a:schemeClr val="accent1">
-              <a:shade val="15000"/>
-            </a:schemeClr>
-          </a:lnRef>
-          <a:fillRef idx="1">
-            <a:schemeClr val="accent1"/>
-          </a:fillRef>
-          <a:effectRef idx="0">
-            <a:schemeClr val="accent1"/>
-          </a:effectRef>
-          <a:fontRef idx="minor">
-            <a:schemeClr val="lt1"/>
-          </a:fontRef>
-        </p:style>
-        <p:txBody>
-          <a:bodyPr rtlCol="0" anchor="ctr"/>
-          <a:lstStyle/>
-          <a:p>
-            <a:pPr algn="ctr"/>
-            <a:endParaRPr lang="fr-BE" dirty="0"/>
-          </a:p>
-        </p:txBody>
-      </p:sp>
-      <p:sp>
-        <p:nvSpPr>
-          <p:cNvPr id="4" name="Rectangle 3">
-            <a:extLst>
-              <a:ext uri="{FF2B5EF4-FFF2-40B4-BE49-F238E27FC236}">
-                <a16:creationId xmlns:a16="http://schemas.microsoft.com/office/drawing/2014/main" id="{4C5902D3-1F19-9E04-01E7-3C71423D4C2E}"/>
-              </a:ext>
-            </a:extLst>
-          </p:cNvPr>
-          <p:cNvSpPr/>
-          <p:nvPr/>
-        </p:nvSpPr>
-        <p:spPr>
-          <a:xfrm>
-            <a:off x="3138769" y="3328074"/>
-            <a:ext cx="1920033" cy="794085"/>
-          </a:xfrm>
-          <a:prstGeom prst="rect">
-            <a:avLst/>
-          </a:prstGeom>
-          <a:solidFill>
-            <a:srgbClr val="AEAEAE">
-              <a:alpha val="89020"/>
-            </a:srgbClr>
-          </a:solidFill>
-          <a:ln w="76200">
-            <a:noFill/>
-          </a:ln>
-        </p:spPr>
-        <p:style>
-          <a:lnRef idx="2">
-            <a:schemeClr val="accent1">
-              <a:shade val="15000"/>
-            </a:schemeClr>
-          </a:lnRef>
-          <a:fillRef idx="1">
-            <a:schemeClr val="accent1"/>
-          </a:fillRef>
-          <a:effectRef idx="0">
-            <a:schemeClr val="accent1"/>
-          </a:effectRef>
-          <a:fontRef idx="minor">
-            <a:schemeClr val="lt1"/>
-          </a:fontRef>
-        </p:style>
-        <p:txBody>
-          <a:bodyPr rtlCol="0" anchor="ctr"/>
-          <a:lstStyle/>
-          <a:p>
-            <a:pPr algn="ctr"/>
-            <a:endParaRPr lang="fr-BE" dirty="0"/>
-          </a:p>
-        </p:txBody>
-      </p:sp>
-      <p:sp>
-        <p:nvSpPr>
-          <p:cNvPr id="2" name="Rectangle 1">
-            <a:extLst>
-              <a:ext uri="{FF2B5EF4-FFF2-40B4-BE49-F238E27FC236}">
-                <a16:creationId xmlns:a16="http://schemas.microsoft.com/office/drawing/2014/main" id="{7AF413BF-BD5C-8976-4EFF-DF8CDAEF65A4}"/>
-              </a:ext>
-            </a:extLst>
-          </p:cNvPr>
-          <p:cNvSpPr/>
-          <p:nvPr/>
-        </p:nvSpPr>
-        <p:spPr>
-          <a:xfrm>
-            <a:off x="7133199" y="1754879"/>
-            <a:ext cx="1708485" cy="794084"/>
-          </a:xfrm>
-          <a:prstGeom prst="rect">
-            <a:avLst/>
-          </a:prstGeom>
-          <a:noFill/>
-          <a:ln w="76200">
-            <a:solidFill>
-              <a:srgbClr val="FF0000"/>
-            </a:solidFill>
-          </a:ln>
-        </p:spPr>
-        <p:style>
-          <a:lnRef idx="2">
-            <a:schemeClr val="accent1">
-              <a:shade val="15000"/>
-            </a:schemeClr>
-          </a:lnRef>
-          <a:fillRef idx="1">
-            <a:schemeClr val="accent1"/>
-          </a:fillRef>
-          <a:effectRef idx="0">
-            <a:schemeClr val="accent1"/>
-          </a:effectRef>
-          <a:fontRef idx="minor">
-            <a:schemeClr val="lt1"/>
-          </a:fontRef>
-        </p:style>
-        <p:txBody>
-          <a:bodyPr rtlCol="0" anchor="ctr"/>
-          <a:lstStyle/>
-          <a:p>
-            <a:pPr algn="ctr"/>
-            <a:endParaRPr lang="fr-BE"/>
-          </a:p>
-        </p:txBody>
-      </p:sp>
-    </p:spTree>
-    <p:extLst>
-      <p:ext uri="{BB962C8B-B14F-4D97-AF65-F5344CB8AC3E}">
-        <p14:creationId xmlns:p14="http://schemas.microsoft.com/office/powerpoint/2010/main" val="3718213451"/>
-      </p:ext>
-    </p:extLst>
-  </p:cSld>
-  <p:clrMapOvr>
-    <a:masterClrMapping/>
-  </p:clrMapOvr>
-</p:sld>
-</file>
-
-<file path=ppt/slides/slide50.xml><?xml version="1.0" encoding="utf-8"?>
+<file path=ppt/slides/slide58.xml><?xml version="1.0" encoding="utf-8"?>
 <p:sld xmlns:a="http://schemas.openxmlformats.org/drawingml/2006/main" xmlns:r="http://schemas.openxmlformats.org/officeDocument/2006/relationships" xmlns:p="http://schemas.openxmlformats.org/presentationml/2006/main">
   <p:cSld>
     <p:spTree>
@@ -17751,7 +21904,7 @@
 </p:sld>
 </file>
 
-<file path=ppt/slides/slide51.xml><?xml version="1.0" encoding="utf-8"?>
+<file path=ppt/slides/slide59.xml><?xml version="1.0" encoding="utf-8"?>
 <p:sld xmlns:a="http://schemas.openxmlformats.org/drawingml/2006/main" xmlns:r="http://schemas.openxmlformats.org/officeDocument/2006/relationships" xmlns:p="http://schemas.openxmlformats.org/presentationml/2006/main">
   <p:cSld>
     <p:spTree>
@@ -17778,186 +21931,6 @@
     <p:extLst>
       <p:ext uri="{BB962C8B-B14F-4D97-AF65-F5344CB8AC3E}">
         <p14:creationId xmlns:p14="http://schemas.microsoft.com/office/powerpoint/2010/main" val="2301660201"/>
-      </p:ext>
-    </p:extLst>
-  </p:cSld>
-  <p:clrMapOvr>
-    <a:masterClrMapping/>
-  </p:clrMapOvr>
-</p:sld>
-</file>
-
-<file path=ppt/slides/slide52.xml><?xml version="1.0" encoding="utf-8"?>
-<p:sld xmlns:a="http://schemas.openxmlformats.org/drawingml/2006/main" xmlns:r="http://schemas.openxmlformats.org/officeDocument/2006/relationships" xmlns:p="http://schemas.openxmlformats.org/presentationml/2006/main">
-  <p:cSld>
-    <p:spTree>
-      <p:nvGrpSpPr>
-        <p:cNvPr id="1" name="">
-          <a:extLst>
-            <a:ext uri="{FF2B5EF4-FFF2-40B4-BE49-F238E27FC236}">
-              <a16:creationId xmlns:a16="http://schemas.microsoft.com/office/drawing/2014/main" id="{E4ED90B0-A78C-6DA6-EFED-8DCF14ED0A2D}"/>
-            </a:ext>
-          </a:extLst>
-        </p:cNvPr>
-        <p:cNvGrpSpPr/>
-        <p:nvPr/>
-      </p:nvGrpSpPr>
-      <p:grpSpPr>
-        <a:xfrm>
-          <a:off x="0" y="0"/>
-          <a:ext cx="0" cy="0"/>
-          <a:chOff x="0" y="0"/>
-          <a:chExt cx="0" cy="0"/>
-        </a:xfrm>
-      </p:grpSpPr>
-    </p:spTree>
-    <p:extLst>
-      <p:ext uri="{BB962C8B-B14F-4D97-AF65-F5344CB8AC3E}">
-        <p14:creationId xmlns:p14="http://schemas.microsoft.com/office/powerpoint/2010/main" val="2187257759"/>
-      </p:ext>
-    </p:extLst>
-  </p:cSld>
-  <p:clrMapOvr>
-    <a:masterClrMapping/>
-  </p:clrMapOvr>
-</p:sld>
-</file>
-
-<file path=ppt/slides/slide53.xml><?xml version="1.0" encoding="utf-8"?>
-<p:sld xmlns:a="http://schemas.openxmlformats.org/drawingml/2006/main" xmlns:r="http://schemas.openxmlformats.org/officeDocument/2006/relationships" xmlns:p="http://schemas.openxmlformats.org/presentationml/2006/main">
-  <p:cSld>
-    <p:spTree>
-      <p:nvGrpSpPr>
-        <p:cNvPr id="1" name="">
-          <a:extLst>
-            <a:ext uri="{FF2B5EF4-FFF2-40B4-BE49-F238E27FC236}">
-              <a16:creationId xmlns:a16="http://schemas.microsoft.com/office/drawing/2014/main" id="{AF3D3EDE-AA6B-7D36-B744-D76014E463ED}"/>
-            </a:ext>
-          </a:extLst>
-        </p:cNvPr>
-        <p:cNvGrpSpPr/>
-        <p:nvPr/>
-      </p:nvGrpSpPr>
-      <p:grpSpPr>
-        <a:xfrm>
-          <a:off x="0" y="0"/>
-          <a:ext cx="0" cy="0"/>
-          <a:chOff x="0" y="0"/>
-          <a:chExt cx="0" cy="0"/>
-        </a:xfrm>
-      </p:grpSpPr>
-    </p:spTree>
-    <p:extLst>
-      <p:ext uri="{BB962C8B-B14F-4D97-AF65-F5344CB8AC3E}">
-        <p14:creationId xmlns:p14="http://schemas.microsoft.com/office/powerpoint/2010/main" val="318123465"/>
-      </p:ext>
-    </p:extLst>
-  </p:cSld>
-  <p:clrMapOvr>
-    <a:masterClrMapping/>
-  </p:clrMapOvr>
-</p:sld>
-</file>
-
-<file path=ppt/slides/slide54.xml><?xml version="1.0" encoding="utf-8"?>
-<p:sld xmlns:a="http://schemas.openxmlformats.org/drawingml/2006/main" xmlns:r="http://schemas.openxmlformats.org/officeDocument/2006/relationships" xmlns:p="http://schemas.openxmlformats.org/presentationml/2006/main">
-  <p:cSld>
-    <p:spTree>
-      <p:nvGrpSpPr>
-        <p:cNvPr id="1" name="">
-          <a:extLst>
-            <a:ext uri="{FF2B5EF4-FFF2-40B4-BE49-F238E27FC236}">
-              <a16:creationId xmlns:a16="http://schemas.microsoft.com/office/drawing/2014/main" id="{7128CDC9-8FDA-1C1C-0838-925F9B0373F8}"/>
-            </a:ext>
-          </a:extLst>
-        </p:cNvPr>
-        <p:cNvGrpSpPr/>
-        <p:nvPr/>
-      </p:nvGrpSpPr>
-      <p:grpSpPr>
-        <a:xfrm>
-          <a:off x="0" y="0"/>
-          <a:ext cx="0" cy="0"/>
-          <a:chOff x="0" y="0"/>
-          <a:chExt cx="0" cy="0"/>
-        </a:xfrm>
-      </p:grpSpPr>
-    </p:spTree>
-    <p:extLst>
-      <p:ext uri="{BB962C8B-B14F-4D97-AF65-F5344CB8AC3E}">
-        <p14:creationId xmlns:p14="http://schemas.microsoft.com/office/powerpoint/2010/main" val="2080462186"/>
-      </p:ext>
-    </p:extLst>
-  </p:cSld>
-  <p:clrMapOvr>
-    <a:masterClrMapping/>
-  </p:clrMapOvr>
-</p:sld>
-</file>
-
-<file path=ppt/slides/slide55.xml><?xml version="1.0" encoding="utf-8"?>
-<p:sld xmlns:a="http://schemas.openxmlformats.org/drawingml/2006/main" xmlns:r="http://schemas.openxmlformats.org/officeDocument/2006/relationships" xmlns:p="http://schemas.openxmlformats.org/presentationml/2006/main">
-  <p:cSld>
-    <p:spTree>
-      <p:nvGrpSpPr>
-        <p:cNvPr id="1" name="">
-          <a:extLst>
-            <a:ext uri="{FF2B5EF4-FFF2-40B4-BE49-F238E27FC236}">
-              <a16:creationId xmlns:a16="http://schemas.microsoft.com/office/drawing/2014/main" id="{700FF0F4-D703-6412-815A-F04506713A8C}"/>
-            </a:ext>
-          </a:extLst>
-        </p:cNvPr>
-        <p:cNvGrpSpPr/>
-        <p:nvPr/>
-      </p:nvGrpSpPr>
-      <p:grpSpPr>
-        <a:xfrm>
-          <a:off x="0" y="0"/>
-          <a:ext cx="0" cy="0"/>
-          <a:chOff x="0" y="0"/>
-          <a:chExt cx="0" cy="0"/>
-        </a:xfrm>
-      </p:grpSpPr>
-    </p:spTree>
-    <p:extLst>
-      <p:ext uri="{BB962C8B-B14F-4D97-AF65-F5344CB8AC3E}">
-        <p14:creationId xmlns:p14="http://schemas.microsoft.com/office/powerpoint/2010/main" val="1086669119"/>
-      </p:ext>
-    </p:extLst>
-  </p:cSld>
-  <p:clrMapOvr>
-    <a:masterClrMapping/>
-  </p:clrMapOvr>
-</p:sld>
-</file>
-
-<file path=ppt/slides/slide56.xml><?xml version="1.0" encoding="utf-8"?>
-<p:sld xmlns:a="http://schemas.openxmlformats.org/drawingml/2006/main" xmlns:r="http://schemas.openxmlformats.org/officeDocument/2006/relationships" xmlns:p="http://schemas.openxmlformats.org/presentationml/2006/main">
-  <p:cSld>
-    <p:spTree>
-      <p:nvGrpSpPr>
-        <p:cNvPr id="1" name="">
-          <a:extLst>
-            <a:ext uri="{FF2B5EF4-FFF2-40B4-BE49-F238E27FC236}">
-              <a16:creationId xmlns:a16="http://schemas.microsoft.com/office/drawing/2014/main" id="{0F6B7CBD-91C0-8088-76A7-B9219F855DBD}"/>
-            </a:ext>
-          </a:extLst>
-        </p:cNvPr>
-        <p:cNvGrpSpPr/>
-        <p:nvPr/>
-      </p:nvGrpSpPr>
-      <p:grpSpPr>
-        <a:xfrm>
-          <a:off x="0" y="0"/>
-          <a:ext cx="0" cy="0"/>
-          <a:chOff x="0" y="0"/>
-          <a:chExt cx="0" cy="0"/>
-        </a:xfrm>
-      </p:grpSpPr>
-    </p:spTree>
-    <p:extLst>
-      <p:ext uri="{BB962C8B-B14F-4D97-AF65-F5344CB8AC3E}">
-        <p14:creationId xmlns:p14="http://schemas.microsoft.com/office/powerpoint/2010/main" val="189502759"/>
       </p:ext>
     </p:extLst>
   </p:cSld>
@@ -18441,6 +22414,186 @@
 </p:sld>
 </file>
 
+<file path=ppt/slides/slide60.xml><?xml version="1.0" encoding="utf-8"?>
+<p:sld xmlns:a="http://schemas.openxmlformats.org/drawingml/2006/main" xmlns:r="http://schemas.openxmlformats.org/officeDocument/2006/relationships" xmlns:p="http://schemas.openxmlformats.org/presentationml/2006/main">
+  <p:cSld>
+    <p:spTree>
+      <p:nvGrpSpPr>
+        <p:cNvPr id="1" name="">
+          <a:extLst>
+            <a:ext uri="{FF2B5EF4-FFF2-40B4-BE49-F238E27FC236}">
+              <a16:creationId xmlns:a16="http://schemas.microsoft.com/office/drawing/2014/main" id="{E4ED90B0-A78C-6DA6-EFED-8DCF14ED0A2D}"/>
+            </a:ext>
+          </a:extLst>
+        </p:cNvPr>
+        <p:cNvGrpSpPr/>
+        <p:nvPr/>
+      </p:nvGrpSpPr>
+      <p:grpSpPr>
+        <a:xfrm>
+          <a:off x="0" y="0"/>
+          <a:ext cx="0" cy="0"/>
+          <a:chOff x="0" y="0"/>
+          <a:chExt cx="0" cy="0"/>
+        </a:xfrm>
+      </p:grpSpPr>
+    </p:spTree>
+    <p:extLst>
+      <p:ext uri="{BB962C8B-B14F-4D97-AF65-F5344CB8AC3E}">
+        <p14:creationId xmlns:p14="http://schemas.microsoft.com/office/powerpoint/2010/main" val="2187257759"/>
+      </p:ext>
+    </p:extLst>
+  </p:cSld>
+  <p:clrMapOvr>
+    <a:masterClrMapping/>
+  </p:clrMapOvr>
+</p:sld>
+</file>
+
+<file path=ppt/slides/slide61.xml><?xml version="1.0" encoding="utf-8"?>
+<p:sld xmlns:a="http://schemas.openxmlformats.org/drawingml/2006/main" xmlns:r="http://schemas.openxmlformats.org/officeDocument/2006/relationships" xmlns:p="http://schemas.openxmlformats.org/presentationml/2006/main">
+  <p:cSld>
+    <p:spTree>
+      <p:nvGrpSpPr>
+        <p:cNvPr id="1" name="">
+          <a:extLst>
+            <a:ext uri="{FF2B5EF4-FFF2-40B4-BE49-F238E27FC236}">
+              <a16:creationId xmlns:a16="http://schemas.microsoft.com/office/drawing/2014/main" id="{AF3D3EDE-AA6B-7D36-B744-D76014E463ED}"/>
+            </a:ext>
+          </a:extLst>
+        </p:cNvPr>
+        <p:cNvGrpSpPr/>
+        <p:nvPr/>
+      </p:nvGrpSpPr>
+      <p:grpSpPr>
+        <a:xfrm>
+          <a:off x="0" y="0"/>
+          <a:ext cx="0" cy="0"/>
+          <a:chOff x="0" y="0"/>
+          <a:chExt cx="0" cy="0"/>
+        </a:xfrm>
+      </p:grpSpPr>
+    </p:spTree>
+    <p:extLst>
+      <p:ext uri="{BB962C8B-B14F-4D97-AF65-F5344CB8AC3E}">
+        <p14:creationId xmlns:p14="http://schemas.microsoft.com/office/powerpoint/2010/main" val="318123465"/>
+      </p:ext>
+    </p:extLst>
+  </p:cSld>
+  <p:clrMapOvr>
+    <a:masterClrMapping/>
+  </p:clrMapOvr>
+</p:sld>
+</file>
+
+<file path=ppt/slides/slide62.xml><?xml version="1.0" encoding="utf-8"?>
+<p:sld xmlns:a="http://schemas.openxmlformats.org/drawingml/2006/main" xmlns:r="http://schemas.openxmlformats.org/officeDocument/2006/relationships" xmlns:p="http://schemas.openxmlformats.org/presentationml/2006/main">
+  <p:cSld>
+    <p:spTree>
+      <p:nvGrpSpPr>
+        <p:cNvPr id="1" name="">
+          <a:extLst>
+            <a:ext uri="{FF2B5EF4-FFF2-40B4-BE49-F238E27FC236}">
+              <a16:creationId xmlns:a16="http://schemas.microsoft.com/office/drawing/2014/main" id="{7128CDC9-8FDA-1C1C-0838-925F9B0373F8}"/>
+            </a:ext>
+          </a:extLst>
+        </p:cNvPr>
+        <p:cNvGrpSpPr/>
+        <p:nvPr/>
+      </p:nvGrpSpPr>
+      <p:grpSpPr>
+        <a:xfrm>
+          <a:off x="0" y="0"/>
+          <a:ext cx="0" cy="0"/>
+          <a:chOff x="0" y="0"/>
+          <a:chExt cx="0" cy="0"/>
+        </a:xfrm>
+      </p:grpSpPr>
+    </p:spTree>
+    <p:extLst>
+      <p:ext uri="{BB962C8B-B14F-4D97-AF65-F5344CB8AC3E}">
+        <p14:creationId xmlns:p14="http://schemas.microsoft.com/office/powerpoint/2010/main" val="2080462186"/>
+      </p:ext>
+    </p:extLst>
+  </p:cSld>
+  <p:clrMapOvr>
+    <a:masterClrMapping/>
+  </p:clrMapOvr>
+</p:sld>
+</file>
+
+<file path=ppt/slides/slide63.xml><?xml version="1.0" encoding="utf-8"?>
+<p:sld xmlns:a="http://schemas.openxmlformats.org/drawingml/2006/main" xmlns:r="http://schemas.openxmlformats.org/officeDocument/2006/relationships" xmlns:p="http://schemas.openxmlformats.org/presentationml/2006/main">
+  <p:cSld>
+    <p:spTree>
+      <p:nvGrpSpPr>
+        <p:cNvPr id="1" name="">
+          <a:extLst>
+            <a:ext uri="{FF2B5EF4-FFF2-40B4-BE49-F238E27FC236}">
+              <a16:creationId xmlns:a16="http://schemas.microsoft.com/office/drawing/2014/main" id="{700FF0F4-D703-6412-815A-F04506713A8C}"/>
+            </a:ext>
+          </a:extLst>
+        </p:cNvPr>
+        <p:cNvGrpSpPr/>
+        <p:nvPr/>
+      </p:nvGrpSpPr>
+      <p:grpSpPr>
+        <a:xfrm>
+          <a:off x="0" y="0"/>
+          <a:ext cx="0" cy="0"/>
+          <a:chOff x="0" y="0"/>
+          <a:chExt cx="0" cy="0"/>
+        </a:xfrm>
+      </p:grpSpPr>
+    </p:spTree>
+    <p:extLst>
+      <p:ext uri="{BB962C8B-B14F-4D97-AF65-F5344CB8AC3E}">
+        <p14:creationId xmlns:p14="http://schemas.microsoft.com/office/powerpoint/2010/main" val="1086669119"/>
+      </p:ext>
+    </p:extLst>
+  </p:cSld>
+  <p:clrMapOvr>
+    <a:masterClrMapping/>
+  </p:clrMapOvr>
+</p:sld>
+</file>
+
+<file path=ppt/slides/slide64.xml><?xml version="1.0" encoding="utf-8"?>
+<p:sld xmlns:a="http://schemas.openxmlformats.org/drawingml/2006/main" xmlns:r="http://schemas.openxmlformats.org/officeDocument/2006/relationships" xmlns:p="http://schemas.openxmlformats.org/presentationml/2006/main">
+  <p:cSld>
+    <p:spTree>
+      <p:nvGrpSpPr>
+        <p:cNvPr id="1" name="">
+          <a:extLst>
+            <a:ext uri="{FF2B5EF4-FFF2-40B4-BE49-F238E27FC236}">
+              <a16:creationId xmlns:a16="http://schemas.microsoft.com/office/drawing/2014/main" id="{0F6B7CBD-91C0-8088-76A7-B9219F855DBD}"/>
+            </a:ext>
+          </a:extLst>
+        </p:cNvPr>
+        <p:cNvGrpSpPr/>
+        <p:nvPr/>
+      </p:nvGrpSpPr>
+      <p:grpSpPr>
+        <a:xfrm>
+          <a:off x="0" y="0"/>
+          <a:ext cx="0" cy="0"/>
+          <a:chOff x="0" y="0"/>
+          <a:chExt cx="0" cy="0"/>
+        </a:xfrm>
+      </p:grpSpPr>
+    </p:spTree>
+    <p:extLst>
+      <p:ext uri="{BB962C8B-B14F-4D97-AF65-F5344CB8AC3E}">
+        <p14:creationId xmlns:p14="http://schemas.microsoft.com/office/powerpoint/2010/main" val="189502759"/>
+      </p:ext>
+    </p:extLst>
+  </p:cSld>
+  <p:clrMapOvr>
+    <a:masterClrMapping/>
+  </p:clrMapOvr>
+</p:sld>
+</file>
+
 <file path=ppt/slides/slide7.xml><?xml version="1.0" encoding="utf-8"?>
 <p:sld xmlns:a="http://schemas.openxmlformats.org/drawingml/2006/main" xmlns:r="http://schemas.openxmlformats.org/officeDocument/2006/relationships" xmlns:p="http://schemas.openxmlformats.org/presentationml/2006/main">
   <p:cSld>
@@ -18560,6 +22713,41 @@
           </a:prstGeom>
         </p:spPr>
       </p:pic>
+      <p:sp>
+        <p:nvSpPr>
+          <p:cNvPr id="2" name="ZoneTexte 1">
+            <a:extLst>
+              <a:ext uri="{FF2B5EF4-FFF2-40B4-BE49-F238E27FC236}">
+                <a16:creationId xmlns:a16="http://schemas.microsoft.com/office/drawing/2014/main" id="{2AF6C42D-A335-8911-2C00-5574818E915C}"/>
+              </a:ext>
+            </a:extLst>
+          </p:cNvPr>
+          <p:cNvSpPr txBox="1"/>
+          <p:nvPr/>
+        </p:nvSpPr>
+        <p:spPr>
+          <a:xfrm>
+            <a:off x="534154" y="534154"/>
+            <a:ext cx="1348967" cy="461665"/>
+          </a:xfrm>
+          <a:prstGeom prst="rect">
+            <a:avLst/>
+          </a:prstGeom>
+          <a:noFill/>
+        </p:spPr>
+        <p:txBody>
+          <a:bodyPr wrap="square" rtlCol="0">
+            <a:spAutoFit/>
+          </a:bodyPr>
+          <a:lstStyle/>
+          <a:p>
+            <a:r>
+              <a:rPr lang="fr-BE" sz="2400" dirty="0"/>
+              <a:t>2a = 3</a:t>
+            </a:r>
+          </a:p>
+        </p:txBody>
+      </p:sp>
     </p:spTree>
     <p:extLst>
       <p:ext uri="{BB962C8B-B14F-4D97-AF65-F5344CB8AC3E}">
@@ -18581,7 +22769,7 @@
         <p:cNvPr id="1" name="">
           <a:extLst>
             <a:ext uri="{FF2B5EF4-FFF2-40B4-BE49-F238E27FC236}">
-              <a16:creationId xmlns:a16="http://schemas.microsoft.com/office/drawing/2014/main" id="{1002A272-4394-86B4-0C78-FD6822103A1B}"/>
+              <a16:creationId xmlns:a16="http://schemas.microsoft.com/office/drawing/2014/main" id="{757837FE-4AE8-D5B1-7E3B-1777724D5AAE}"/>
             </a:ext>
           </a:extLst>
         </p:cNvPr>
@@ -18601,7 +22789,7 @@
           <p:cNvPr id="3" name="Image 2">
             <a:extLst>
               <a:ext uri="{FF2B5EF4-FFF2-40B4-BE49-F238E27FC236}">
-                <a16:creationId xmlns:a16="http://schemas.microsoft.com/office/drawing/2014/main" id="{B41531CF-93A5-2E78-838D-00751D24BFDF}"/>
+                <a16:creationId xmlns:a16="http://schemas.microsoft.com/office/drawing/2014/main" id="{115E7BE8-4CFE-7169-44E3-5CBF98FBA240}"/>
               </a:ext>
             </a:extLst>
           </p:cNvPr>
@@ -18628,169 +22816,78 @@
       </p:pic>
       <p:sp>
         <p:nvSpPr>
-          <p:cNvPr id="4" name="Ellipse 3">
-            <a:extLst>
-              <a:ext uri="{FF2B5EF4-FFF2-40B4-BE49-F238E27FC236}">
-                <a16:creationId xmlns:a16="http://schemas.microsoft.com/office/drawing/2014/main" id="{1DD3328F-C773-514F-3477-C500D6DD9C6D}"/>
-              </a:ext>
-            </a:extLst>
-          </p:cNvPr>
-          <p:cNvSpPr/>
+          <p:cNvPr id="2" name="ZoneTexte 1">
+            <a:extLst>
+              <a:ext uri="{FF2B5EF4-FFF2-40B4-BE49-F238E27FC236}">
+                <a16:creationId xmlns:a16="http://schemas.microsoft.com/office/drawing/2014/main" id="{1F3C08F8-53C0-1F10-C1B1-DC5E6923579A}"/>
+              </a:ext>
+            </a:extLst>
+          </p:cNvPr>
+          <p:cNvSpPr txBox="1"/>
           <p:nvPr/>
         </p:nvSpPr>
         <p:spPr>
           <a:xfrm>
-            <a:off x="4190452" y="2312312"/>
-            <a:ext cx="2203770" cy="2184037"/>
-          </a:xfrm>
-          <a:prstGeom prst="ellipse">
+            <a:off x="534154" y="534154"/>
+            <a:ext cx="1348967" cy="461665"/>
+          </a:xfrm>
+          <a:prstGeom prst="rect">
             <a:avLst/>
           </a:prstGeom>
           <a:noFill/>
-          <a:ln>
-            <a:solidFill>
-              <a:schemeClr val="tx2">
-                <a:lumMod val="75000"/>
-                <a:lumOff val="25000"/>
-              </a:schemeClr>
-            </a:solidFill>
-          </a:ln>
         </p:spPr>
-        <p:style>
-          <a:lnRef idx="2">
-            <a:schemeClr val="accent1">
-              <a:shade val="15000"/>
-            </a:schemeClr>
-          </a:lnRef>
-          <a:fillRef idx="1">
-            <a:schemeClr val="accent1"/>
-          </a:fillRef>
-          <a:effectRef idx="0">
-            <a:schemeClr val="accent1"/>
-          </a:effectRef>
-          <a:fontRef idx="minor">
-            <a:schemeClr val="lt1"/>
-          </a:fontRef>
-        </p:style>
-        <p:txBody>
-          <a:bodyPr rtlCol="0" anchor="ctr"/>
+        <p:txBody>
+          <a:bodyPr wrap="square" rtlCol="0">
+            <a:spAutoFit/>
+          </a:bodyPr>
           <a:lstStyle/>
           <a:p>
-            <a:pPr algn="ctr"/>
-            <a:endParaRPr lang="fr-BE"/>
-          </a:p>
-        </p:txBody>
-      </p:sp>
-      <p:sp>
-        <p:nvSpPr>
-          <p:cNvPr id="5" name="Ellipse 4">
-            <a:extLst>
-              <a:ext uri="{FF2B5EF4-FFF2-40B4-BE49-F238E27FC236}">
-                <a16:creationId xmlns:a16="http://schemas.microsoft.com/office/drawing/2014/main" id="{6B8D4B12-2163-3E81-92F4-FC26C902D90F}"/>
-              </a:ext>
-            </a:extLst>
-          </p:cNvPr>
-          <p:cNvSpPr/>
+            <a:r>
+              <a:rPr lang="fr-BE" sz="2400" dirty="0"/>
+              <a:t>2a = 3</a:t>
+            </a:r>
+          </a:p>
+        </p:txBody>
+      </p:sp>
+      <p:sp>
+        <p:nvSpPr>
+          <p:cNvPr id="4" name="ZoneTexte 3">
+            <a:extLst>
+              <a:ext uri="{FF2B5EF4-FFF2-40B4-BE49-F238E27FC236}">
+                <a16:creationId xmlns:a16="http://schemas.microsoft.com/office/drawing/2014/main" id="{19EA30CD-4AFD-AF7F-19DC-749F1525434C}"/>
+              </a:ext>
+            </a:extLst>
+          </p:cNvPr>
+          <p:cNvSpPr txBox="1"/>
           <p:nvPr/>
         </p:nvSpPr>
         <p:spPr>
           <a:xfrm>
-            <a:off x="5091694" y="1749859"/>
-            <a:ext cx="3322101" cy="3308944"/>
-          </a:xfrm>
-          <a:prstGeom prst="ellipse">
+            <a:off x="534154" y="1068308"/>
+            <a:ext cx="1348967" cy="461665"/>
+          </a:xfrm>
+          <a:prstGeom prst="rect">
             <a:avLst/>
           </a:prstGeom>
           <a:noFill/>
-          <a:ln>
-            <a:solidFill>
-              <a:srgbClr val="FF0000"/>
-            </a:solidFill>
-          </a:ln>
         </p:spPr>
-        <p:style>
-          <a:lnRef idx="2">
-            <a:schemeClr val="accent1">
-              <a:shade val="15000"/>
-            </a:schemeClr>
-          </a:lnRef>
-          <a:fillRef idx="1">
-            <a:schemeClr val="accent1"/>
-          </a:fillRef>
-          <a:effectRef idx="0">
-            <a:schemeClr val="accent1"/>
-          </a:effectRef>
-          <a:fontRef idx="minor">
-            <a:schemeClr val="lt1"/>
-          </a:fontRef>
-        </p:style>
-        <p:txBody>
-          <a:bodyPr rtlCol="0" anchor="ctr"/>
+        <p:txBody>
+          <a:bodyPr wrap="square" rtlCol="0">
+            <a:spAutoFit/>
+          </a:bodyPr>
           <a:lstStyle/>
           <a:p>
-            <a:pPr algn="ctr"/>
-            <a:endParaRPr lang="fr-BE"/>
-          </a:p>
-        </p:txBody>
-      </p:sp>
-      <p:sp>
-        <p:nvSpPr>
-          <p:cNvPr id="2" name="Ellipse 1">
-            <a:extLst>
-              <a:ext uri="{FF2B5EF4-FFF2-40B4-BE49-F238E27FC236}">
-                <a16:creationId xmlns:a16="http://schemas.microsoft.com/office/drawing/2014/main" id="{1D6FBA78-261A-AD77-84DA-C337492C3D81}"/>
-              </a:ext>
-            </a:extLst>
-          </p:cNvPr>
-          <p:cNvSpPr/>
-          <p:nvPr/>
-        </p:nvSpPr>
-        <p:spPr>
-          <a:xfrm>
-            <a:off x="5473243" y="2262975"/>
-            <a:ext cx="92098" cy="98676"/>
-          </a:xfrm>
-          <a:prstGeom prst="ellipse">
-            <a:avLst/>
-          </a:prstGeom>
-          <a:solidFill>
-            <a:srgbClr val="FF0000"/>
-          </a:solidFill>
-          <a:ln>
-            <a:solidFill>
-              <a:schemeClr val="tx1"/>
-            </a:solidFill>
-          </a:ln>
-        </p:spPr>
-        <p:style>
-          <a:lnRef idx="2">
-            <a:schemeClr val="accent1">
-              <a:shade val="15000"/>
-            </a:schemeClr>
-          </a:lnRef>
-          <a:fillRef idx="1">
-            <a:schemeClr val="accent1"/>
-          </a:fillRef>
-          <a:effectRef idx="0">
-            <a:schemeClr val="accent1"/>
-          </a:effectRef>
-          <a:fontRef idx="minor">
-            <a:schemeClr val="lt1"/>
-          </a:fontRef>
-        </p:style>
-        <p:txBody>
-          <a:bodyPr rtlCol="0" anchor="ctr"/>
-          <a:lstStyle/>
-          <a:p>
-            <a:pPr algn="ctr"/>
-            <a:endParaRPr lang="fr-BE"/>
+            <a:r>
+              <a:rPr lang="fr-BE" sz="2400" dirty="0"/>
+              <a:t>2c = 8</a:t>
+            </a:r>
           </a:p>
         </p:txBody>
       </p:sp>
     </p:spTree>
     <p:extLst>
       <p:ext uri="{BB962C8B-B14F-4D97-AF65-F5344CB8AC3E}">
-        <p14:creationId xmlns:p14="http://schemas.microsoft.com/office/powerpoint/2010/main" val="3009571489"/>
+        <p14:creationId xmlns:p14="http://schemas.microsoft.com/office/powerpoint/2010/main" val="2407530988"/>
       </p:ext>
     </p:extLst>
   </p:cSld>
@@ -19428,4 +23525,319 @@
     </a:ext>
   </a:extLst>
 </a:theme>
+</file>
+
+<file path=ppt/theme/theme3.xml><?xml version="1.0" encoding="utf-8"?>
+<a:theme xmlns:a="http://schemas.openxmlformats.org/drawingml/2006/main" name="Thème Office">
+  <a:themeElements>
+    <a:clrScheme name="Office">
+      <a:dk1>
+        <a:sysClr val="windowText" lastClr="000000"/>
+      </a:dk1>
+      <a:lt1>
+        <a:sysClr val="window" lastClr="FFFFFF"/>
+      </a:lt1>
+      <a:dk2>
+        <a:srgbClr val="0E2841"/>
+      </a:dk2>
+      <a:lt2>
+        <a:srgbClr val="E8E8E8"/>
+      </a:lt2>
+      <a:accent1>
+        <a:srgbClr val="156082"/>
+      </a:accent1>
+      <a:accent2>
+        <a:srgbClr val="E97132"/>
+      </a:accent2>
+      <a:accent3>
+        <a:srgbClr val="196B24"/>
+      </a:accent3>
+      <a:accent4>
+        <a:srgbClr val="0F9ED5"/>
+      </a:accent4>
+      <a:accent5>
+        <a:srgbClr val="A02B93"/>
+      </a:accent5>
+      <a:accent6>
+        <a:srgbClr val="4EA72E"/>
+      </a:accent6>
+      <a:hlink>
+        <a:srgbClr val="467886"/>
+      </a:hlink>
+      <a:folHlink>
+        <a:srgbClr val="96607D"/>
+      </a:folHlink>
+    </a:clrScheme>
+    <a:fontScheme name="Office">
+      <a:majorFont>
+        <a:latin typeface="Aptos Display" panose="02110004020202020204"/>
+        <a:ea typeface=""/>
+        <a:cs typeface=""/>
+        <a:font script="Jpan" typeface="游ゴシック Light"/>
+        <a:font script="Hang" typeface="맑은 고딕"/>
+        <a:font script="Hans" typeface="等线 Light"/>
+        <a:font script="Hant" typeface="新細明體"/>
+        <a:font script="Arab" typeface="Times New Roman"/>
+        <a:font script="Hebr" typeface="Times New Roman"/>
+        <a:font script="Thai" typeface="Angsana New"/>
+        <a:font script="Ethi" typeface="Nyala"/>
+        <a:font script="Beng" typeface="Vrinda"/>
+        <a:font script="Gujr" typeface="Shruti"/>
+        <a:font script="Khmr" typeface="MoolBoran"/>
+        <a:font script="Knda" typeface="Tunga"/>
+        <a:font script="Guru" typeface="Raavi"/>
+        <a:font script="Cans" typeface="Euphemia"/>
+        <a:font script="Cher" typeface="Plantagenet Cherokee"/>
+        <a:font script="Yiii" typeface="Microsoft Yi Baiti"/>
+        <a:font script="Tibt" typeface="Microsoft Himalaya"/>
+        <a:font script="Thaa" typeface="MV Boli"/>
+        <a:font script="Deva" typeface="Mangal"/>
+        <a:font script="Telu" typeface="Gautami"/>
+        <a:font script="Taml" typeface="Latha"/>
+        <a:font script="Syrc" typeface="Estrangelo Edessa"/>
+        <a:font script="Orya" typeface="Kalinga"/>
+        <a:font script="Mlym" typeface="Kartika"/>
+        <a:font script="Laoo" typeface="DokChampa"/>
+        <a:font script="Sinh" typeface="Iskoola Pota"/>
+        <a:font script="Mong" typeface="Mongolian Baiti"/>
+        <a:font script="Viet" typeface="Times New Roman"/>
+        <a:font script="Uigh" typeface="Microsoft Uighur"/>
+        <a:font script="Geor" typeface="Sylfaen"/>
+        <a:font script="Armn" typeface="Arial"/>
+        <a:font script="Bugi" typeface="Leelawadee UI"/>
+        <a:font script="Bopo" typeface="Microsoft JhengHei"/>
+        <a:font script="Java" typeface="Javanese Text"/>
+        <a:font script="Lisu" typeface="Segoe UI"/>
+        <a:font script="Mymr" typeface="Myanmar Text"/>
+        <a:font script="Nkoo" typeface="Ebrima"/>
+        <a:font script="Olck" typeface="Nirmala UI"/>
+        <a:font script="Osma" typeface="Ebrima"/>
+        <a:font script="Phag" typeface="Phagspa"/>
+        <a:font script="Syrn" typeface="Estrangelo Edessa"/>
+        <a:font script="Syrj" typeface="Estrangelo Edessa"/>
+        <a:font script="Syre" typeface="Estrangelo Edessa"/>
+        <a:font script="Sora" typeface="Nirmala UI"/>
+        <a:font script="Tale" typeface="Microsoft Tai Le"/>
+        <a:font script="Talu" typeface="Microsoft New Tai Lue"/>
+        <a:font script="Tfng" typeface="Ebrima"/>
+      </a:majorFont>
+      <a:minorFont>
+        <a:latin typeface="Aptos" panose="02110004020202020204"/>
+        <a:ea typeface=""/>
+        <a:cs typeface=""/>
+        <a:font script="Jpan" typeface="游ゴシック"/>
+        <a:font script="Hang" typeface="맑은 고딕"/>
+        <a:font script="Hans" typeface="等线"/>
+        <a:font script="Hant" typeface="新細明體"/>
+        <a:font script="Arab" typeface="Arial"/>
+        <a:font script="Hebr" typeface="Arial"/>
+        <a:font script="Thai" typeface="Cordia New"/>
+        <a:font script="Ethi" typeface="Nyala"/>
+        <a:font script="Beng" typeface="Vrinda"/>
+        <a:font script="Gujr" typeface="Shruti"/>
+        <a:font script="Khmr" typeface="DaunPenh"/>
+        <a:font script="Knda" typeface="Tunga"/>
+        <a:font script="Guru" typeface="Raavi"/>
+        <a:font script="Cans" typeface="Euphemia"/>
+        <a:font script="Cher" typeface="Plantagenet Cherokee"/>
+        <a:font script="Yiii" typeface="Microsoft Yi Baiti"/>
+        <a:font script="Tibt" typeface="Microsoft Himalaya"/>
+        <a:font script="Thaa" typeface="MV Boli"/>
+        <a:font script="Deva" typeface="Mangal"/>
+        <a:font script="Telu" typeface="Gautami"/>
+        <a:font script="Taml" typeface="Latha"/>
+        <a:font script="Syrc" typeface="Estrangelo Edessa"/>
+        <a:font script="Orya" typeface="Kalinga"/>
+        <a:font script="Mlym" typeface="Kartika"/>
+        <a:font script="Laoo" typeface="DokChampa"/>
+        <a:font script="Sinh" typeface="Iskoola Pota"/>
+        <a:font script="Mong" typeface="Mongolian Baiti"/>
+        <a:font script="Viet" typeface="Arial"/>
+        <a:font script="Uigh" typeface="Microsoft Uighur"/>
+        <a:font script="Geor" typeface="Sylfaen"/>
+        <a:font script="Armn" typeface="Arial"/>
+        <a:font script="Bugi" typeface="Leelawadee UI"/>
+        <a:font script="Bopo" typeface="Microsoft JhengHei"/>
+        <a:font script="Java" typeface="Javanese Text"/>
+        <a:font script="Lisu" typeface="Segoe UI"/>
+        <a:font script="Mymr" typeface="Myanmar Text"/>
+        <a:font script="Nkoo" typeface="Ebrima"/>
+        <a:font script="Olck" typeface="Nirmala UI"/>
+        <a:font script="Osma" typeface="Ebrima"/>
+        <a:font script="Phag" typeface="Phagspa"/>
+        <a:font script="Syrn" typeface="Estrangelo Edessa"/>
+        <a:font script="Syrj" typeface="Estrangelo Edessa"/>
+        <a:font script="Syre" typeface="Estrangelo Edessa"/>
+        <a:font script="Sora" typeface="Nirmala UI"/>
+        <a:font script="Tale" typeface="Microsoft Tai Le"/>
+        <a:font script="Talu" typeface="Microsoft New Tai Lue"/>
+        <a:font script="Tfng" typeface="Ebrima"/>
+      </a:minorFont>
+    </a:fontScheme>
+    <a:fmtScheme name="Office">
+      <a:fillStyleLst>
+        <a:solidFill>
+          <a:schemeClr val="phClr"/>
+        </a:solidFill>
+        <a:gradFill rotWithShape="1">
+          <a:gsLst>
+            <a:gs pos="0">
+              <a:schemeClr val="phClr">
+                <a:lumMod val="110000"/>
+                <a:satMod val="105000"/>
+                <a:tint val="67000"/>
+              </a:schemeClr>
+            </a:gs>
+            <a:gs pos="50000">
+              <a:schemeClr val="phClr">
+                <a:lumMod val="105000"/>
+                <a:satMod val="103000"/>
+                <a:tint val="73000"/>
+              </a:schemeClr>
+            </a:gs>
+            <a:gs pos="100000">
+              <a:schemeClr val="phClr">
+                <a:lumMod val="105000"/>
+                <a:satMod val="109000"/>
+                <a:tint val="81000"/>
+              </a:schemeClr>
+            </a:gs>
+          </a:gsLst>
+          <a:lin ang="5400000" scaled="0"/>
+        </a:gradFill>
+        <a:gradFill rotWithShape="1">
+          <a:gsLst>
+            <a:gs pos="0">
+              <a:schemeClr val="phClr">
+                <a:satMod val="103000"/>
+                <a:lumMod val="102000"/>
+                <a:tint val="94000"/>
+              </a:schemeClr>
+            </a:gs>
+            <a:gs pos="50000">
+              <a:schemeClr val="phClr">
+                <a:satMod val="110000"/>
+                <a:lumMod val="100000"/>
+                <a:shade val="100000"/>
+              </a:schemeClr>
+            </a:gs>
+            <a:gs pos="100000">
+              <a:schemeClr val="phClr">
+                <a:lumMod val="99000"/>
+                <a:satMod val="120000"/>
+                <a:shade val="78000"/>
+              </a:schemeClr>
+            </a:gs>
+          </a:gsLst>
+          <a:lin ang="5400000" scaled="0"/>
+        </a:gradFill>
+      </a:fillStyleLst>
+      <a:lnStyleLst>
+        <a:ln w="12700" cap="flat" cmpd="sng" algn="ctr">
+          <a:solidFill>
+            <a:schemeClr val="phClr"/>
+          </a:solidFill>
+          <a:prstDash val="solid"/>
+          <a:miter lim="800000"/>
+        </a:ln>
+        <a:ln w="19050" cap="flat" cmpd="sng" algn="ctr">
+          <a:solidFill>
+            <a:schemeClr val="phClr"/>
+          </a:solidFill>
+          <a:prstDash val="solid"/>
+          <a:miter lim="800000"/>
+        </a:ln>
+        <a:ln w="25400" cap="flat" cmpd="sng" algn="ctr">
+          <a:solidFill>
+            <a:schemeClr val="phClr"/>
+          </a:solidFill>
+          <a:prstDash val="solid"/>
+          <a:miter lim="800000"/>
+        </a:ln>
+      </a:lnStyleLst>
+      <a:effectStyleLst>
+        <a:effectStyle>
+          <a:effectLst/>
+        </a:effectStyle>
+        <a:effectStyle>
+          <a:effectLst/>
+        </a:effectStyle>
+        <a:effectStyle>
+          <a:effectLst>
+            <a:outerShdw blurRad="57150" dist="19050" dir="5400000" algn="ctr" rotWithShape="0">
+              <a:srgbClr val="000000">
+                <a:alpha val="63000"/>
+              </a:srgbClr>
+            </a:outerShdw>
+          </a:effectLst>
+        </a:effectStyle>
+      </a:effectStyleLst>
+      <a:bgFillStyleLst>
+        <a:solidFill>
+          <a:schemeClr val="phClr"/>
+        </a:solidFill>
+        <a:solidFill>
+          <a:schemeClr val="phClr">
+            <a:tint val="95000"/>
+            <a:satMod val="170000"/>
+          </a:schemeClr>
+        </a:solidFill>
+        <a:gradFill rotWithShape="1">
+          <a:gsLst>
+            <a:gs pos="0">
+              <a:schemeClr val="phClr">
+                <a:tint val="93000"/>
+                <a:satMod val="150000"/>
+                <a:shade val="98000"/>
+                <a:lumMod val="102000"/>
+              </a:schemeClr>
+            </a:gs>
+            <a:gs pos="50000">
+              <a:schemeClr val="phClr">
+                <a:tint val="98000"/>
+                <a:satMod val="130000"/>
+                <a:shade val="90000"/>
+                <a:lumMod val="103000"/>
+              </a:schemeClr>
+            </a:gs>
+            <a:gs pos="100000">
+              <a:schemeClr val="phClr">
+                <a:shade val="63000"/>
+                <a:satMod val="120000"/>
+              </a:schemeClr>
+            </a:gs>
+          </a:gsLst>
+          <a:lin ang="5400000" scaled="0"/>
+        </a:gradFill>
+      </a:bgFillStyleLst>
+    </a:fmtScheme>
+  </a:themeElements>
+  <a:objectDefaults>
+    <a:lnDef>
+      <a:spPr/>
+      <a:bodyPr/>
+      <a:lstStyle/>
+      <a:style>
+        <a:lnRef idx="2">
+          <a:schemeClr val="accent1"/>
+        </a:lnRef>
+        <a:fillRef idx="0">
+          <a:schemeClr val="accent1"/>
+        </a:fillRef>
+        <a:effectRef idx="1">
+          <a:schemeClr val="accent1"/>
+        </a:effectRef>
+        <a:fontRef idx="minor">
+          <a:schemeClr val="tx1"/>
+        </a:fontRef>
+      </a:style>
+    </a:lnDef>
+  </a:objectDefaults>
+  <a:extraClrSchemeLst/>
+  <a:extLst>
+    <a:ext uri="{05A4C25C-085E-4340-85A3-A5531E510DB2}">
+      <thm15:themeFamily xmlns:thm15="http://schemas.microsoft.com/office/thememl/2012/main" name="Office Theme" id="{2E142A2C-CD16-42D6-873A-C26D2A0506FA}" vid="{1BDDFF52-6CD6-40A5-AB3C-68EB2F1E4D0A}"/>
+    </a:ext>
+  </a:extLst>
+</a:theme>
 </file>